--- a/schedule/01-welcome-kickoff/01-welcome-kickoff.pptx
+++ b/schedule/01-welcome-kickoff/01-welcome-kickoff.pptx
@@ -5,7 +5,7 @@
     <p:sldMasterId id="2147483648" r:id="rId1"/>
   </p:sldMasterIdLst>
   <p:notesMasterIdLst>
-    <p:notesMasterId r:id="rId13"/>
+    <p:notesMasterId r:id="rId14"/>
   </p:notesMasterIdLst>
   <p:sldIdLst>
     <p:sldId id="267" r:id="rId2"/>
@@ -16,9 +16,10 @@
     <p:sldId id="260" r:id="rId7"/>
     <p:sldId id="261" r:id="rId8"/>
     <p:sldId id="262" r:id="rId9"/>
-    <p:sldId id="263" r:id="rId10"/>
-    <p:sldId id="264" r:id="rId11"/>
-    <p:sldId id="265" r:id="rId12"/>
+    <p:sldId id="268" r:id="rId10"/>
+    <p:sldId id="263" r:id="rId11"/>
+    <p:sldId id="264" r:id="rId12"/>
+    <p:sldId id="265" r:id="rId13"/>
   </p:sldIdLst>
   <p:sldSz cx="12192000" cy="6858000"/>
   <p:notesSz cx="6858000" cy="12192000"/>
@@ -204,7 +205,7 @@
           <a:p>
             <a:fld id="{9440A35C-DBD2-4A64-A6BF-7C1DF79DB2B6}" type="datetimeFigureOut">
               <a:rPr lang="en-US" smtClean="0"/>
-              <a:t>5/4/2026</a:t>
+              <a:t>5/5/2026</a:t>
             </a:fld>
             <a:endParaRPr lang="en-US"/>
           </a:p>
@@ -664,7 +665,7 @@
           <a:p>
             <a:r>
               <a:rPr lang="en-US" dirty="0"/>
-              <a:t>Don't explain it deeply — that's later in the day. Just say the letters out loud once so the room's heard it. By Day 2 it should feel familiar.</a:t>
+              <a:t>If more than ~20% of the room isn't green, silently extend the 10:15 break by 10 min rather than pushing people into the SDLC session cold. Don't shame anyone — just point them at the AI Genius Bar.</a:t>
             </a:r>
           </a:p>
         </p:txBody>
@@ -751,7 +752,7 @@
           <a:p>
             <a:r>
               <a:rPr lang="en-US" dirty="0"/>
-              <a:t>Land it, smile, hand off cleanly. Don't oversell the next session — let it speak for itself. Last words: 'Let's build.'</a:t>
+              <a:t>Don't explain it deeply — that's later in the day. Just say the letters out loud once so the room's heard it. By Day 2 it should feel familiar.</a:t>
             </a:r>
           </a:p>
         </p:txBody>
@@ -774,6 +775,93 @@
             <a:fld id="{F7021451-1387-4CA6-816F-3879F97B5CBC}" type="slidenum">
               <a:rPr lang="en-US"/>
               <a:t>11</a:t>
+            </a:fld>
+            <a:endParaRPr lang="en-US"/>
+          </a:p>
+        </p:txBody>
+      </p:sp>
+    </p:spTree>
+    <p:extLst>
+      <p:ext uri="{BB962C8B-B14F-4D97-AF65-F5344CB8AC3E}">
+        <p14:creationId xmlns:p14="http://schemas.microsoft.com/office/powerpoint/2010/main" val="1024086991"/>
+      </p:ext>
+    </p:extLst>
+  </p:cSld>
+  <p:clrMapOvr>
+    <a:masterClrMapping/>
+  </p:clrMapOvr>
+</p:notes>
+</file>
+
+<file path=ppt/notesSlides/notesSlide12.xml><?xml version="1.0" encoding="utf-8"?>
+<p:notes xmlns:a="http://schemas.openxmlformats.org/drawingml/2006/main" xmlns:r="http://schemas.openxmlformats.org/officeDocument/2006/relationships" xmlns:p="http://schemas.openxmlformats.org/presentationml/2006/main">
+  <p:cSld>
+    <p:spTree>
+      <p:nvGrpSpPr>
+        <p:cNvPr id="1" name=""/>
+        <p:cNvGrpSpPr/>
+        <p:nvPr/>
+      </p:nvGrpSpPr>
+      <p:grpSpPr>
+        <a:xfrm>
+          <a:off x="0" y="0"/>
+          <a:ext cx="0" cy="0"/>
+          <a:chOff x="0" y="0"/>
+          <a:chExt cx="0" cy="0"/>
+        </a:xfrm>
+      </p:grpSpPr>
+      <p:sp>
+        <p:nvSpPr>
+          <p:cNvPr id="2" name="Slide Image Placeholder 1"/>
+          <p:cNvSpPr>
+            <a:spLocks noGrp="1" noRot="1" noChangeAspect="1"/>
+          </p:cNvSpPr>
+          <p:nvPr>
+            <p:ph type="sldImg"/>
+          </p:nvPr>
+        </p:nvSpPr>
+        <p:spPr/>
+      </p:sp>
+      <p:sp>
+        <p:nvSpPr>
+          <p:cNvPr id="3" name="Notes Placeholder 2"/>
+          <p:cNvSpPr>
+            <a:spLocks noGrp="1"/>
+          </p:cNvSpPr>
+          <p:nvPr>
+            <p:ph type="body" idx="1"/>
+          </p:nvPr>
+        </p:nvSpPr>
+        <p:spPr/>
+        <p:txBody>
+          <a:bodyPr/>
+          <a:lstStyle/>
+          <a:p>
+            <a:r>
+              <a:rPr lang="en-US" dirty="0"/>
+              <a:t>Land it, smile, hand off cleanly. Don't oversell the next session — let it speak for itself. Last words: 'Let's build.'</a:t>
+            </a:r>
+          </a:p>
+        </p:txBody>
+      </p:sp>
+      <p:sp>
+        <p:nvSpPr>
+          <p:cNvPr id="4" name="Slide Number Placeholder 3"/>
+          <p:cNvSpPr>
+            <a:spLocks noGrp="1"/>
+          </p:cNvSpPr>
+          <p:nvPr>
+            <p:ph type="sldNum" sz="quarter" idx="10"/>
+          </p:nvPr>
+        </p:nvSpPr>
+        <p:spPr/>
+        <p:txBody>
+          <a:bodyPr/>
+          <a:lstStyle/>
+          <a:p>
+            <a:fld id="{F7021451-1387-4CA6-816F-3879F97B5CBC}" type="slidenum">
+              <a:rPr lang="en-US"/>
+              <a:t>12</a:t>
             </a:fld>
             <a:endParaRPr lang="en-US"/>
           </a:p>
@@ -1402,11 +1490,11 @@
 </file>
 
 <file path=ppt/notesSlides/notesSlide9.xml><?xml version="1.0" encoding="utf-8"?>
-<p:notes xmlns:a="http://schemas.openxmlformats.org/drawingml/2006/main" xmlns:r="http://schemas.openxmlformats.org/officeDocument/2006/relationships" xmlns:p="http://schemas.openxmlformats.org/presentationml/2006/main">
+<p:notes xmlns:a="http://schemas.openxmlformats.org/drawingml/2006/main" xmlns:r="http://schemas.openxmlformats.org/officeDocument/2006/relationships" xmlns:p="http://schemas.openxmlformats.org/presentationml/2006/main" showMasterSp="0" showMasterPhAnim="0">
   <p:cSld>
     <p:spTree>
       <p:nvGrpSpPr>
-        <p:cNvPr id="1" name=""/>
+        <p:cNvPr id="1" name="Shape 23"/>
         <p:cNvGrpSpPr/>
         <p:nvPr/>
       </p:nvGrpSpPr>
@@ -1420,67 +1508,166 @@
       </p:grpSpPr>
       <p:sp>
         <p:nvSpPr>
-          <p:cNvPr id="2" name="Slide Image Placeholder 1"/>
+          <p:cNvPr id="24" name="Google Shape;24;p2:notes"/>
           <p:cNvSpPr>
             <a:spLocks noGrp="1" noRot="1" noChangeAspect="1"/>
           </p:cNvSpPr>
           <p:nvPr>
-            <p:ph type="sldImg"/>
+            <p:ph type="sldImg" idx="2"/>
           </p:nvPr>
         </p:nvSpPr>
-        <p:spPr/>
-      </p:sp>
-      <p:sp>
-        <p:nvSpPr>
-          <p:cNvPr id="3" name="Notes Placeholder 2"/>
-          <p:cNvSpPr>
+        <p:spPr>
+          <a:xfrm>
+            <a:off x="-1166813" y="0"/>
+            <a:ext cx="5334001" cy="3000375"/>
+          </a:xfrm>
+          <a:custGeom>
+            <a:avLst/>
+            <a:gdLst/>
+            <a:ahLst/>
+            <a:cxnLst/>
+            <a:rect l="l" t="t" r="r" b="b"/>
+            <a:pathLst>
+              <a:path w="120000" h="120000" extrusionOk="0">
+                <a:moveTo>
+                  <a:pt x="0" y="0"/>
+                </a:moveTo>
+                <a:lnTo>
+                  <a:pt x="120000" y="0"/>
+                </a:lnTo>
+                <a:lnTo>
+                  <a:pt x="120000" y="120000"/>
+                </a:lnTo>
+                <a:lnTo>
+                  <a:pt x="0" y="120000"/>
+                </a:lnTo>
+                <a:close/>
+              </a:path>
+            </a:pathLst>
+          </a:custGeom>
+          <a:noFill/>
+          <a:ln>
+            <a:noFill/>
+          </a:ln>
+        </p:spPr>
+      </p:sp>
+      <p:sp>
+        <p:nvSpPr>
+          <p:cNvPr id="25" name="Google Shape;25;p2:notes"/>
+          <p:cNvSpPr txBox="1">
             <a:spLocks noGrp="1"/>
           </p:cNvSpPr>
           <p:nvPr>
             <p:ph type="body" idx="1"/>
           </p:nvPr>
         </p:nvSpPr>
-        <p:spPr/>
-        <p:txBody>
-          <a:bodyPr/>
-          <a:lstStyle/>
-          <a:p>
-            <a:r>
-              <a:rPr lang="en-US" dirty="0"/>
-              <a:t>If more than ~20% of the room isn't green, silently extend the 10:15 break by 10 min rather than pushing people into the SDLC session cold. Don't shame anyone — just point them at the AI Genius Bar.</a:t>
-            </a:r>
-          </a:p>
-        </p:txBody>
-      </p:sp>
-      <p:sp>
-        <p:nvSpPr>
-          <p:cNvPr id="4" name="Slide Number Placeholder 3"/>
-          <p:cNvSpPr>
+        <p:spPr>
+          <a:xfrm>
+            <a:off x="0" y="0"/>
+            <a:ext cx="3000000" cy="3000000"/>
+          </a:xfrm>
+          <a:prstGeom prst="rect">
+            <a:avLst/>
+          </a:prstGeom>
+          <a:noFill/>
+          <a:ln>
+            <a:noFill/>
+          </a:ln>
+        </p:spPr>
+        <p:txBody>
+          <a:bodyPr spcFirstLastPara="1" wrap="square" lIns="91425" tIns="45700" rIns="91425" bIns="45700" anchor="t" anchorCtr="0">
+            <a:noAutofit/>
+          </a:bodyPr>
+          <a:lstStyle/>
+          <a:p>
+            <a:pPr marL="0" marR="0" lvl="0" indent="0" algn="l" rtl="0">
+              <a:spcBef>
+                <a:spcPts val="0"/>
+              </a:spcBef>
+              <a:spcAft>
+                <a:spcPts val="0"/>
+              </a:spcAft>
+              <a:buNone/>
+            </a:pPr>
+            <a:r>
+              <a:rPr lang="en-US" sz="1200">
+                <a:solidFill>
+                  <a:schemeClr val="dk1"/>
+                </a:solidFill>
+                <a:latin typeface="Arial"/>
+                <a:ea typeface="Arial"/>
+                <a:cs typeface="Arial"/>
+                <a:sym typeface="Arial"/>
+              </a:rPr>
+              <a:t>Brief intro — keep it under 60 seconds. 'I ship AI products for a living and I've been in the church tech world a while. Most of what I'm sharing today is what I wish someone had told me two years ago.'</a:t>
+            </a:r>
+            <a:endParaRPr/>
+          </a:p>
+        </p:txBody>
+      </p:sp>
+      <p:sp>
+        <p:nvSpPr>
+          <p:cNvPr id="26" name="Google Shape;26;p2:notes"/>
+          <p:cNvSpPr txBox="1">
             <a:spLocks noGrp="1"/>
           </p:cNvSpPr>
           <p:nvPr>
-            <p:ph type="sldNum" sz="quarter" idx="10"/>
+            <p:ph type="sldNum" idx="12"/>
           </p:nvPr>
         </p:nvSpPr>
-        <p:spPr/>
-        <p:txBody>
-          <a:bodyPr/>
-          <a:lstStyle/>
-          <a:p>
-            <a:fld id="{F7021451-1387-4CA6-816F-3879F97B5CBC}" type="slidenum">
-              <a:rPr lang="en-US"/>
+        <p:spPr>
+          <a:xfrm>
+            <a:off x="0" y="0"/>
+            <a:ext cx="3000000" cy="3000000"/>
+          </a:xfrm>
+          <a:prstGeom prst="rect">
+            <a:avLst/>
+          </a:prstGeom>
+          <a:noFill/>
+          <a:ln>
+            <a:noFill/>
+          </a:ln>
+        </p:spPr>
+        <p:txBody>
+          <a:bodyPr spcFirstLastPara="1" wrap="square" lIns="91425" tIns="45700" rIns="91425" bIns="45700" anchor="t" anchorCtr="0">
+            <a:noAutofit/>
+          </a:bodyPr>
+          <a:lstStyle/>
+          <a:p>
+            <a:pPr marL="0" marR="0" lvl="0" indent="0" algn="l" rtl="0">
+              <a:spcBef>
+                <a:spcPts val="0"/>
+              </a:spcBef>
+              <a:spcAft>
+                <a:spcPts val="0"/>
+              </a:spcAft>
+              <a:buNone/>
+            </a:pPr>
+            <a:fld id="{00000000-1234-1234-1234-123412341234}" type="slidenum">
+              <a:rPr lang="en-US" sz="1800">
+                <a:solidFill>
+                  <a:schemeClr val="dk1"/>
+                </a:solidFill>
+                <a:latin typeface="Arial"/>
+                <a:ea typeface="Arial"/>
+                <a:cs typeface="Arial"/>
+                <a:sym typeface="Arial"/>
+              </a:rPr>
               <a:t>9</a:t>
             </a:fld>
-            <a:endParaRPr lang="en-US"/>
+            <a:endParaRPr sz="1800">
+              <a:solidFill>
+                <a:schemeClr val="dk1"/>
+              </a:solidFill>
+              <a:latin typeface="Arial"/>
+              <a:ea typeface="Arial"/>
+              <a:cs typeface="Arial"/>
+              <a:sym typeface="Arial"/>
+            </a:endParaRPr>
           </a:p>
         </p:txBody>
       </p:sp>
     </p:spTree>
-    <p:extLst>
-      <p:ext uri="{BB962C8B-B14F-4D97-AF65-F5344CB8AC3E}">
-        <p14:creationId xmlns:p14="http://schemas.microsoft.com/office/powerpoint/2010/main" val="1024086991"/>
-      </p:ext>
-    </p:extLst>
   </p:cSld>
   <p:clrMapOvr>
     <a:masterClrMapping/>
@@ -2218,6 +2405,971 @@
 
 <file path=ppt/slides/slide10.xml><?xml version="1.0" encoding="utf-8"?>
 <p:sld xmlns:a="http://schemas.openxmlformats.org/drawingml/2006/main" xmlns:r="http://schemas.openxmlformats.org/officeDocument/2006/relationships" xmlns:p="http://schemas.openxmlformats.org/presentationml/2006/main">
+  <p:cSld name="Slide 8">
+    <p:bg>
+      <p:bgPr>
+        <a:solidFill>
+          <a:srgbClr val="F5F2ED"/>
+        </a:solidFill>
+        <a:effectLst/>
+      </p:bgPr>
+    </p:bg>
+    <p:spTree>
+      <p:nvGrpSpPr>
+        <p:cNvPr id="1" name=""/>
+        <p:cNvGrpSpPr/>
+        <p:nvPr/>
+      </p:nvGrpSpPr>
+      <p:grpSpPr>
+        <a:xfrm>
+          <a:off x="0" y="0"/>
+          <a:ext cx="0" cy="0"/>
+          <a:chOff x="0" y="0"/>
+          <a:chExt cx="0" cy="0"/>
+        </a:xfrm>
+      </p:grpSpPr>
+      <p:sp>
+        <p:nvSpPr>
+          <p:cNvPr id="2" name="Text 0"/>
+          <p:cNvSpPr/>
+          <p:nvPr/>
+        </p:nvSpPr>
+        <p:spPr>
+          <a:xfrm>
+            <a:off x="548640" y="548640"/>
+            <a:ext cx="5486400" cy="274320"/>
+          </a:xfrm>
+          <a:prstGeom prst="rect">
+            <a:avLst/>
+          </a:prstGeom>
+          <a:noFill/>
+          <a:ln/>
+        </p:spPr>
+        <p:txBody>
+          <a:bodyPr wrap="square" lIns="0" tIns="0" rIns="0" bIns="0" rtlCol="0" anchor="ctr"/>
+          <a:lstStyle/>
+          <a:p>
+            <a:pPr marL="0" indent="0">
+              <a:buNone/>
+            </a:pPr>
+            <a:r>
+              <a:rPr lang="en-US" sz="1000" b="1" kern="0" spc="600" dirty="0">
+                <a:solidFill>
+                  <a:srgbClr val="E89B3C"/>
+                </a:solidFill>
+                <a:latin typeface="Inter" pitchFamily="34" charset="0"/>
+                <a:ea typeface="Inter" pitchFamily="34" charset="-122"/>
+                <a:cs typeface="Inter" pitchFamily="34" charset="-120"/>
+              </a:rPr>
+              <a:t>SETUP CHECK · 8 MIN</a:t>
+            </a:r>
+            <a:endParaRPr lang="en-US" sz="1000" dirty="0"/>
+          </a:p>
+        </p:txBody>
+      </p:sp>
+      <p:sp>
+        <p:nvSpPr>
+          <p:cNvPr id="3" name="Text 1"/>
+          <p:cNvSpPr/>
+          <p:nvPr/>
+        </p:nvSpPr>
+        <p:spPr>
+          <a:xfrm>
+            <a:off x="548640" y="914400"/>
+            <a:ext cx="10972800" cy="822960"/>
+          </a:xfrm>
+          <a:prstGeom prst="rect">
+            <a:avLst/>
+          </a:prstGeom>
+          <a:noFill/>
+          <a:ln/>
+        </p:spPr>
+        <p:txBody>
+          <a:bodyPr wrap="square" lIns="0" tIns="0" rIns="0" bIns="0" rtlCol="0" anchor="ctr"/>
+          <a:lstStyle/>
+          <a:p>
+            <a:pPr marL="0" indent="0">
+              <a:buNone/>
+            </a:pPr>
+            <a:r>
+              <a:rPr lang="en-US" sz="3400" b="1" dirty="0">
+                <a:solidFill>
+                  <a:srgbClr val="1F2937"/>
+                </a:solidFill>
+                <a:latin typeface="Montserrat" pitchFamily="34" charset="0"/>
+                <a:ea typeface="Montserrat" pitchFamily="34" charset="-122"/>
+                <a:cs typeface="Montserrat" pitchFamily="34" charset="-120"/>
+              </a:rPr>
+              <a:t>Run these three commands together.</a:t>
+            </a:r>
+            <a:endParaRPr lang="en-US" sz="3400" dirty="0"/>
+          </a:p>
+        </p:txBody>
+      </p:sp>
+      <p:sp>
+        <p:nvSpPr>
+          <p:cNvPr id="4" name="Text 2"/>
+          <p:cNvSpPr/>
+          <p:nvPr/>
+        </p:nvSpPr>
+        <p:spPr>
+          <a:xfrm>
+            <a:off x="548640" y="1783080"/>
+            <a:ext cx="10972800" cy="457200"/>
+          </a:xfrm>
+          <a:prstGeom prst="rect">
+            <a:avLst/>
+          </a:prstGeom>
+          <a:noFill/>
+          <a:ln/>
+        </p:spPr>
+        <p:txBody>
+          <a:bodyPr wrap="square" lIns="0" tIns="0" rIns="0" bIns="0" rtlCol="0" anchor="ctr"/>
+          <a:lstStyle/>
+          <a:p>
+            <a:pPr marL="0" indent="0">
+              <a:buNone/>
+            </a:pPr>
+            <a:r>
+              <a:rPr lang="en-US" sz="1400" i="1" dirty="0">
+                <a:solidFill>
+                  <a:srgbClr val="6B7280"/>
+                </a:solidFill>
+                <a:latin typeface="Inter" pitchFamily="34" charset="0"/>
+                <a:ea typeface="Inter" pitchFamily="34" charset="-122"/>
+                <a:cs typeface="Inter" pitchFamily="34" charset="-120"/>
+              </a:rPr>
+              <a:t>Three green checks and you're ready for Day 1. Anything red? Find Tripp or Patrick at the 10:15 break.</a:t>
+            </a:r>
+            <a:endParaRPr lang="en-US" sz="1400" dirty="0"/>
+          </a:p>
+        </p:txBody>
+      </p:sp>
+      <p:sp>
+        <p:nvSpPr>
+          <p:cNvPr id="5" name="Shape 3"/>
+          <p:cNvSpPr/>
+          <p:nvPr/>
+        </p:nvSpPr>
+        <p:spPr>
+          <a:xfrm>
+            <a:off x="548640" y="2468880"/>
+            <a:ext cx="7315200" cy="3657600"/>
+          </a:xfrm>
+          <a:prstGeom prst="rect">
+            <a:avLst/>
+          </a:prstGeom>
+          <a:solidFill>
+            <a:srgbClr val="0F1620"/>
+          </a:solidFill>
+          <a:ln/>
+        </p:spPr>
+        <p:txBody>
+          <a:bodyPr/>
+          <a:lstStyle/>
+          <a:p>
+            <a:endParaRPr lang="en-US"/>
+          </a:p>
+        </p:txBody>
+      </p:sp>
+      <p:sp>
+        <p:nvSpPr>
+          <p:cNvPr id="6" name="Shape 4"/>
+          <p:cNvSpPr/>
+          <p:nvPr/>
+        </p:nvSpPr>
+        <p:spPr>
+          <a:xfrm>
+            <a:off x="548640" y="2468880"/>
+            <a:ext cx="7315200" cy="365760"/>
+          </a:xfrm>
+          <a:prstGeom prst="rect">
+            <a:avLst/>
+          </a:prstGeom>
+          <a:solidFill>
+            <a:srgbClr val="1B2533"/>
+          </a:solidFill>
+          <a:ln/>
+        </p:spPr>
+        <p:txBody>
+          <a:bodyPr/>
+          <a:lstStyle/>
+          <a:p>
+            <a:endParaRPr lang="en-US"/>
+          </a:p>
+        </p:txBody>
+      </p:sp>
+      <p:sp>
+        <p:nvSpPr>
+          <p:cNvPr id="7" name="Shape 5"/>
+          <p:cNvSpPr/>
+          <p:nvPr/>
+        </p:nvSpPr>
+        <p:spPr>
+          <a:xfrm>
+            <a:off x="731520" y="2587752"/>
+            <a:ext cx="137160" cy="137160"/>
+          </a:xfrm>
+          <a:prstGeom prst="ellipse">
+            <a:avLst/>
+          </a:prstGeom>
+          <a:solidFill>
+            <a:srgbClr val="FF6058"/>
+          </a:solidFill>
+          <a:ln/>
+        </p:spPr>
+        <p:txBody>
+          <a:bodyPr/>
+          <a:lstStyle/>
+          <a:p>
+            <a:endParaRPr lang="en-US"/>
+          </a:p>
+        </p:txBody>
+      </p:sp>
+      <p:sp>
+        <p:nvSpPr>
+          <p:cNvPr id="8" name="Shape 6"/>
+          <p:cNvSpPr/>
+          <p:nvPr/>
+        </p:nvSpPr>
+        <p:spPr>
+          <a:xfrm>
+            <a:off x="960120" y="2587752"/>
+            <a:ext cx="137160" cy="137160"/>
+          </a:xfrm>
+          <a:prstGeom prst="ellipse">
+            <a:avLst/>
+          </a:prstGeom>
+          <a:solidFill>
+            <a:srgbClr val="FFBD2E"/>
+          </a:solidFill>
+          <a:ln/>
+        </p:spPr>
+        <p:txBody>
+          <a:bodyPr/>
+          <a:lstStyle/>
+          <a:p>
+            <a:endParaRPr lang="en-US"/>
+          </a:p>
+        </p:txBody>
+      </p:sp>
+      <p:sp>
+        <p:nvSpPr>
+          <p:cNvPr id="9" name="Shape 7"/>
+          <p:cNvSpPr/>
+          <p:nvPr/>
+        </p:nvSpPr>
+        <p:spPr>
+          <a:xfrm>
+            <a:off x="1188720" y="2587752"/>
+            <a:ext cx="137160" cy="137160"/>
+          </a:xfrm>
+          <a:prstGeom prst="ellipse">
+            <a:avLst/>
+          </a:prstGeom>
+          <a:solidFill>
+            <a:srgbClr val="27CA40"/>
+          </a:solidFill>
+          <a:ln/>
+        </p:spPr>
+        <p:txBody>
+          <a:bodyPr/>
+          <a:lstStyle/>
+          <a:p>
+            <a:endParaRPr lang="en-US"/>
+          </a:p>
+        </p:txBody>
+      </p:sp>
+      <p:sp>
+        <p:nvSpPr>
+          <p:cNvPr id="10" name="Text 8"/>
+          <p:cNvSpPr/>
+          <p:nvPr/>
+        </p:nvSpPr>
+        <p:spPr>
+          <a:xfrm>
+            <a:off x="1920240" y="2514600"/>
+            <a:ext cx="4572000" cy="274320"/>
+          </a:xfrm>
+          <a:prstGeom prst="rect">
+            <a:avLst/>
+          </a:prstGeom>
+          <a:noFill/>
+          <a:ln/>
+        </p:spPr>
+        <p:txBody>
+          <a:bodyPr wrap="square" lIns="0" tIns="0" rIns="0" bIns="0" rtlCol="0" anchor="ctr"/>
+          <a:lstStyle/>
+          <a:p>
+            <a:pPr marL="0" indent="0" algn="ctr">
+              <a:buNone/>
+            </a:pPr>
+            <a:r>
+              <a:rPr lang="en-US" sz="1000" dirty="0">
+                <a:solidFill>
+                  <a:srgbClr val="9AA3AF"/>
+                </a:solidFill>
+                <a:latin typeface="JetBrains Mono" pitchFamily="34" charset="0"/>
+                <a:ea typeface="JetBrains Mono" pitchFamily="34" charset="-122"/>
+                <a:cs typeface="JetBrains Mono" pitchFamily="34" charset="-120"/>
+              </a:rPr>
+              <a:t>prerequisites · check</a:t>
+            </a:r>
+            <a:endParaRPr lang="en-US" sz="1000" dirty="0"/>
+          </a:p>
+        </p:txBody>
+      </p:sp>
+      <p:sp>
+        <p:nvSpPr>
+          <p:cNvPr id="11" name="Text 9"/>
+          <p:cNvSpPr/>
+          <p:nvPr/>
+        </p:nvSpPr>
+        <p:spPr>
+          <a:xfrm>
+            <a:off x="914400" y="3017520"/>
+            <a:ext cx="6583680" cy="365760"/>
+          </a:xfrm>
+          <a:prstGeom prst="rect">
+            <a:avLst/>
+          </a:prstGeom>
+          <a:noFill/>
+          <a:ln/>
+        </p:spPr>
+        <p:txBody>
+          <a:bodyPr wrap="square" lIns="0" tIns="0" rIns="0" bIns="0" rtlCol="0" anchor="ctr"/>
+          <a:lstStyle/>
+          <a:p>
+            <a:pPr marL="0" indent="0">
+              <a:buNone/>
+            </a:pPr>
+            <a:r>
+              <a:rPr lang="en-US" sz="1800" b="1" dirty="0">
+                <a:solidFill>
+                  <a:srgbClr val="3FB6A8"/>
+                </a:solidFill>
+                <a:latin typeface="JetBrains Mono" pitchFamily="34" charset="0"/>
+                <a:ea typeface="JetBrains Mono" pitchFamily="34" charset="-122"/>
+                <a:cs typeface="JetBrains Mono" pitchFamily="34" charset="-120"/>
+              </a:rPr>
+              <a:t>$ </a:t>
+            </a:r>
+            <a:r>
+              <a:rPr lang="en-US" sz="1800" b="1" dirty="0">
+                <a:solidFill>
+                  <a:srgbClr val="FFFFFF"/>
+                </a:solidFill>
+                <a:latin typeface="JetBrains Mono" pitchFamily="34" charset="0"/>
+                <a:ea typeface="JetBrains Mono" pitchFamily="34" charset="-122"/>
+                <a:cs typeface="JetBrains Mono" pitchFamily="34" charset="-120"/>
+              </a:rPr>
+              <a:t>claude --version</a:t>
+            </a:r>
+            <a:endParaRPr lang="en-US" sz="1800" dirty="0"/>
+          </a:p>
+        </p:txBody>
+      </p:sp>
+      <p:sp>
+        <p:nvSpPr>
+          <p:cNvPr id="12" name="Text 10"/>
+          <p:cNvSpPr/>
+          <p:nvPr/>
+        </p:nvSpPr>
+        <p:spPr>
+          <a:xfrm>
+            <a:off x="1097280" y="3429000"/>
+            <a:ext cx="6400800" cy="365760"/>
+          </a:xfrm>
+          <a:prstGeom prst="rect">
+            <a:avLst/>
+          </a:prstGeom>
+          <a:noFill/>
+          <a:ln/>
+        </p:spPr>
+        <p:txBody>
+          <a:bodyPr wrap="square" lIns="0" tIns="0" rIns="0" bIns="0" rtlCol="0" anchor="ctr"/>
+          <a:lstStyle/>
+          <a:p>
+            <a:pPr marL="0" indent="0">
+              <a:buNone/>
+            </a:pPr>
+            <a:r>
+              <a:rPr lang="en-US" sz="1300" b="1" dirty="0">
+                <a:solidFill>
+                  <a:srgbClr val="3FB6A8"/>
+                </a:solidFill>
+                <a:latin typeface="JetBrains Mono" pitchFamily="34" charset="0"/>
+                <a:ea typeface="JetBrains Mono" pitchFamily="34" charset="-122"/>
+                <a:cs typeface="JetBrains Mono" pitchFamily="34" charset="-120"/>
+              </a:rPr>
+              <a:t>✓ </a:t>
+            </a:r>
+            <a:r>
+              <a:rPr lang="en-US" sz="1300" dirty="0">
+                <a:solidFill>
+                  <a:srgbClr val="9AA3AF"/>
+                </a:solidFill>
+                <a:latin typeface="JetBrains Mono" pitchFamily="34" charset="0"/>
+                <a:ea typeface="JetBrains Mono" pitchFamily="34" charset="-122"/>
+                <a:cs typeface="JetBrains Mono" pitchFamily="34" charset="-120"/>
+              </a:rPr>
+              <a:t>claude code 1.x · ready</a:t>
+            </a:r>
+            <a:endParaRPr lang="en-US" sz="1300" dirty="0"/>
+          </a:p>
+        </p:txBody>
+      </p:sp>
+      <p:sp>
+        <p:nvSpPr>
+          <p:cNvPr id="13" name="Text 11"/>
+          <p:cNvSpPr/>
+          <p:nvPr/>
+        </p:nvSpPr>
+        <p:spPr>
+          <a:xfrm>
+            <a:off x="914400" y="3977640"/>
+            <a:ext cx="6583680" cy="365760"/>
+          </a:xfrm>
+          <a:prstGeom prst="rect">
+            <a:avLst/>
+          </a:prstGeom>
+          <a:noFill/>
+          <a:ln/>
+        </p:spPr>
+        <p:txBody>
+          <a:bodyPr wrap="square" lIns="0" tIns="0" rIns="0" bIns="0" rtlCol="0" anchor="ctr"/>
+          <a:lstStyle/>
+          <a:p>
+            <a:pPr marL="0" indent="0">
+              <a:buNone/>
+            </a:pPr>
+            <a:r>
+              <a:rPr lang="en-US" sz="1800" b="1" dirty="0">
+                <a:solidFill>
+                  <a:srgbClr val="3FB6A8"/>
+                </a:solidFill>
+                <a:latin typeface="JetBrains Mono" pitchFamily="34" charset="0"/>
+                <a:ea typeface="JetBrains Mono" pitchFamily="34" charset="-122"/>
+                <a:cs typeface="JetBrains Mono" pitchFamily="34" charset="-120"/>
+              </a:rPr>
+              <a:t>$ </a:t>
+            </a:r>
+            <a:r>
+              <a:rPr lang="en-US" sz="1800" b="1" dirty="0">
+                <a:solidFill>
+                  <a:srgbClr val="FFFFFF"/>
+                </a:solidFill>
+                <a:latin typeface="JetBrains Mono" pitchFamily="34" charset="0"/>
+                <a:ea typeface="JetBrains Mono" pitchFamily="34" charset="-122"/>
+                <a:cs typeface="JetBrains Mono" pitchFamily="34" charset="-120"/>
+              </a:rPr>
+              <a:t>gh auth status</a:t>
+            </a:r>
+            <a:endParaRPr lang="en-US" sz="1800" dirty="0"/>
+          </a:p>
+        </p:txBody>
+      </p:sp>
+      <p:sp>
+        <p:nvSpPr>
+          <p:cNvPr id="14" name="Text 12"/>
+          <p:cNvSpPr/>
+          <p:nvPr/>
+        </p:nvSpPr>
+        <p:spPr>
+          <a:xfrm>
+            <a:off x="1097280" y="4389120"/>
+            <a:ext cx="6400800" cy="365760"/>
+          </a:xfrm>
+          <a:prstGeom prst="rect">
+            <a:avLst/>
+          </a:prstGeom>
+          <a:noFill/>
+          <a:ln/>
+        </p:spPr>
+        <p:txBody>
+          <a:bodyPr wrap="square" lIns="0" tIns="0" rIns="0" bIns="0" rtlCol="0" anchor="ctr"/>
+          <a:lstStyle/>
+          <a:p>
+            <a:pPr marL="0" indent="0">
+              <a:buNone/>
+            </a:pPr>
+            <a:r>
+              <a:rPr lang="en-US" sz="1300" b="1" dirty="0">
+                <a:solidFill>
+                  <a:srgbClr val="3FB6A8"/>
+                </a:solidFill>
+                <a:latin typeface="JetBrains Mono" pitchFamily="34" charset="0"/>
+                <a:ea typeface="JetBrains Mono" pitchFamily="34" charset="-122"/>
+                <a:cs typeface="JetBrains Mono" pitchFamily="34" charset="-120"/>
+              </a:rPr>
+              <a:t>✓ </a:t>
+            </a:r>
+            <a:r>
+              <a:rPr lang="en-US" sz="1300" dirty="0">
+                <a:solidFill>
+                  <a:srgbClr val="9AA3AF"/>
+                </a:solidFill>
+                <a:latin typeface="JetBrains Mono" pitchFamily="34" charset="0"/>
+                <a:ea typeface="JetBrains Mono" pitchFamily="34" charset="-122"/>
+                <a:cs typeface="JetBrains Mono" pitchFamily="34" charset="-120"/>
+              </a:rPr>
+              <a:t>Logged in to github.com as you</a:t>
+            </a:r>
+            <a:endParaRPr lang="en-US" sz="1300" dirty="0"/>
+          </a:p>
+        </p:txBody>
+      </p:sp>
+      <p:sp>
+        <p:nvSpPr>
+          <p:cNvPr id="15" name="Text 13"/>
+          <p:cNvSpPr/>
+          <p:nvPr/>
+        </p:nvSpPr>
+        <p:spPr>
+          <a:xfrm>
+            <a:off x="914400" y="4937760"/>
+            <a:ext cx="6583680" cy="365760"/>
+          </a:xfrm>
+          <a:prstGeom prst="rect">
+            <a:avLst/>
+          </a:prstGeom>
+          <a:noFill/>
+          <a:ln/>
+        </p:spPr>
+        <p:txBody>
+          <a:bodyPr wrap="square" lIns="0" tIns="0" rIns="0" bIns="0" rtlCol="0" anchor="ctr"/>
+          <a:lstStyle/>
+          <a:p>
+            <a:pPr marL="0" indent="0">
+              <a:buNone/>
+            </a:pPr>
+            <a:r>
+              <a:rPr lang="en-US" sz="1800" b="1" dirty="0">
+                <a:solidFill>
+                  <a:srgbClr val="3FB6A8"/>
+                </a:solidFill>
+                <a:latin typeface="JetBrains Mono" pitchFamily="34" charset="0"/>
+                <a:ea typeface="JetBrains Mono" pitchFamily="34" charset="-122"/>
+                <a:cs typeface="JetBrains Mono" pitchFamily="34" charset="-120"/>
+              </a:rPr>
+              <a:t>$ </a:t>
+            </a:r>
+            <a:r>
+              <a:rPr lang="en-US" sz="1800" b="1" dirty="0">
+                <a:solidFill>
+                  <a:srgbClr val="FFFFFF"/>
+                </a:solidFill>
+                <a:latin typeface="JetBrains Mono" pitchFamily="34" charset="0"/>
+                <a:ea typeface="JetBrains Mono" pitchFamily="34" charset="-122"/>
+                <a:cs typeface="JetBrains Mono" pitchFamily="34" charset="-120"/>
+              </a:rPr>
+              <a:t>node --version</a:t>
+            </a:r>
+            <a:endParaRPr lang="en-US" sz="1800" dirty="0"/>
+          </a:p>
+        </p:txBody>
+      </p:sp>
+      <p:sp>
+        <p:nvSpPr>
+          <p:cNvPr id="16" name="Text 14"/>
+          <p:cNvSpPr/>
+          <p:nvPr/>
+        </p:nvSpPr>
+        <p:spPr>
+          <a:xfrm>
+            <a:off x="1097280" y="5349240"/>
+            <a:ext cx="6400800" cy="365760"/>
+          </a:xfrm>
+          <a:prstGeom prst="rect">
+            <a:avLst/>
+          </a:prstGeom>
+          <a:noFill/>
+          <a:ln/>
+        </p:spPr>
+        <p:txBody>
+          <a:bodyPr wrap="square" lIns="0" tIns="0" rIns="0" bIns="0" rtlCol="0" anchor="ctr"/>
+          <a:lstStyle/>
+          <a:p>
+            <a:pPr marL="0" indent="0">
+              <a:buNone/>
+            </a:pPr>
+            <a:r>
+              <a:rPr lang="en-US" sz="1300" b="1" dirty="0">
+                <a:solidFill>
+                  <a:srgbClr val="3FB6A8"/>
+                </a:solidFill>
+                <a:latin typeface="JetBrains Mono" pitchFamily="34" charset="0"/>
+                <a:ea typeface="JetBrains Mono" pitchFamily="34" charset="-122"/>
+                <a:cs typeface="JetBrains Mono" pitchFamily="34" charset="-120"/>
+              </a:rPr>
+              <a:t>✓ </a:t>
+            </a:r>
+            <a:r>
+              <a:rPr lang="en-US" sz="1300" dirty="0">
+                <a:solidFill>
+                  <a:srgbClr val="9AA3AF"/>
+                </a:solidFill>
+                <a:latin typeface="JetBrains Mono" pitchFamily="34" charset="0"/>
+                <a:ea typeface="JetBrains Mono" pitchFamily="34" charset="-122"/>
+                <a:cs typeface="JetBrains Mono" pitchFamily="34" charset="-120"/>
+              </a:rPr>
+              <a:t>v20.x or newer</a:t>
+            </a:r>
+            <a:endParaRPr lang="en-US" sz="1300" dirty="0"/>
+          </a:p>
+        </p:txBody>
+      </p:sp>
+      <p:sp>
+        <p:nvSpPr>
+          <p:cNvPr id="17" name="Shape 15"/>
+          <p:cNvSpPr/>
+          <p:nvPr/>
+        </p:nvSpPr>
+        <p:spPr>
+          <a:xfrm>
+            <a:off x="8138160" y="2468880"/>
+            <a:ext cx="3474720" cy="3657600"/>
+          </a:xfrm>
+          <a:prstGeom prst="rect">
+            <a:avLst/>
+          </a:prstGeom>
+          <a:solidFill>
+            <a:srgbClr val="FFFFFF"/>
+          </a:solidFill>
+          <a:ln w="6350">
+            <a:solidFill>
+              <a:srgbClr val="E2DFD8"/>
+            </a:solidFill>
+            <a:prstDash val="solid"/>
+          </a:ln>
+        </p:spPr>
+        <p:txBody>
+          <a:bodyPr/>
+          <a:lstStyle/>
+          <a:p>
+            <a:endParaRPr lang="en-US"/>
+          </a:p>
+        </p:txBody>
+      </p:sp>
+      <p:sp>
+        <p:nvSpPr>
+          <p:cNvPr id="18" name="Shape 16"/>
+          <p:cNvSpPr/>
+          <p:nvPr/>
+        </p:nvSpPr>
+        <p:spPr>
+          <a:xfrm>
+            <a:off x="8138160" y="2468880"/>
+            <a:ext cx="3474720" cy="73152"/>
+          </a:xfrm>
+          <a:prstGeom prst="rect">
+            <a:avLst/>
+          </a:prstGeom>
+          <a:solidFill>
+            <a:srgbClr val="E89B3C"/>
+          </a:solidFill>
+          <a:ln/>
+        </p:spPr>
+        <p:txBody>
+          <a:bodyPr/>
+          <a:lstStyle/>
+          <a:p>
+            <a:endParaRPr lang="en-US"/>
+          </a:p>
+        </p:txBody>
+      </p:sp>
+      <p:sp>
+        <p:nvSpPr>
+          <p:cNvPr id="19" name="Text 17"/>
+          <p:cNvSpPr/>
+          <p:nvPr/>
+        </p:nvSpPr>
+        <p:spPr>
+          <a:xfrm>
+            <a:off x="8412480" y="2788920"/>
+            <a:ext cx="2926080" cy="274320"/>
+          </a:xfrm>
+          <a:prstGeom prst="rect">
+            <a:avLst/>
+          </a:prstGeom>
+          <a:noFill/>
+          <a:ln/>
+        </p:spPr>
+        <p:txBody>
+          <a:bodyPr wrap="square" lIns="0" tIns="0" rIns="0" bIns="0" rtlCol="0" anchor="ctr"/>
+          <a:lstStyle/>
+          <a:p>
+            <a:pPr marL="0" indent="0">
+              <a:buNone/>
+            </a:pPr>
+            <a:r>
+              <a:rPr lang="en-US" sz="1000" b="1" kern="0" spc="600" dirty="0">
+                <a:solidFill>
+                  <a:srgbClr val="E89B3C"/>
+                </a:solidFill>
+                <a:latin typeface="Inter" pitchFamily="34" charset="0"/>
+                <a:ea typeface="Inter" pitchFamily="34" charset="-122"/>
+                <a:cs typeface="Inter" pitchFamily="34" charset="-120"/>
+              </a:rPr>
+              <a:t>AI Help</a:t>
+            </a:r>
+            <a:endParaRPr lang="en-US" sz="1000" dirty="0"/>
+          </a:p>
+        </p:txBody>
+      </p:sp>
+      <p:sp>
+        <p:nvSpPr>
+          <p:cNvPr id="20" name="Text 18"/>
+          <p:cNvSpPr/>
+          <p:nvPr/>
+        </p:nvSpPr>
+        <p:spPr>
+          <a:xfrm>
+            <a:off x="8412480" y="3108960"/>
+            <a:ext cx="2926080" cy="548640"/>
+          </a:xfrm>
+          <a:prstGeom prst="rect">
+            <a:avLst/>
+          </a:prstGeom>
+          <a:noFill/>
+          <a:ln/>
+        </p:spPr>
+        <p:txBody>
+          <a:bodyPr wrap="square" lIns="0" tIns="0" rIns="0" bIns="0" rtlCol="0" anchor="ctr"/>
+          <a:lstStyle/>
+          <a:p>
+            <a:pPr marL="0" indent="0">
+              <a:buNone/>
+            </a:pPr>
+            <a:r>
+              <a:rPr lang="en-US" sz="2400" b="1" dirty="0">
+                <a:solidFill>
+                  <a:srgbClr val="1F2937"/>
+                </a:solidFill>
+                <a:latin typeface="Montserrat" pitchFamily="34" charset="0"/>
+                <a:ea typeface="Montserrat" pitchFamily="34" charset="-122"/>
+                <a:cs typeface="Montserrat" pitchFamily="34" charset="-120"/>
+              </a:rPr>
+              <a:t>Tripp &amp; Patrick</a:t>
+            </a:r>
+          </a:p>
+          <a:p>
+            <a:pPr marL="0" indent="0">
+              <a:buNone/>
+            </a:pPr>
+            <a:r>
+              <a:rPr lang="en-US" sz="2400" b="1" dirty="0">
+                <a:solidFill>
+                  <a:srgbClr val="1F2937"/>
+                </a:solidFill>
+                <a:latin typeface="Montserrat" pitchFamily="34" charset="0"/>
+              </a:rPr>
+              <a:t>Jason &amp; Matt</a:t>
+            </a:r>
+            <a:endParaRPr lang="en-US" sz="2400" dirty="0"/>
+          </a:p>
+        </p:txBody>
+      </p:sp>
+      <p:sp>
+        <p:nvSpPr>
+          <p:cNvPr id="21" name="Text 19"/>
+          <p:cNvSpPr/>
+          <p:nvPr/>
+        </p:nvSpPr>
+        <p:spPr>
+          <a:xfrm>
+            <a:off x="8412480" y="3703320"/>
+            <a:ext cx="2926080" cy="365760"/>
+          </a:xfrm>
+          <a:prstGeom prst="rect">
+            <a:avLst/>
+          </a:prstGeom>
+          <a:noFill/>
+          <a:ln/>
+        </p:spPr>
+        <p:txBody>
+          <a:bodyPr wrap="square" lIns="0" tIns="0" rIns="0" bIns="0" rtlCol="0" anchor="ctr"/>
+          <a:lstStyle/>
+          <a:p>
+            <a:pPr marL="0" indent="0">
+              <a:buNone/>
+            </a:pPr>
+            <a:r>
+              <a:rPr lang="en-US" sz="1300" i="1" dirty="0">
+                <a:solidFill>
+                  <a:srgbClr val="6B7280"/>
+                </a:solidFill>
+                <a:latin typeface="Inter" pitchFamily="34" charset="0"/>
+                <a:ea typeface="Inter" pitchFamily="34" charset="-122"/>
+                <a:cs typeface="Inter" pitchFamily="34" charset="-120"/>
+              </a:rPr>
+              <a:t>Standing by at every break.</a:t>
+            </a:r>
+            <a:endParaRPr lang="en-US" sz="1300" dirty="0"/>
+          </a:p>
+        </p:txBody>
+      </p:sp>
+      <p:sp>
+        <p:nvSpPr>
+          <p:cNvPr id="22" name="Text 20"/>
+          <p:cNvSpPr/>
+          <p:nvPr/>
+        </p:nvSpPr>
+        <p:spPr>
+          <a:xfrm>
+            <a:off x="8412480" y="4251960"/>
+            <a:ext cx="2926080" cy="1645920"/>
+          </a:xfrm>
+          <a:prstGeom prst="rect">
+            <a:avLst/>
+          </a:prstGeom>
+          <a:noFill/>
+          <a:ln/>
+        </p:spPr>
+        <p:txBody>
+          <a:bodyPr wrap="square" lIns="0" tIns="0" rIns="0" bIns="0" rtlCol="0" anchor="ctr"/>
+          <a:lstStyle/>
+          <a:p>
+            <a:pPr marL="0" indent="0">
+              <a:buNone/>
+            </a:pPr>
+            <a:r>
+              <a:rPr lang="en-US" sz="1300" b="1" dirty="0">
+                <a:solidFill>
+                  <a:srgbClr val="1F2937"/>
+                </a:solidFill>
+                <a:latin typeface="Inter" pitchFamily="34" charset="0"/>
+                <a:ea typeface="Inter" pitchFamily="34" charset="-122"/>
+                <a:cs typeface="Inter" pitchFamily="34" charset="-120"/>
+              </a:rPr>
+              <a:t>If any of those three are red — find them.</a:t>
+            </a:r>
+            <a:endParaRPr lang="en-US" sz="1300" dirty="0"/>
+          </a:p>
+          <a:p>
+            <a:pPr marL="0" indent="0">
+              <a:buNone/>
+            </a:pPr>
+            <a:r>
+              <a:rPr lang="en-US" sz="1300" dirty="0">
+                <a:solidFill>
+                  <a:srgbClr val="000000"/>
+                </a:solidFill>
+                <a:latin typeface="Inter" pitchFamily="34" charset="0"/>
+                <a:ea typeface="Inter" pitchFamily="34" charset="-122"/>
+                <a:cs typeface="Inter" pitchFamily="34" charset="-120"/>
+              </a:rPr>
+              <a:t> </a:t>
+            </a:r>
+            <a:endParaRPr lang="en-US" sz="1300" dirty="0"/>
+          </a:p>
+          <a:p>
+            <a:pPr marL="0" indent="0">
+              <a:buNone/>
+            </a:pPr>
+            <a:r>
+              <a:rPr lang="en-US" sz="1300" dirty="0">
+                <a:solidFill>
+                  <a:srgbClr val="6B7280"/>
+                </a:solidFill>
+                <a:latin typeface="Inter" pitchFamily="34" charset="0"/>
+                <a:ea typeface="Inter" pitchFamily="34" charset="-122"/>
+                <a:cs typeface="Inter" pitchFamily="34" charset="-120"/>
+              </a:rPr>
+              <a:t>Anthropic account, Claude Code CLI, and GitHub CLI unlock the rest of the workshop.</a:t>
+            </a:r>
+            <a:endParaRPr lang="en-US" sz="1300" dirty="0"/>
+          </a:p>
+        </p:txBody>
+      </p:sp>
+      <p:sp>
+        <p:nvSpPr>
+          <p:cNvPr id="23" name="Text 21"/>
+          <p:cNvSpPr/>
+          <p:nvPr/>
+        </p:nvSpPr>
+        <p:spPr>
+          <a:xfrm>
+            <a:off x="457200" y="6446520"/>
+            <a:ext cx="7315200" cy="274320"/>
+          </a:xfrm>
+          <a:prstGeom prst="rect">
+            <a:avLst/>
+          </a:prstGeom>
+          <a:noFill/>
+          <a:ln/>
+        </p:spPr>
+        <p:txBody>
+          <a:bodyPr wrap="square" lIns="0" tIns="0" rIns="0" bIns="0" rtlCol="0" anchor="ctr"/>
+          <a:lstStyle/>
+          <a:p>
+            <a:pPr marL="0" indent="0">
+              <a:buNone/>
+            </a:pPr>
+            <a:r>
+              <a:rPr lang="en-US" sz="900" kern="0" spc="300" dirty="0">
+                <a:solidFill>
+                  <a:srgbClr val="6B7280"/>
+                </a:solidFill>
+                <a:latin typeface="Inter" pitchFamily="34" charset="0"/>
+                <a:ea typeface="Inter" pitchFamily="34" charset="-122"/>
+                <a:cs typeface="Inter" pitchFamily="34" charset="-120"/>
+              </a:rPr>
+              <a:t>01 · WELCOME &amp; KICKOFF</a:t>
+            </a:r>
+            <a:endParaRPr lang="en-US" sz="900" dirty="0"/>
+          </a:p>
+        </p:txBody>
+      </p:sp>
+      <p:sp>
+        <p:nvSpPr>
+          <p:cNvPr id="24" name="Text 22"/>
+          <p:cNvSpPr/>
+          <p:nvPr/>
+        </p:nvSpPr>
+        <p:spPr>
+          <a:xfrm>
+            <a:off x="8076895" y="6446520"/>
+            <a:ext cx="3657600" cy="274320"/>
+          </a:xfrm>
+          <a:prstGeom prst="rect">
+            <a:avLst/>
+          </a:prstGeom>
+          <a:noFill/>
+          <a:ln/>
+        </p:spPr>
+        <p:txBody>
+          <a:bodyPr wrap="square" lIns="0" tIns="0" rIns="0" bIns="0" rtlCol="0" anchor="ctr"/>
+          <a:lstStyle/>
+          <a:p>
+            <a:pPr marL="0" indent="0" algn="r">
+              <a:buNone/>
+            </a:pPr>
+            <a:r>
+              <a:rPr lang="en-US" sz="900" kern="0" spc="300" dirty="0">
+                <a:solidFill>
+                  <a:srgbClr val="6B7280"/>
+                </a:solidFill>
+                <a:latin typeface="Inter" pitchFamily="34" charset="0"/>
+                <a:ea typeface="Inter" pitchFamily="34" charset="-122"/>
+                <a:cs typeface="Inter" pitchFamily="34" charset="-120"/>
+              </a:rPr>
+              <a:t>PREREQUISITES · GREEN BY 10:00</a:t>
+            </a:r>
+            <a:endParaRPr lang="en-US" sz="900" dirty="0"/>
+          </a:p>
+        </p:txBody>
+      </p:sp>
+    </p:spTree>
+  </p:cSld>
+  <p:clrMapOvr>
+    <a:masterClrMapping/>
+  </p:clrMapOvr>
+</p:sld>
+</file>
+
+<file path=ppt/slides/slide11.xml><?xml version="1.0" encoding="utf-8"?>
+<p:sld xmlns:a="http://schemas.openxmlformats.org/drawingml/2006/main" xmlns:r="http://schemas.openxmlformats.org/officeDocument/2006/relationships" xmlns:p="http://schemas.openxmlformats.org/presentationml/2006/main">
   <p:cSld name="Slide 9">
     <p:bg>
       <p:bgPr>
@@ -3500,7 +4652,7 @@
 </p:sld>
 </file>
 
-<file path=ppt/slides/slide11.xml><?xml version="1.0" encoding="utf-8"?>
+<file path=ppt/slides/slide12.xml><?xml version="1.0" encoding="utf-8"?>
 <p:sld xmlns:a="http://schemas.openxmlformats.org/drawingml/2006/main" xmlns:r="http://schemas.openxmlformats.org/officeDocument/2006/relationships" xmlns:p="http://schemas.openxmlformats.org/presentationml/2006/main">
   <p:cSld name="Slide 10">
     <p:bg>
@@ -8700,18 +9852,10 @@
 
 <file path=ppt/slides/slide9.xml><?xml version="1.0" encoding="utf-8"?>
 <p:sld xmlns:a="http://schemas.openxmlformats.org/drawingml/2006/main" xmlns:r="http://schemas.openxmlformats.org/officeDocument/2006/relationships" xmlns:p="http://schemas.openxmlformats.org/presentationml/2006/main">
-  <p:cSld name="Slide 8">
-    <p:bg>
-      <p:bgPr>
-        <a:solidFill>
-          <a:srgbClr val="F5F2ED"/>
-        </a:solidFill>
-        <a:effectLst/>
-      </p:bgPr>
-    </p:bg>
+  <p:cSld>
     <p:spTree>
       <p:nvGrpSpPr>
-        <p:cNvPr id="1" name=""/>
+        <p:cNvPr id="1" name="Shape 27"/>
         <p:cNvGrpSpPr/>
         <p:nvPr/>
       </p:nvGrpSpPr>
@@ -8725,933 +9869,265 @@
       </p:grpSpPr>
       <p:sp>
         <p:nvSpPr>
-          <p:cNvPr id="2" name="Text 0"/>
-          <p:cNvSpPr/>
-          <p:nvPr/>
-        </p:nvSpPr>
-        <p:spPr>
-          <a:xfrm>
-            <a:off x="548640" y="548640"/>
-            <a:ext cx="5486400" cy="274320"/>
-          </a:xfrm>
-          <a:prstGeom prst="rect">
-            <a:avLst/>
-          </a:prstGeom>
-          <a:noFill/>
-          <a:ln/>
-        </p:spPr>
-        <p:txBody>
-          <a:bodyPr wrap="square" lIns="0" tIns="0" rIns="0" bIns="0" rtlCol="0" anchor="ctr"/>
-          <a:lstStyle/>
-          <a:p>
-            <a:pPr marL="0" indent="0">
-              <a:buNone/>
-            </a:pPr>
-            <a:r>
-              <a:rPr lang="en-US" sz="1000" b="1" kern="0" spc="600" dirty="0">
-                <a:solidFill>
-                  <a:srgbClr val="E89B3C"/>
-                </a:solidFill>
-                <a:latin typeface="Inter" pitchFamily="34" charset="0"/>
-                <a:ea typeface="Inter" pitchFamily="34" charset="-122"/>
-                <a:cs typeface="Inter" pitchFamily="34" charset="-120"/>
-              </a:rPr>
-              <a:t>SETUP CHECK · 8 MIN</a:t>
-            </a:r>
-            <a:endParaRPr lang="en-US" sz="1000" dirty="0"/>
-          </a:p>
-        </p:txBody>
-      </p:sp>
-      <p:sp>
-        <p:nvSpPr>
-          <p:cNvPr id="3" name="Text 1"/>
-          <p:cNvSpPr/>
-          <p:nvPr/>
-        </p:nvSpPr>
-        <p:spPr>
-          <a:xfrm>
-            <a:off x="548640" y="914400"/>
-            <a:ext cx="10972800" cy="822960"/>
-          </a:xfrm>
-          <a:prstGeom prst="rect">
-            <a:avLst/>
-          </a:prstGeom>
-          <a:noFill/>
-          <a:ln/>
-        </p:spPr>
-        <p:txBody>
-          <a:bodyPr wrap="square" lIns="0" tIns="0" rIns="0" bIns="0" rtlCol="0" anchor="ctr"/>
-          <a:lstStyle/>
-          <a:p>
-            <a:pPr marL="0" indent="0">
-              <a:buNone/>
-            </a:pPr>
-            <a:r>
-              <a:rPr lang="en-US" sz="3400" b="1" dirty="0">
-                <a:solidFill>
-                  <a:srgbClr val="1F2937"/>
-                </a:solidFill>
-                <a:latin typeface="Montserrat" pitchFamily="34" charset="0"/>
-                <a:ea typeface="Montserrat" pitchFamily="34" charset="-122"/>
-                <a:cs typeface="Montserrat" pitchFamily="34" charset="-120"/>
-              </a:rPr>
-              <a:t>Run these three commands together.</a:t>
-            </a:r>
-            <a:endParaRPr lang="en-US" sz="3400" dirty="0"/>
-          </a:p>
-        </p:txBody>
-      </p:sp>
-      <p:sp>
-        <p:nvSpPr>
-          <p:cNvPr id="4" name="Text 2"/>
-          <p:cNvSpPr/>
-          <p:nvPr/>
-        </p:nvSpPr>
-        <p:spPr>
-          <a:xfrm>
-            <a:off x="548640" y="1783080"/>
-            <a:ext cx="10972800" cy="457200"/>
-          </a:xfrm>
-          <a:prstGeom prst="rect">
-            <a:avLst/>
-          </a:prstGeom>
-          <a:noFill/>
-          <a:ln/>
-        </p:spPr>
-        <p:txBody>
-          <a:bodyPr wrap="square" lIns="0" tIns="0" rIns="0" bIns="0" rtlCol="0" anchor="ctr"/>
-          <a:lstStyle/>
-          <a:p>
-            <a:pPr marL="0" indent="0">
-              <a:buNone/>
-            </a:pPr>
-            <a:r>
-              <a:rPr lang="en-US" sz="1400" i="1" dirty="0">
-                <a:solidFill>
-                  <a:srgbClr val="6B7280"/>
-                </a:solidFill>
-                <a:latin typeface="Inter" pitchFamily="34" charset="0"/>
-                <a:ea typeface="Inter" pitchFamily="34" charset="-122"/>
-                <a:cs typeface="Inter" pitchFamily="34" charset="-120"/>
-              </a:rPr>
-              <a:t>Three green checks and you're ready for Day 1. Anything red? Find Tripp or Patrick at the 10:15 break.</a:t>
-            </a:r>
-            <a:endParaRPr lang="en-US" sz="1400" dirty="0"/>
-          </a:p>
-        </p:txBody>
-      </p:sp>
-      <p:sp>
-        <p:nvSpPr>
-          <p:cNvPr id="5" name="Shape 3"/>
-          <p:cNvSpPr/>
-          <p:nvPr/>
-        </p:nvSpPr>
-        <p:spPr>
-          <a:xfrm>
-            <a:off x="548640" y="2468880"/>
-            <a:ext cx="7315200" cy="3657600"/>
-          </a:xfrm>
-          <a:prstGeom prst="rect">
-            <a:avLst/>
+          <p:cNvPr id="28" name="Google Shape;28;p2"/>
+          <p:cNvSpPr/>
+          <p:nvPr/>
+        </p:nvSpPr>
+        <p:spPr>
+          <a:xfrm>
+            <a:off x="635000" y="1778000"/>
+            <a:ext cx="4572000" cy="4572000"/>
+          </a:xfrm>
+          <a:prstGeom prst="roundRect">
+            <a:avLst>
+              <a:gd name="adj" fmla="val 2778"/>
+            </a:avLst>
           </a:prstGeom>
           <a:solidFill>
-            <a:srgbClr val="0F1620"/>
+            <a:srgbClr val="1B1D24"/>
           </a:solidFill>
-          <a:ln/>
-        </p:spPr>
-        <p:txBody>
-          <a:bodyPr/>
-          <a:lstStyle/>
-          <a:p>
-            <a:endParaRPr lang="en-US"/>
-          </a:p>
-        </p:txBody>
-      </p:sp>
-      <p:sp>
-        <p:nvSpPr>
-          <p:cNvPr id="6" name="Shape 4"/>
-          <p:cNvSpPr/>
-          <p:nvPr/>
-        </p:nvSpPr>
-        <p:spPr>
-          <a:xfrm>
-            <a:off x="548640" y="2468880"/>
-            <a:ext cx="7315200" cy="365760"/>
-          </a:xfrm>
-          <a:prstGeom prst="rect">
-            <a:avLst/>
-          </a:prstGeom>
-          <a:solidFill>
-            <a:srgbClr val="1B2533"/>
-          </a:solidFill>
-          <a:ln/>
-        </p:spPr>
-        <p:txBody>
-          <a:bodyPr/>
-          <a:lstStyle/>
-          <a:p>
-            <a:endParaRPr lang="en-US"/>
-          </a:p>
-        </p:txBody>
-      </p:sp>
-      <p:sp>
-        <p:nvSpPr>
-          <p:cNvPr id="7" name="Shape 5"/>
-          <p:cNvSpPr/>
-          <p:nvPr/>
-        </p:nvSpPr>
-        <p:spPr>
-          <a:xfrm>
-            <a:off x="731520" y="2587752"/>
-            <a:ext cx="137160" cy="137160"/>
-          </a:xfrm>
-          <a:prstGeom prst="ellipse">
-            <a:avLst/>
-          </a:prstGeom>
-          <a:solidFill>
-            <a:srgbClr val="FF6058"/>
-          </a:solidFill>
-          <a:ln/>
-        </p:spPr>
-        <p:txBody>
-          <a:bodyPr/>
-          <a:lstStyle/>
-          <a:p>
-            <a:endParaRPr lang="en-US"/>
-          </a:p>
-        </p:txBody>
-      </p:sp>
-      <p:sp>
-        <p:nvSpPr>
-          <p:cNvPr id="8" name="Shape 6"/>
-          <p:cNvSpPr/>
-          <p:nvPr/>
-        </p:nvSpPr>
-        <p:spPr>
-          <a:xfrm>
-            <a:off x="960120" y="2587752"/>
-            <a:ext cx="137160" cy="137160"/>
-          </a:xfrm>
-          <a:prstGeom prst="ellipse">
-            <a:avLst/>
-          </a:prstGeom>
-          <a:solidFill>
-            <a:srgbClr val="FFBD2E"/>
-          </a:solidFill>
-          <a:ln/>
-        </p:spPr>
-        <p:txBody>
-          <a:bodyPr/>
-          <a:lstStyle/>
-          <a:p>
-            <a:endParaRPr lang="en-US"/>
-          </a:p>
-        </p:txBody>
-      </p:sp>
-      <p:sp>
-        <p:nvSpPr>
-          <p:cNvPr id="9" name="Shape 7"/>
-          <p:cNvSpPr/>
-          <p:nvPr/>
-        </p:nvSpPr>
-        <p:spPr>
-          <a:xfrm>
-            <a:off x="1188720" y="2587752"/>
-            <a:ext cx="137160" cy="137160"/>
-          </a:xfrm>
-          <a:prstGeom prst="ellipse">
-            <a:avLst/>
-          </a:prstGeom>
-          <a:solidFill>
-            <a:srgbClr val="27CA40"/>
-          </a:solidFill>
-          <a:ln/>
-        </p:spPr>
-        <p:txBody>
-          <a:bodyPr/>
-          <a:lstStyle/>
-          <a:p>
-            <a:endParaRPr lang="en-US"/>
-          </a:p>
-        </p:txBody>
-      </p:sp>
-      <p:sp>
-        <p:nvSpPr>
-          <p:cNvPr id="10" name="Text 8"/>
-          <p:cNvSpPr/>
-          <p:nvPr/>
-        </p:nvSpPr>
-        <p:spPr>
-          <a:xfrm>
-            <a:off x="1920240" y="2514600"/>
-            <a:ext cx="4572000" cy="274320"/>
-          </a:xfrm>
-          <a:prstGeom prst="rect">
-            <a:avLst/>
-          </a:prstGeom>
-          <a:noFill/>
-          <a:ln/>
-        </p:spPr>
-        <p:txBody>
-          <a:bodyPr wrap="square" lIns="0" tIns="0" rIns="0" bIns="0" rtlCol="0" anchor="ctr"/>
-          <a:lstStyle/>
-          <a:p>
-            <a:pPr marL="0" indent="0" algn="ctr">
-              <a:buNone/>
-            </a:pPr>
-            <a:r>
-              <a:rPr lang="en-US" sz="1000" dirty="0">
-                <a:solidFill>
-                  <a:srgbClr val="9AA3AF"/>
-                </a:solidFill>
-                <a:latin typeface="JetBrains Mono" pitchFamily="34" charset="0"/>
-                <a:ea typeface="JetBrains Mono" pitchFamily="34" charset="-122"/>
-                <a:cs typeface="JetBrains Mono" pitchFamily="34" charset="-120"/>
-              </a:rPr>
-              <a:t>prerequisites · check</a:t>
-            </a:r>
-            <a:endParaRPr lang="en-US" sz="1000" dirty="0"/>
-          </a:p>
-        </p:txBody>
-      </p:sp>
-      <p:sp>
-        <p:nvSpPr>
-          <p:cNvPr id="11" name="Text 9"/>
-          <p:cNvSpPr/>
-          <p:nvPr/>
-        </p:nvSpPr>
-        <p:spPr>
-          <a:xfrm>
-            <a:off x="914400" y="3017520"/>
-            <a:ext cx="6583680" cy="365760"/>
-          </a:xfrm>
-          <a:prstGeom prst="rect">
-            <a:avLst/>
-          </a:prstGeom>
-          <a:noFill/>
-          <a:ln/>
-        </p:spPr>
-        <p:txBody>
-          <a:bodyPr wrap="square" lIns="0" tIns="0" rIns="0" bIns="0" rtlCol="0" anchor="ctr"/>
-          <a:lstStyle/>
-          <a:p>
-            <a:pPr marL="0" indent="0">
-              <a:buNone/>
-            </a:pPr>
-            <a:r>
-              <a:rPr lang="en-US" sz="1800" b="1" dirty="0">
-                <a:solidFill>
-                  <a:srgbClr val="3FB6A8"/>
-                </a:solidFill>
-                <a:latin typeface="JetBrains Mono" pitchFamily="34" charset="0"/>
-                <a:ea typeface="JetBrains Mono" pitchFamily="34" charset="-122"/>
-                <a:cs typeface="JetBrains Mono" pitchFamily="34" charset="-120"/>
-              </a:rPr>
-              <a:t>$ </a:t>
-            </a:r>
-            <a:r>
-              <a:rPr lang="en-US" sz="1800" b="1" dirty="0">
-                <a:solidFill>
-                  <a:srgbClr val="FFFFFF"/>
-                </a:solidFill>
-                <a:latin typeface="JetBrains Mono" pitchFamily="34" charset="0"/>
-                <a:ea typeface="JetBrains Mono" pitchFamily="34" charset="-122"/>
-                <a:cs typeface="JetBrains Mono" pitchFamily="34" charset="-120"/>
-              </a:rPr>
-              <a:t>claude --version</a:t>
-            </a:r>
-            <a:endParaRPr lang="en-US" sz="1800" dirty="0"/>
-          </a:p>
-        </p:txBody>
-      </p:sp>
-      <p:sp>
-        <p:nvSpPr>
-          <p:cNvPr id="12" name="Text 10"/>
-          <p:cNvSpPr/>
-          <p:nvPr/>
-        </p:nvSpPr>
-        <p:spPr>
-          <a:xfrm>
-            <a:off x="1097280" y="3429000"/>
-            <a:ext cx="6400800" cy="365760"/>
-          </a:xfrm>
-          <a:prstGeom prst="rect">
-            <a:avLst/>
-          </a:prstGeom>
-          <a:noFill/>
-          <a:ln/>
-        </p:spPr>
-        <p:txBody>
-          <a:bodyPr wrap="square" lIns="0" tIns="0" rIns="0" bIns="0" rtlCol="0" anchor="ctr"/>
-          <a:lstStyle/>
-          <a:p>
-            <a:pPr marL="0" indent="0">
-              <a:buNone/>
-            </a:pPr>
-            <a:r>
-              <a:rPr lang="en-US" sz="1300" b="1" dirty="0">
-                <a:solidFill>
-                  <a:srgbClr val="3FB6A8"/>
-                </a:solidFill>
-                <a:latin typeface="JetBrains Mono" pitchFamily="34" charset="0"/>
-                <a:ea typeface="JetBrains Mono" pitchFamily="34" charset="-122"/>
-                <a:cs typeface="JetBrains Mono" pitchFamily="34" charset="-120"/>
-              </a:rPr>
-              <a:t>✓ </a:t>
-            </a:r>
-            <a:r>
-              <a:rPr lang="en-US" sz="1300" dirty="0">
-                <a:solidFill>
-                  <a:srgbClr val="9AA3AF"/>
-                </a:solidFill>
-                <a:latin typeface="JetBrains Mono" pitchFamily="34" charset="0"/>
-                <a:ea typeface="JetBrains Mono" pitchFamily="34" charset="-122"/>
-                <a:cs typeface="JetBrains Mono" pitchFamily="34" charset="-120"/>
-              </a:rPr>
-              <a:t>claude code 1.x · ready</a:t>
-            </a:r>
-            <a:endParaRPr lang="en-US" sz="1300" dirty="0"/>
-          </a:p>
-        </p:txBody>
-      </p:sp>
-      <p:sp>
-        <p:nvSpPr>
-          <p:cNvPr id="13" name="Text 11"/>
-          <p:cNvSpPr/>
-          <p:nvPr/>
-        </p:nvSpPr>
-        <p:spPr>
-          <a:xfrm>
-            <a:off x="914400" y="3977640"/>
-            <a:ext cx="6583680" cy="365760"/>
-          </a:xfrm>
-          <a:prstGeom prst="rect">
-            <a:avLst/>
-          </a:prstGeom>
-          <a:noFill/>
-          <a:ln/>
-        </p:spPr>
-        <p:txBody>
-          <a:bodyPr wrap="square" lIns="0" tIns="0" rIns="0" bIns="0" rtlCol="0" anchor="ctr"/>
-          <a:lstStyle/>
-          <a:p>
-            <a:pPr marL="0" indent="0">
-              <a:buNone/>
-            </a:pPr>
-            <a:r>
-              <a:rPr lang="en-US" sz="1800" b="1" dirty="0">
-                <a:solidFill>
-                  <a:srgbClr val="3FB6A8"/>
-                </a:solidFill>
-                <a:latin typeface="JetBrains Mono" pitchFamily="34" charset="0"/>
-                <a:ea typeface="JetBrains Mono" pitchFamily="34" charset="-122"/>
-                <a:cs typeface="JetBrains Mono" pitchFamily="34" charset="-120"/>
-              </a:rPr>
-              <a:t>$ </a:t>
-            </a:r>
-            <a:r>
-              <a:rPr lang="en-US" sz="1800" b="1" dirty="0">
-                <a:solidFill>
-                  <a:srgbClr val="FFFFFF"/>
-                </a:solidFill>
-                <a:latin typeface="JetBrains Mono" pitchFamily="34" charset="0"/>
-                <a:ea typeface="JetBrains Mono" pitchFamily="34" charset="-122"/>
-                <a:cs typeface="JetBrains Mono" pitchFamily="34" charset="-120"/>
-              </a:rPr>
-              <a:t>gh auth status</a:t>
-            </a:r>
-            <a:endParaRPr lang="en-US" sz="1800" dirty="0"/>
-          </a:p>
-        </p:txBody>
-      </p:sp>
-      <p:sp>
-        <p:nvSpPr>
-          <p:cNvPr id="14" name="Text 12"/>
-          <p:cNvSpPr/>
-          <p:nvPr/>
-        </p:nvSpPr>
-        <p:spPr>
-          <a:xfrm>
-            <a:off x="1097280" y="4389120"/>
-            <a:ext cx="6400800" cy="365760"/>
-          </a:xfrm>
-          <a:prstGeom prst="rect">
-            <a:avLst/>
-          </a:prstGeom>
-          <a:noFill/>
-          <a:ln/>
-        </p:spPr>
-        <p:txBody>
-          <a:bodyPr wrap="square" lIns="0" tIns="0" rIns="0" bIns="0" rtlCol="0" anchor="ctr"/>
-          <a:lstStyle/>
-          <a:p>
-            <a:pPr marL="0" indent="0">
-              <a:buNone/>
-            </a:pPr>
-            <a:r>
-              <a:rPr lang="en-US" sz="1300" b="1" dirty="0">
-                <a:solidFill>
-                  <a:srgbClr val="3FB6A8"/>
-                </a:solidFill>
-                <a:latin typeface="JetBrains Mono" pitchFamily="34" charset="0"/>
-                <a:ea typeface="JetBrains Mono" pitchFamily="34" charset="-122"/>
-                <a:cs typeface="JetBrains Mono" pitchFamily="34" charset="-120"/>
-              </a:rPr>
-              <a:t>✓ </a:t>
-            </a:r>
-            <a:r>
-              <a:rPr lang="en-US" sz="1300" dirty="0">
-                <a:solidFill>
-                  <a:srgbClr val="9AA3AF"/>
-                </a:solidFill>
-                <a:latin typeface="JetBrains Mono" pitchFamily="34" charset="0"/>
-                <a:ea typeface="JetBrains Mono" pitchFamily="34" charset="-122"/>
-                <a:cs typeface="JetBrains Mono" pitchFamily="34" charset="-120"/>
-              </a:rPr>
-              <a:t>Logged in to github.com as you</a:t>
-            </a:r>
-            <a:endParaRPr lang="en-US" sz="1300" dirty="0"/>
-          </a:p>
-        </p:txBody>
-      </p:sp>
-      <p:sp>
-        <p:nvSpPr>
-          <p:cNvPr id="15" name="Text 13"/>
-          <p:cNvSpPr/>
-          <p:nvPr/>
-        </p:nvSpPr>
-        <p:spPr>
-          <a:xfrm>
-            <a:off x="914400" y="4937760"/>
-            <a:ext cx="6583680" cy="365760"/>
-          </a:xfrm>
-          <a:prstGeom prst="rect">
-            <a:avLst/>
-          </a:prstGeom>
-          <a:noFill/>
-          <a:ln/>
-        </p:spPr>
-        <p:txBody>
-          <a:bodyPr wrap="square" lIns="0" tIns="0" rIns="0" bIns="0" rtlCol="0" anchor="ctr"/>
-          <a:lstStyle/>
-          <a:p>
-            <a:pPr marL="0" indent="0">
-              <a:buNone/>
-            </a:pPr>
-            <a:r>
-              <a:rPr lang="en-US" sz="1800" b="1" dirty="0">
-                <a:solidFill>
-                  <a:srgbClr val="3FB6A8"/>
-                </a:solidFill>
-                <a:latin typeface="JetBrains Mono" pitchFamily="34" charset="0"/>
-                <a:ea typeface="JetBrains Mono" pitchFamily="34" charset="-122"/>
-                <a:cs typeface="JetBrains Mono" pitchFamily="34" charset="-120"/>
-              </a:rPr>
-              <a:t>$ </a:t>
-            </a:r>
-            <a:r>
-              <a:rPr lang="en-US" sz="1800" b="1" dirty="0">
-                <a:solidFill>
-                  <a:srgbClr val="FFFFFF"/>
-                </a:solidFill>
-                <a:latin typeface="JetBrains Mono" pitchFamily="34" charset="0"/>
-                <a:ea typeface="JetBrains Mono" pitchFamily="34" charset="-122"/>
-                <a:cs typeface="JetBrains Mono" pitchFamily="34" charset="-120"/>
-              </a:rPr>
-              <a:t>node --version</a:t>
-            </a:r>
-            <a:endParaRPr lang="en-US" sz="1800" dirty="0"/>
-          </a:p>
-        </p:txBody>
-      </p:sp>
-      <p:sp>
-        <p:nvSpPr>
-          <p:cNvPr id="16" name="Text 14"/>
-          <p:cNvSpPr/>
-          <p:nvPr/>
-        </p:nvSpPr>
-        <p:spPr>
-          <a:xfrm>
-            <a:off x="1097280" y="5349240"/>
-            <a:ext cx="6400800" cy="365760"/>
-          </a:xfrm>
-          <a:prstGeom prst="rect">
-            <a:avLst/>
-          </a:prstGeom>
-          <a:noFill/>
-          <a:ln/>
-        </p:spPr>
-        <p:txBody>
-          <a:bodyPr wrap="square" lIns="0" tIns="0" rIns="0" bIns="0" rtlCol="0" anchor="ctr"/>
-          <a:lstStyle/>
-          <a:p>
-            <a:pPr marL="0" indent="0">
-              <a:buNone/>
-            </a:pPr>
-            <a:r>
-              <a:rPr lang="en-US" sz="1300" b="1" dirty="0">
-                <a:solidFill>
-                  <a:srgbClr val="3FB6A8"/>
-                </a:solidFill>
-                <a:latin typeface="JetBrains Mono" pitchFamily="34" charset="0"/>
-                <a:ea typeface="JetBrains Mono" pitchFamily="34" charset="-122"/>
-                <a:cs typeface="JetBrains Mono" pitchFamily="34" charset="-120"/>
-              </a:rPr>
-              <a:t>✓ </a:t>
-            </a:r>
-            <a:r>
-              <a:rPr lang="en-US" sz="1300" dirty="0">
-                <a:solidFill>
-                  <a:srgbClr val="9AA3AF"/>
-                </a:solidFill>
-                <a:latin typeface="JetBrains Mono" pitchFamily="34" charset="0"/>
-                <a:ea typeface="JetBrains Mono" pitchFamily="34" charset="-122"/>
-                <a:cs typeface="JetBrains Mono" pitchFamily="34" charset="-120"/>
-              </a:rPr>
-              <a:t>v20.x or newer</a:t>
-            </a:r>
-            <a:endParaRPr lang="en-US" sz="1300" dirty="0"/>
-          </a:p>
-        </p:txBody>
-      </p:sp>
-      <p:sp>
-        <p:nvSpPr>
-          <p:cNvPr id="17" name="Shape 15"/>
-          <p:cNvSpPr/>
-          <p:nvPr/>
-        </p:nvSpPr>
-        <p:spPr>
-          <a:xfrm>
-            <a:off x="8138160" y="2468880"/>
-            <a:ext cx="3474720" cy="3657600"/>
-          </a:xfrm>
-          <a:prstGeom prst="rect">
-            <a:avLst/>
-          </a:prstGeom>
-          <a:solidFill>
-            <a:srgbClr val="FFFFFF"/>
-          </a:solidFill>
-          <a:ln w="6350">
-            <a:solidFill>
-              <a:srgbClr val="E2DFD8"/>
-            </a:solidFill>
-            <a:prstDash val="solid"/>
+          <a:ln>
+            <a:noFill/>
           </a:ln>
         </p:spPr>
         <p:txBody>
-          <a:bodyPr/>
-          <a:lstStyle/>
-          <a:p>
-            <a:endParaRPr lang="en-US"/>
-          </a:p>
-        </p:txBody>
-      </p:sp>
-      <p:sp>
-        <p:nvSpPr>
-          <p:cNvPr id="18" name="Shape 16"/>
-          <p:cNvSpPr/>
-          <p:nvPr/>
-        </p:nvSpPr>
-        <p:spPr>
-          <a:xfrm>
-            <a:off x="8138160" y="2468880"/>
-            <a:ext cx="3474720" cy="73152"/>
-          </a:xfrm>
-          <a:prstGeom prst="rect">
-            <a:avLst/>
-          </a:prstGeom>
-          <a:solidFill>
-            <a:srgbClr val="E89B3C"/>
-          </a:solidFill>
-          <a:ln/>
-        </p:spPr>
-        <p:txBody>
-          <a:bodyPr/>
-          <a:lstStyle/>
-          <a:p>
-            <a:endParaRPr lang="en-US"/>
-          </a:p>
-        </p:txBody>
-      </p:sp>
-      <p:sp>
-        <p:nvSpPr>
-          <p:cNvPr id="19" name="Text 17"/>
-          <p:cNvSpPr/>
-          <p:nvPr/>
-        </p:nvSpPr>
-        <p:spPr>
-          <a:xfrm>
-            <a:off x="8412480" y="2788920"/>
-            <a:ext cx="2926080" cy="274320"/>
-          </a:xfrm>
-          <a:prstGeom prst="rect">
-            <a:avLst/>
-          </a:prstGeom>
-          <a:noFill/>
-          <a:ln/>
-        </p:spPr>
-        <p:txBody>
-          <a:bodyPr wrap="square" lIns="0" tIns="0" rIns="0" bIns="0" rtlCol="0" anchor="ctr"/>
-          <a:lstStyle/>
-          <a:p>
-            <a:pPr marL="0" indent="0">
-              <a:buNone/>
-            </a:pPr>
-            <a:r>
-              <a:rPr lang="en-US" sz="1000" b="1" kern="0" spc="600" dirty="0">
-                <a:solidFill>
-                  <a:srgbClr val="E89B3C"/>
-                </a:solidFill>
-                <a:latin typeface="Inter" pitchFamily="34" charset="0"/>
-                <a:ea typeface="Inter" pitchFamily="34" charset="-122"/>
-                <a:cs typeface="Inter" pitchFamily="34" charset="-120"/>
-              </a:rPr>
-              <a:t>AI Help</a:t>
-            </a:r>
-            <a:endParaRPr lang="en-US" sz="1000" dirty="0"/>
-          </a:p>
-        </p:txBody>
-      </p:sp>
-      <p:sp>
-        <p:nvSpPr>
-          <p:cNvPr id="20" name="Text 18"/>
-          <p:cNvSpPr/>
-          <p:nvPr/>
-        </p:nvSpPr>
-        <p:spPr>
-          <a:xfrm>
-            <a:off x="8412480" y="3108960"/>
-            <a:ext cx="2926080" cy="548640"/>
-          </a:xfrm>
-          <a:prstGeom prst="rect">
-            <a:avLst/>
-          </a:prstGeom>
-          <a:noFill/>
-          <a:ln/>
-        </p:spPr>
-        <p:txBody>
-          <a:bodyPr wrap="square" lIns="0" tIns="0" rIns="0" bIns="0" rtlCol="0" anchor="ctr"/>
-          <a:lstStyle/>
-          <a:p>
-            <a:pPr marL="0" indent="0">
-              <a:buNone/>
-            </a:pPr>
-            <a:r>
-              <a:rPr lang="en-US" sz="2400" b="1" dirty="0">
-                <a:solidFill>
-                  <a:srgbClr val="1F2937"/>
-                </a:solidFill>
-                <a:latin typeface="Montserrat" pitchFamily="34" charset="0"/>
-                <a:ea typeface="Montserrat" pitchFamily="34" charset="-122"/>
-                <a:cs typeface="Montserrat" pitchFamily="34" charset="-120"/>
-              </a:rPr>
-              <a:t>Tripp &amp; Patrick</a:t>
-            </a:r>
-          </a:p>
-          <a:p>
-            <a:pPr marL="0" indent="0">
-              <a:buNone/>
-            </a:pPr>
-            <a:r>
-              <a:rPr lang="en-US" sz="2400" b="1" dirty="0">
-                <a:solidFill>
-                  <a:srgbClr val="1F2937"/>
-                </a:solidFill>
-                <a:latin typeface="Montserrat" pitchFamily="34" charset="0"/>
-              </a:rPr>
-              <a:t>Jason &amp; Matt</a:t>
-            </a:r>
-            <a:endParaRPr lang="en-US" sz="2400" dirty="0"/>
-          </a:p>
-        </p:txBody>
-      </p:sp>
-      <p:sp>
-        <p:nvSpPr>
-          <p:cNvPr id="21" name="Text 19"/>
-          <p:cNvSpPr/>
-          <p:nvPr/>
-        </p:nvSpPr>
-        <p:spPr>
-          <a:xfrm>
-            <a:off x="8412480" y="3703320"/>
-            <a:ext cx="2926080" cy="365760"/>
-          </a:xfrm>
-          <a:prstGeom prst="rect">
-            <a:avLst/>
-          </a:prstGeom>
-          <a:noFill/>
-          <a:ln/>
-        </p:spPr>
-        <p:txBody>
-          <a:bodyPr wrap="square" lIns="0" tIns="0" rIns="0" bIns="0" rtlCol="0" anchor="ctr"/>
-          <a:lstStyle/>
-          <a:p>
-            <a:pPr marL="0" indent="0">
-              <a:buNone/>
-            </a:pPr>
-            <a:r>
-              <a:rPr lang="en-US" sz="1300" i="1" dirty="0">
-                <a:solidFill>
-                  <a:srgbClr val="6B7280"/>
-                </a:solidFill>
-                <a:latin typeface="Inter" pitchFamily="34" charset="0"/>
-                <a:ea typeface="Inter" pitchFamily="34" charset="-122"/>
-                <a:cs typeface="Inter" pitchFamily="34" charset="-120"/>
-              </a:rPr>
-              <a:t>Standing by at every break.</a:t>
-            </a:r>
-            <a:endParaRPr lang="en-US" sz="1300" dirty="0"/>
-          </a:p>
-        </p:txBody>
-      </p:sp>
-      <p:sp>
-        <p:nvSpPr>
-          <p:cNvPr id="22" name="Text 20"/>
-          <p:cNvSpPr/>
-          <p:nvPr/>
-        </p:nvSpPr>
-        <p:spPr>
-          <a:xfrm>
-            <a:off x="8412480" y="4251960"/>
-            <a:ext cx="2926080" cy="1645920"/>
-          </a:xfrm>
-          <a:prstGeom prst="rect">
-            <a:avLst/>
-          </a:prstGeom>
-          <a:noFill/>
-          <a:ln/>
-        </p:spPr>
-        <p:txBody>
-          <a:bodyPr wrap="square" lIns="0" tIns="0" rIns="0" bIns="0" rtlCol="0" anchor="ctr"/>
-          <a:lstStyle/>
-          <a:p>
-            <a:pPr marL="0" indent="0">
-              <a:buNone/>
-            </a:pPr>
-            <a:r>
-              <a:rPr lang="en-US" sz="1300" b="1" dirty="0">
-                <a:solidFill>
-                  <a:srgbClr val="1F2937"/>
-                </a:solidFill>
-                <a:latin typeface="Inter" pitchFamily="34" charset="0"/>
-                <a:ea typeface="Inter" pitchFamily="34" charset="-122"/>
-                <a:cs typeface="Inter" pitchFamily="34" charset="-120"/>
-              </a:rPr>
-              <a:t>If any of those three are red — find them.</a:t>
-            </a:r>
-            <a:endParaRPr lang="en-US" sz="1300" dirty="0"/>
-          </a:p>
-          <a:p>
-            <a:pPr marL="0" indent="0">
-              <a:buNone/>
-            </a:pPr>
-            <a:r>
-              <a:rPr lang="en-US" sz="1300" dirty="0">
-                <a:solidFill>
-                  <a:srgbClr val="000000"/>
-                </a:solidFill>
-                <a:latin typeface="Inter" pitchFamily="34" charset="0"/>
-                <a:ea typeface="Inter" pitchFamily="34" charset="-122"/>
-                <a:cs typeface="Inter" pitchFamily="34" charset="-120"/>
-              </a:rPr>
-              <a:t> </a:t>
-            </a:r>
-            <a:endParaRPr lang="en-US" sz="1300" dirty="0"/>
-          </a:p>
-          <a:p>
-            <a:pPr marL="0" indent="0">
-              <a:buNone/>
-            </a:pPr>
-            <a:r>
-              <a:rPr lang="en-US" sz="1300" dirty="0">
-                <a:solidFill>
-                  <a:srgbClr val="6B7280"/>
-                </a:solidFill>
-                <a:latin typeface="Inter" pitchFamily="34" charset="0"/>
-                <a:ea typeface="Inter" pitchFamily="34" charset="-122"/>
-                <a:cs typeface="Inter" pitchFamily="34" charset="-120"/>
-              </a:rPr>
-              <a:t>Anthropic account, Claude Code CLI, and GitHub CLI unlock the rest of the workshop.</a:t>
-            </a:r>
-            <a:endParaRPr lang="en-US" sz="1300" dirty="0"/>
-          </a:p>
-        </p:txBody>
-      </p:sp>
-      <p:sp>
-        <p:nvSpPr>
-          <p:cNvPr id="23" name="Text 21"/>
-          <p:cNvSpPr/>
-          <p:nvPr/>
-        </p:nvSpPr>
-        <p:spPr>
-          <a:xfrm>
-            <a:off x="457200" y="6446520"/>
-            <a:ext cx="7315200" cy="274320"/>
-          </a:xfrm>
-          <a:prstGeom prst="rect">
-            <a:avLst/>
-          </a:prstGeom>
-          <a:noFill/>
-          <a:ln/>
-        </p:spPr>
-        <p:txBody>
-          <a:bodyPr wrap="square" lIns="0" tIns="0" rIns="0" bIns="0" rtlCol="0" anchor="ctr"/>
-          <a:lstStyle/>
-          <a:p>
-            <a:pPr marL="0" indent="0">
-              <a:buNone/>
-            </a:pPr>
-            <a:r>
-              <a:rPr lang="en-US" sz="900" kern="0" spc="300" dirty="0">
-                <a:solidFill>
-                  <a:srgbClr val="6B7280"/>
-                </a:solidFill>
-                <a:latin typeface="Inter" pitchFamily="34" charset="0"/>
-                <a:ea typeface="Inter" pitchFamily="34" charset="-122"/>
-                <a:cs typeface="Inter" pitchFamily="34" charset="-120"/>
-              </a:rPr>
-              <a:t>01 · WELCOME &amp; KICKOFF</a:t>
-            </a:r>
-            <a:endParaRPr lang="en-US" sz="900" dirty="0"/>
-          </a:p>
-        </p:txBody>
-      </p:sp>
-      <p:sp>
-        <p:nvSpPr>
-          <p:cNvPr id="24" name="Text 22"/>
-          <p:cNvSpPr/>
-          <p:nvPr/>
-        </p:nvSpPr>
-        <p:spPr>
-          <a:xfrm>
-            <a:off x="8076895" y="6446520"/>
-            <a:ext cx="3657600" cy="274320"/>
-          </a:xfrm>
-          <a:prstGeom prst="rect">
-            <a:avLst/>
-          </a:prstGeom>
-          <a:noFill/>
-          <a:ln/>
-        </p:spPr>
-        <p:txBody>
-          <a:bodyPr wrap="square" lIns="0" tIns="0" rIns="0" bIns="0" rtlCol="0" anchor="ctr"/>
-          <a:lstStyle/>
-          <a:p>
-            <a:pPr marL="0" indent="0" algn="r">
-              <a:buNone/>
-            </a:pPr>
-            <a:r>
-              <a:rPr lang="en-US" sz="900" kern="0" spc="300" dirty="0">
-                <a:solidFill>
-                  <a:srgbClr val="6B7280"/>
-                </a:solidFill>
-                <a:latin typeface="Inter" pitchFamily="34" charset="0"/>
-                <a:ea typeface="Inter" pitchFamily="34" charset="-122"/>
-                <a:cs typeface="Inter" pitchFamily="34" charset="-120"/>
-              </a:rPr>
-              <a:t>PREREQUISITES · GREEN BY 10:00</a:t>
-            </a:r>
-            <a:endParaRPr lang="en-US" sz="900" dirty="0"/>
+          <a:bodyPr spcFirstLastPara="1" wrap="square" lIns="60950" tIns="30467" rIns="60950" bIns="30467" anchor="t" anchorCtr="0">
+            <a:noAutofit/>
+          </a:bodyPr>
+          <a:lstStyle/>
+          <a:p>
+            <a:endParaRPr sz="1200">
+              <a:solidFill>
+                <a:schemeClr val="dk1"/>
+              </a:solidFill>
+              <a:latin typeface="Calibri"/>
+              <a:ea typeface="Calibri"/>
+              <a:cs typeface="Calibri"/>
+              <a:sym typeface="Calibri"/>
+            </a:endParaRPr>
+          </a:p>
+        </p:txBody>
+      </p:sp>
+      <p:sp>
+        <p:nvSpPr>
+          <p:cNvPr id="29" name="Google Shape;29;p2"/>
+          <p:cNvSpPr/>
+          <p:nvPr/>
+        </p:nvSpPr>
+        <p:spPr>
+          <a:xfrm>
+            <a:off x="1806873" y="3136900"/>
+            <a:ext cx="2295000" cy="1879600"/>
+          </a:xfrm>
+          <a:prstGeom prst="rect">
+            <a:avLst/>
+          </a:prstGeom>
+          <a:noFill/>
+          <a:ln>
+            <a:noFill/>
+          </a:ln>
+        </p:spPr>
+        <p:txBody>
+          <a:bodyPr spcFirstLastPara="1" wrap="square" lIns="16933" tIns="16933" rIns="16933" bIns="16933" anchor="t" anchorCtr="0">
+            <a:normAutofit/>
+          </a:bodyPr>
+          <a:lstStyle/>
+          <a:p>
+            <a:pPr>
+              <a:buClr>
+                <a:srgbClr val="3FE0D0"/>
+              </a:buClr>
+              <a:buSzPts val="18000"/>
+            </a:pPr>
+            <a:r>
+              <a:rPr lang="en-US" sz="12001" b="1" dirty="0">
+                <a:solidFill>
+                  <a:srgbClr val="3FE0D0"/>
+                </a:solidFill>
+                <a:latin typeface="Montserrat"/>
+                <a:ea typeface="Montserrat"/>
+                <a:cs typeface="Montserrat"/>
+                <a:sym typeface="Montserrat"/>
+              </a:rPr>
+              <a:t>CK</a:t>
+            </a:r>
+            <a:endParaRPr sz="12001" dirty="0">
+              <a:solidFill>
+                <a:schemeClr val="dk1"/>
+              </a:solidFill>
+              <a:latin typeface="Calibri"/>
+              <a:ea typeface="Calibri"/>
+              <a:cs typeface="Calibri"/>
+              <a:sym typeface="Calibri"/>
+            </a:endParaRPr>
+          </a:p>
+        </p:txBody>
+      </p:sp>
+      <p:sp>
+        <p:nvSpPr>
+          <p:cNvPr id="30" name="Google Shape;30;p2"/>
+          <p:cNvSpPr/>
+          <p:nvPr/>
+        </p:nvSpPr>
+        <p:spPr>
+          <a:xfrm>
+            <a:off x="5715000" y="2753519"/>
+            <a:ext cx="6017260" cy="222250"/>
+          </a:xfrm>
+          <a:prstGeom prst="rect">
+            <a:avLst/>
+          </a:prstGeom>
+          <a:noFill/>
+          <a:ln>
+            <a:noFill/>
+          </a:ln>
+        </p:spPr>
+        <p:txBody>
+          <a:bodyPr spcFirstLastPara="1" wrap="square" lIns="16933" tIns="16933" rIns="16933" bIns="16933" anchor="t" anchorCtr="0">
+            <a:normAutofit/>
+          </a:bodyPr>
+          <a:lstStyle/>
+          <a:p>
+            <a:pPr>
+              <a:buClr>
+                <a:srgbClr val="F58220"/>
+              </a:buClr>
+              <a:buSzPts val="1800"/>
+            </a:pPr>
+            <a:r>
+              <a:rPr lang="en-US" sz="1200">
+                <a:solidFill>
+                  <a:srgbClr val="F58220"/>
+                </a:solidFill>
+                <a:latin typeface="JetBrains Mono"/>
+                <a:ea typeface="JetBrains Mono"/>
+                <a:cs typeface="JetBrains Mono"/>
+                <a:sym typeface="JetBrains Mono"/>
+              </a:rPr>
+              <a:t>SPEAKER</a:t>
+            </a:r>
+            <a:endParaRPr sz="1200">
+              <a:solidFill>
+                <a:schemeClr val="dk1"/>
+              </a:solidFill>
+              <a:latin typeface="Calibri"/>
+              <a:ea typeface="Calibri"/>
+              <a:cs typeface="Calibri"/>
+              <a:sym typeface="Calibri"/>
+            </a:endParaRPr>
+          </a:p>
+        </p:txBody>
+      </p:sp>
+      <p:sp>
+        <p:nvSpPr>
+          <p:cNvPr id="31" name="Google Shape;31;p2"/>
+          <p:cNvSpPr/>
+          <p:nvPr/>
+        </p:nvSpPr>
+        <p:spPr>
+          <a:xfrm>
+            <a:off x="5715000" y="3064669"/>
+            <a:ext cx="6017260" cy="635000"/>
+          </a:xfrm>
+          <a:prstGeom prst="rect">
+            <a:avLst/>
+          </a:prstGeom>
+          <a:noFill/>
+          <a:ln>
+            <a:noFill/>
+          </a:ln>
+        </p:spPr>
+        <p:txBody>
+          <a:bodyPr spcFirstLastPara="1" wrap="square" lIns="16933" tIns="16933" rIns="16933" bIns="16933" anchor="t" anchorCtr="0">
+            <a:normAutofit fontScale="92500" lnSpcReduction="20000"/>
+          </a:bodyPr>
+          <a:lstStyle/>
+          <a:p>
+            <a:pPr>
+              <a:buClr>
+                <a:srgbClr val="2A2D38"/>
+              </a:buClr>
+              <a:buSzPts val="7200"/>
+            </a:pPr>
+            <a:r>
+              <a:rPr lang="en-US" sz="4800" b="1">
+                <a:solidFill>
+                  <a:srgbClr val="2A2D38"/>
+                </a:solidFill>
+                <a:latin typeface="Montserrat"/>
+                <a:ea typeface="Montserrat"/>
+                <a:cs typeface="Montserrat"/>
+                <a:sym typeface="Montserrat"/>
+              </a:rPr>
+              <a:t>Chris Kehayias</a:t>
+            </a:r>
+            <a:endParaRPr sz="4800">
+              <a:solidFill>
+                <a:schemeClr val="dk1"/>
+              </a:solidFill>
+              <a:latin typeface="Calibri"/>
+              <a:ea typeface="Calibri"/>
+              <a:cs typeface="Calibri"/>
+              <a:sym typeface="Calibri"/>
+            </a:endParaRPr>
+          </a:p>
+        </p:txBody>
+      </p:sp>
+      <p:sp>
+        <p:nvSpPr>
+          <p:cNvPr id="32" name="Google Shape;32;p2"/>
+          <p:cNvSpPr/>
+          <p:nvPr/>
+        </p:nvSpPr>
+        <p:spPr>
+          <a:xfrm>
+            <a:off x="5722717" y="3797736"/>
+            <a:ext cx="6017260" cy="273050"/>
+          </a:xfrm>
+          <a:prstGeom prst="rect">
+            <a:avLst/>
+          </a:prstGeom>
+          <a:noFill/>
+          <a:ln>
+            <a:noFill/>
+          </a:ln>
+        </p:spPr>
+        <p:txBody>
+          <a:bodyPr spcFirstLastPara="1" wrap="square" lIns="16933" tIns="16933" rIns="16933" bIns="16933" anchor="t" anchorCtr="0">
+            <a:normAutofit/>
+          </a:bodyPr>
+          <a:lstStyle/>
+          <a:p>
+            <a:pPr>
+              <a:lnSpc>
+                <a:spcPct val="90000"/>
+              </a:lnSpc>
+              <a:buClr>
+                <a:srgbClr val="F58220"/>
+              </a:buClr>
+              <a:buSzPts val="2400"/>
+            </a:pPr>
+            <a:r>
+              <a:rPr lang="en-US" sz="1600" b="1">
+                <a:solidFill>
+                  <a:srgbClr val="F58220"/>
+                </a:solidFill>
+                <a:latin typeface="Montserrat"/>
+                <a:ea typeface="Montserrat"/>
+                <a:cs typeface="Montserrat"/>
+                <a:sym typeface="Montserrat"/>
+              </a:rPr>
+              <a:t>SVP, AI &amp; INNOVATION – ACS Technologies</a:t>
+            </a:r>
+            <a:endParaRPr sz="1600">
+              <a:solidFill>
+                <a:schemeClr val="dk1"/>
+              </a:solidFill>
+              <a:latin typeface="Calibri"/>
+              <a:ea typeface="Calibri"/>
+              <a:cs typeface="Calibri"/>
+              <a:sym typeface="Calibri"/>
+            </a:endParaRPr>
           </a:p>
         </p:txBody>
       </p:sp>

--- a/schedule/01-welcome-kickoff/01-welcome-kickoff.pptx
+++ b/schedule/01-welcome-kickoff/01-welcome-kickoff.pptx
@@ -5,7 +5,7 @@
     <p:sldMasterId id="2147483648" r:id="rId1"/>
   </p:sldMasterIdLst>
   <p:notesMasterIdLst>
-    <p:notesMasterId r:id="rId14"/>
+    <p:notesMasterId r:id="rId13"/>
   </p:notesMasterIdLst>
   <p:sldIdLst>
     <p:sldId id="267" r:id="rId2"/>
@@ -18,8 +18,7 @@
     <p:sldId id="262" r:id="rId9"/>
     <p:sldId id="268" r:id="rId10"/>
     <p:sldId id="263" r:id="rId11"/>
-    <p:sldId id="264" r:id="rId12"/>
-    <p:sldId id="265" r:id="rId13"/>
+    <p:sldId id="265" r:id="rId12"/>
   </p:sldIdLst>
   <p:sldSz cx="12192000" cy="6858000"/>
   <p:notesSz cx="6858000" cy="12192000"/>
@@ -752,7 +751,7 @@
           <a:p>
             <a:r>
               <a:rPr lang="en-US" dirty="0"/>
-              <a:t>Don't explain it deeply — that's later in the day. Just say the letters out loud once so the room's heard it. By Day 2 it should feel familiar.</a:t>
+              <a:t>Land it, smile, hand off cleanly. Don't oversell the next session — let it speak for itself. Last words: 'Let's build.'</a:t>
             </a:r>
           </a:p>
         </p:txBody>
@@ -775,93 +774,6 @@
             <a:fld id="{F7021451-1387-4CA6-816F-3879F97B5CBC}" type="slidenum">
               <a:rPr lang="en-US"/>
               <a:t>11</a:t>
-            </a:fld>
-            <a:endParaRPr lang="en-US"/>
-          </a:p>
-        </p:txBody>
-      </p:sp>
-    </p:spTree>
-    <p:extLst>
-      <p:ext uri="{BB962C8B-B14F-4D97-AF65-F5344CB8AC3E}">
-        <p14:creationId xmlns:p14="http://schemas.microsoft.com/office/powerpoint/2010/main" val="1024086991"/>
-      </p:ext>
-    </p:extLst>
-  </p:cSld>
-  <p:clrMapOvr>
-    <a:masterClrMapping/>
-  </p:clrMapOvr>
-</p:notes>
-</file>
-
-<file path=ppt/notesSlides/notesSlide12.xml><?xml version="1.0" encoding="utf-8"?>
-<p:notes xmlns:a="http://schemas.openxmlformats.org/drawingml/2006/main" xmlns:r="http://schemas.openxmlformats.org/officeDocument/2006/relationships" xmlns:p="http://schemas.openxmlformats.org/presentationml/2006/main">
-  <p:cSld>
-    <p:spTree>
-      <p:nvGrpSpPr>
-        <p:cNvPr id="1" name=""/>
-        <p:cNvGrpSpPr/>
-        <p:nvPr/>
-      </p:nvGrpSpPr>
-      <p:grpSpPr>
-        <a:xfrm>
-          <a:off x="0" y="0"/>
-          <a:ext cx="0" cy="0"/>
-          <a:chOff x="0" y="0"/>
-          <a:chExt cx="0" cy="0"/>
-        </a:xfrm>
-      </p:grpSpPr>
-      <p:sp>
-        <p:nvSpPr>
-          <p:cNvPr id="2" name="Slide Image Placeholder 1"/>
-          <p:cNvSpPr>
-            <a:spLocks noGrp="1" noRot="1" noChangeAspect="1"/>
-          </p:cNvSpPr>
-          <p:nvPr>
-            <p:ph type="sldImg"/>
-          </p:nvPr>
-        </p:nvSpPr>
-        <p:spPr/>
-      </p:sp>
-      <p:sp>
-        <p:nvSpPr>
-          <p:cNvPr id="3" name="Notes Placeholder 2"/>
-          <p:cNvSpPr>
-            <a:spLocks noGrp="1"/>
-          </p:cNvSpPr>
-          <p:nvPr>
-            <p:ph type="body" idx="1"/>
-          </p:nvPr>
-        </p:nvSpPr>
-        <p:spPr/>
-        <p:txBody>
-          <a:bodyPr/>
-          <a:lstStyle/>
-          <a:p>
-            <a:r>
-              <a:rPr lang="en-US" dirty="0"/>
-              <a:t>Land it, smile, hand off cleanly. Don't oversell the next session — let it speak for itself. Last words: 'Let's build.'</a:t>
-            </a:r>
-          </a:p>
-        </p:txBody>
-      </p:sp>
-      <p:sp>
-        <p:nvSpPr>
-          <p:cNvPr id="4" name="Slide Number Placeholder 3"/>
-          <p:cNvSpPr>
-            <a:spLocks noGrp="1"/>
-          </p:cNvSpPr>
-          <p:nvPr>
-            <p:ph type="sldNum" sz="quarter" idx="10"/>
-          </p:nvPr>
-        </p:nvSpPr>
-        <p:spPr/>
-        <p:txBody>
-          <a:bodyPr/>
-          <a:lstStyle/>
-          <a:p>
-            <a:fld id="{F7021451-1387-4CA6-816F-3879F97B5CBC}" type="slidenum">
-              <a:rPr lang="en-US"/>
-              <a:t>12</a:t>
             </a:fld>
             <a:endParaRPr lang="en-US"/>
           </a:p>
@@ -2508,45 +2420,6 @@
       </p:sp>
       <p:sp>
         <p:nvSpPr>
-          <p:cNvPr id="4" name="Text 2"/>
-          <p:cNvSpPr/>
-          <p:nvPr/>
-        </p:nvSpPr>
-        <p:spPr>
-          <a:xfrm>
-            <a:off x="548640" y="1783080"/>
-            <a:ext cx="10972800" cy="457200"/>
-          </a:xfrm>
-          <a:prstGeom prst="rect">
-            <a:avLst/>
-          </a:prstGeom>
-          <a:noFill/>
-          <a:ln/>
-        </p:spPr>
-        <p:txBody>
-          <a:bodyPr wrap="square" lIns="0" tIns="0" rIns="0" bIns="0" rtlCol="0" anchor="ctr"/>
-          <a:lstStyle/>
-          <a:p>
-            <a:pPr marL="0" indent="0">
-              <a:buNone/>
-            </a:pPr>
-            <a:r>
-              <a:rPr lang="en-US" sz="1400" i="1" dirty="0">
-                <a:solidFill>
-                  <a:srgbClr val="6B7280"/>
-                </a:solidFill>
-                <a:latin typeface="Inter" pitchFamily="34" charset="0"/>
-                <a:ea typeface="Inter" pitchFamily="34" charset="-122"/>
-                <a:cs typeface="Inter" pitchFamily="34" charset="-120"/>
-              </a:rPr>
-              <a:t>Three green checks and you're ready for Day 1. Anything red? Find Tripp or Patrick at the 10:15 break.</a:t>
-            </a:r>
-            <a:endParaRPr lang="en-US" sz="1400" dirty="0"/>
-          </a:p>
-        </p:txBody>
-      </p:sp>
-      <p:sp>
-        <p:nvSpPr>
           <p:cNvPr id="5" name="Shape 3"/>
           <p:cNvSpPr/>
           <p:nvPr/>
@@ -3242,7 +3115,7 @@
                 <a:ea typeface="Inter" pitchFamily="34" charset="-122"/>
                 <a:cs typeface="Inter" pitchFamily="34" charset="-120"/>
               </a:rPr>
-              <a:t>If any of those three are red — find them.</a:t>
+              <a:t>If any of those three are red or missing – turn your name plate vertical.</a:t>
             </a:r>
             <a:endParaRPr lang="en-US" sz="1300" dirty="0"/>
           </a:p>
@@ -3369,1290 +3242,6 @@
 </file>
 
 <file path=ppt/slides/slide11.xml><?xml version="1.0" encoding="utf-8"?>
-<p:sld xmlns:a="http://schemas.openxmlformats.org/drawingml/2006/main" xmlns:r="http://schemas.openxmlformats.org/officeDocument/2006/relationships" xmlns:p="http://schemas.openxmlformats.org/presentationml/2006/main">
-  <p:cSld name="Slide 9">
-    <p:bg>
-      <p:bgPr>
-        <a:solidFill>
-          <a:srgbClr val="0F1620"/>
-        </a:solidFill>
-        <a:effectLst/>
-      </p:bgPr>
-    </p:bg>
-    <p:spTree>
-      <p:nvGrpSpPr>
-        <p:cNvPr id="1" name=""/>
-        <p:cNvGrpSpPr/>
-        <p:nvPr/>
-      </p:nvGrpSpPr>
-      <p:grpSpPr>
-        <a:xfrm>
-          <a:off x="0" y="0"/>
-          <a:ext cx="0" cy="0"/>
-          <a:chOff x="0" y="0"/>
-          <a:chExt cx="0" cy="0"/>
-        </a:xfrm>
-      </p:grpSpPr>
-      <p:sp>
-        <p:nvSpPr>
-          <p:cNvPr id="2" name="Text 0"/>
-          <p:cNvSpPr/>
-          <p:nvPr/>
-        </p:nvSpPr>
-        <p:spPr>
-          <a:xfrm>
-            <a:off x="731520" y="548640"/>
-            <a:ext cx="5486400" cy="274320"/>
-          </a:xfrm>
-          <a:prstGeom prst="rect">
-            <a:avLst/>
-          </a:prstGeom>
-          <a:noFill/>
-          <a:ln/>
-        </p:spPr>
-        <p:txBody>
-          <a:bodyPr wrap="square" lIns="0" tIns="0" rIns="0" bIns="0" rtlCol="0" anchor="ctr"/>
-          <a:lstStyle/>
-          <a:p>
-            <a:pPr marL="0" indent="0">
-              <a:buNone/>
-            </a:pPr>
-            <a:r>
-              <a:rPr lang="en-US" sz="1000" b="1" kern="0" spc="600" dirty="0">
-                <a:solidFill>
-                  <a:srgbClr val="E89B3C"/>
-                </a:solidFill>
-                <a:latin typeface="Inter" pitchFamily="34" charset="0"/>
-                <a:ea typeface="Inter" pitchFamily="34" charset="-122"/>
-                <a:cs typeface="Inter" pitchFamily="34" charset="-120"/>
-              </a:rPr>
-              <a:t>AN ACRONYM TO REMEMBER</a:t>
-            </a:r>
-            <a:endParaRPr lang="en-US" sz="1000" dirty="0"/>
-          </a:p>
-        </p:txBody>
-      </p:sp>
-      <p:sp>
-        <p:nvSpPr>
-          <p:cNvPr id="3" name="Text 1"/>
-          <p:cNvSpPr/>
-          <p:nvPr/>
-        </p:nvSpPr>
-        <p:spPr>
-          <a:xfrm>
-            <a:off x="731520" y="868680"/>
-            <a:ext cx="10058400" cy="914400"/>
-          </a:xfrm>
-          <a:prstGeom prst="rect">
-            <a:avLst/>
-          </a:prstGeom>
-          <a:noFill/>
-          <a:ln/>
-        </p:spPr>
-        <p:txBody>
-          <a:bodyPr wrap="square" lIns="0" tIns="0" rIns="0" bIns="0" rtlCol="0" anchor="ctr"/>
-          <a:lstStyle/>
-          <a:p>
-            <a:pPr marL="0" indent="0">
-              <a:buNone/>
-            </a:pPr>
-            <a:r>
-              <a:rPr lang="en-US" sz="6000" b="1" dirty="0">
-                <a:solidFill>
-                  <a:srgbClr val="FFFFFF"/>
-                </a:solidFill>
-                <a:latin typeface="Montserrat" pitchFamily="34" charset="0"/>
-                <a:ea typeface="Montserrat" pitchFamily="34" charset="-122"/>
-                <a:cs typeface="Montserrat" pitchFamily="34" charset="-120"/>
-              </a:rPr>
-              <a:t>PRTDUD.</a:t>
-            </a:r>
-            <a:endParaRPr lang="en-US" sz="6000" dirty="0"/>
-          </a:p>
-        </p:txBody>
-      </p:sp>
-      <p:sp>
-        <p:nvSpPr>
-          <p:cNvPr id="4" name="Text 2"/>
-          <p:cNvSpPr/>
-          <p:nvPr/>
-        </p:nvSpPr>
-        <p:spPr>
-          <a:xfrm>
-            <a:off x="731520" y="1828800"/>
-            <a:ext cx="10972800" cy="457200"/>
-          </a:xfrm>
-          <a:prstGeom prst="rect">
-            <a:avLst/>
-          </a:prstGeom>
-          <a:noFill/>
-          <a:ln/>
-        </p:spPr>
-        <p:txBody>
-          <a:bodyPr wrap="square" lIns="0" tIns="0" rIns="0" bIns="0" rtlCol="0" anchor="ctr"/>
-          <a:lstStyle/>
-          <a:p>
-            <a:pPr marL="0" indent="0">
-              <a:buNone/>
-            </a:pPr>
-            <a:r>
-              <a:rPr lang="en-US" sz="1800" i="1" dirty="0">
-                <a:solidFill>
-                  <a:srgbClr val="9AA3AF"/>
-                </a:solidFill>
-                <a:latin typeface="Montserrat" pitchFamily="34" charset="0"/>
-                <a:ea typeface="Montserrat" pitchFamily="34" charset="-122"/>
-                <a:cs typeface="Montserrat" pitchFamily="34" charset="-120"/>
-              </a:rPr>
-              <a:t>The loop you'll hear all weekend. Plant it now.</a:t>
-            </a:r>
-            <a:endParaRPr lang="en-US" sz="1800" dirty="0"/>
-          </a:p>
-        </p:txBody>
-      </p:sp>
-      <p:sp>
-        <p:nvSpPr>
-          <p:cNvPr id="5" name="Shape 3"/>
-          <p:cNvSpPr/>
-          <p:nvPr/>
-        </p:nvSpPr>
-        <p:spPr>
-          <a:xfrm>
-            <a:off x="563728" y="2834640"/>
-            <a:ext cx="1653540" cy="3017520"/>
-          </a:xfrm>
-          <a:prstGeom prst="rect">
-            <a:avLst/>
-          </a:prstGeom>
-          <a:solidFill>
-            <a:srgbClr val="1B2533"/>
-          </a:solidFill>
-          <a:ln w="6350">
-            <a:solidFill>
-              <a:srgbClr val="2B3543"/>
-            </a:solidFill>
-            <a:prstDash val="solid"/>
-          </a:ln>
-        </p:spPr>
-        <p:txBody>
-          <a:bodyPr/>
-          <a:lstStyle/>
-          <a:p>
-            <a:endParaRPr lang="en-US"/>
-          </a:p>
-        </p:txBody>
-      </p:sp>
-      <p:sp>
-        <p:nvSpPr>
-          <p:cNvPr id="6" name="Shape 4"/>
-          <p:cNvSpPr/>
-          <p:nvPr/>
-        </p:nvSpPr>
-        <p:spPr>
-          <a:xfrm>
-            <a:off x="563728" y="2834640"/>
-            <a:ext cx="1653540" cy="54864"/>
-          </a:xfrm>
-          <a:prstGeom prst="rect">
-            <a:avLst/>
-          </a:prstGeom>
-          <a:solidFill>
-            <a:srgbClr val="3FB6A8"/>
-          </a:solidFill>
-          <a:ln/>
-        </p:spPr>
-        <p:txBody>
-          <a:bodyPr/>
-          <a:lstStyle/>
-          <a:p>
-            <a:endParaRPr lang="en-US"/>
-          </a:p>
-        </p:txBody>
-      </p:sp>
-      <p:sp>
-        <p:nvSpPr>
-          <p:cNvPr id="7" name="Text 5"/>
-          <p:cNvSpPr/>
-          <p:nvPr/>
-        </p:nvSpPr>
-        <p:spPr>
-          <a:xfrm>
-            <a:off x="563728" y="3200400"/>
-            <a:ext cx="1653540" cy="1280160"/>
-          </a:xfrm>
-          <a:prstGeom prst="rect">
-            <a:avLst/>
-          </a:prstGeom>
-          <a:noFill/>
-          <a:ln/>
-        </p:spPr>
-        <p:txBody>
-          <a:bodyPr wrap="square" lIns="0" tIns="0" rIns="0" bIns="0" rtlCol="0" anchor="ctr"/>
-          <a:lstStyle/>
-          <a:p>
-            <a:pPr marL="0" indent="0" algn="ctr">
-              <a:buNone/>
-            </a:pPr>
-            <a:r>
-              <a:rPr lang="en-US" sz="9000" b="1" dirty="0">
-                <a:solidFill>
-                  <a:srgbClr val="3FB6A8"/>
-                </a:solidFill>
-                <a:latin typeface="Montserrat" pitchFamily="34" charset="0"/>
-                <a:ea typeface="Montserrat" pitchFamily="34" charset="-122"/>
-                <a:cs typeface="Montserrat" pitchFamily="34" charset="-120"/>
-              </a:rPr>
-              <a:t>P</a:t>
-            </a:r>
-            <a:endParaRPr lang="en-US" sz="9000" dirty="0"/>
-          </a:p>
-        </p:txBody>
-      </p:sp>
-      <p:sp>
-        <p:nvSpPr>
-          <p:cNvPr id="8" name="Text 6"/>
-          <p:cNvSpPr/>
-          <p:nvPr/>
-        </p:nvSpPr>
-        <p:spPr>
-          <a:xfrm>
-            <a:off x="563728" y="4526280"/>
-            <a:ext cx="1653540" cy="457200"/>
-          </a:xfrm>
-          <a:prstGeom prst="rect">
-            <a:avLst/>
-          </a:prstGeom>
-          <a:noFill/>
-          <a:ln/>
-        </p:spPr>
-        <p:txBody>
-          <a:bodyPr wrap="square" lIns="0" tIns="0" rIns="0" bIns="0" rtlCol="0" anchor="ctr"/>
-          <a:lstStyle/>
-          <a:p>
-            <a:pPr marL="0" indent="0" algn="ctr">
-              <a:buNone/>
-            </a:pPr>
-            <a:r>
-              <a:rPr lang="en-US" sz="1800" b="1" dirty="0">
-                <a:solidFill>
-                  <a:srgbClr val="FFFFFF"/>
-                </a:solidFill>
-                <a:latin typeface="Montserrat" pitchFamily="34" charset="0"/>
-                <a:ea typeface="Montserrat" pitchFamily="34" charset="-122"/>
-                <a:cs typeface="Montserrat" pitchFamily="34" charset="-120"/>
-              </a:rPr>
-              <a:t>Plan</a:t>
-            </a:r>
-            <a:endParaRPr lang="en-US" sz="1800" dirty="0"/>
-          </a:p>
-        </p:txBody>
-      </p:sp>
-      <p:sp>
-        <p:nvSpPr>
-          <p:cNvPr id="9" name="Text 7"/>
-          <p:cNvSpPr/>
-          <p:nvPr/>
-        </p:nvSpPr>
-        <p:spPr>
-          <a:xfrm>
-            <a:off x="700888" y="5074920"/>
-            <a:ext cx="1379220" cy="640080"/>
-          </a:xfrm>
-          <a:prstGeom prst="rect">
-            <a:avLst/>
-          </a:prstGeom>
-          <a:noFill/>
-          <a:ln/>
-        </p:spPr>
-        <p:txBody>
-          <a:bodyPr wrap="square" lIns="0" tIns="0" rIns="0" bIns="0" rtlCol="0" anchor="ctr"/>
-          <a:lstStyle/>
-          <a:p>
-            <a:pPr marL="0" indent="0" algn="ctr">
-              <a:buNone/>
-            </a:pPr>
-            <a:r>
-              <a:rPr lang="en-US" sz="1100" dirty="0">
-                <a:solidFill>
-                  <a:srgbClr val="9AA3AF"/>
-                </a:solidFill>
-                <a:latin typeface="Inter" pitchFamily="34" charset="0"/>
-                <a:ea typeface="Inter" pitchFamily="34" charset="-122"/>
-                <a:cs typeface="Inter" pitchFamily="34" charset="-120"/>
-              </a:rPr>
-              <a:t>Spec it in writing.</a:t>
-            </a:r>
-            <a:endParaRPr lang="en-US" sz="1100" dirty="0"/>
-          </a:p>
-        </p:txBody>
-      </p:sp>
-      <p:sp>
-        <p:nvSpPr>
-          <p:cNvPr id="10" name="Shape 8"/>
-          <p:cNvSpPr/>
-          <p:nvPr/>
-        </p:nvSpPr>
-        <p:spPr>
-          <a:xfrm>
-            <a:off x="2445868" y="2834640"/>
-            <a:ext cx="1653540" cy="3017520"/>
-          </a:xfrm>
-          <a:prstGeom prst="rect">
-            <a:avLst/>
-          </a:prstGeom>
-          <a:solidFill>
-            <a:srgbClr val="1B2533"/>
-          </a:solidFill>
-          <a:ln w="6350">
-            <a:solidFill>
-              <a:srgbClr val="2B3543"/>
-            </a:solidFill>
-            <a:prstDash val="solid"/>
-          </a:ln>
-        </p:spPr>
-        <p:txBody>
-          <a:bodyPr/>
-          <a:lstStyle/>
-          <a:p>
-            <a:endParaRPr lang="en-US"/>
-          </a:p>
-        </p:txBody>
-      </p:sp>
-      <p:sp>
-        <p:nvSpPr>
-          <p:cNvPr id="11" name="Shape 9"/>
-          <p:cNvSpPr/>
-          <p:nvPr/>
-        </p:nvSpPr>
-        <p:spPr>
-          <a:xfrm>
-            <a:off x="2445868" y="2834640"/>
-            <a:ext cx="1653540" cy="54864"/>
-          </a:xfrm>
-          <a:prstGeom prst="rect">
-            <a:avLst/>
-          </a:prstGeom>
-          <a:solidFill>
-            <a:srgbClr val="E89B3C"/>
-          </a:solidFill>
-          <a:ln/>
-        </p:spPr>
-        <p:txBody>
-          <a:bodyPr/>
-          <a:lstStyle/>
-          <a:p>
-            <a:endParaRPr lang="en-US"/>
-          </a:p>
-        </p:txBody>
-      </p:sp>
-      <p:sp>
-        <p:nvSpPr>
-          <p:cNvPr id="12" name="Text 10"/>
-          <p:cNvSpPr/>
-          <p:nvPr/>
-        </p:nvSpPr>
-        <p:spPr>
-          <a:xfrm>
-            <a:off x="2445868" y="3200400"/>
-            <a:ext cx="1653540" cy="1280160"/>
-          </a:xfrm>
-          <a:prstGeom prst="rect">
-            <a:avLst/>
-          </a:prstGeom>
-          <a:noFill/>
-          <a:ln/>
-        </p:spPr>
-        <p:txBody>
-          <a:bodyPr wrap="square" lIns="0" tIns="0" rIns="0" bIns="0" rtlCol="0" anchor="ctr"/>
-          <a:lstStyle/>
-          <a:p>
-            <a:pPr marL="0" indent="0" algn="ctr">
-              <a:buNone/>
-            </a:pPr>
-            <a:r>
-              <a:rPr lang="en-US" sz="9000" b="1" dirty="0">
-                <a:solidFill>
-                  <a:srgbClr val="E89B3C"/>
-                </a:solidFill>
-                <a:latin typeface="Montserrat" pitchFamily="34" charset="0"/>
-                <a:ea typeface="Montserrat" pitchFamily="34" charset="-122"/>
-                <a:cs typeface="Montserrat" pitchFamily="34" charset="-120"/>
-              </a:rPr>
-              <a:t>R</a:t>
-            </a:r>
-            <a:endParaRPr lang="en-US" sz="9000" dirty="0"/>
-          </a:p>
-        </p:txBody>
-      </p:sp>
-      <p:sp>
-        <p:nvSpPr>
-          <p:cNvPr id="13" name="Text 11"/>
-          <p:cNvSpPr/>
-          <p:nvPr/>
-        </p:nvSpPr>
-        <p:spPr>
-          <a:xfrm>
-            <a:off x="2445868" y="4526280"/>
-            <a:ext cx="1653540" cy="457200"/>
-          </a:xfrm>
-          <a:prstGeom prst="rect">
-            <a:avLst/>
-          </a:prstGeom>
-          <a:noFill/>
-          <a:ln/>
-        </p:spPr>
-        <p:txBody>
-          <a:bodyPr wrap="square" lIns="0" tIns="0" rIns="0" bIns="0" rtlCol="0" anchor="ctr"/>
-          <a:lstStyle/>
-          <a:p>
-            <a:pPr marL="0" indent="0" algn="ctr">
-              <a:buNone/>
-            </a:pPr>
-            <a:r>
-              <a:rPr lang="en-US" sz="1800" b="1" dirty="0">
-                <a:solidFill>
-                  <a:srgbClr val="FFFFFF"/>
-                </a:solidFill>
-                <a:latin typeface="Montserrat" pitchFamily="34" charset="0"/>
-                <a:ea typeface="Montserrat" pitchFamily="34" charset="-122"/>
-                <a:cs typeface="Montserrat" pitchFamily="34" charset="-120"/>
-              </a:rPr>
-              <a:t>Review</a:t>
-            </a:r>
-            <a:endParaRPr lang="en-US" sz="1800" dirty="0"/>
-          </a:p>
-        </p:txBody>
-      </p:sp>
-      <p:sp>
-        <p:nvSpPr>
-          <p:cNvPr id="14" name="Text 12"/>
-          <p:cNvSpPr/>
-          <p:nvPr/>
-        </p:nvSpPr>
-        <p:spPr>
-          <a:xfrm>
-            <a:off x="2583028" y="5074920"/>
-            <a:ext cx="1379220" cy="640080"/>
-          </a:xfrm>
-          <a:prstGeom prst="rect">
-            <a:avLst/>
-          </a:prstGeom>
-          <a:noFill/>
-          <a:ln/>
-        </p:spPr>
-        <p:txBody>
-          <a:bodyPr wrap="square" lIns="0" tIns="0" rIns="0" bIns="0" rtlCol="0" anchor="ctr"/>
-          <a:lstStyle/>
-          <a:p>
-            <a:pPr marL="0" indent="0" algn="ctr">
-              <a:buNone/>
-            </a:pPr>
-            <a:r>
-              <a:rPr lang="en-US" sz="1100" dirty="0">
-                <a:solidFill>
-                  <a:srgbClr val="9AA3AF"/>
-                </a:solidFill>
-                <a:latin typeface="Inter" pitchFamily="34" charset="0"/>
-                <a:ea typeface="Inter" pitchFamily="34" charset="-122"/>
-                <a:cs typeface="Inter" pitchFamily="34" charset="-120"/>
-              </a:rPr>
-              <a:t>Read before you run.</a:t>
-            </a:r>
-            <a:endParaRPr lang="en-US" sz="1100" dirty="0"/>
-          </a:p>
-        </p:txBody>
-      </p:sp>
-      <p:sp>
-        <p:nvSpPr>
-          <p:cNvPr id="15" name="Shape 13"/>
-          <p:cNvSpPr/>
-          <p:nvPr/>
-        </p:nvSpPr>
-        <p:spPr>
-          <a:xfrm>
-            <a:off x="4328008" y="2834640"/>
-            <a:ext cx="1653540" cy="3017520"/>
-          </a:xfrm>
-          <a:prstGeom prst="rect">
-            <a:avLst/>
-          </a:prstGeom>
-          <a:solidFill>
-            <a:srgbClr val="1B2533"/>
-          </a:solidFill>
-          <a:ln w="6350">
-            <a:solidFill>
-              <a:srgbClr val="2B3543"/>
-            </a:solidFill>
-            <a:prstDash val="solid"/>
-          </a:ln>
-        </p:spPr>
-        <p:txBody>
-          <a:bodyPr/>
-          <a:lstStyle/>
-          <a:p>
-            <a:endParaRPr lang="en-US"/>
-          </a:p>
-        </p:txBody>
-      </p:sp>
-      <p:sp>
-        <p:nvSpPr>
-          <p:cNvPr id="16" name="Shape 14"/>
-          <p:cNvSpPr/>
-          <p:nvPr/>
-        </p:nvSpPr>
-        <p:spPr>
-          <a:xfrm>
-            <a:off x="4328008" y="2834640"/>
-            <a:ext cx="1653540" cy="54864"/>
-          </a:xfrm>
-          <a:prstGeom prst="rect">
-            <a:avLst/>
-          </a:prstGeom>
-          <a:solidFill>
-            <a:srgbClr val="3FB6A8"/>
-          </a:solidFill>
-          <a:ln/>
-        </p:spPr>
-        <p:txBody>
-          <a:bodyPr/>
-          <a:lstStyle/>
-          <a:p>
-            <a:endParaRPr lang="en-US"/>
-          </a:p>
-        </p:txBody>
-      </p:sp>
-      <p:sp>
-        <p:nvSpPr>
-          <p:cNvPr id="17" name="Text 15"/>
-          <p:cNvSpPr/>
-          <p:nvPr/>
-        </p:nvSpPr>
-        <p:spPr>
-          <a:xfrm>
-            <a:off x="4328008" y="3200400"/>
-            <a:ext cx="1653540" cy="1280160"/>
-          </a:xfrm>
-          <a:prstGeom prst="rect">
-            <a:avLst/>
-          </a:prstGeom>
-          <a:noFill/>
-          <a:ln/>
-        </p:spPr>
-        <p:txBody>
-          <a:bodyPr wrap="square" lIns="0" tIns="0" rIns="0" bIns="0" rtlCol="0" anchor="ctr"/>
-          <a:lstStyle/>
-          <a:p>
-            <a:pPr marL="0" indent="0" algn="ctr">
-              <a:buNone/>
-            </a:pPr>
-            <a:r>
-              <a:rPr lang="en-US" sz="9000" b="1" dirty="0">
-                <a:solidFill>
-                  <a:srgbClr val="3FB6A8"/>
-                </a:solidFill>
-                <a:latin typeface="Montserrat" pitchFamily="34" charset="0"/>
-                <a:ea typeface="Montserrat" pitchFamily="34" charset="-122"/>
-                <a:cs typeface="Montserrat" pitchFamily="34" charset="-120"/>
-              </a:rPr>
-              <a:t>T</a:t>
-            </a:r>
-            <a:endParaRPr lang="en-US" sz="9000" dirty="0"/>
-          </a:p>
-        </p:txBody>
-      </p:sp>
-      <p:sp>
-        <p:nvSpPr>
-          <p:cNvPr id="18" name="Text 16"/>
-          <p:cNvSpPr/>
-          <p:nvPr/>
-        </p:nvSpPr>
-        <p:spPr>
-          <a:xfrm>
-            <a:off x="4328008" y="4526280"/>
-            <a:ext cx="1653540" cy="457200"/>
-          </a:xfrm>
-          <a:prstGeom prst="rect">
-            <a:avLst/>
-          </a:prstGeom>
-          <a:noFill/>
-          <a:ln/>
-        </p:spPr>
-        <p:txBody>
-          <a:bodyPr wrap="square" lIns="0" tIns="0" rIns="0" bIns="0" rtlCol="0" anchor="ctr"/>
-          <a:lstStyle/>
-          <a:p>
-            <a:pPr marL="0" indent="0" algn="ctr">
-              <a:buNone/>
-            </a:pPr>
-            <a:r>
-              <a:rPr lang="en-US" sz="1800" b="1" dirty="0">
-                <a:solidFill>
-                  <a:srgbClr val="FFFFFF"/>
-                </a:solidFill>
-                <a:latin typeface="Montserrat" pitchFamily="34" charset="0"/>
-                <a:ea typeface="Montserrat" pitchFamily="34" charset="-122"/>
-                <a:cs typeface="Montserrat" pitchFamily="34" charset="-120"/>
-              </a:rPr>
-              <a:t>Test</a:t>
-            </a:r>
-            <a:endParaRPr lang="en-US" sz="1800" dirty="0"/>
-          </a:p>
-        </p:txBody>
-      </p:sp>
-      <p:sp>
-        <p:nvSpPr>
-          <p:cNvPr id="19" name="Text 17"/>
-          <p:cNvSpPr/>
-          <p:nvPr/>
-        </p:nvSpPr>
-        <p:spPr>
-          <a:xfrm>
-            <a:off x="4465168" y="5074920"/>
-            <a:ext cx="1379220" cy="640080"/>
-          </a:xfrm>
-          <a:prstGeom prst="rect">
-            <a:avLst/>
-          </a:prstGeom>
-          <a:noFill/>
-          <a:ln/>
-        </p:spPr>
-        <p:txBody>
-          <a:bodyPr wrap="square" lIns="0" tIns="0" rIns="0" bIns="0" rtlCol="0" anchor="ctr"/>
-          <a:lstStyle/>
-          <a:p>
-            <a:pPr marL="0" indent="0" algn="ctr">
-              <a:buNone/>
-            </a:pPr>
-            <a:r>
-              <a:rPr lang="en-US" sz="1100" dirty="0">
-                <a:solidFill>
-                  <a:srgbClr val="9AA3AF"/>
-                </a:solidFill>
-                <a:latin typeface="Inter" pitchFamily="34" charset="0"/>
-                <a:ea typeface="Inter" pitchFamily="34" charset="-122"/>
-                <a:cs typeface="Inter" pitchFamily="34" charset="-120"/>
-              </a:rPr>
-              <a:t>Prove it works.</a:t>
-            </a:r>
-            <a:endParaRPr lang="en-US" sz="1100" dirty="0"/>
-          </a:p>
-        </p:txBody>
-      </p:sp>
-      <p:sp>
-        <p:nvSpPr>
-          <p:cNvPr id="20" name="Shape 18"/>
-          <p:cNvSpPr/>
-          <p:nvPr/>
-        </p:nvSpPr>
-        <p:spPr>
-          <a:xfrm>
-            <a:off x="6210148" y="2834640"/>
-            <a:ext cx="1653540" cy="3017520"/>
-          </a:xfrm>
-          <a:prstGeom prst="rect">
-            <a:avLst/>
-          </a:prstGeom>
-          <a:solidFill>
-            <a:srgbClr val="1B2533"/>
-          </a:solidFill>
-          <a:ln w="6350">
-            <a:solidFill>
-              <a:srgbClr val="2B3543"/>
-            </a:solidFill>
-            <a:prstDash val="solid"/>
-          </a:ln>
-        </p:spPr>
-        <p:txBody>
-          <a:bodyPr/>
-          <a:lstStyle/>
-          <a:p>
-            <a:endParaRPr lang="en-US"/>
-          </a:p>
-        </p:txBody>
-      </p:sp>
-      <p:sp>
-        <p:nvSpPr>
-          <p:cNvPr id="21" name="Shape 19"/>
-          <p:cNvSpPr/>
-          <p:nvPr/>
-        </p:nvSpPr>
-        <p:spPr>
-          <a:xfrm>
-            <a:off x="6210148" y="2834640"/>
-            <a:ext cx="1653540" cy="54864"/>
-          </a:xfrm>
-          <a:prstGeom prst="rect">
-            <a:avLst/>
-          </a:prstGeom>
-          <a:solidFill>
-            <a:srgbClr val="E89B3C"/>
-          </a:solidFill>
-          <a:ln/>
-        </p:spPr>
-        <p:txBody>
-          <a:bodyPr/>
-          <a:lstStyle/>
-          <a:p>
-            <a:endParaRPr lang="en-US"/>
-          </a:p>
-        </p:txBody>
-      </p:sp>
-      <p:sp>
-        <p:nvSpPr>
-          <p:cNvPr id="22" name="Text 20"/>
-          <p:cNvSpPr/>
-          <p:nvPr/>
-        </p:nvSpPr>
-        <p:spPr>
-          <a:xfrm>
-            <a:off x="6210148" y="3200400"/>
-            <a:ext cx="1653540" cy="1280160"/>
-          </a:xfrm>
-          <a:prstGeom prst="rect">
-            <a:avLst/>
-          </a:prstGeom>
-          <a:noFill/>
-          <a:ln/>
-        </p:spPr>
-        <p:txBody>
-          <a:bodyPr wrap="square" lIns="0" tIns="0" rIns="0" bIns="0" rtlCol="0" anchor="ctr"/>
-          <a:lstStyle/>
-          <a:p>
-            <a:pPr marL="0" indent="0" algn="ctr">
-              <a:buNone/>
-            </a:pPr>
-            <a:r>
-              <a:rPr lang="en-US" sz="9000" b="1" dirty="0">
-                <a:solidFill>
-                  <a:srgbClr val="E89B3C"/>
-                </a:solidFill>
-                <a:latin typeface="Montserrat" pitchFamily="34" charset="0"/>
-                <a:ea typeface="Montserrat" pitchFamily="34" charset="-122"/>
-                <a:cs typeface="Montserrat" pitchFamily="34" charset="-120"/>
-              </a:rPr>
-              <a:t>D</a:t>
-            </a:r>
-            <a:endParaRPr lang="en-US" sz="9000" dirty="0"/>
-          </a:p>
-        </p:txBody>
-      </p:sp>
-      <p:sp>
-        <p:nvSpPr>
-          <p:cNvPr id="23" name="Text 21"/>
-          <p:cNvSpPr/>
-          <p:nvPr/>
-        </p:nvSpPr>
-        <p:spPr>
-          <a:xfrm>
-            <a:off x="6210148" y="4526280"/>
-            <a:ext cx="1653540" cy="457200"/>
-          </a:xfrm>
-          <a:prstGeom prst="rect">
-            <a:avLst/>
-          </a:prstGeom>
-          <a:noFill/>
-          <a:ln/>
-        </p:spPr>
-        <p:txBody>
-          <a:bodyPr wrap="square" lIns="0" tIns="0" rIns="0" bIns="0" rtlCol="0" anchor="ctr"/>
-          <a:lstStyle/>
-          <a:p>
-            <a:pPr marL="0" indent="0" algn="ctr">
-              <a:buNone/>
-            </a:pPr>
-            <a:r>
-              <a:rPr lang="en-US" sz="1800" b="1" dirty="0">
-                <a:solidFill>
-                  <a:srgbClr val="FFFFFF"/>
-                </a:solidFill>
-                <a:latin typeface="Montserrat" pitchFamily="34" charset="0"/>
-                <a:ea typeface="Montserrat" pitchFamily="34" charset="-122"/>
-                <a:cs typeface="Montserrat" pitchFamily="34" charset="-120"/>
-              </a:rPr>
-              <a:t>Debug</a:t>
-            </a:r>
-            <a:endParaRPr lang="en-US" sz="1800" dirty="0"/>
-          </a:p>
-        </p:txBody>
-      </p:sp>
-      <p:sp>
-        <p:nvSpPr>
-          <p:cNvPr id="24" name="Text 22"/>
-          <p:cNvSpPr/>
-          <p:nvPr/>
-        </p:nvSpPr>
-        <p:spPr>
-          <a:xfrm>
-            <a:off x="6347308" y="5074920"/>
-            <a:ext cx="1379220" cy="640080"/>
-          </a:xfrm>
-          <a:prstGeom prst="rect">
-            <a:avLst/>
-          </a:prstGeom>
-          <a:noFill/>
-          <a:ln/>
-        </p:spPr>
-        <p:txBody>
-          <a:bodyPr wrap="square" lIns="0" tIns="0" rIns="0" bIns="0" rtlCol="0" anchor="ctr"/>
-          <a:lstStyle/>
-          <a:p>
-            <a:pPr marL="0" indent="0" algn="ctr">
-              <a:buNone/>
-            </a:pPr>
-            <a:r>
-              <a:rPr lang="en-US" sz="1100" dirty="0">
-                <a:solidFill>
-                  <a:srgbClr val="9AA3AF"/>
-                </a:solidFill>
-                <a:latin typeface="Inter" pitchFamily="34" charset="0"/>
-                <a:ea typeface="Inter" pitchFamily="34" charset="-122"/>
-                <a:cs typeface="Inter" pitchFamily="34" charset="-120"/>
-              </a:rPr>
-              <a:t>Hunt the why.</a:t>
-            </a:r>
-            <a:endParaRPr lang="en-US" sz="1100" dirty="0"/>
-          </a:p>
-        </p:txBody>
-      </p:sp>
-      <p:sp>
-        <p:nvSpPr>
-          <p:cNvPr id="25" name="Shape 23"/>
-          <p:cNvSpPr/>
-          <p:nvPr/>
-        </p:nvSpPr>
-        <p:spPr>
-          <a:xfrm>
-            <a:off x="8092288" y="2834640"/>
-            <a:ext cx="1653540" cy="3017520"/>
-          </a:xfrm>
-          <a:prstGeom prst="rect">
-            <a:avLst/>
-          </a:prstGeom>
-          <a:solidFill>
-            <a:srgbClr val="1B2533"/>
-          </a:solidFill>
-          <a:ln w="6350">
-            <a:solidFill>
-              <a:srgbClr val="2B3543"/>
-            </a:solidFill>
-            <a:prstDash val="solid"/>
-          </a:ln>
-        </p:spPr>
-        <p:txBody>
-          <a:bodyPr/>
-          <a:lstStyle/>
-          <a:p>
-            <a:endParaRPr lang="en-US"/>
-          </a:p>
-        </p:txBody>
-      </p:sp>
-      <p:sp>
-        <p:nvSpPr>
-          <p:cNvPr id="26" name="Shape 24"/>
-          <p:cNvSpPr/>
-          <p:nvPr/>
-        </p:nvSpPr>
-        <p:spPr>
-          <a:xfrm>
-            <a:off x="8092288" y="2834640"/>
-            <a:ext cx="1653540" cy="54864"/>
-          </a:xfrm>
-          <a:prstGeom prst="rect">
-            <a:avLst/>
-          </a:prstGeom>
-          <a:solidFill>
-            <a:srgbClr val="3FB6A8"/>
-          </a:solidFill>
-          <a:ln/>
-        </p:spPr>
-        <p:txBody>
-          <a:bodyPr/>
-          <a:lstStyle/>
-          <a:p>
-            <a:endParaRPr lang="en-US"/>
-          </a:p>
-        </p:txBody>
-      </p:sp>
-      <p:sp>
-        <p:nvSpPr>
-          <p:cNvPr id="27" name="Text 25"/>
-          <p:cNvSpPr/>
-          <p:nvPr/>
-        </p:nvSpPr>
-        <p:spPr>
-          <a:xfrm>
-            <a:off x="8092288" y="3200400"/>
-            <a:ext cx="1653540" cy="1280160"/>
-          </a:xfrm>
-          <a:prstGeom prst="rect">
-            <a:avLst/>
-          </a:prstGeom>
-          <a:noFill/>
-          <a:ln/>
-        </p:spPr>
-        <p:txBody>
-          <a:bodyPr wrap="square" lIns="0" tIns="0" rIns="0" bIns="0" rtlCol="0" anchor="ctr"/>
-          <a:lstStyle/>
-          <a:p>
-            <a:pPr marL="0" indent="0" algn="ctr">
-              <a:buNone/>
-            </a:pPr>
-            <a:r>
-              <a:rPr lang="en-US" sz="9000" b="1" dirty="0">
-                <a:solidFill>
-                  <a:srgbClr val="3FB6A8"/>
-                </a:solidFill>
-                <a:latin typeface="Montserrat" pitchFamily="34" charset="0"/>
-                <a:ea typeface="Montserrat" pitchFamily="34" charset="-122"/>
-                <a:cs typeface="Montserrat" pitchFamily="34" charset="-120"/>
-              </a:rPr>
-              <a:t>U</a:t>
-            </a:r>
-            <a:endParaRPr lang="en-US" sz="9000" dirty="0"/>
-          </a:p>
-        </p:txBody>
-      </p:sp>
-      <p:sp>
-        <p:nvSpPr>
-          <p:cNvPr id="28" name="Text 26"/>
-          <p:cNvSpPr/>
-          <p:nvPr/>
-        </p:nvSpPr>
-        <p:spPr>
-          <a:xfrm>
-            <a:off x="8092288" y="4526280"/>
-            <a:ext cx="1653540" cy="457200"/>
-          </a:xfrm>
-          <a:prstGeom prst="rect">
-            <a:avLst/>
-          </a:prstGeom>
-          <a:noFill/>
-          <a:ln/>
-        </p:spPr>
-        <p:txBody>
-          <a:bodyPr wrap="square" lIns="0" tIns="0" rIns="0" bIns="0" rtlCol="0" anchor="ctr"/>
-          <a:lstStyle/>
-          <a:p>
-            <a:pPr marL="0" indent="0" algn="ctr">
-              <a:buNone/>
-            </a:pPr>
-            <a:r>
-              <a:rPr lang="en-US" sz="1800" b="1" dirty="0">
-                <a:solidFill>
-                  <a:srgbClr val="FFFFFF"/>
-                </a:solidFill>
-                <a:latin typeface="Montserrat" pitchFamily="34" charset="0"/>
-                <a:ea typeface="Montserrat" pitchFamily="34" charset="-122"/>
-                <a:cs typeface="Montserrat" pitchFamily="34" charset="-120"/>
-              </a:rPr>
-              <a:t>Update</a:t>
-            </a:r>
-            <a:endParaRPr lang="en-US" sz="1800" dirty="0"/>
-          </a:p>
-        </p:txBody>
-      </p:sp>
-      <p:sp>
-        <p:nvSpPr>
-          <p:cNvPr id="29" name="Text 27"/>
-          <p:cNvSpPr/>
-          <p:nvPr/>
-        </p:nvSpPr>
-        <p:spPr>
-          <a:xfrm>
-            <a:off x="8229448" y="5074920"/>
-            <a:ext cx="1379220" cy="640080"/>
-          </a:xfrm>
-          <a:prstGeom prst="rect">
-            <a:avLst/>
-          </a:prstGeom>
-          <a:noFill/>
-          <a:ln/>
-        </p:spPr>
-        <p:txBody>
-          <a:bodyPr wrap="square" lIns="0" tIns="0" rIns="0" bIns="0" rtlCol="0" anchor="ctr"/>
-          <a:lstStyle/>
-          <a:p>
-            <a:pPr marL="0" indent="0" algn="ctr">
-              <a:buNone/>
-            </a:pPr>
-            <a:r>
-              <a:rPr lang="en-US" sz="1100" dirty="0">
-                <a:solidFill>
-                  <a:srgbClr val="9AA3AF"/>
-                </a:solidFill>
-                <a:latin typeface="Inter" pitchFamily="34" charset="0"/>
-                <a:ea typeface="Inter" pitchFamily="34" charset="-122"/>
-                <a:cs typeface="Inter" pitchFamily="34" charset="-120"/>
-              </a:rPr>
-              <a:t>Edit the context.</a:t>
-            </a:r>
-            <a:endParaRPr lang="en-US" sz="1100" dirty="0"/>
-          </a:p>
-        </p:txBody>
-      </p:sp>
-      <p:sp>
-        <p:nvSpPr>
-          <p:cNvPr id="30" name="Shape 28"/>
-          <p:cNvSpPr/>
-          <p:nvPr/>
-        </p:nvSpPr>
-        <p:spPr>
-          <a:xfrm>
-            <a:off x="9974428" y="2834640"/>
-            <a:ext cx="1653540" cy="3017520"/>
-          </a:xfrm>
-          <a:prstGeom prst="rect">
-            <a:avLst/>
-          </a:prstGeom>
-          <a:solidFill>
-            <a:srgbClr val="1B2533"/>
-          </a:solidFill>
-          <a:ln w="6350">
-            <a:solidFill>
-              <a:srgbClr val="2B3543"/>
-            </a:solidFill>
-            <a:prstDash val="solid"/>
-          </a:ln>
-        </p:spPr>
-        <p:txBody>
-          <a:bodyPr/>
-          <a:lstStyle/>
-          <a:p>
-            <a:endParaRPr lang="en-US"/>
-          </a:p>
-        </p:txBody>
-      </p:sp>
-      <p:sp>
-        <p:nvSpPr>
-          <p:cNvPr id="31" name="Shape 29"/>
-          <p:cNvSpPr/>
-          <p:nvPr/>
-        </p:nvSpPr>
-        <p:spPr>
-          <a:xfrm>
-            <a:off x="9974428" y="2834640"/>
-            <a:ext cx="1653540" cy="54864"/>
-          </a:xfrm>
-          <a:prstGeom prst="rect">
-            <a:avLst/>
-          </a:prstGeom>
-          <a:solidFill>
-            <a:srgbClr val="E89B3C"/>
-          </a:solidFill>
-          <a:ln/>
-        </p:spPr>
-        <p:txBody>
-          <a:bodyPr/>
-          <a:lstStyle/>
-          <a:p>
-            <a:endParaRPr lang="en-US"/>
-          </a:p>
-        </p:txBody>
-      </p:sp>
-      <p:sp>
-        <p:nvSpPr>
-          <p:cNvPr id="32" name="Text 30"/>
-          <p:cNvSpPr/>
-          <p:nvPr/>
-        </p:nvSpPr>
-        <p:spPr>
-          <a:xfrm>
-            <a:off x="9974428" y="3200400"/>
-            <a:ext cx="1653540" cy="1280160"/>
-          </a:xfrm>
-          <a:prstGeom prst="rect">
-            <a:avLst/>
-          </a:prstGeom>
-          <a:noFill/>
-          <a:ln/>
-        </p:spPr>
-        <p:txBody>
-          <a:bodyPr wrap="square" lIns="0" tIns="0" rIns="0" bIns="0" rtlCol="0" anchor="ctr"/>
-          <a:lstStyle/>
-          <a:p>
-            <a:pPr marL="0" indent="0" algn="ctr">
-              <a:buNone/>
-            </a:pPr>
-            <a:r>
-              <a:rPr lang="en-US" sz="9000" b="1" dirty="0">
-                <a:solidFill>
-                  <a:srgbClr val="E89B3C"/>
-                </a:solidFill>
-                <a:latin typeface="Montserrat" pitchFamily="34" charset="0"/>
-                <a:ea typeface="Montserrat" pitchFamily="34" charset="-122"/>
-                <a:cs typeface="Montserrat" pitchFamily="34" charset="-120"/>
-              </a:rPr>
-              <a:t>D</a:t>
-            </a:r>
-            <a:endParaRPr lang="en-US" sz="9000" dirty="0"/>
-          </a:p>
-        </p:txBody>
-      </p:sp>
-      <p:sp>
-        <p:nvSpPr>
-          <p:cNvPr id="33" name="Text 31"/>
-          <p:cNvSpPr/>
-          <p:nvPr/>
-        </p:nvSpPr>
-        <p:spPr>
-          <a:xfrm>
-            <a:off x="9974428" y="4526280"/>
-            <a:ext cx="1653540" cy="457200"/>
-          </a:xfrm>
-          <a:prstGeom prst="rect">
-            <a:avLst/>
-          </a:prstGeom>
-          <a:noFill/>
-          <a:ln/>
-        </p:spPr>
-        <p:txBody>
-          <a:bodyPr wrap="square" lIns="0" tIns="0" rIns="0" bIns="0" rtlCol="0" anchor="ctr"/>
-          <a:lstStyle/>
-          <a:p>
-            <a:pPr marL="0" indent="0" algn="ctr">
-              <a:buNone/>
-            </a:pPr>
-            <a:r>
-              <a:rPr lang="en-US" sz="1800" b="1" dirty="0">
-                <a:solidFill>
-                  <a:srgbClr val="FFFFFF"/>
-                </a:solidFill>
-                <a:latin typeface="Montserrat" pitchFamily="34" charset="0"/>
-                <a:ea typeface="Montserrat" pitchFamily="34" charset="-122"/>
-                <a:cs typeface="Montserrat" pitchFamily="34" charset="-120"/>
-              </a:rPr>
-              <a:t>Deploy</a:t>
-            </a:r>
-            <a:endParaRPr lang="en-US" sz="1800" dirty="0"/>
-          </a:p>
-        </p:txBody>
-      </p:sp>
-      <p:sp>
-        <p:nvSpPr>
-          <p:cNvPr id="34" name="Text 32"/>
-          <p:cNvSpPr/>
-          <p:nvPr/>
-        </p:nvSpPr>
-        <p:spPr>
-          <a:xfrm>
-            <a:off x="10111588" y="5074920"/>
-            <a:ext cx="1379220" cy="640080"/>
-          </a:xfrm>
-          <a:prstGeom prst="rect">
-            <a:avLst/>
-          </a:prstGeom>
-          <a:noFill/>
-          <a:ln/>
-        </p:spPr>
-        <p:txBody>
-          <a:bodyPr wrap="square" lIns="0" tIns="0" rIns="0" bIns="0" rtlCol="0" anchor="ctr"/>
-          <a:lstStyle/>
-          <a:p>
-            <a:pPr marL="0" indent="0" algn="ctr">
-              <a:buNone/>
-            </a:pPr>
-            <a:r>
-              <a:rPr lang="en-US" sz="1100" dirty="0">
-                <a:solidFill>
-                  <a:srgbClr val="9AA3AF"/>
-                </a:solidFill>
-                <a:latin typeface="Inter" pitchFamily="34" charset="0"/>
-                <a:ea typeface="Inter" pitchFamily="34" charset="-122"/>
-                <a:cs typeface="Inter" pitchFamily="34" charset="-120"/>
-              </a:rPr>
-              <a:t>Ship it live.</a:t>
-            </a:r>
-            <a:endParaRPr lang="en-US" sz="1100" dirty="0"/>
-          </a:p>
-        </p:txBody>
-      </p:sp>
-      <p:sp>
-        <p:nvSpPr>
-          <p:cNvPr id="35" name="Text 33"/>
-          <p:cNvSpPr/>
-          <p:nvPr/>
-        </p:nvSpPr>
-        <p:spPr>
-          <a:xfrm>
-            <a:off x="457200" y="6446520"/>
-            <a:ext cx="7315200" cy="274320"/>
-          </a:xfrm>
-          <a:prstGeom prst="rect">
-            <a:avLst/>
-          </a:prstGeom>
-          <a:noFill/>
-          <a:ln/>
-        </p:spPr>
-        <p:txBody>
-          <a:bodyPr wrap="square" lIns="0" tIns="0" rIns="0" bIns="0" rtlCol="0" anchor="ctr"/>
-          <a:lstStyle/>
-          <a:p>
-            <a:pPr marL="0" indent="0">
-              <a:buNone/>
-            </a:pPr>
-            <a:r>
-              <a:rPr lang="en-US" sz="900" kern="0" spc="300" dirty="0">
-                <a:solidFill>
-                  <a:srgbClr val="9AA3AF"/>
-                </a:solidFill>
-                <a:latin typeface="Inter" pitchFamily="34" charset="0"/>
-                <a:ea typeface="Inter" pitchFamily="34" charset="-122"/>
-                <a:cs typeface="Inter" pitchFamily="34" charset="-120"/>
-              </a:rPr>
-              <a:t>01 · WELCOME &amp; KICKOFF</a:t>
-            </a:r>
-            <a:endParaRPr lang="en-US" sz="900" dirty="0"/>
-          </a:p>
-        </p:txBody>
-      </p:sp>
-      <p:sp>
-        <p:nvSpPr>
-          <p:cNvPr id="36" name="Text 34"/>
-          <p:cNvSpPr/>
-          <p:nvPr/>
-        </p:nvSpPr>
-        <p:spPr>
-          <a:xfrm>
-            <a:off x="8076895" y="6446520"/>
-            <a:ext cx="3657600" cy="274320"/>
-          </a:xfrm>
-          <a:prstGeom prst="rect">
-            <a:avLst/>
-          </a:prstGeom>
-          <a:noFill/>
-          <a:ln/>
-        </p:spPr>
-        <p:txBody>
-          <a:bodyPr wrap="square" lIns="0" tIns="0" rIns="0" bIns="0" rtlCol="0" anchor="ctr"/>
-          <a:lstStyle/>
-          <a:p>
-            <a:pPr marL="0" indent="0" algn="r">
-              <a:buNone/>
-            </a:pPr>
-            <a:r>
-              <a:rPr lang="en-US" sz="900" kern="0" spc="300" dirty="0">
-                <a:solidFill>
-                  <a:srgbClr val="9AA3AF"/>
-                </a:solidFill>
-                <a:latin typeface="Inter" pitchFamily="34" charset="0"/>
-                <a:ea typeface="Inter" pitchFamily="34" charset="-122"/>
-                <a:cs typeface="Inter" pitchFamily="34" charset="-120"/>
-              </a:rPr>
-              <a:t>ECHOES ALL WEEKEND</a:t>
-            </a:r>
-            <a:endParaRPr lang="en-US" sz="900" dirty="0"/>
-          </a:p>
-        </p:txBody>
-      </p:sp>
-    </p:spTree>
-  </p:cSld>
-  <p:clrMapOvr>
-    <a:masterClrMapping/>
-  </p:clrMapOvr>
-</p:sld>
-</file>
-
-<file path=ppt/slides/slide12.xml><?xml version="1.0" encoding="utf-8"?>
 <p:sld xmlns:a="http://schemas.openxmlformats.org/drawingml/2006/main" xmlns:r="http://schemas.openxmlformats.org/officeDocument/2006/relationships" xmlns:p="http://schemas.openxmlformats.org/presentationml/2006/main">
   <p:cSld name="Slide 10">
     <p:bg>
@@ -8198,7 +6787,7 @@
                 <a:ea typeface="Inter" pitchFamily="34" charset="-122"/>
                 <a:cs typeface="Inter" pitchFamily="34" charset="-120"/>
               </a:rPr>
-              <a:t>PRTDUD workflow overview</a:t>
+              <a:t>Context Engineering Workflow Overview</a:t>
             </a:r>
             <a:endParaRPr lang="en-US" sz="1200" dirty="0"/>
           </a:p>
@@ -8496,7 +7085,7 @@
                 <a:ea typeface="Inter" pitchFamily="34" charset="-122"/>
                 <a:cs typeface="Inter" pitchFamily="34" charset="-120"/>
               </a:rPr>
-              <a:t>Build Block 2 — execute &amp; test</a:t>
+              <a:t>Build Block 2 — code &amp; commit</a:t>
             </a:r>
             <a:endParaRPr lang="en-US" sz="1200" dirty="0"/>
           </a:p>
@@ -8517,7 +7106,7 @@
                 <a:ea typeface="Inter" pitchFamily="34" charset="-122"/>
                 <a:cs typeface="Inter" pitchFamily="34" charset="-120"/>
               </a:rPr>
-              <a:t>Deploying to Vercel</a:t>
+              <a:t>Deploying – ship it</a:t>
             </a:r>
             <a:endParaRPr lang="en-US" sz="1200" dirty="0"/>
           </a:p>
@@ -9908,61 +8497,36 @@
           </a:p>
         </p:txBody>
       </p:sp>
-      <p:sp>
-        <p:nvSpPr>
-          <p:cNvPr id="29" name="Google Shape;29;p2"/>
-          <p:cNvSpPr/>
-          <p:nvPr/>
-        </p:nvSpPr>
-        <p:spPr>
-          <a:xfrm>
-            <a:off x="1806873" y="3136900"/>
-            <a:ext cx="2295000" cy="1879600"/>
-          </a:xfrm>
-          <a:prstGeom prst="rect">
-            <a:avLst/>
-          </a:prstGeom>
-          <a:noFill/>
+      <p:pic>
+        <p:nvPicPr>
+          <p:cNvPr id="29" name="Avatar"/>
+          <p:cNvPicPr>
+            <a:picLocks noChangeAspect="1"/>
+          </p:cNvPicPr>
+          <p:nvPr/>
+        </p:nvPicPr>
+        <p:blipFill>
+          <a:blip r:embed="rId3"/>
+          <a:srcRect/>
+          <a:stretch>
+            <a:fillRect/>
+          </a:stretch>
+        </p:blipFill>
+        <p:spPr>
+          <a:xfrm>
+            <a:off x="863600" y="2006600"/>
+            <a:ext cx="4114800" cy="4114800"/>
+          </a:xfrm>
+          <a:prstGeom prst="roundRect">
+            <a:avLst>
+              <a:gd name="adj" fmla="val 2778"/>
+            </a:avLst>
+          </a:prstGeom>
           <a:ln>
             <a:noFill/>
           </a:ln>
         </p:spPr>
-        <p:txBody>
-          <a:bodyPr spcFirstLastPara="1" wrap="square" lIns="16933" tIns="16933" rIns="16933" bIns="16933" anchor="t" anchorCtr="0">
-            <a:normAutofit/>
-          </a:bodyPr>
-          <a:lstStyle/>
-          <a:p>
-            <a:pPr>
-              <a:buClr>
-                <a:srgbClr val="3FE0D0"/>
-              </a:buClr>
-              <a:buSzPts val="18000"/>
-            </a:pPr>
-            <a:r>
-              <a:rPr lang="en-US" sz="12001" b="1" dirty="0">
-                <a:solidFill>
-                  <a:srgbClr val="3FE0D0"/>
-                </a:solidFill>
-                <a:latin typeface="Montserrat"/>
-                <a:ea typeface="Montserrat"/>
-                <a:cs typeface="Montserrat"/>
-                <a:sym typeface="Montserrat"/>
-              </a:rPr>
-              <a:t>CK</a:t>
-            </a:r>
-            <a:endParaRPr sz="12001" dirty="0">
-              <a:solidFill>
-                <a:schemeClr val="dk1"/>
-              </a:solidFill>
-              <a:latin typeface="Calibri"/>
-              <a:ea typeface="Calibri"/>
-              <a:cs typeface="Calibri"/>
-              <a:sym typeface="Calibri"/>
-            </a:endParaRPr>
-          </a:p>
-        </p:txBody>
-      </p:sp>
+      </p:pic>
       <p:sp>
         <p:nvSpPr>
           <p:cNvPr id="30" name="Google Shape;30;p2"/>

--- a/schedule/01-welcome-kickoff/01-welcome-kickoff.pptx
+++ b/schedule/01-welcome-kickoff/01-welcome-kickoff.pptx
@@ -204,7 +204,7 @@
           <a:p>
             <a:fld id="{9440A35C-DBD2-4A64-A6BF-7C1DF79DB2B6}" type="datetimeFigureOut">
               <a:rPr lang="en-US" smtClean="0"/>
-              <a:t>5/5/2026</a:t>
+              <a:t>5/6/26</a:t>
             </a:fld>
             <a:endParaRPr lang="en-US"/>
           </a:p>
@@ -5038,7 +5038,7 @@
                 <a:ea typeface="Inter" pitchFamily="34" charset="-122"/>
                 <a:cs typeface="Inter" pitchFamily="34" charset="-120"/>
               </a:rPr>
-              <a:t>claude, gh, node — all green before 10:00 AM. If not, we have people who can help.</a:t>
+              <a:t>claude, gh, node — all green. If not, we have people who can help.</a:t>
             </a:r>
             <a:endParaRPr lang="en-US" sz="1300" dirty="0"/>
           </a:p>
@@ -5374,7 +5374,7 @@
                 <a:ea typeface="Inter" pitchFamily="34" charset="-122"/>
                 <a:cs typeface="Inter" pitchFamily="34" charset="-120"/>
               </a:rPr>
-              <a:t>2 min</a:t>
+              <a:t>10 min</a:t>
             </a:r>
             <a:endParaRPr lang="en-US" sz="1400" dirty="0"/>
           </a:p>
@@ -5815,7 +5815,7 @@
                 <a:ea typeface="Inter" pitchFamily="34" charset="-122"/>
                 <a:cs typeface="Inter" pitchFamily="34" charset="-120"/>
               </a:rPr>
-              <a:t>3 min</a:t>
+              <a:t>5 min</a:t>
             </a:r>
             <a:endParaRPr lang="en-US" sz="1400" dirty="0"/>
           </a:p>
@@ -6000,123 +6000,6 @@
       </p:sp>
       <p:sp>
         <p:nvSpPr>
-          <p:cNvPr id="25" name="Text 23"/>
-          <p:cNvSpPr/>
-          <p:nvPr/>
-        </p:nvSpPr>
-        <p:spPr>
-          <a:xfrm>
-            <a:off x="548640" y="4754880"/>
-            <a:ext cx="731520" cy="548640"/>
-          </a:xfrm>
-          <a:prstGeom prst="rect">
-            <a:avLst/>
-          </a:prstGeom>
-          <a:noFill/>
-          <a:ln/>
-        </p:spPr>
-        <p:txBody>
-          <a:bodyPr wrap="square" lIns="0" tIns="0" rIns="0" bIns="0" rtlCol="0" anchor="ctr"/>
-          <a:lstStyle/>
-          <a:p>
-            <a:pPr marL="0" indent="0">
-              <a:buNone/>
-            </a:pPr>
-            <a:r>
-              <a:rPr lang="en-US" sz="1600" b="1" dirty="0">
-                <a:solidFill>
-                  <a:srgbClr val="E89B3C"/>
-                </a:solidFill>
-                <a:latin typeface="Montserrat" pitchFamily="34" charset="0"/>
-                <a:ea typeface="Montserrat" pitchFamily="34" charset="-122"/>
-                <a:cs typeface="Montserrat" pitchFamily="34" charset="-120"/>
-              </a:rPr>
-              <a:t>06</a:t>
-            </a:r>
-            <a:endParaRPr lang="en-US" sz="1600" dirty="0"/>
-          </a:p>
-        </p:txBody>
-      </p:sp>
-      <p:sp>
-        <p:nvSpPr>
-          <p:cNvPr id="26" name="Text 24"/>
-          <p:cNvSpPr/>
-          <p:nvPr/>
-        </p:nvSpPr>
-        <p:spPr>
-          <a:xfrm>
-            <a:off x="1371600" y="4754880"/>
-            <a:ext cx="8686800" cy="548640"/>
-          </a:xfrm>
-          <a:prstGeom prst="rect">
-            <a:avLst/>
-          </a:prstGeom>
-          <a:noFill/>
-          <a:ln/>
-        </p:spPr>
-        <p:txBody>
-          <a:bodyPr wrap="square" lIns="0" tIns="0" rIns="0" bIns="0" rtlCol="0" anchor="ctr"/>
-          <a:lstStyle/>
-          <a:p>
-            <a:pPr marL="0" indent="0">
-              <a:buNone/>
-            </a:pPr>
-            <a:r>
-              <a:rPr lang="en-US" sz="1600" dirty="0">
-                <a:solidFill>
-                  <a:srgbClr val="1F2937"/>
-                </a:solidFill>
-                <a:latin typeface="Inter" pitchFamily="34" charset="0"/>
-                <a:ea typeface="Inter" pitchFamily="34" charset="-122"/>
-                <a:cs typeface="Inter" pitchFamily="34" charset="-120"/>
-              </a:rPr>
-              <a:t>Setup check — live walk through prerequisites</a:t>
-            </a:r>
-            <a:endParaRPr lang="en-US" sz="1600" dirty="0"/>
-          </a:p>
-        </p:txBody>
-      </p:sp>
-      <p:sp>
-        <p:nvSpPr>
-          <p:cNvPr id="27" name="Text 25"/>
-          <p:cNvSpPr/>
-          <p:nvPr/>
-        </p:nvSpPr>
-        <p:spPr>
-          <a:xfrm>
-            <a:off x="10088575" y="4754880"/>
-            <a:ext cx="1554480" cy="548640"/>
-          </a:xfrm>
-          <a:prstGeom prst="rect">
-            <a:avLst/>
-          </a:prstGeom>
-          <a:noFill/>
-          <a:ln/>
-        </p:spPr>
-        <p:txBody>
-          <a:bodyPr wrap="square" lIns="0" tIns="0" rIns="0" bIns="0" rtlCol="0" anchor="ctr"/>
-          <a:lstStyle/>
-          <a:p>
-            <a:pPr marL="0" indent="0" algn="r">
-              <a:buNone/>
-            </a:pPr>
-            <a:r>
-              <a:rPr lang="en-US" sz="1400" kern="0" spc="200" dirty="0">
-                <a:solidFill>
-                  <a:srgbClr val="6B7280"/>
-                </a:solidFill>
-                <a:latin typeface="Inter" pitchFamily="34" charset="0"/>
-                <a:ea typeface="Inter" pitchFamily="34" charset="-122"/>
-                <a:cs typeface="Inter" pitchFamily="34" charset="-120"/>
-              </a:rPr>
-              <a:t>8 min</a:t>
-            </a:r>
-            <a:endParaRPr lang="en-US" sz="1400" dirty="0"/>
-          </a:p>
-        </p:txBody>
-      </p:sp>
-      <p:sp>
-        <p:nvSpPr>
           <p:cNvPr id="28" name="Shape 26"/>
           <p:cNvSpPr/>
           <p:nvPr/>
@@ -6142,123 +6025,6 @@
           <a:lstStyle/>
           <a:p>
             <a:endParaRPr lang="en-US"/>
-          </a:p>
-        </p:txBody>
-      </p:sp>
-      <p:sp>
-        <p:nvSpPr>
-          <p:cNvPr id="29" name="Text 27"/>
-          <p:cNvSpPr/>
-          <p:nvPr/>
-        </p:nvSpPr>
-        <p:spPr>
-          <a:xfrm>
-            <a:off x="548640" y="5303520"/>
-            <a:ext cx="731520" cy="548640"/>
-          </a:xfrm>
-          <a:prstGeom prst="rect">
-            <a:avLst/>
-          </a:prstGeom>
-          <a:noFill/>
-          <a:ln/>
-        </p:spPr>
-        <p:txBody>
-          <a:bodyPr wrap="square" lIns="0" tIns="0" rIns="0" bIns="0" rtlCol="0" anchor="ctr"/>
-          <a:lstStyle/>
-          <a:p>
-            <a:pPr marL="0" indent="0">
-              <a:buNone/>
-            </a:pPr>
-            <a:r>
-              <a:rPr lang="en-US" sz="1600" b="1" dirty="0">
-                <a:solidFill>
-                  <a:srgbClr val="E89B3C"/>
-                </a:solidFill>
-                <a:latin typeface="Montserrat" pitchFamily="34" charset="0"/>
-                <a:ea typeface="Montserrat" pitchFamily="34" charset="-122"/>
-                <a:cs typeface="Montserrat" pitchFamily="34" charset="-120"/>
-              </a:rPr>
-              <a:t>07</a:t>
-            </a:r>
-            <a:endParaRPr lang="en-US" sz="1600" dirty="0"/>
-          </a:p>
-        </p:txBody>
-      </p:sp>
-      <p:sp>
-        <p:nvSpPr>
-          <p:cNvPr id="30" name="Text 28"/>
-          <p:cNvSpPr/>
-          <p:nvPr/>
-        </p:nvSpPr>
-        <p:spPr>
-          <a:xfrm>
-            <a:off x="1371600" y="5303520"/>
-            <a:ext cx="8686800" cy="548640"/>
-          </a:xfrm>
-          <a:prstGeom prst="rect">
-            <a:avLst/>
-          </a:prstGeom>
-          <a:noFill/>
-          <a:ln/>
-        </p:spPr>
-        <p:txBody>
-          <a:bodyPr wrap="square" lIns="0" tIns="0" rIns="0" bIns="0" rtlCol="0" anchor="ctr"/>
-          <a:lstStyle/>
-          <a:p>
-            <a:pPr marL="0" indent="0">
-              <a:buNone/>
-            </a:pPr>
-            <a:r>
-              <a:rPr lang="en-US" sz="1600" dirty="0">
-                <a:solidFill>
-                  <a:srgbClr val="1F2937"/>
-                </a:solidFill>
-                <a:latin typeface="Inter" pitchFamily="34" charset="0"/>
-                <a:ea typeface="Inter" pitchFamily="34" charset="-122"/>
-                <a:cs typeface="Inter" pitchFamily="34" charset="-120"/>
-              </a:rPr>
-              <a:t>Hand-off</a:t>
-            </a:r>
-            <a:endParaRPr lang="en-US" sz="1600" dirty="0"/>
-          </a:p>
-        </p:txBody>
-      </p:sp>
-      <p:sp>
-        <p:nvSpPr>
-          <p:cNvPr id="31" name="Text 29"/>
-          <p:cNvSpPr/>
-          <p:nvPr/>
-        </p:nvSpPr>
-        <p:spPr>
-          <a:xfrm>
-            <a:off x="10088575" y="5303520"/>
-            <a:ext cx="1554480" cy="548640"/>
-          </a:xfrm>
-          <a:prstGeom prst="rect">
-            <a:avLst/>
-          </a:prstGeom>
-          <a:noFill/>
-          <a:ln/>
-        </p:spPr>
-        <p:txBody>
-          <a:bodyPr wrap="square" lIns="0" tIns="0" rIns="0" bIns="0" rtlCol="0" anchor="ctr"/>
-          <a:lstStyle/>
-          <a:p>
-            <a:pPr marL="0" indent="0" algn="r">
-              <a:buNone/>
-            </a:pPr>
-            <a:r>
-              <a:rPr lang="en-US" sz="1400" kern="0" spc="200" dirty="0">
-                <a:solidFill>
-                  <a:srgbClr val="6B7280"/>
-                </a:solidFill>
-                <a:latin typeface="Inter" pitchFamily="34" charset="0"/>
-                <a:ea typeface="Inter" pitchFamily="34" charset="-122"/>
-                <a:cs typeface="Inter" pitchFamily="34" charset="-120"/>
-              </a:rPr>
-              <a:t>2 min</a:t>
-            </a:r>
-            <a:endParaRPr lang="en-US" sz="1400" dirty="0"/>
           </a:p>
         </p:txBody>
       </p:sp>
@@ -7022,7 +6788,7 @@
                 <a:ea typeface="Inter" pitchFamily="34" charset="-122"/>
                 <a:cs typeface="Inter" pitchFamily="34" charset="-120"/>
               </a:rPr>
-              <a:t>Choosing your medium</a:t>
+              <a:t>Choosing your Claude Code Adventure</a:t>
             </a:r>
             <a:endParaRPr lang="en-US" sz="1200" dirty="0"/>
           </a:p>
@@ -8308,7 +8074,7 @@
                 <a:ea typeface="Montserrat" pitchFamily="34" charset="-122"/>
                 <a:cs typeface="Montserrat" pitchFamily="34" charset="-120"/>
               </a:rPr>
-              <a:t>Game's at 7. We'll be done.</a:t>
+              <a:t>Game is at 7. We'll be done.</a:t>
             </a:r>
             <a:endParaRPr lang="en-US" sz="1900" dirty="0"/>
           </a:p>

--- a/schedule/01-welcome-kickoff/01-welcome-kickoff.pptx
+++ b/schedule/01-welcome-kickoff/01-welcome-kickoff.pptx
@@ -5,20 +5,19 @@
     <p:sldMasterId id="2147483648" r:id="rId1"/>
   </p:sldMasterIdLst>
   <p:notesMasterIdLst>
-    <p:notesMasterId r:id="rId13"/>
+    <p:notesMasterId r:id="rId12"/>
   </p:notesMasterIdLst>
   <p:sldIdLst>
     <p:sldId id="267" r:id="rId2"/>
     <p:sldId id="256" r:id="rId3"/>
     <p:sldId id="257" r:id="rId4"/>
     <p:sldId id="258" r:id="rId5"/>
-    <p:sldId id="259" r:id="rId6"/>
-    <p:sldId id="260" r:id="rId7"/>
-    <p:sldId id="261" r:id="rId8"/>
-    <p:sldId id="262" r:id="rId9"/>
-    <p:sldId id="268" r:id="rId10"/>
-    <p:sldId id="263" r:id="rId11"/>
-    <p:sldId id="265" r:id="rId12"/>
+    <p:sldId id="260" r:id="rId6"/>
+    <p:sldId id="261" r:id="rId7"/>
+    <p:sldId id="262" r:id="rId8"/>
+    <p:sldId id="268" r:id="rId9"/>
+    <p:sldId id="263" r:id="rId10"/>
+    <p:sldId id="265" r:id="rId11"/>
   </p:sldIdLst>
   <p:sldSz cx="12192000" cy="6858000"/>
   <p:notesSz cx="6858000" cy="12192000"/>
@@ -204,7 +203,7 @@
           <a:p>
             <a:fld id="{9440A35C-DBD2-4A64-A6BF-7C1DF79DB2B6}" type="datetimeFigureOut">
               <a:rPr lang="en-US" smtClean="0"/>
-              <a:t>5/6/26</a:t>
+              <a:t>5/7/26</a:t>
             </a:fld>
             <a:endParaRPr lang="en-US"/>
           </a:p>
@@ -664,7 +663,7 @@
           <a:p>
             <a:r>
               <a:rPr lang="en-US" dirty="0"/>
-              <a:t>If more than ~20% of the room isn't green, silently extend the 10:15 break by 10 min rather than pushing people into the SDLC session cold. Don't shame anyone — just point them at the AI Genius Bar.</a:t>
+              <a:t>Land it, smile, hand off cleanly. Don't oversell the next session — let it speak for itself. Last words: 'Let's build.'</a:t>
             </a:r>
           </a:p>
         </p:txBody>
@@ -687,93 +686,6 @@
             <a:fld id="{F7021451-1387-4CA6-816F-3879F97B5CBC}" type="slidenum">
               <a:rPr lang="en-US"/>
               <a:t>10</a:t>
-            </a:fld>
-            <a:endParaRPr lang="en-US"/>
-          </a:p>
-        </p:txBody>
-      </p:sp>
-    </p:spTree>
-    <p:extLst>
-      <p:ext uri="{BB962C8B-B14F-4D97-AF65-F5344CB8AC3E}">
-        <p14:creationId xmlns:p14="http://schemas.microsoft.com/office/powerpoint/2010/main" val="1024086991"/>
-      </p:ext>
-    </p:extLst>
-  </p:cSld>
-  <p:clrMapOvr>
-    <a:masterClrMapping/>
-  </p:clrMapOvr>
-</p:notes>
-</file>
-
-<file path=ppt/notesSlides/notesSlide11.xml><?xml version="1.0" encoding="utf-8"?>
-<p:notes xmlns:a="http://schemas.openxmlformats.org/drawingml/2006/main" xmlns:r="http://schemas.openxmlformats.org/officeDocument/2006/relationships" xmlns:p="http://schemas.openxmlformats.org/presentationml/2006/main">
-  <p:cSld>
-    <p:spTree>
-      <p:nvGrpSpPr>
-        <p:cNvPr id="1" name=""/>
-        <p:cNvGrpSpPr/>
-        <p:nvPr/>
-      </p:nvGrpSpPr>
-      <p:grpSpPr>
-        <a:xfrm>
-          <a:off x="0" y="0"/>
-          <a:ext cx="0" cy="0"/>
-          <a:chOff x="0" y="0"/>
-          <a:chExt cx="0" cy="0"/>
-        </a:xfrm>
-      </p:grpSpPr>
-      <p:sp>
-        <p:nvSpPr>
-          <p:cNvPr id="2" name="Slide Image Placeholder 1"/>
-          <p:cNvSpPr>
-            <a:spLocks noGrp="1" noRot="1" noChangeAspect="1"/>
-          </p:cNvSpPr>
-          <p:nvPr>
-            <p:ph type="sldImg"/>
-          </p:nvPr>
-        </p:nvSpPr>
-        <p:spPr/>
-      </p:sp>
-      <p:sp>
-        <p:nvSpPr>
-          <p:cNvPr id="3" name="Notes Placeholder 2"/>
-          <p:cNvSpPr>
-            <a:spLocks noGrp="1"/>
-          </p:cNvSpPr>
-          <p:nvPr>
-            <p:ph type="body" idx="1"/>
-          </p:nvPr>
-        </p:nvSpPr>
-        <p:spPr/>
-        <p:txBody>
-          <a:bodyPr/>
-          <a:lstStyle/>
-          <a:p>
-            <a:r>
-              <a:rPr lang="en-US" dirty="0"/>
-              <a:t>Land it, smile, hand off cleanly. Don't oversell the next session — let it speak for itself. Last words: 'Let's build.'</a:t>
-            </a:r>
-          </a:p>
-        </p:txBody>
-      </p:sp>
-      <p:sp>
-        <p:nvSpPr>
-          <p:cNvPr id="4" name="Slide Number Placeholder 3"/>
-          <p:cNvSpPr>
-            <a:spLocks noGrp="1"/>
-          </p:cNvSpPr>
-          <p:nvPr>
-            <p:ph type="sldNum" sz="quarter" idx="10"/>
-          </p:nvPr>
-        </p:nvSpPr>
-        <p:spPr/>
-        <p:txBody>
-          <a:bodyPr/>
-          <a:lstStyle/>
-          <a:p>
-            <a:fld id="{F7021451-1387-4CA6-816F-3879F97B5CBC}" type="slidenum">
-              <a:rPr lang="en-US"/>
-              <a:t>11</a:t>
             </a:fld>
             <a:endParaRPr lang="en-US"/>
           </a:p>
@@ -1099,7 +1011,7 @@
           <a:p>
             <a:r>
               <a:rPr lang="en-US" dirty="0"/>
-              <a:t>Walk it quickly. The big block is setup check — that's where the room either gets unstuck or gets stuck for the day. If you only protect one item, protect that one.</a:t>
+              <a:t>Don't read the bullets. The point is the headline: Day 1 craft, Day 2 ship. Everything else is in the schedule on the table.</a:t>
             </a:r>
           </a:p>
         </p:txBody>
@@ -1186,7 +1098,7 @@
           <a:p>
             <a:r>
               <a:rPr lang="en-US" dirty="0"/>
-              <a:t>Don't read the bullets. The point is the headline: Day 1 craft, Day 2 ship. Everything else is in the schedule on the table.</a:t>
+              <a:t>Read it slowly, twice. This is the one sentence to leave the room with. Note: this preview lands the idea, then we hand off to the next session for the full unpack.</a:t>
             </a:r>
           </a:p>
         </p:txBody>
@@ -1273,7 +1185,7 @@
           <a:p>
             <a:r>
               <a:rPr lang="en-US" dirty="0"/>
-              <a:t>Read it slowly, twice. This is the one sentence to leave the room with. Note: this preview lands the idea, then we hand off to the next session for the full unpack.</a:t>
+              <a:t>Keep this tight — 2 to 3 minutes max. Energy stays up. The baseball line gets a laugh; lean into it briefly and move on.</a:t>
             </a:r>
           </a:p>
         </p:txBody>
@@ -1315,93 +1227,6 @@
 </file>
 
 <file path=ppt/notesSlides/notesSlide8.xml><?xml version="1.0" encoding="utf-8"?>
-<p:notes xmlns:a="http://schemas.openxmlformats.org/drawingml/2006/main" xmlns:r="http://schemas.openxmlformats.org/officeDocument/2006/relationships" xmlns:p="http://schemas.openxmlformats.org/presentationml/2006/main">
-  <p:cSld>
-    <p:spTree>
-      <p:nvGrpSpPr>
-        <p:cNvPr id="1" name=""/>
-        <p:cNvGrpSpPr/>
-        <p:nvPr/>
-      </p:nvGrpSpPr>
-      <p:grpSpPr>
-        <a:xfrm>
-          <a:off x="0" y="0"/>
-          <a:ext cx="0" cy="0"/>
-          <a:chOff x="0" y="0"/>
-          <a:chExt cx="0" cy="0"/>
-        </a:xfrm>
-      </p:grpSpPr>
-      <p:sp>
-        <p:nvSpPr>
-          <p:cNvPr id="2" name="Slide Image Placeholder 1"/>
-          <p:cNvSpPr>
-            <a:spLocks noGrp="1" noRot="1" noChangeAspect="1"/>
-          </p:cNvSpPr>
-          <p:nvPr>
-            <p:ph type="sldImg"/>
-          </p:nvPr>
-        </p:nvSpPr>
-        <p:spPr/>
-      </p:sp>
-      <p:sp>
-        <p:nvSpPr>
-          <p:cNvPr id="3" name="Notes Placeholder 2"/>
-          <p:cNvSpPr>
-            <a:spLocks noGrp="1"/>
-          </p:cNvSpPr>
-          <p:nvPr>
-            <p:ph type="body" idx="1"/>
-          </p:nvPr>
-        </p:nvSpPr>
-        <p:spPr/>
-        <p:txBody>
-          <a:bodyPr/>
-          <a:lstStyle/>
-          <a:p>
-            <a:r>
-              <a:rPr lang="en-US" dirty="0"/>
-              <a:t>Keep this tight — 2 to 3 minutes max. Energy stays up. The baseball line gets a laugh; lean into it briefly and move on.</a:t>
-            </a:r>
-          </a:p>
-        </p:txBody>
-      </p:sp>
-      <p:sp>
-        <p:nvSpPr>
-          <p:cNvPr id="4" name="Slide Number Placeholder 3"/>
-          <p:cNvSpPr>
-            <a:spLocks noGrp="1"/>
-          </p:cNvSpPr>
-          <p:nvPr>
-            <p:ph type="sldNum" sz="quarter" idx="10"/>
-          </p:nvPr>
-        </p:nvSpPr>
-        <p:spPr/>
-        <p:txBody>
-          <a:bodyPr/>
-          <a:lstStyle/>
-          <a:p>
-            <a:fld id="{F7021451-1387-4CA6-816F-3879F97B5CBC}" type="slidenum">
-              <a:rPr lang="en-US"/>
-              <a:t>8</a:t>
-            </a:fld>
-            <a:endParaRPr lang="en-US"/>
-          </a:p>
-        </p:txBody>
-      </p:sp>
-    </p:spTree>
-    <p:extLst>
-      <p:ext uri="{BB962C8B-B14F-4D97-AF65-F5344CB8AC3E}">
-        <p14:creationId xmlns:p14="http://schemas.microsoft.com/office/powerpoint/2010/main" val="1024086991"/>
-      </p:ext>
-    </p:extLst>
-  </p:cSld>
-  <p:clrMapOvr>
-    <a:masterClrMapping/>
-  </p:clrMapOvr>
-</p:notes>
-</file>
-
-<file path=ppt/notesSlides/notesSlide9.xml><?xml version="1.0" encoding="utf-8"?>
 <p:notes xmlns:a="http://schemas.openxmlformats.org/drawingml/2006/main" xmlns:r="http://schemas.openxmlformats.org/officeDocument/2006/relationships" xmlns:p="http://schemas.openxmlformats.org/presentationml/2006/main" showMasterSp="0" showMasterPhAnim="0">
   <p:cSld>
     <p:spTree>
@@ -1565,7 +1390,7 @@
                 <a:cs typeface="Arial"/>
                 <a:sym typeface="Arial"/>
               </a:rPr>
-              <a:t>9</a:t>
+              <a:t>8</a:t>
             </a:fld>
             <a:endParaRPr sz="1800">
               <a:solidFill>
@@ -1580,6 +1405,93 @@
         </p:txBody>
       </p:sp>
     </p:spTree>
+  </p:cSld>
+  <p:clrMapOvr>
+    <a:masterClrMapping/>
+  </p:clrMapOvr>
+</p:notes>
+</file>
+
+<file path=ppt/notesSlides/notesSlide9.xml><?xml version="1.0" encoding="utf-8"?>
+<p:notes xmlns:a="http://schemas.openxmlformats.org/drawingml/2006/main" xmlns:r="http://schemas.openxmlformats.org/officeDocument/2006/relationships" xmlns:p="http://schemas.openxmlformats.org/presentationml/2006/main">
+  <p:cSld>
+    <p:spTree>
+      <p:nvGrpSpPr>
+        <p:cNvPr id="1" name=""/>
+        <p:cNvGrpSpPr/>
+        <p:nvPr/>
+      </p:nvGrpSpPr>
+      <p:grpSpPr>
+        <a:xfrm>
+          <a:off x="0" y="0"/>
+          <a:ext cx="0" cy="0"/>
+          <a:chOff x="0" y="0"/>
+          <a:chExt cx="0" cy="0"/>
+        </a:xfrm>
+      </p:grpSpPr>
+      <p:sp>
+        <p:nvSpPr>
+          <p:cNvPr id="2" name="Slide Image Placeholder 1"/>
+          <p:cNvSpPr>
+            <a:spLocks noGrp="1" noRot="1" noChangeAspect="1"/>
+          </p:cNvSpPr>
+          <p:nvPr>
+            <p:ph type="sldImg"/>
+          </p:nvPr>
+        </p:nvSpPr>
+        <p:spPr/>
+      </p:sp>
+      <p:sp>
+        <p:nvSpPr>
+          <p:cNvPr id="3" name="Notes Placeholder 2"/>
+          <p:cNvSpPr>
+            <a:spLocks noGrp="1"/>
+          </p:cNvSpPr>
+          <p:nvPr>
+            <p:ph type="body" idx="1"/>
+          </p:nvPr>
+        </p:nvSpPr>
+        <p:spPr/>
+        <p:txBody>
+          <a:bodyPr/>
+          <a:lstStyle/>
+          <a:p>
+            <a:r>
+              <a:rPr lang="en-US" dirty="0"/>
+              <a:t>If more than ~20% of the room isn't green, silently extend the 10:15 break by 10 min rather than pushing people into the SDLC session cold. Don't shame anyone — just point them at the AI Genius Bar.</a:t>
+            </a:r>
+          </a:p>
+        </p:txBody>
+      </p:sp>
+      <p:sp>
+        <p:nvSpPr>
+          <p:cNvPr id="4" name="Slide Number Placeholder 3"/>
+          <p:cNvSpPr>
+            <a:spLocks noGrp="1"/>
+          </p:cNvSpPr>
+          <p:nvPr>
+            <p:ph type="sldNum" sz="quarter" idx="10"/>
+          </p:nvPr>
+        </p:nvSpPr>
+        <p:spPr/>
+        <p:txBody>
+          <a:bodyPr/>
+          <a:lstStyle/>
+          <a:p>
+            <a:fld id="{F7021451-1387-4CA6-816F-3879F97B5CBC}" type="slidenum">
+              <a:rPr lang="en-US"/>
+              <a:t>9</a:t>
+            </a:fld>
+            <a:endParaRPr lang="en-US"/>
+          </a:p>
+        </p:txBody>
+      </p:sp>
+    </p:spTree>
+    <p:extLst>
+      <p:ext uri="{BB962C8B-B14F-4D97-AF65-F5344CB8AC3E}">
+        <p14:creationId xmlns:p14="http://schemas.microsoft.com/office/powerpoint/2010/main" val="1024086991"/>
+      </p:ext>
+    </p:extLst>
   </p:cSld>
   <p:clrMapOvr>
     <a:masterClrMapping/>
@@ -2317,932 +2229,6 @@
 
 <file path=ppt/slides/slide10.xml><?xml version="1.0" encoding="utf-8"?>
 <p:sld xmlns:a="http://schemas.openxmlformats.org/drawingml/2006/main" xmlns:r="http://schemas.openxmlformats.org/officeDocument/2006/relationships" xmlns:p="http://schemas.openxmlformats.org/presentationml/2006/main">
-  <p:cSld name="Slide 8">
-    <p:bg>
-      <p:bgPr>
-        <a:solidFill>
-          <a:srgbClr val="F5F2ED"/>
-        </a:solidFill>
-        <a:effectLst/>
-      </p:bgPr>
-    </p:bg>
-    <p:spTree>
-      <p:nvGrpSpPr>
-        <p:cNvPr id="1" name=""/>
-        <p:cNvGrpSpPr/>
-        <p:nvPr/>
-      </p:nvGrpSpPr>
-      <p:grpSpPr>
-        <a:xfrm>
-          <a:off x="0" y="0"/>
-          <a:ext cx="0" cy="0"/>
-          <a:chOff x="0" y="0"/>
-          <a:chExt cx="0" cy="0"/>
-        </a:xfrm>
-      </p:grpSpPr>
-      <p:sp>
-        <p:nvSpPr>
-          <p:cNvPr id="2" name="Text 0"/>
-          <p:cNvSpPr/>
-          <p:nvPr/>
-        </p:nvSpPr>
-        <p:spPr>
-          <a:xfrm>
-            <a:off x="548640" y="548640"/>
-            <a:ext cx="5486400" cy="274320"/>
-          </a:xfrm>
-          <a:prstGeom prst="rect">
-            <a:avLst/>
-          </a:prstGeom>
-          <a:noFill/>
-          <a:ln/>
-        </p:spPr>
-        <p:txBody>
-          <a:bodyPr wrap="square" lIns="0" tIns="0" rIns="0" bIns="0" rtlCol="0" anchor="ctr"/>
-          <a:lstStyle/>
-          <a:p>
-            <a:pPr marL="0" indent="0">
-              <a:buNone/>
-            </a:pPr>
-            <a:r>
-              <a:rPr lang="en-US" sz="1000" b="1" kern="0" spc="600" dirty="0">
-                <a:solidFill>
-                  <a:srgbClr val="E89B3C"/>
-                </a:solidFill>
-                <a:latin typeface="Inter" pitchFamily="34" charset="0"/>
-                <a:ea typeface="Inter" pitchFamily="34" charset="-122"/>
-                <a:cs typeface="Inter" pitchFamily="34" charset="-120"/>
-              </a:rPr>
-              <a:t>SETUP CHECK · 8 MIN</a:t>
-            </a:r>
-            <a:endParaRPr lang="en-US" sz="1000" dirty="0"/>
-          </a:p>
-        </p:txBody>
-      </p:sp>
-      <p:sp>
-        <p:nvSpPr>
-          <p:cNvPr id="3" name="Text 1"/>
-          <p:cNvSpPr/>
-          <p:nvPr/>
-        </p:nvSpPr>
-        <p:spPr>
-          <a:xfrm>
-            <a:off x="548640" y="914400"/>
-            <a:ext cx="10972800" cy="822960"/>
-          </a:xfrm>
-          <a:prstGeom prst="rect">
-            <a:avLst/>
-          </a:prstGeom>
-          <a:noFill/>
-          <a:ln/>
-        </p:spPr>
-        <p:txBody>
-          <a:bodyPr wrap="square" lIns="0" tIns="0" rIns="0" bIns="0" rtlCol="0" anchor="ctr"/>
-          <a:lstStyle/>
-          <a:p>
-            <a:pPr marL="0" indent="0">
-              <a:buNone/>
-            </a:pPr>
-            <a:r>
-              <a:rPr lang="en-US" sz="3400" b="1" dirty="0">
-                <a:solidFill>
-                  <a:srgbClr val="1F2937"/>
-                </a:solidFill>
-                <a:latin typeface="Montserrat" pitchFamily="34" charset="0"/>
-                <a:ea typeface="Montserrat" pitchFamily="34" charset="-122"/>
-                <a:cs typeface="Montserrat" pitchFamily="34" charset="-120"/>
-              </a:rPr>
-              <a:t>Run these three commands together.</a:t>
-            </a:r>
-            <a:endParaRPr lang="en-US" sz="3400" dirty="0"/>
-          </a:p>
-        </p:txBody>
-      </p:sp>
-      <p:sp>
-        <p:nvSpPr>
-          <p:cNvPr id="5" name="Shape 3"/>
-          <p:cNvSpPr/>
-          <p:nvPr/>
-        </p:nvSpPr>
-        <p:spPr>
-          <a:xfrm>
-            <a:off x="548640" y="2468880"/>
-            <a:ext cx="7315200" cy="3657600"/>
-          </a:xfrm>
-          <a:prstGeom prst="rect">
-            <a:avLst/>
-          </a:prstGeom>
-          <a:solidFill>
-            <a:srgbClr val="0F1620"/>
-          </a:solidFill>
-          <a:ln/>
-        </p:spPr>
-        <p:txBody>
-          <a:bodyPr/>
-          <a:lstStyle/>
-          <a:p>
-            <a:endParaRPr lang="en-US"/>
-          </a:p>
-        </p:txBody>
-      </p:sp>
-      <p:sp>
-        <p:nvSpPr>
-          <p:cNvPr id="6" name="Shape 4"/>
-          <p:cNvSpPr/>
-          <p:nvPr/>
-        </p:nvSpPr>
-        <p:spPr>
-          <a:xfrm>
-            <a:off x="548640" y="2468880"/>
-            <a:ext cx="7315200" cy="365760"/>
-          </a:xfrm>
-          <a:prstGeom prst="rect">
-            <a:avLst/>
-          </a:prstGeom>
-          <a:solidFill>
-            <a:srgbClr val="1B2533"/>
-          </a:solidFill>
-          <a:ln/>
-        </p:spPr>
-        <p:txBody>
-          <a:bodyPr/>
-          <a:lstStyle/>
-          <a:p>
-            <a:endParaRPr lang="en-US"/>
-          </a:p>
-        </p:txBody>
-      </p:sp>
-      <p:sp>
-        <p:nvSpPr>
-          <p:cNvPr id="7" name="Shape 5"/>
-          <p:cNvSpPr/>
-          <p:nvPr/>
-        </p:nvSpPr>
-        <p:spPr>
-          <a:xfrm>
-            <a:off x="731520" y="2587752"/>
-            <a:ext cx="137160" cy="137160"/>
-          </a:xfrm>
-          <a:prstGeom prst="ellipse">
-            <a:avLst/>
-          </a:prstGeom>
-          <a:solidFill>
-            <a:srgbClr val="FF6058"/>
-          </a:solidFill>
-          <a:ln/>
-        </p:spPr>
-        <p:txBody>
-          <a:bodyPr/>
-          <a:lstStyle/>
-          <a:p>
-            <a:endParaRPr lang="en-US"/>
-          </a:p>
-        </p:txBody>
-      </p:sp>
-      <p:sp>
-        <p:nvSpPr>
-          <p:cNvPr id="8" name="Shape 6"/>
-          <p:cNvSpPr/>
-          <p:nvPr/>
-        </p:nvSpPr>
-        <p:spPr>
-          <a:xfrm>
-            <a:off x="960120" y="2587752"/>
-            <a:ext cx="137160" cy="137160"/>
-          </a:xfrm>
-          <a:prstGeom prst="ellipse">
-            <a:avLst/>
-          </a:prstGeom>
-          <a:solidFill>
-            <a:srgbClr val="FFBD2E"/>
-          </a:solidFill>
-          <a:ln/>
-        </p:spPr>
-        <p:txBody>
-          <a:bodyPr/>
-          <a:lstStyle/>
-          <a:p>
-            <a:endParaRPr lang="en-US"/>
-          </a:p>
-        </p:txBody>
-      </p:sp>
-      <p:sp>
-        <p:nvSpPr>
-          <p:cNvPr id="9" name="Shape 7"/>
-          <p:cNvSpPr/>
-          <p:nvPr/>
-        </p:nvSpPr>
-        <p:spPr>
-          <a:xfrm>
-            <a:off x="1188720" y="2587752"/>
-            <a:ext cx="137160" cy="137160"/>
-          </a:xfrm>
-          <a:prstGeom prst="ellipse">
-            <a:avLst/>
-          </a:prstGeom>
-          <a:solidFill>
-            <a:srgbClr val="27CA40"/>
-          </a:solidFill>
-          <a:ln/>
-        </p:spPr>
-        <p:txBody>
-          <a:bodyPr/>
-          <a:lstStyle/>
-          <a:p>
-            <a:endParaRPr lang="en-US"/>
-          </a:p>
-        </p:txBody>
-      </p:sp>
-      <p:sp>
-        <p:nvSpPr>
-          <p:cNvPr id="10" name="Text 8"/>
-          <p:cNvSpPr/>
-          <p:nvPr/>
-        </p:nvSpPr>
-        <p:spPr>
-          <a:xfrm>
-            <a:off x="1920240" y="2514600"/>
-            <a:ext cx="4572000" cy="274320"/>
-          </a:xfrm>
-          <a:prstGeom prst="rect">
-            <a:avLst/>
-          </a:prstGeom>
-          <a:noFill/>
-          <a:ln/>
-        </p:spPr>
-        <p:txBody>
-          <a:bodyPr wrap="square" lIns="0" tIns="0" rIns="0" bIns="0" rtlCol="0" anchor="ctr"/>
-          <a:lstStyle/>
-          <a:p>
-            <a:pPr marL="0" indent="0" algn="ctr">
-              <a:buNone/>
-            </a:pPr>
-            <a:r>
-              <a:rPr lang="en-US" sz="1000" dirty="0">
-                <a:solidFill>
-                  <a:srgbClr val="9AA3AF"/>
-                </a:solidFill>
-                <a:latin typeface="JetBrains Mono" pitchFamily="34" charset="0"/>
-                <a:ea typeface="JetBrains Mono" pitchFamily="34" charset="-122"/>
-                <a:cs typeface="JetBrains Mono" pitchFamily="34" charset="-120"/>
-              </a:rPr>
-              <a:t>prerequisites · check</a:t>
-            </a:r>
-            <a:endParaRPr lang="en-US" sz="1000" dirty="0"/>
-          </a:p>
-        </p:txBody>
-      </p:sp>
-      <p:sp>
-        <p:nvSpPr>
-          <p:cNvPr id="11" name="Text 9"/>
-          <p:cNvSpPr/>
-          <p:nvPr/>
-        </p:nvSpPr>
-        <p:spPr>
-          <a:xfrm>
-            <a:off x="914400" y="3017520"/>
-            <a:ext cx="6583680" cy="365760"/>
-          </a:xfrm>
-          <a:prstGeom prst="rect">
-            <a:avLst/>
-          </a:prstGeom>
-          <a:noFill/>
-          <a:ln/>
-        </p:spPr>
-        <p:txBody>
-          <a:bodyPr wrap="square" lIns="0" tIns="0" rIns="0" bIns="0" rtlCol="0" anchor="ctr"/>
-          <a:lstStyle/>
-          <a:p>
-            <a:pPr marL="0" indent="0">
-              <a:buNone/>
-            </a:pPr>
-            <a:r>
-              <a:rPr lang="en-US" sz="1800" b="1" dirty="0">
-                <a:solidFill>
-                  <a:srgbClr val="3FB6A8"/>
-                </a:solidFill>
-                <a:latin typeface="JetBrains Mono" pitchFamily="34" charset="0"/>
-                <a:ea typeface="JetBrains Mono" pitchFamily="34" charset="-122"/>
-                <a:cs typeface="JetBrains Mono" pitchFamily="34" charset="-120"/>
-              </a:rPr>
-              <a:t>$ </a:t>
-            </a:r>
-            <a:r>
-              <a:rPr lang="en-US" sz="1800" b="1" dirty="0">
-                <a:solidFill>
-                  <a:srgbClr val="FFFFFF"/>
-                </a:solidFill>
-                <a:latin typeface="JetBrains Mono" pitchFamily="34" charset="0"/>
-                <a:ea typeface="JetBrains Mono" pitchFamily="34" charset="-122"/>
-                <a:cs typeface="JetBrains Mono" pitchFamily="34" charset="-120"/>
-              </a:rPr>
-              <a:t>claude --version</a:t>
-            </a:r>
-            <a:endParaRPr lang="en-US" sz="1800" dirty="0"/>
-          </a:p>
-        </p:txBody>
-      </p:sp>
-      <p:sp>
-        <p:nvSpPr>
-          <p:cNvPr id="12" name="Text 10"/>
-          <p:cNvSpPr/>
-          <p:nvPr/>
-        </p:nvSpPr>
-        <p:spPr>
-          <a:xfrm>
-            <a:off x="1097280" y="3429000"/>
-            <a:ext cx="6400800" cy="365760"/>
-          </a:xfrm>
-          <a:prstGeom prst="rect">
-            <a:avLst/>
-          </a:prstGeom>
-          <a:noFill/>
-          <a:ln/>
-        </p:spPr>
-        <p:txBody>
-          <a:bodyPr wrap="square" lIns="0" tIns="0" rIns="0" bIns="0" rtlCol="0" anchor="ctr"/>
-          <a:lstStyle/>
-          <a:p>
-            <a:pPr marL="0" indent="0">
-              <a:buNone/>
-            </a:pPr>
-            <a:r>
-              <a:rPr lang="en-US" sz="1300" b="1" dirty="0">
-                <a:solidFill>
-                  <a:srgbClr val="3FB6A8"/>
-                </a:solidFill>
-                <a:latin typeface="JetBrains Mono" pitchFamily="34" charset="0"/>
-                <a:ea typeface="JetBrains Mono" pitchFamily="34" charset="-122"/>
-                <a:cs typeface="JetBrains Mono" pitchFamily="34" charset="-120"/>
-              </a:rPr>
-              <a:t>✓ </a:t>
-            </a:r>
-            <a:r>
-              <a:rPr lang="en-US" sz="1300" dirty="0">
-                <a:solidFill>
-                  <a:srgbClr val="9AA3AF"/>
-                </a:solidFill>
-                <a:latin typeface="JetBrains Mono" pitchFamily="34" charset="0"/>
-                <a:ea typeface="JetBrains Mono" pitchFamily="34" charset="-122"/>
-                <a:cs typeface="JetBrains Mono" pitchFamily="34" charset="-120"/>
-              </a:rPr>
-              <a:t>claude code 1.x · ready</a:t>
-            </a:r>
-            <a:endParaRPr lang="en-US" sz="1300" dirty="0"/>
-          </a:p>
-        </p:txBody>
-      </p:sp>
-      <p:sp>
-        <p:nvSpPr>
-          <p:cNvPr id="13" name="Text 11"/>
-          <p:cNvSpPr/>
-          <p:nvPr/>
-        </p:nvSpPr>
-        <p:spPr>
-          <a:xfrm>
-            <a:off x="914400" y="3977640"/>
-            <a:ext cx="6583680" cy="365760"/>
-          </a:xfrm>
-          <a:prstGeom prst="rect">
-            <a:avLst/>
-          </a:prstGeom>
-          <a:noFill/>
-          <a:ln/>
-        </p:spPr>
-        <p:txBody>
-          <a:bodyPr wrap="square" lIns="0" tIns="0" rIns="0" bIns="0" rtlCol="0" anchor="ctr"/>
-          <a:lstStyle/>
-          <a:p>
-            <a:pPr marL="0" indent="0">
-              <a:buNone/>
-            </a:pPr>
-            <a:r>
-              <a:rPr lang="en-US" sz="1800" b="1" dirty="0">
-                <a:solidFill>
-                  <a:srgbClr val="3FB6A8"/>
-                </a:solidFill>
-                <a:latin typeface="JetBrains Mono" pitchFamily="34" charset="0"/>
-                <a:ea typeface="JetBrains Mono" pitchFamily="34" charset="-122"/>
-                <a:cs typeface="JetBrains Mono" pitchFamily="34" charset="-120"/>
-              </a:rPr>
-              <a:t>$ </a:t>
-            </a:r>
-            <a:r>
-              <a:rPr lang="en-US" sz="1800" b="1" dirty="0">
-                <a:solidFill>
-                  <a:srgbClr val="FFFFFF"/>
-                </a:solidFill>
-                <a:latin typeface="JetBrains Mono" pitchFamily="34" charset="0"/>
-                <a:ea typeface="JetBrains Mono" pitchFamily="34" charset="-122"/>
-                <a:cs typeface="JetBrains Mono" pitchFamily="34" charset="-120"/>
-              </a:rPr>
-              <a:t>gh auth status</a:t>
-            </a:r>
-            <a:endParaRPr lang="en-US" sz="1800" dirty="0"/>
-          </a:p>
-        </p:txBody>
-      </p:sp>
-      <p:sp>
-        <p:nvSpPr>
-          <p:cNvPr id="14" name="Text 12"/>
-          <p:cNvSpPr/>
-          <p:nvPr/>
-        </p:nvSpPr>
-        <p:spPr>
-          <a:xfrm>
-            <a:off x="1097280" y="4389120"/>
-            <a:ext cx="6400800" cy="365760"/>
-          </a:xfrm>
-          <a:prstGeom prst="rect">
-            <a:avLst/>
-          </a:prstGeom>
-          <a:noFill/>
-          <a:ln/>
-        </p:spPr>
-        <p:txBody>
-          <a:bodyPr wrap="square" lIns="0" tIns="0" rIns="0" bIns="0" rtlCol="0" anchor="ctr"/>
-          <a:lstStyle/>
-          <a:p>
-            <a:pPr marL="0" indent="0">
-              <a:buNone/>
-            </a:pPr>
-            <a:r>
-              <a:rPr lang="en-US" sz="1300" b="1" dirty="0">
-                <a:solidFill>
-                  <a:srgbClr val="3FB6A8"/>
-                </a:solidFill>
-                <a:latin typeface="JetBrains Mono" pitchFamily="34" charset="0"/>
-                <a:ea typeface="JetBrains Mono" pitchFamily="34" charset="-122"/>
-                <a:cs typeface="JetBrains Mono" pitchFamily="34" charset="-120"/>
-              </a:rPr>
-              <a:t>✓ </a:t>
-            </a:r>
-            <a:r>
-              <a:rPr lang="en-US" sz="1300" dirty="0">
-                <a:solidFill>
-                  <a:srgbClr val="9AA3AF"/>
-                </a:solidFill>
-                <a:latin typeface="JetBrains Mono" pitchFamily="34" charset="0"/>
-                <a:ea typeface="JetBrains Mono" pitchFamily="34" charset="-122"/>
-                <a:cs typeface="JetBrains Mono" pitchFamily="34" charset="-120"/>
-              </a:rPr>
-              <a:t>Logged in to github.com as you</a:t>
-            </a:r>
-            <a:endParaRPr lang="en-US" sz="1300" dirty="0"/>
-          </a:p>
-        </p:txBody>
-      </p:sp>
-      <p:sp>
-        <p:nvSpPr>
-          <p:cNvPr id="15" name="Text 13"/>
-          <p:cNvSpPr/>
-          <p:nvPr/>
-        </p:nvSpPr>
-        <p:spPr>
-          <a:xfrm>
-            <a:off x="914400" y="4937760"/>
-            <a:ext cx="6583680" cy="365760"/>
-          </a:xfrm>
-          <a:prstGeom prst="rect">
-            <a:avLst/>
-          </a:prstGeom>
-          <a:noFill/>
-          <a:ln/>
-        </p:spPr>
-        <p:txBody>
-          <a:bodyPr wrap="square" lIns="0" tIns="0" rIns="0" bIns="0" rtlCol="0" anchor="ctr"/>
-          <a:lstStyle/>
-          <a:p>
-            <a:pPr marL="0" indent="0">
-              <a:buNone/>
-            </a:pPr>
-            <a:r>
-              <a:rPr lang="en-US" sz="1800" b="1" dirty="0">
-                <a:solidFill>
-                  <a:srgbClr val="3FB6A8"/>
-                </a:solidFill>
-                <a:latin typeface="JetBrains Mono" pitchFamily="34" charset="0"/>
-                <a:ea typeface="JetBrains Mono" pitchFamily="34" charset="-122"/>
-                <a:cs typeface="JetBrains Mono" pitchFamily="34" charset="-120"/>
-              </a:rPr>
-              <a:t>$ </a:t>
-            </a:r>
-            <a:r>
-              <a:rPr lang="en-US" sz="1800" b="1" dirty="0">
-                <a:solidFill>
-                  <a:srgbClr val="FFFFFF"/>
-                </a:solidFill>
-                <a:latin typeface="JetBrains Mono" pitchFamily="34" charset="0"/>
-                <a:ea typeface="JetBrains Mono" pitchFamily="34" charset="-122"/>
-                <a:cs typeface="JetBrains Mono" pitchFamily="34" charset="-120"/>
-              </a:rPr>
-              <a:t>node --version</a:t>
-            </a:r>
-            <a:endParaRPr lang="en-US" sz="1800" dirty="0"/>
-          </a:p>
-        </p:txBody>
-      </p:sp>
-      <p:sp>
-        <p:nvSpPr>
-          <p:cNvPr id="16" name="Text 14"/>
-          <p:cNvSpPr/>
-          <p:nvPr/>
-        </p:nvSpPr>
-        <p:spPr>
-          <a:xfrm>
-            <a:off x="1097280" y="5349240"/>
-            <a:ext cx="6400800" cy="365760"/>
-          </a:xfrm>
-          <a:prstGeom prst="rect">
-            <a:avLst/>
-          </a:prstGeom>
-          <a:noFill/>
-          <a:ln/>
-        </p:spPr>
-        <p:txBody>
-          <a:bodyPr wrap="square" lIns="0" tIns="0" rIns="0" bIns="0" rtlCol="0" anchor="ctr"/>
-          <a:lstStyle/>
-          <a:p>
-            <a:pPr marL="0" indent="0">
-              <a:buNone/>
-            </a:pPr>
-            <a:r>
-              <a:rPr lang="en-US" sz="1300" b="1" dirty="0">
-                <a:solidFill>
-                  <a:srgbClr val="3FB6A8"/>
-                </a:solidFill>
-                <a:latin typeface="JetBrains Mono" pitchFamily="34" charset="0"/>
-                <a:ea typeface="JetBrains Mono" pitchFamily="34" charset="-122"/>
-                <a:cs typeface="JetBrains Mono" pitchFamily="34" charset="-120"/>
-              </a:rPr>
-              <a:t>✓ </a:t>
-            </a:r>
-            <a:r>
-              <a:rPr lang="en-US" sz="1300" dirty="0">
-                <a:solidFill>
-                  <a:srgbClr val="9AA3AF"/>
-                </a:solidFill>
-                <a:latin typeface="JetBrains Mono" pitchFamily="34" charset="0"/>
-                <a:ea typeface="JetBrains Mono" pitchFamily="34" charset="-122"/>
-                <a:cs typeface="JetBrains Mono" pitchFamily="34" charset="-120"/>
-              </a:rPr>
-              <a:t>v20.x or newer</a:t>
-            </a:r>
-            <a:endParaRPr lang="en-US" sz="1300" dirty="0"/>
-          </a:p>
-        </p:txBody>
-      </p:sp>
-      <p:sp>
-        <p:nvSpPr>
-          <p:cNvPr id="17" name="Shape 15"/>
-          <p:cNvSpPr/>
-          <p:nvPr/>
-        </p:nvSpPr>
-        <p:spPr>
-          <a:xfrm>
-            <a:off x="8138160" y="2468880"/>
-            <a:ext cx="3474720" cy="3657600"/>
-          </a:xfrm>
-          <a:prstGeom prst="rect">
-            <a:avLst/>
-          </a:prstGeom>
-          <a:solidFill>
-            <a:srgbClr val="FFFFFF"/>
-          </a:solidFill>
-          <a:ln w="6350">
-            <a:solidFill>
-              <a:srgbClr val="E2DFD8"/>
-            </a:solidFill>
-            <a:prstDash val="solid"/>
-          </a:ln>
-        </p:spPr>
-        <p:txBody>
-          <a:bodyPr/>
-          <a:lstStyle/>
-          <a:p>
-            <a:endParaRPr lang="en-US"/>
-          </a:p>
-        </p:txBody>
-      </p:sp>
-      <p:sp>
-        <p:nvSpPr>
-          <p:cNvPr id="18" name="Shape 16"/>
-          <p:cNvSpPr/>
-          <p:nvPr/>
-        </p:nvSpPr>
-        <p:spPr>
-          <a:xfrm>
-            <a:off x="8138160" y="2468880"/>
-            <a:ext cx="3474720" cy="73152"/>
-          </a:xfrm>
-          <a:prstGeom prst="rect">
-            <a:avLst/>
-          </a:prstGeom>
-          <a:solidFill>
-            <a:srgbClr val="E89B3C"/>
-          </a:solidFill>
-          <a:ln/>
-        </p:spPr>
-        <p:txBody>
-          <a:bodyPr/>
-          <a:lstStyle/>
-          <a:p>
-            <a:endParaRPr lang="en-US"/>
-          </a:p>
-        </p:txBody>
-      </p:sp>
-      <p:sp>
-        <p:nvSpPr>
-          <p:cNvPr id="19" name="Text 17"/>
-          <p:cNvSpPr/>
-          <p:nvPr/>
-        </p:nvSpPr>
-        <p:spPr>
-          <a:xfrm>
-            <a:off x="8412480" y="2788920"/>
-            <a:ext cx="2926080" cy="274320"/>
-          </a:xfrm>
-          <a:prstGeom prst="rect">
-            <a:avLst/>
-          </a:prstGeom>
-          <a:noFill/>
-          <a:ln/>
-        </p:spPr>
-        <p:txBody>
-          <a:bodyPr wrap="square" lIns="0" tIns="0" rIns="0" bIns="0" rtlCol="0" anchor="ctr"/>
-          <a:lstStyle/>
-          <a:p>
-            <a:pPr marL="0" indent="0">
-              <a:buNone/>
-            </a:pPr>
-            <a:r>
-              <a:rPr lang="en-US" sz="1000" b="1" kern="0" spc="600" dirty="0">
-                <a:solidFill>
-                  <a:srgbClr val="E89B3C"/>
-                </a:solidFill>
-                <a:latin typeface="Inter" pitchFamily="34" charset="0"/>
-                <a:ea typeface="Inter" pitchFamily="34" charset="-122"/>
-                <a:cs typeface="Inter" pitchFamily="34" charset="-120"/>
-              </a:rPr>
-              <a:t>AI Help</a:t>
-            </a:r>
-            <a:endParaRPr lang="en-US" sz="1000" dirty="0"/>
-          </a:p>
-        </p:txBody>
-      </p:sp>
-      <p:sp>
-        <p:nvSpPr>
-          <p:cNvPr id="20" name="Text 18"/>
-          <p:cNvSpPr/>
-          <p:nvPr/>
-        </p:nvSpPr>
-        <p:spPr>
-          <a:xfrm>
-            <a:off x="8412480" y="3108960"/>
-            <a:ext cx="2926080" cy="548640"/>
-          </a:xfrm>
-          <a:prstGeom prst="rect">
-            <a:avLst/>
-          </a:prstGeom>
-          <a:noFill/>
-          <a:ln/>
-        </p:spPr>
-        <p:txBody>
-          <a:bodyPr wrap="square" lIns="0" tIns="0" rIns="0" bIns="0" rtlCol="0" anchor="ctr"/>
-          <a:lstStyle/>
-          <a:p>
-            <a:pPr marL="0" indent="0">
-              <a:buNone/>
-            </a:pPr>
-            <a:r>
-              <a:rPr lang="en-US" sz="2400" b="1" dirty="0">
-                <a:solidFill>
-                  <a:srgbClr val="1F2937"/>
-                </a:solidFill>
-                <a:latin typeface="Montserrat" pitchFamily="34" charset="0"/>
-                <a:ea typeface="Montserrat" pitchFamily="34" charset="-122"/>
-                <a:cs typeface="Montserrat" pitchFamily="34" charset="-120"/>
-              </a:rPr>
-              <a:t>Tripp &amp; Patrick</a:t>
-            </a:r>
-          </a:p>
-          <a:p>
-            <a:pPr marL="0" indent="0">
-              <a:buNone/>
-            </a:pPr>
-            <a:r>
-              <a:rPr lang="en-US" sz="2400" b="1" dirty="0">
-                <a:solidFill>
-                  <a:srgbClr val="1F2937"/>
-                </a:solidFill>
-                <a:latin typeface="Montserrat" pitchFamily="34" charset="0"/>
-              </a:rPr>
-              <a:t>Jason &amp; Matt</a:t>
-            </a:r>
-            <a:endParaRPr lang="en-US" sz="2400" dirty="0"/>
-          </a:p>
-        </p:txBody>
-      </p:sp>
-      <p:sp>
-        <p:nvSpPr>
-          <p:cNvPr id="21" name="Text 19"/>
-          <p:cNvSpPr/>
-          <p:nvPr/>
-        </p:nvSpPr>
-        <p:spPr>
-          <a:xfrm>
-            <a:off x="8412480" y="3703320"/>
-            <a:ext cx="2926080" cy="365760"/>
-          </a:xfrm>
-          <a:prstGeom prst="rect">
-            <a:avLst/>
-          </a:prstGeom>
-          <a:noFill/>
-          <a:ln/>
-        </p:spPr>
-        <p:txBody>
-          <a:bodyPr wrap="square" lIns="0" tIns="0" rIns="0" bIns="0" rtlCol="0" anchor="ctr"/>
-          <a:lstStyle/>
-          <a:p>
-            <a:pPr marL="0" indent="0">
-              <a:buNone/>
-            </a:pPr>
-            <a:r>
-              <a:rPr lang="en-US" sz="1300" i="1" dirty="0">
-                <a:solidFill>
-                  <a:srgbClr val="6B7280"/>
-                </a:solidFill>
-                <a:latin typeface="Inter" pitchFamily="34" charset="0"/>
-                <a:ea typeface="Inter" pitchFamily="34" charset="-122"/>
-                <a:cs typeface="Inter" pitchFamily="34" charset="-120"/>
-              </a:rPr>
-              <a:t>Standing by at every break.</a:t>
-            </a:r>
-            <a:endParaRPr lang="en-US" sz="1300" dirty="0"/>
-          </a:p>
-        </p:txBody>
-      </p:sp>
-      <p:sp>
-        <p:nvSpPr>
-          <p:cNvPr id="22" name="Text 20"/>
-          <p:cNvSpPr/>
-          <p:nvPr/>
-        </p:nvSpPr>
-        <p:spPr>
-          <a:xfrm>
-            <a:off x="8412480" y="4251960"/>
-            <a:ext cx="2926080" cy="1645920"/>
-          </a:xfrm>
-          <a:prstGeom prst="rect">
-            <a:avLst/>
-          </a:prstGeom>
-          <a:noFill/>
-          <a:ln/>
-        </p:spPr>
-        <p:txBody>
-          <a:bodyPr wrap="square" lIns="0" tIns="0" rIns="0" bIns="0" rtlCol="0" anchor="ctr"/>
-          <a:lstStyle/>
-          <a:p>
-            <a:pPr marL="0" indent="0">
-              <a:buNone/>
-            </a:pPr>
-            <a:r>
-              <a:rPr lang="en-US" sz="1300" b="1" dirty="0">
-                <a:solidFill>
-                  <a:srgbClr val="1F2937"/>
-                </a:solidFill>
-                <a:latin typeface="Inter" pitchFamily="34" charset="0"/>
-                <a:ea typeface="Inter" pitchFamily="34" charset="-122"/>
-                <a:cs typeface="Inter" pitchFamily="34" charset="-120"/>
-              </a:rPr>
-              <a:t>If any of those three are red or missing – turn your name plate vertical.</a:t>
-            </a:r>
-            <a:endParaRPr lang="en-US" sz="1300" dirty="0"/>
-          </a:p>
-          <a:p>
-            <a:pPr marL="0" indent="0">
-              <a:buNone/>
-            </a:pPr>
-            <a:r>
-              <a:rPr lang="en-US" sz="1300" dirty="0">
-                <a:solidFill>
-                  <a:srgbClr val="000000"/>
-                </a:solidFill>
-                <a:latin typeface="Inter" pitchFamily="34" charset="0"/>
-                <a:ea typeface="Inter" pitchFamily="34" charset="-122"/>
-                <a:cs typeface="Inter" pitchFamily="34" charset="-120"/>
-              </a:rPr>
-              <a:t> </a:t>
-            </a:r>
-            <a:endParaRPr lang="en-US" sz="1300" dirty="0"/>
-          </a:p>
-          <a:p>
-            <a:pPr marL="0" indent="0">
-              <a:buNone/>
-            </a:pPr>
-            <a:r>
-              <a:rPr lang="en-US" sz="1300" dirty="0">
-                <a:solidFill>
-                  <a:srgbClr val="6B7280"/>
-                </a:solidFill>
-                <a:latin typeface="Inter" pitchFamily="34" charset="0"/>
-                <a:ea typeface="Inter" pitchFamily="34" charset="-122"/>
-                <a:cs typeface="Inter" pitchFamily="34" charset="-120"/>
-              </a:rPr>
-              <a:t>Anthropic account, Claude Code CLI, and GitHub CLI unlock the rest of the workshop.</a:t>
-            </a:r>
-            <a:endParaRPr lang="en-US" sz="1300" dirty="0"/>
-          </a:p>
-        </p:txBody>
-      </p:sp>
-      <p:sp>
-        <p:nvSpPr>
-          <p:cNvPr id="23" name="Text 21"/>
-          <p:cNvSpPr/>
-          <p:nvPr/>
-        </p:nvSpPr>
-        <p:spPr>
-          <a:xfrm>
-            <a:off x="457200" y="6446520"/>
-            <a:ext cx="7315200" cy="274320"/>
-          </a:xfrm>
-          <a:prstGeom prst="rect">
-            <a:avLst/>
-          </a:prstGeom>
-          <a:noFill/>
-          <a:ln/>
-        </p:spPr>
-        <p:txBody>
-          <a:bodyPr wrap="square" lIns="0" tIns="0" rIns="0" bIns="0" rtlCol="0" anchor="ctr"/>
-          <a:lstStyle/>
-          <a:p>
-            <a:pPr marL="0" indent="0">
-              <a:buNone/>
-            </a:pPr>
-            <a:r>
-              <a:rPr lang="en-US" sz="900" kern="0" spc="300" dirty="0">
-                <a:solidFill>
-                  <a:srgbClr val="6B7280"/>
-                </a:solidFill>
-                <a:latin typeface="Inter" pitchFamily="34" charset="0"/>
-                <a:ea typeface="Inter" pitchFamily="34" charset="-122"/>
-                <a:cs typeface="Inter" pitchFamily="34" charset="-120"/>
-              </a:rPr>
-              <a:t>01 · WELCOME &amp; KICKOFF</a:t>
-            </a:r>
-            <a:endParaRPr lang="en-US" sz="900" dirty="0"/>
-          </a:p>
-        </p:txBody>
-      </p:sp>
-      <p:sp>
-        <p:nvSpPr>
-          <p:cNvPr id="24" name="Text 22"/>
-          <p:cNvSpPr/>
-          <p:nvPr/>
-        </p:nvSpPr>
-        <p:spPr>
-          <a:xfrm>
-            <a:off x="8076895" y="6446520"/>
-            <a:ext cx="3657600" cy="274320"/>
-          </a:xfrm>
-          <a:prstGeom prst="rect">
-            <a:avLst/>
-          </a:prstGeom>
-          <a:noFill/>
-          <a:ln/>
-        </p:spPr>
-        <p:txBody>
-          <a:bodyPr wrap="square" lIns="0" tIns="0" rIns="0" bIns="0" rtlCol="0" anchor="ctr"/>
-          <a:lstStyle/>
-          <a:p>
-            <a:pPr marL="0" indent="0" algn="r">
-              <a:buNone/>
-            </a:pPr>
-            <a:r>
-              <a:rPr lang="en-US" sz="900" kern="0" spc="300" dirty="0">
-                <a:solidFill>
-                  <a:srgbClr val="6B7280"/>
-                </a:solidFill>
-                <a:latin typeface="Inter" pitchFamily="34" charset="0"/>
-                <a:ea typeface="Inter" pitchFamily="34" charset="-122"/>
-                <a:cs typeface="Inter" pitchFamily="34" charset="-120"/>
-              </a:rPr>
-              <a:t>PREREQUISITES · GREEN BY 10:00</a:t>
-            </a:r>
-            <a:endParaRPr lang="en-US" sz="900" dirty="0"/>
-          </a:p>
-        </p:txBody>
-      </p:sp>
-    </p:spTree>
-  </p:cSld>
-  <p:clrMapOvr>
-    <a:masterClrMapping/>
-  </p:clrMapOvr>
-</p:sld>
-</file>
-
-<file path=ppt/slides/slide11.xml><?xml version="1.0" encoding="utf-8"?>
-<p:sld xmlns:a="http://schemas.openxmlformats.org/drawingml/2006/main" xmlns:r="http://schemas.openxmlformats.org/officeDocument/2006/relationships" xmlns:p="http://schemas.openxmlformats.org/presentationml/2006/main">
   <p:cSld name="Slide 10">
     <p:bg>
       <p:bgPr>
@@ -5132,990 +4118,6 @@
 
 <file path=ppt/slides/slide5.xml><?xml version="1.0" encoding="utf-8"?>
 <p:sld xmlns:a="http://schemas.openxmlformats.org/drawingml/2006/main" xmlns:r="http://schemas.openxmlformats.org/officeDocument/2006/relationships" xmlns:p="http://schemas.openxmlformats.org/presentationml/2006/main">
-  <p:cSld name="Slide 4">
-    <p:bg>
-      <p:bgPr>
-        <a:solidFill>
-          <a:srgbClr val="F5F2ED"/>
-        </a:solidFill>
-        <a:effectLst/>
-      </p:bgPr>
-    </p:bg>
-    <p:spTree>
-      <p:nvGrpSpPr>
-        <p:cNvPr id="1" name=""/>
-        <p:cNvGrpSpPr/>
-        <p:nvPr/>
-      </p:nvGrpSpPr>
-      <p:grpSpPr>
-        <a:xfrm>
-          <a:off x="0" y="0"/>
-          <a:ext cx="0" cy="0"/>
-          <a:chOff x="0" y="0"/>
-          <a:chExt cx="0" cy="0"/>
-        </a:xfrm>
-      </p:grpSpPr>
-      <p:sp>
-        <p:nvSpPr>
-          <p:cNvPr id="2" name="Text 0"/>
-          <p:cNvSpPr/>
-          <p:nvPr/>
-        </p:nvSpPr>
-        <p:spPr>
-          <a:xfrm>
-            <a:off x="548640" y="548640"/>
-            <a:ext cx="5486400" cy="274320"/>
-          </a:xfrm>
-          <a:prstGeom prst="rect">
-            <a:avLst/>
-          </a:prstGeom>
-          <a:noFill/>
-          <a:ln/>
-        </p:spPr>
-        <p:txBody>
-          <a:bodyPr wrap="square" lIns="0" tIns="0" rIns="0" bIns="0" rtlCol="0" anchor="ctr"/>
-          <a:lstStyle/>
-          <a:p>
-            <a:pPr marL="0" indent="0">
-              <a:buNone/>
-            </a:pPr>
-            <a:r>
-              <a:rPr lang="en-US" sz="1000" b="1" kern="0" spc="600" dirty="0">
-                <a:solidFill>
-                  <a:srgbClr val="E89B3C"/>
-                </a:solidFill>
-                <a:latin typeface="Inter" pitchFamily="34" charset="0"/>
-                <a:ea typeface="Inter" pitchFamily="34" charset="-122"/>
-                <a:cs typeface="Inter" pitchFamily="34" charset="-120"/>
-              </a:rPr>
-              <a:t>WHAT WE'LL DO</a:t>
-            </a:r>
-            <a:endParaRPr lang="en-US" sz="1000" dirty="0"/>
-          </a:p>
-        </p:txBody>
-      </p:sp>
-      <p:sp>
-        <p:nvSpPr>
-          <p:cNvPr id="3" name="Text 1"/>
-          <p:cNvSpPr/>
-          <p:nvPr/>
-        </p:nvSpPr>
-        <p:spPr>
-          <a:xfrm>
-            <a:off x="548640" y="914400"/>
-            <a:ext cx="10058400" cy="822960"/>
-          </a:xfrm>
-          <a:prstGeom prst="rect">
-            <a:avLst/>
-          </a:prstGeom>
-          <a:noFill/>
-          <a:ln/>
-        </p:spPr>
-        <p:txBody>
-          <a:bodyPr wrap="square" lIns="0" tIns="0" rIns="0" bIns="0" rtlCol="0" anchor="ctr"/>
-          <a:lstStyle/>
-          <a:p>
-            <a:pPr marL="0" indent="0">
-              <a:buNone/>
-            </a:pPr>
-            <a:r>
-              <a:rPr lang="en-US" sz="3600" b="1" dirty="0">
-                <a:solidFill>
-                  <a:srgbClr val="1F2937"/>
-                </a:solidFill>
-                <a:latin typeface="Montserrat" pitchFamily="34" charset="0"/>
-                <a:ea typeface="Montserrat" pitchFamily="34" charset="-122"/>
-                <a:cs typeface="Montserrat" pitchFamily="34" charset="-120"/>
-              </a:rPr>
-              <a:t>Outline · 30 minutes.</a:t>
-            </a:r>
-            <a:endParaRPr lang="en-US" sz="3600" dirty="0"/>
-          </a:p>
-        </p:txBody>
-      </p:sp>
-      <p:sp>
-        <p:nvSpPr>
-          <p:cNvPr id="4" name="Shape 2"/>
-          <p:cNvSpPr/>
-          <p:nvPr/>
-        </p:nvSpPr>
-        <p:spPr>
-          <a:xfrm>
-            <a:off x="548640" y="2542032"/>
-            <a:ext cx="11094415" cy="0"/>
-          </a:xfrm>
-          <a:prstGeom prst="line">
-            <a:avLst/>
-          </a:prstGeom>
-          <a:noFill/>
-          <a:ln w="9525">
-            <a:solidFill>
-              <a:srgbClr val="E2DFD8"/>
-            </a:solidFill>
-            <a:prstDash val="solid"/>
-          </a:ln>
-        </p:spPr>
-        <p:txBody>
-          <a:bodyPr/>
-          <a:lstStyle/>
-          <a:p>
-            <a:endParaRPr lang="en-US"/>
-          </a:p>
-        </p:txBody>
-      </p:sp>
-      <p:sp>
-        <p:nvSpPr>
-          <p:cNvPr id="5" name="Text 3"/>
-          <p:cNvSpPr/>
-          <p:nvPr/>
-        </p:nvSpPr>
-        <p:spPr>
-          <a:xfrm>
-            <a:off x="548640" y="2011680"/>
-            <a:ext cx="731520" cy="548640"/>
-          </a:xfrm>
-          <a:prstGeom prst="rect">
-            <a:avLst/>
-          </a:prstGeom>
-          <a:noFill/>
-          <a:ln/>
-        </p:spPr>
-        <p:txBody>
-          <a:bodyPr wrap="square" lIns="0" tIns="0" rIns="0" bIns="0" rtlCol="0" anchor="ctr"/>
-          <a:lstStyle/>
-          <a:p>
-            <a:pPr marL="0" indent="0">
-              <a:buNone/>
-            </a:pPr>
-            <a:r>
-              <a:rPr lang="en-US" sz="1600" b="1" dirty="0">
-                <a:solidFill>
-                  <a:srgbClr val="E89B3C"/>
-                </a:solidFill>
-                <a:latin typeface="Montserrat" pitchFamily="34" charset="0"/>
-                <a:ea typeface="Montserrat" pitchFamily="34" charset="-122"/>
-                <a:cs typeface="Montserrat" pitchFamily="34" charset="-120"/>
-              </a:rPr>
-              <a:t>01</a:t>
-            </a:r>
-            <a:endParaRPr lang="en-US" sz="1600" dirty="0"/>
-          </a:p>
-        </p:txBody>
-      </p:sp>
-      <p:sp>
-        <p:nvSpPr>
-          <p:cNvPr id="6" name="Text 4"/>
-          <p:cNvSpPr/>
-          <p:nvPr/>
-        </p:nvSpPr>
-        <p:spPr>
-          <a:xfrm>
-            <a:off x="1371600" y="2011680"/>
-            <a:ext cx="8686800" cy="548640"/>
-          </a:xfrm>
-          <a:prstGeom prst="rect">
-            <a:avLst/>
-          </a:prstGeom>
-          <a:noFill/>
-          <a:ln/>
-        </p:spPr>
-        <p:txBody>
-          <a:bodyPr wrap="square" lIns="0" tIns="0" rIns="0" bIns="0" rtlCol="0" anchor="ctr"/>
-          <a:lstStyle/>
-          <a:p>
-            <a:pPr marL="0" indent="0">
-              <a:buNone/>
-            </a:pPr>
-            <a:r>
-              <a:rPr lang="en-US" sz="1600" dirty="0">
-                <a:solidFill>
-                  <a:srgbClr val="1F2937"/>
-                </a:solidFill>
-                <a:latin typeface="Inter" pitchFamily="34" charset="0"/>
-                <a:ea typeface="Inter" pitchFamily="34" charset="-122"/>
-                <a:cs typeface="Inter" pitchFamily="34" charset="-120"/>
-              </a:rPr>
-              <a:t>Welcome,  prayer, Devo</a:t>
-            </a:r>
-            <a:endParaRPr lang="en-US" sz="1600" dirty="0"/>
-          </a:p>
-        </p:txBody>
-      </p:sp>
-      <p:sp>
-        <p:nvSpPr>
-          <p:cNvPr id="7" name="Text 5"/>
-          <p:cNvSpPr/>
-          <p:nvPr/>
-        </p:nvSpPr>
-        <p:spPr>
-          <a:xfrm>
-            <a:off x="10088575" y="2011680"/>
-            <a:ext cx="1554480" cy="548640"/>
-          </a:xfrm>
-          <a:prstGeom prst="rect">
-            <a:avLst/>
-          </a:prstGeom>
-          <a:noFill/>
-          <a:ln/>
-        </p:spPr>
-        <p:txBody>
-          <a:bodyPr wrap="square" lIns="0" tIns="0" rIns="0" bIns="0" rtlCol="0" anchor="ctr"/>
-          <a:lstStyle/>
-          <a:p>
-            <a:pPr marL="0" indent="0" algn="r">
-              <a:buNone/>
-            </a:pPr>
-            <a:r>
-              <a:rPr lang="en-US" sz="1400" kern="0" spc="200" dirty="0">
-                <a:solidFill>
-                  <a:srgbClr val="6B7280"/>
-                </a:solidFill>
-                <a:latin typeface="Inter" pitchFamily="34" charset="0"/>
-                <a:ea typeface="Inter" pitchFamily="34" charset="-122"/>
-                <a:cs typeface="Inter" pitchFamily="34" charset="-120"/>
-              </a:rPr>
-              <a:t>10 min</a:t>
-            </a:r>
-            <a:endParaRPr lang="en-US" sz="1400" dirty="0"/>
-          </a:p>
-        </p:txBody>
-      </p:sp>
-      <p:sp>
-        <p:nvSpPr>
-          <p:cNvPr id="8" name="Shape 6"/>
-          <p:cNvSpPr/>
-          <p:nvPr/>
-        </p:nvSpPr>
-        <p:spPr>
-          <a:xfrm>
-            <a:off x="548640" y="3090672"/>
-            <a:ext cx="11094415" cy="0"/>
-          </a:xfrm>
-          <a:prstGeom prst="line">
-            <a:avLst/>
-          </a:prstGeom>
-          <a:noFill/>
-          <a:ln w="9525">
-            <a:solidFill>
-              <a:srgbClr val="E2DFD8"/>
-            </a:solidFill>
-            <a:prstDash val="solid"/>
-          </a:ln>
-        </p:spPr>
-        <p:txBody>
-          <a:bodyPr/>
-          <a:lstStyle/>
-          <a:p>
-            <a:endParaRPr lang="en-US"/>
-          </a:p>
-        </p:txBody>
-      </p:sp>
-      <p:sp>
-        <p:nvSpPr>
-          <p:cNvPr id="9" name="Text 7"/>
-          <p:cNvSpPr/>
-          <p:nvPr/>
-        </p:nvSpPr>
-        <p:spPr>
-          <a:xfrm>
-            <a:off x="548640" y="2560320"/>
-            <a:ext cx="731520" cy="548640"/>
-          </a:xfrm>
-          <a:prstGeom prst="rect">
-            <a:avLst/>
-          </a:prstGeom>
-          <a:noFill/>
-          <a:ln/>
-        </p:spPr>
-        <p:txBody>
-          <a:bodyPr wrap="square" lIns="0" tIns="0" rIns="0" bIns="0" rtlCol="0" anchor="ctr"/>
-          <a:lstStyle/>
-          <a:p>
-            <a:pPr marL="0" indent="0">
-              <a:buNone/>
-            </a:pPr>
-            <a:r>
-              <a:rPr lang="en-US" sz="1600" b="1" dirty="0">
-                <a:solidFill>
-                  <a:srgbClr val="E89B3C"/>
-                </a:solidFill>
-                <a:latin typeface="Montserrat" pitchFamily="34" charset="0"/>
-                <a:ea typeface="Montserrat" pitchFamily="34" charset="-122"/>
-                <a:cs typeface="Montserrat" pitchFamily="34" charset="-120"/>
-              </a:rPr>
-              <a:t>02</a:t>
-            </a:r>
-            <a:endParaRPr lang="en-US" sz="1600" dirty="0"/>
-          </a:p>
-        </p:txBody>
-      </p:sp>
-      <p:sp>
-        <p:nvSpPr>
-          <p:cNvPr id="10" name="Text 8"/>
-          <p:cNvSpPr/>
-          <p:nvPr/>
-        </p:nvSpPr>
-        <p:spPr>
-          <a:xfrm>
-            <a:off x="1371600" y="2560320"/>
-            <a:ext cx="8686800" cy="548640"/>
-          </a:xfrm>
-          <a:prstGeom prst="rect">
-            <a:avLst/>
-          </a:prstGeom>
-          <a:noFill/>
-          <a:ln/>
-        </p:spPr>
-        <p:txBody>
-          <a:bodyPr wrap="square" lIns="0" tIns="0" rIns="0" bIns="0" rtlCol="0" anchor="ctr"/>
-          <a:lstStyle/>
-          <a:p>
-            <a:pPr marL="0" indent="0">
-              <a:buNone/>
-            </a:pPr>
-            <a:r>
-              <a:rPr lang="en-US" sz="1600" dirty="0">
-                <a:solidFill>
-                  <a:srgbClr val="1F2937"/>
-                </a:solidFill>
-                <a:latin typeface="Inter" pitchFamily="34" charset="0"/>
-                <a:ea typeface="Inter" pitchFamily="34" charset="-122"/>
-                <a:cs typeface="Inter" pitchFamily="34" charset="-120"/>
-              </a:rPr>
-              <a:t>Who's in the room / why this matters</a:t>
-            </a:r>
-            <a:endParaRPr lang="en-US" sz="1600" dirty="0"/>
-          </a:p>
-        </p:txBody>
-      </p:sp>
-      <p:sp>
-        <p:nvSpPr>
-          <p:cNvPr id="11" name="Text 9"/>
-          <p:cNvSpPr/>
-          <p:nvPr/>
-        </p:nvSpPr>
-        <p:spPr>
-          <a:xfrm>
-            <a:off x="10088575" y="2560320"/>
-            <a:ext cx="1554480" cy="548640"/>
-          </a:xfrm>
-          <a:prstGeom prst="rect">
-            <a:avLst/>
-          </a:prstGeom>
-          <a:noFill/>
-          <a:ln/>
-        </p:spPr>
-        <p:txBody>
-          <a:bodyPr wrap="square" lIns="0" tIns="0" rIns="0" bIns="0" rtlCol="0" anchor="ctr"/>
-          <a:lstStyle/>
-          <a:p>
-            <a:pPr marL="0" indent="0" algn="r">
-              <a:buNone/>
-            </a:pPr>
-            <a:r>
-              <a:rPr lang="en-US" sz="1400" kern="0" spc="200" dirty="0">
-                <a:solidFill>
-                  <a:srgbClr val="6B7280"/>
-                </a:solidFill>
-                <a:latin typeface="Inter" pitchFamily="34" charset="0"/>
-                <a:ea typeface="Inter" pitchFamily="34" charset="-122"/>
-                <a:cs typeface="Inter" pitchFamily="34" charset="-120"/>
-              </a:rPr>
-              <a:t>5 min</a:t>
-            </a:r>
-            <a:endParaRPr lang="en-US" sz="1400" dirty="0"/>
-          </a:p>
-        </p:txBody>
-      </p:sp>
-      <p:sp>
-        <p:nvSpPr>
-          <p:cNvPr id="12" name="Shape 10"/>
-          <p:cNvSpPr/>
-          <p:nvPr/>
-        </p:nvSpPr>
-        <p:spPr>
-          <a:xfrm>
-            <a:off x="548640" y="3639312"/>
-            <a:ext cx="11094415" cy="0"/>
-          </a:xfrm>
-          <a:prstGeom prst="line">
-            <a:avLst/>
-          </a:prstGeom>
-          <a:noFill/>
-          <a:ln w="9525">
-            <a:solidFill>
-              <a:srgbClr val="E2DFD8"/>
-            </a:solidFill>
-            <a:prstDash val="solid"/>
-          </a:ln>
-        </p:spPr>
-        <p:txBody>
-          <a:bodyPr/>
-          <a:lstStyle/>
-          <a:p>
-            <a:endParaRPr lang="en-US"/>
-          </a:p>
-        </p:txBody>
-      </p:sp>
-      <p:sp>
-        <p:nvSpPr>
-          <p:cNvPr id="13" name="Text 11"/>
-          <p:cNvSpPr/>
-          <p:nvPr/>
-        </p:nvSpPr>
-        <p:spPr>
-          <a:xfrm>
-            <a:off x="548640" y="3108960"/>
-            <a:ext cx="731520" cy="548640"/>
-          </a:xfrm>
-          <a:prstGeom prst="rect">
-            <a:avLst/>
-          </a:prstGeom>
-          <a:noFill/>
-          <a:ln/>
-        </p:spPr>
-        <p:txBody>
-          <a:bodyPr wrap="square" lIns="0" tIns="0" rIns="0" bIns="0" rtlCol="0" anchor="ctr"/>
-          <a:lstStyle/>
-          <a:p>
-            <a:pPr marL="0" indent="0">
-              <a:buNone/>
-            </a:pPr>
-            <a:r>
-              <a:rPr lang="en-US" sz="1600" b="1" dirty="0">
-                <a:solidFill>
-                  <a:srgbClr val="E89B3C"/>
-                </a:solidFill>
-                <a:latin typeface="Montserrat" pitchFamily="34" charset="0"/>
-                <a:ea typeface="Montserrat" pitchFamily="34" charset="-122"/>
-                <a:cs typeface="Montserrat" pitchFamily="34" charset="-120"/>
-              </a:rPr>
-              <a:t>03</a:t>
-            </a:r>
-            <a:endParaRPr lang="en-US" sz="1600" dirty="0"/>
-          </a:p>
-        </p:txBody>
-      </p:sp>
-      <p:sp>
-        <p:nvSpPr>
-          <p:cNvPr id="14" name="Text 12"/>
-          <p:cNvSpPr/>
-          <p:nvPr/>
-        </p:nvSpPr>
-        <p:spPr>
-          <a:xfrm>
-            <a:off x="1371600" y="3108960"/>
-            <a:ext cx="8686800" cy="548640"/>
-          </a:xfrm>
-          <a:prstGeom prst="rect">
-            <a:avLst/>
-          </a:prstGeom>
-          <a:noFill/>
-          <a:ln/>
-        </p:spPr>
-        <p:txBody>
-          <a:bodyPr wrap="square" lIns="0" tIns="0" rIns="0" bIns="0" rtlCol="0" anchor="ctr"/>
-          <a:lstStyle/>
-          <a:p>
-            <a:pPr marL="0" indent="0">
-              <a:buNone/>
-            </a:pPr>
-            <a:r>
-              <a:rPr lang="en-US" sz="1600" dirty="0">
-                <a:solidFill>
-                  <a:srgbClr val="1F2937"/>
-                </a:solidFill>
-                <a:latin typeface="Inter" pitchFamily="34" charset="0"/>
-                <a:ea typeface="Inter" pitchFamily="34" charset="-122"/>
-                <a:cs typeface="Inter" pitchFamily="34" charset="-120"/>
-              </a:rPr>
-              <a:t>Short demo — two days in three minutes</a:t>
-            </a:r>
-            <a:endParaRPr lang="en-US" sz="1600" dirty="0"/>
-          </a:p>
-        </p:txBody>
-      </p:sp>
-      <p:sp>
-        <p:nvSpPr>
-          <p:cNvPr id="15" name="Text 13"/>
-          <p:cNvSpPr/>
-          <p:nvPr/>
-        </p:nvSpPr>
-        <p:spPr>
-          <a:xfrm>
-            <a:off x="10088575" y="3108960"/>
-            <a:ext cx="1554480" cy="548640"/>
-          </a:xfrm>
-          <a:prstGeom prst="rect">
-            <a:avLst/>
-          </a:prstGeom>
-          <a:noFill/>
-          <a:ln/>
-        </p:spPr>
-        <p:txBody>
-          <a:bodyPr wrap="square" lIns="0" tIns="0" rIns="0" bIns="0" rtlCol="0" anchor="ctr"/>
-          <a:lstStyle/>
-          <a:p>
-            <a:pPr marL="0" indent="0" algn="r">
-              <a:buNone/>
-            </a:pPr>
-            <a:r>
-              <a:rPr lang="en-US" sz="1400" kern="0" spc="200" dirty="0">
-                <a:solidFill>
-                  <a:srgbClr val="6B7280"/>
-                </a:solidFill>
-                <a:latin typeface="Inter" pitchFamily="34" charset="0"/>
-                <a:ea typeface="Inter" pitchFamily="34" charset="-122"/>
-                <a:cs typeface="Inter" pitchFamily="34" charset="-120"/>
-              </a:rPr>
-              <a:t>5 min</a:t>
-            </a:r>
-            <a:endParaRPr lang="en-US" sz="1400" dirty="0"/>
-          </a:p>
-        </p:txBody>
-      </p:sp>
-      <p:sp>
-        <p:nvSpPr>
-          <p:cNvPr id="16" name="Shape 14"/>
-          <p:cNvSpPr/>
-          <p:nvPr/>
-        </p:nvSpPr>
-        <p:spPr>
-          <a:xfrm>
-            <a:off x="548640" y="4187952"/>
-            <a:ext cx="11094415" cy="0"/>
-          </a:xfrm>
-          <a:prstGeom prst="line">
-            <a:avLst/>
-          </a:prstGeom>
-          <a:noFill/>
-          <a:ln w="9525">
-            <a:solidFill>
-              <a:srgbClr val="E2DFD8"/>
-            </a:solidFill>
-            <a:prstDash val="solid"/>
-          </a:ln>
-        </p:spPr>
-        <p:txBody>
-          <a:bodyPr/>
-          <a:lstStyle/>
-          <a:p>
-            <a:endParaRPr lang="en-US"/>
-          </a:p>
-        </p:txBody>
-      </p:sp>
-      <p:sp>
-        <p:nvSpPr>
-          <p:cNvPr id="17" name="Text 15"/>
-          <p:cNvSpPr/>
-          <p:nvPr/>
-        </p:nvSpPr>
-        <p:spPr>
-          <a:xfrm>
-            <a:off x="548640" y="3657600"/>
-            <a:ext cx="731520" cy="548640"/>
-          </a:xfrm>
-          <a:prstGeom prst="rect">
-            <a:avLst/>
-          </a:prstGeom>
-          <a:noFill/>
-          <a:ln/>
-        </p:spPr>
-        <p:txBody>
-          <a:bodyPr wrap="square" lIns="0" tIns="0" rIns="0" bIns="0" rtlCol="0" anchor="ctr"/>
-          <a:lstStyle/>
-          <a:p>
-            <a:pPr marL="0" indent="0">
-              <a:buNone/>
-            </a:pPr>
-            <a:r>
-              <a:rPr lang="en-US" sz="1600" b="1" dirty="0">
-                <a:solidFill>
-                  <a:srgbClr val="E89B3C"/>
-                </a:solidFill>
-                <a:latin typeface="Montserrat" pitchFamily="34" charset="0"/>
-                <a:ea typeface="Montserrat" pitchFamily="34" charset="-122"/>
-                <a:cs typeface="Montserrat" pitchFamily="34" charset="-120"/>
-              </a:rPr>
-              <a:t>04</a:t>
-            </a:r>
-            <a:endParaRPr lang="en-US" sz="1600" dirty="0"/>
-          </a:p>
-        </p:txBody>
-      </p:sp>
-      <p:sp>
-        <p:nvSpPr>
-          <p:cNvPr id="18" name="Text 16"/>
-          <p:cNvSpPr/>
-          <p:nvPr/>
-        </p:nvSpPr>
-        <p:spPr>
-          <a:xfrm>
-            <a:off x="1371600" y="3657600"/>
-            <a:ext cx="8686800" cy="548640"/>
-          </a:xfrm>
-          <a:prstGeom prst="rect">
-            <a:avLst/>
-          </a:prstGeom>
-          <a:noFill/>
-          <a:ln/>
-        </p:spPr>
-        <p:txBody>
-          <a:bodyPr wrap="square" lIns="0" tIns="0" rIns="0" bIns="0" rtlCol="0" anchor="ctr"/>
-          <a:lstStyle/>
-          <a:p>
-            <a:pPr marL="0" indent="0">
-              <a:buNone/>
-            </a:pPr>
-            <a:r>
-              <a:rPr lang="en-US" sz="1600" dirty="0">
-                <a:solidFill>
-                  <a:srgbClr val="1F2937"/>
-                </a:solidFill>
-                <a:latin typeface="Inter" pitchFamily="34" charset="0"/>
-                <a:ea typeface="Inter" pitchFamily="34" charset="-122"/>
-                <a:cs typeface="Inter" pitchFamily="34" charset="-120"/>
-              </a:rPr>
-              <a:t>Logistics — bathrooms, breaks, food, baseball</a:t>
-            </a:r>
-            <a:endParaRPr lang="en-US" sz="1600" dirty="0"/>
-          </a:p>
-        </p:txBody>
-      </p:sp>
-      <p:sp>
-        <p:nvSpPr>
-          <p:cNvPr id="19" name="Text 17"/>
-          <p:cNvSpPr/>
-          <p:nvPr/>
-        </p:nvSpPr>
-        <p:spPr>
-          <a:xfrm>
-            <a:off x="10088575" y="3657600"/>
-            <a:ext cx="1554480" cy="548640"/>
-          </a:xfrm>
-          <a:prstGeom prst="rect">
-            <a:avLst/>
-          </a:prstGeom>
-          <a:noFill/>
-          <a:ln/>
-        </p:spPr>
-        <p:txBody>
-          <a:bodyPr wrap="square" lIns="0" tIns="0" rIns="0" bIns="0" rtlCol="0" anchor="ctr"/>
-          <a:lstStyle/>
-          <a:p>
-            <a:pPr marL="0" indent="0" algn="r">
-              <a:buNone/>
-            </a:pPr>
-            <a:r>
-              <a:rPr lang="en-US" sz="1400" kern="0" spc="200" dirty="0">
-                <a:solidFill>
-                  <a:srgbClr val="6B7280"/>
-                </a:solidFill>
-                <a:latin typeface="Inter" pitchFamily="34" charset="0"/>
-                <a:ea typeface="Inter" pitchFamily="34" charset="-122"/>
-                <a:cs typeface="Inter" pitchFamily="34" charset="-120"/>
-              </a:rPr>
-              <a:t>5 min</a:t>
-            </a:r>
-            <a:endParaRPr lang="en-US" sz="1400" dirty="0"/>
-          </a:p>
-        </p:txBody>
-      </p:sp>
-      <p:sp>
-        <p:nvSpPr>
-          <p:cNvPr id="20" name="Shape 18"/>
-          <p:cNvSpPr/>
-          <p:nvPr/>
-        </p:nvSpPr>
-        <p:spPr>
-          <a:xfrm>
-            <a:off x="548640" y="4736592"/>
-            <a:ext cx="11094415" cy="0"/>
-          </a:xfrm>
-          <a:prstGeom prst="line">
-            <a:avLst/>
-          </a:prstGeom>
-          <a:noFill/>
-          <a:ln w="9525">
-            <a:solidFill>
-              <a:srgbClr val="E2DFD8"/>
-            </a:solidFill>
-            <a:prstDash val="solid"/>
-          </a:ln>
-        </p:spPr>
-        <p:txBody>
-          <a:bodyPr/>
-          <a:lstStyle/>
-          <a:p>
-            <a:endParaRPr lang="en-US"/>
-          </a:p>
-        </p:txBody>
-      </p:sp>
-      <p:sp>
-        <p:nvSpPr>
-          <p:cNvPr id="21" name="Text 19"/>
-          <p:cNvSpPr/>
-          <p:nvPr/>
-        </p:nvSpPr>
-        <p:spPr>
-          <a:xfrm>
-            <a:off x="548640" y="4206240"/>
-            <a:ext cx="731520" cy="548640"/>
-          </a:xfrm>
-          <a:prstGeom prst="rect">
-            <a:avLst/>
-          </a:prstGeom>
-          <a:noFill/>
-          <a:ln/>
-        </p:spPr>
-        <p:txBody>
-          <a:bodyPr wrap="square" lIns="0" tIns="0" rIns="0" bIns="0" rtlCol="0" anchor="ctr"/>
-          <a:lstStyle/>
-          <a:p>
-            <a:pPr marL="0" indent="0">
-              <a:buNone/>
-            </a:pPr>
-            <a:r>
-              <a:rPr lang="en-US" sz="1600" b="1" dirty="0">
-                <a:solidFill>
-                  <a:srgbClr val="E89B3C"/>
-                </a:solidFill>
-                <a:latin typeface="Montserrat" pitchFamily="34" charset="0"/>
-                <a:ea typeface="Montserrat" pitchFamily="34" charset="-122"/>
-                <a:cs typeface="Montserrat" pitchFamily="34" charset="-120"/>
-              </a:rPr>
-              <a:t>05</a:t>
-            </a:r>
-            <a:endParaRPr lang="en-US" sz="1600" dirty="0"/>
-          </a:p>
-        </p:txBody>
-      </p:sp>
-      <p:sp>
-        <p:nvSpPr>
-          <p:cNvPr id="22" name="Text 20"/>
-          <p:cNvSpPr/>
-          <p:nvPr/>
-        </p:nvSpPr>
-        <p:spPr>
-          <a:xfrm>
-            <a:off x="1371600" y="4206240"/>
-            <a:ext cx="8686800" cy="548640"/>
-          </a:xfrm>
-          <a:prstGeom prst="rect">
-            <a:avLst/>
-          </a:prstGeom>
-          <a:noFill/>
-          <a:ln/>
-        </p:spPr>
-        <p:txBody>
-          <a:bodyPr wrap="square" lIns="0" tIns="0" rIns="0" bIns="0" rtlCol="0" anchor="ctr"/>
-          <a:lstStyle/>
-          <a:p>
-            <a:pPr marL="0" indent="0">
-              <a:buNone/>
-            </a:pPr>
-            <a:r>
-              <a:rPr lang="en-US" sz="1600" dirty="0">
-                <a:solidFill>
-                  <a:srgbClr val="1F2937"/>
-                </a:solidFill>
-                <a:latin typeface="Inter" pitchFamily="34" charset="0"/>
-                <a:ea typeface="Inter" pitchFamily="34" charset="-122"/>
-                <a:cs typeface="Inter" pitchFamily="34" charset="-120"/>
-              </a:rPr>
-              <a:t>Goals for the two days</a:t>
-            </a:r>
-            <a:endParaRPr lang="en-US" sz="1600" dirty="0"/>
-          </a:p>
-        </p:txBody>
-      </p:sp>
-      <p:sp>
-        <p:nvSpPr>
-          <p:cNvPr id="23" name="Text 21"/>
-          <p:cNvSpPr/>
-          <p:nvPr/>
-        </p:nvSpPr>
-        <p:spPr>
-          <a:xfrm>
-            <a:off x="10088575" y="4206240"/>
-            <a:ext cx="1554480" cy="548640"/>
-          </a:xfrm>
-          <a:prstGeom prst="rect">
-            <a:avLst/>
-          </a:prstGeom>
-          <a:noFill/>
-          <a:ln/>
-        </p:spPr>
-        <p:txBody>
-          <a:bodyPr wrap="square" lIns="0" tIns="0" rIns="0" bIns="0" rtlCol="0" anchor="ctr"/>
-          <a:lstStyle/>
-          <a:p>
-            <a:pPr marL="0" indent="0" algn="r">
-              <a:buNone/>
-            </a:pPr>
-            <a:r>
-              <a:rPr lang="en-US" sz="1400" kern="0" spc="200" dirty="0">
-                <a:solidFill>
-                  <a:srgbClr val="6B7280"/>
-                </a:solidFill>
-                <a:latin typeface="Inter" pitchFamily="34" charset="0"/>
-                <a:ea typeface="Inter" pitchFamily="34" charset="-122"/>
-                <a:cs typeface="Inter" pitchFamily="34" charset="-120"/>
-              </a:rPr>
-              <a:t>5 min</a:t>
-            </a:r>
-            <a:endParaRPr lang="en-US" sz="1400" dirty="0"/>
-          </a:p>
-        </p:txBody>
-      </p:sp>
-      <p:sp>
-        <p:nvSpPr>
-          <p:cNvPr id="24" name="Shape 22"/>
-          <p:cNvSpPr/>
-          <p:nvPr/>
-        </p:nvSpPr>
-        <p:spPr>
-          <a:xfrm>
-            <a:off x="548640" y="5285232"/>
-            <a:ext cx="11094415" cy="0"/>
-          </a:xfrm>
-          <a:prstGeom prst="line">
-            <a:avLst/>
-          </a:prstGeom>
-          <a:noFill/>
-          <a:ln w="9525">
-            <a:solidFill>
-              <a:srgbClr val="E2DFD8"/>
-            </a:solidFill>
-            <a:prstDash val="solid"/>
-          </a:ln>
-        </p:spPr>
-        <p:txBody>
-          <a:bodyPr/>
-          <a:lstStyle/>
-          <a:p>
-            <a:endParaRPr lang="en-US"/>
-          </a:p>
-        </p:txBody>
-      </p:sp>
-      <p:sp>
-        <p:nvSpPr>
-          <p:cNvPr id="28" name="Shape 26"/>
-          <p:cNvSpPr/>
-          <p:nvPr/>
-        </p:nvSpPr>
-        <p:spPr>
-          <a:xfrm>
-            <a:off x="548640" y="5833872"/>
-            <a:ext cx="11094415" cy="0"/>
-          </a:xfrm>
-          <a:prstGeom prst="line">
-            <a:avLst/>
-          </a:prstGeom>
-          <a:noFill/>
-          <a:ln w="9525">
-            <a:solidFill>
-              <a:srgbClr val="E2DFD8"/>
-            </a:solidFill>
-            <a:prstDash val="solid"/>
-          </a:ln>
-        </p:spPr>
-        <p:txBody>
-          <a:bodyPr/>
-          <a:lstStyle/>
-          <a:p>
-            <a:endParaRPr lang="en-US"/>
-          </a:p>
-        </p:txBody>
-      </p:sp>
-      <p:sp>
-        <p:nvSpPr>
-          <p:cNvPr id="32" name="Text 30"/>
-          <p:cNvSpPr/>
-          <p:nvPr/>
-        </p:nvSpPr>
-        <p:spPr>
-          <a:xfrm>
-            <a:off x="457200" y="6446520"/>
-            <a:ext cx="7315200" cy="274320"/>
-          </a:xfrm>
-          <a:prstGeom prst="rect">
-            <a:avLst/>
-          </a:prstGeom>
-          <a:noFill/>
-          <a:ln/>
-        </p:spPr>
-        <p:txBody>
-          <a:bodyPr wrap="square" lIns="0" tIns="0" rIns="0" bIns="0" rtlCol="0" anchor="ctr"/>
-          <a:lstStyle/>
-          <a:p>
-            <a:pPr marL="0" indent="0">
-              <a:buNone/>
-            </a:pPr>
-            <a:r>
-              <a:rPr lang="en-US" sz="900" kern="0" spc="300" dirty="0">
-                <a:solidFill>
-                  <a:srgbClr val="6B7280"/>
-                </a:solidFill>
-                <a:latin typeface="Inter" pitchFamily="34" charset="0"/>
-                <a:ea typeface="Inter" pitchFamily="34" charset="-122"/>
-                <a:cs typeface="Inter" pitchFamily="34" charset="-120"/>
-              </a:rPr>
-              <a:t>01 · WELCOME &amp; KICKOFF</a:t>
-            </a:r>
-            <a:endParaRPr lang="en-US" sz="900" dirty="0"/>
-          </a:p>
-        </p:txBody>
-      </p:sp>
-      <p:sp>
-        <p:nvSpPr>
-          <p:cNvPr id="33" name="Text 31"/>
-          <p:cNvSpPr/>
-          <p:nvPr/>
-        </p:nvSpPr>
-        <p:spPr>
-          <a:xfrm>
-            <a:off x="8076895" y="6446520"/>
-            <a:ext cx="3657600" cy="274320"/>
-          </a:xfrm>
-          <a:prstGeom prst="rect">
-            <a:avLst/>
-          </a:prstGeom>
-          <a:noFill/>
-          <a:ln/>
-        </p:spPr>
-        <p:txBody>
-          <a:bodyPr wrap="square" lIns="0" tIns="0" rIns="0" bIns="0" rtlCol="0" anchor="ctr"/>
-          <a:lstStyle/>
-          <a:p>
-            <a:pPr marL="0" indent="0" algn="r">
-              <a:buNone/>
-            </a:pPr>
-            <a:r>
-              <a:rPr lang="en-US" sz="900" kern="0" spc="300" dirty="0">
-                <a:solidFill>
-                  <a:srgbClr val="6B7280"/>
-                </a:solidFill>
-                <a:latin typeface="Inter" pitchFamily="34" charset="0"/>
-                <a:ea typeface="Inter" pitchFamily="34" charset="-122"/>
-                <a:cs typeface="Inter" pitchFamily="34" charset="-120"/>
-              </a:rPr>
-              <a:t>OUTLINE</a:t>
-            </a:r>
-            <a:endParaRPr lang="en-US" sz="900" dirty="0"/>
-          </a:p>
-        </p:txBody>
-      </p:sp>
-    </p:spTree>
-  </p:cSld>
-  <p:clrMapOvr>
-    <a:masterClrMapping/>
-  </p:clrMapOvr>
-</p:sld>
-</file>
-
-<file path=ppt/slides/slide6.xml><?xml version="1.0" encoding="utf-8"?>
-<p:sld xmlns:a="http://schemas.openxmlformats.org/drawingml/2006/main" xmlns:r="http://schemas.openxmlformats.org/officeDocument/2006/relationships" xmlns:p="http://schemas.openxmlformats.org/presentationml/2006/main">
   <p:cSld name="Slide 5">
     <p:bg>
       <p:bgPr>
@@ -6985,7 +4987,7 @@
 </p:sld>
 </file>
 
-<file path=ppt/slides/slide7.xml><?xml version="1.0" encoding="utf-8"?>
+<file path=ppt/slides/slide6.xml><?xml version="1.0" encoding="utf-8"?>
 <p:sld xmlns:a="http://schemas.openxmlformats.org/drawingml/2006/main" xmlns:r="http://schemas.openxmlformats.org/officeDocument/2006/relationships" xmlns:p="http://schemas.openxmlformats.org/presentationml/2006/main">
   <p:cSld name="Slide 6">
     <p:bg>
@@ -7312,7 +5314,7 @@
 </p:sld>
 </file>
 
-<file path=ppt/slides/slide8.xml><?xml version="1.0" encoding="utf-8"?>
+<file path=ppt/slides/slide7.xml><?xml version="1.0" encoding="utf-8"?>
 <p:sld xmlns:a="http://schemas.openxmlformats.org/drawingml/2006/main" xmlns:r="http://schemas.openxmlformats.org/officeDocument/2006/relationships" xmlns:p="http://schemas.openxmlformats.org/presentationml/2006/main">
   <p:cSld name="Slide 7">
     <p:bg>
@@ -8205,7 +6207,7 @@
 </p:sld>
 </file>
 
-<file path=ppt/slides/slide9.xml><?xml version="1.0" encoding="utf-8"?>
+<file path=ppt/slides/slide8.xml><?xml version="1.0" encoding="utf-8"?>
 <p:sld xmlns:a="http://schemas.openxmlformats.org/drawingml/2006/main" xmlns:r="http://schemas.openxmlformats.org/officeDocument/2006/relationships" xmlns:p="http://schemas.openxmlformats.org/presentationml/2006/main">
   <p:cSld>
     <p:spTree>
@@ -8458,6 +6460,932 @@
               <a:cs typeface="Calibri"/>
               <a:sym typeface="Calibri"/>
             </a:endParaRPr>
+          </a:p>
+        </p:txBody>
+      </p:sp>
+    </p:spTree>
+  </p:cSld>
+  <p:clrMapOvr>
+    <a:masterClrMapping/>
+  </p:clrMapOvr>
+</p:sld>
+</file>
+
+<file path=ppt/slides/slide9.xml><?xml version="1.0" encoding="utf-8"?>
+<p:sld xmlns:a="http://schemas.openxmlformats.org/drawingml/2006/main" xmlns:r="http://schemas.openxmlformats.org/officeDocument/2006/relationships" xmlns:p="http://schemas.openxmlformats.org/presentationml/2006/main">
+  <p:cSld name="Slide 8">
+    <p:bg>
+      <p:bgPr>
+        <a:solidFill>
+          <a:srgbClr val="F5F2ED"/>
+        </a:solidFill>
+        <a:effectLst/>
+      </p:bgPr>
+    </p:bg>
+    <p:spTree>
+      <p:nvGrpSpPr>
+        <p:cNvPr id="1" name=""/>
+        <p:cNvGrpSpPr/>
+        <p:nvPr/>
+      </p:nvGrpSpPr>
+      <p:grpSpPr>
+        <a:xfrm>
+          <a:off x="0" y="0"/>
+          <a:ext cx="0" cy="0"/>
+          <a:chOff x="0" y="0"/>
+          <a:chExt cx="0" cy="0"/>
+        </a:xfrm>
+      </p:grpSpPr>
+      <p:sp>
+        <p:nvSpPr>
+          <p:cNvPr id="2" name="Text 0"/>
+          <p:cNvSpPr/>
+          <p:nvPr/>
+        </p:nvSpPr>
+        <p:spPr>
+          <a:xfrm>
+            <a:off x="548640" y="548640"/>
+            <a:ext cx="5486400" cy="274320"/>
+          </a:xfrm>
+          <a:prstGeom prst="rect">
+            <a:avLst/>
+          </a:prstGeom>
+          <a:noFill/>
+          <a:ln/>
+        </p:spPr>
+        <p:txBody>
+          <a:bodyPr wrap="square" lIns="0" tIns="0" rIns="0" bIns="0" rtlCol="0" anchor="ctr"/>
+          <a:lstStyle/>
+          <a:p>
+            <a:pPr marL="0" indent="0">
+              <a:buNone/>
+            </a:pPr>
+            <a:r>
+              <a:rPr lang="en-US" sz="1000" b="1" kern="0" spc="600" dirty="0">
+                <a:solidFill>
+                  <a:srgbClr val="E89B3C"/>
+                </a:solidFill>
+                <a:latin typeface="Inter" pitchFamily="34" charset="0"/>
+                <a:ea typeface="Inter" pitchFamily="34" charset="-122"/>
+                <a:cs typeface="Inter" pitchFamily="34" charset="-120"/>
+              </a:rPr>
+              <a:t>SETUP CHECK · 8 MIN</a:t>
+            </a:r>
+            <a:endParaRPr lang="en-US" sz="1000" dirty="0"/>
+          </a:p>
+        </p:txBody>
+      </p:sp>
+      <p:sp>
+        <p:nvSpPr>
+          <p:cNvPr id="3" name="Text 1"/>
+          <p:cNvSpPr/>
+          <p:nvPr/>
+        </p:nvSpPr>
+        <p:spPr>
+          <a:xfrm>
+            <a:off x="548640" y="914400"/>
+            <a:ext cx="10972800" cy="822960"/>
+          </a:xfrm>
+          <a:prstGeom prst="rect">
+            <a:avLst/>
+          </a:prstGeom>
+          <a:noFill/>
+          <a:ln/>
+        </p:spPr>
+        <p:txBody>
+          <a:bodyPr wrap="square" lIns="0" tIns="0" rIns="0" bIns="0" rtlCol="0" anchor="ctr"/>
+          <a:lstStyle/>
+          <a:p>
+            <a:pPr marL="0" indent="0">
+              <a:buNone/>
+            </a:pPr>
+            <a:r>
+              <a:rPr lang="en-US" sz="3400" b="1" dirty="0">
+                <a:solidFill>
+                  <a:srgbClr val="1F2937"/>
+                </a:solidFill>
+                <a:latin typeface="Montserrat" pitchFamily="34" charset="0"/>
+                <a:ea typeface="Montserrat" pitchFamily="34" charset="-122"/>
+                <a:cs typeface="Montserrat" pitchFamily="34" charset="-120"/>
+              </a:rPr>
+              <a:t>Run these three commands together.</a:t>
+            </a:r>
+            <a:endParaRPr lang="en-US" sz="3400" dirty="0"/>
+          </a:p>
+        </p:txBody>
+      </p:sp>
+      <p:sp>
+        <p:nvSpPr>
+          <p:cNvPr id="5" name="Shape 3"/>
+          <p:cNvSpPr/>
+          <p:nvPr/>
+        </p:nvSpPr>
+        <p:spPr>
+          <a:xfrm>
+            <a:off x="548640" y="2468880"/>
+            <a:ext cx="7315200" cy="3657600"/>
+          </a:xfrm>
+          <a:prstGeom prst="rect">
+            <a:avLst/>
+          </a:prstGeom>
+          <a:solidFill>
+            <a:srgbClr val="0F1620"/>
+          </a:solidFill>
+          <a:ln/>
+        </p:spPr>
+        <p:txBody>
+          <a:bodyPr/>
+          <a:lstStyle/>
+          <a:p>
+            <a:endParaRPr lang="en-US"/>
+          </a:p>
+        </p:txBody>
+      </p:sp>
+      <p:sp>
+        <p:nvSpPr>
+          <p:cNvPr id="6" name="Shape 4"/>
+          <p:cNvSpPr/>
+          <p:nvPr/>
+        </p:nvSpPr>
+        <p:spPr>
+          <a:xfrm>
+            <a:off x="548640" y="2468880"/>
+            <a:ext cx="7315200" cy="365760"/>
+          </a:xfrm>
+          <a:prstGeom prst="rect">
+            <a:avLst/>
+          </a:prstGeom>
+          <a:solidFill>
+            <a:srgbClr val="1B2533"/>
+          </a:solidFill>
+          <a:ln/>
+        </p:spPr>
+        <p:txBody>
+          <a:bodyPr/>
+          <a:lstStyle/>
+          <a:p>
+            <a:endParaRPr lang="en-US"/>
+          </a:p>
+        </p:txBody>
+      </p:sp>
+      <p:sp>
+        <p:nvSpPr>
+          <p:cNvPr id="7" name="Shape 5"/>
+          <p:cNvSpPr/>
+          <p:nvPr/>
+        </p:nvSpPr>
+        <p:spPr>
+          <a:xfrm>
+            <a:off x="731520" y="2587752"/>
+            <a:ext cx="137160" cy="137160"/>
+          </a:xfrm>
+          <a:prstGeom prst="ellipse">
+            <a:avLst/>
+          </a:prstGeom>
+          <a:solidFill>
+            <a:srgbClr val="FF6058"/>
+          </a:solidFill>
+          <a:ln/>
+        </p:spPr>
+        <p:txBody>
+          <a:bodyPr/>
+          <a:lstStyle/>
+          <a:p>
+            <a:endParaRPr lang="en-US"/>
+          </a:p>
+        </p:txBody>
+      </p:sp>
+      <p:sp>
+        <p:nvSpPr>
+          <p:cNvPr id="8" name="Shape 6"/>
+          <p:cNvSpPr/>
+          <p:nvPr/>
+        </p:nvSpPr>
+        <p:spPr>
+          <a:xfrm>
+            <a:off x="960120" y="2587752"/>
+            <a:ext cx="137160" cy="137160"/>
+          </a:xfrm>
+          <a:prstGeom prst="ellipse">
+            <a:avLst/>
+          </a:prstGeom>
+          <a:solidFill>
+            <a:srgbClr val="FFBD2E"/>
+          </a:solidFill>
+          <a:ln/>
+        </p:spPr>
+        <p:txBody>
+          <a:bodyPr/>
+          <a:lstStyle/>
+          <a:p>
+            <a:endParaRPr lang="en-US"/>
+          </a:p>
+        </p:txBody>
+      </p:sp>
+      <p:sp>
+        <p:nvSpPr>
+          <p:cNvPr id="9" name="Shape 7"/>
+          <p:cNvSpPr/>
+          <p:nvPr/>
+        </p:nvSpPr>
+        <p:spPr>
+          <a:xfrm>
+            <a:off x="1188720" y="2587752"/>
+            <a:ext cx="137160" cy="137160"/>
+          </a:xfrm>
+          <a:prstGeom prst="ellipse">
+            <a:avLst/>
+          </a:prstGeom>
+          <a:solidFill>
+            <a:srgbClr val="27CA40"/>
+          </a:solidFill>
+          <a:ln/>
+        </p:spPr>
+        <p:txBody>
+          <a:bodyPr/>
+          <a:lstStyle/>
+          <a:p>
+            <a:endParaRPr lang="en-US"/>
+          </a:p>
+        </p:txBody>
+      </p:sp>
+      <p:sp>
+        <p:nvSpPr>
+          <p:cNvPr id="10" name="Text 8"/>
+          <p:cNvSpPr/>
+          <p:nvPr/>
+        </p:nvSpPr>
+        <p:spPr>
+          <a:xfrm>
+            <a:off x="1920240" y="2514600"/>
+            <a:ext cx="4572000" cy="274320"/>
+          </a:xfrm>
+          <a:prstGeom prst="rect">
+            <a:avLst/>
+          </a:prstGeom>
+          <a:noFill/>
+          <a:ln/>
+        </p:spPr>
+        <p:txBody>
+          <a:bodyPr wrap="square" lIns="0" tIns="0" rIns="0" bIns="0" rtlCol="0" anchor="ctr"/>
+          <a:lstStyle/>
+          <a:p>
+            <a:pPr marL="0" indent="0" algn="ctr">
+              <a:buNone/>
+            </a:pPr>
+            <a:r>
+              <a:rPr lang="en-US" sz="1000" dirty="0">
+                <a:solidFill>
+                  <a:srgbClr val="9AA3AF"/>
+                </a:solidFill>
+                <a:latin typeface="JetBrains Mono" pitchFamily="34" charset="0"/>
+                <a:ea typeface="JetBrains Mono" pitchFamily="34" charset="-122"/>
+                <a:cs typeface="JetBrains Mono" pitchFamily="34" charset="-120"/>
+              </a:rPr>
+              <a:t>prerequisites · check</a:t>
+            </a:r>
+            <a:endParaRPr lang="en-US" sz="1000" dirty="0"/>
+          </a:p>
+        </p:txBody>
+      </p:sp>
+      <p:sp>
+        <p:nvSpPr>
+          <p:cNvPr id="11" name="Text 9"/>
+          <p:cNvSpPr/>
+          <p:nvPr/>
+        </p:nvSpPr>
+        <p:spPr>
+          <a:xfrm>
+            <a:off x="914400" y="3017520"/>
+            <a:ext cx="6583680" cy="365760"/>
+          </a:xfrm>
+          <a:prstGeom prst="rect">
+            <a:avLst/>
+          </a:prstGeom>
+          <a:noFill/>
+          <a:ln/>
+        </p:spPr>
+        <p:txBody>
+          <a:bodyPr wrap="square" lIns="0" tIns="0" rIns="0" bIns="0" rtlCol="0" anchor="ctr"/>
+          <a:lstStyle/>
+          <a:p>
+            <a:pPr marL="0" indent="0">
+              <a:buNone/>
+            </a:pPr>
+            <a:r>
+              <a:rPr lang="en-US" sz="1800" b="1" dirty="0">
+                <a:solidFill>
+                  <a:srgbClr val="3FB6A8"/>
+                </a:solidFill>
+                <a:latin typeface="JetBrains Mono" pitchFamily="34" charset="0"/>
+                <a:ea typeface="JetBrains Mono" pitchFamily="34" charset="-122"/>
+                <a:cs typeface="JetBrains Mono" pitchFamily="34" charset="-120"/>
+              </a:rPr>
+              <a:t>$ </a:t>
+            </a:r>
+            <a:r>
+              <a:rPr lang="en-US" sz="1800" b="1" dirty="0">
+                <a:solidFill>
+                  <a:srgbClr val="FFFFFF"/>
+                </a:solidFill>
+                <a:latin typeface="JetBrains Mono" pitchFamily="34" charset="0"/>
+                <a:ea typeface="JetBrains Mono" pitchFamily="34" charset="-122"/>
+                <a:cs typeface="JetBrains Mono" pitchFamily="34" charset="-120"/>
+              </a:rPr>
+              <a:t>claude --version</a:t>
+            </a:r>
+            <a:endParaRPr lang="en-US" sz="1800" dirty="0"/>
+          </a:p>
+        </p:txBody>
+      </p:sp>
+      <p:sp>
+        <p:nvSpPr>
+          <p:cNvPr id="12" name="Text 10"/>
+          <p:cNvSpPr/>
+          <p:nvPr/>
+        </p:nvSpPr>
+        <p:spPr>
+          <a:xfrm>
+            <a:off x="1097280" y="3429000"/>
+            <a:ext cx="6400800" cy="365760"/>
+          </a:xfrm>
+          <a:prstGeom prst="rect">
+            <a:avLst/>
+          </a:prstGeom>
+          <a:noFill/>
+          <a:ln/>
+        </p:spPr>
+        <p:txBody>
+          <a:bodyPr wrap="square" lIns="0" tIns="0" rIns="0" bIns="0" rtlCol="0" anchor="ctr"/>
+          <a:lstStyle/>
+          <a:p>
+            <a:pPr marL="0" indent="0">
+              <a:buNone/>
+            </a:pPr>
+            <a:r>
+              <a:rPr lang="en-US" sz="1300" b="1" dirty="0">
+                <a:solidFill>
+                  <a:srgbClr val="3FB6A8"/>
+                </a:solidFill>
+                <a:latin typeface="JetBrains Mono" pitchFamily="34" charset="0"/>
+                <a:ea typeface="JetBrains Mono" pitchFamily="34" charset="-122"/>
+                <a:cs typeface="JetBrains Mono" pitchFamily="34" charset="-120"/>
+              </a:rPr>
+              <a:t>✓ </a:t>
+            </a:r>
+            <a:r>
+              <a:rPr lang="en-US" sz="1300" dirty="0">
+                <a:solidFill>
+                  <a:srgbClr val="9AA3AF"/>
+                </a:solidFill>
+                <a:latin typeface="JetBrains Mono" pitchFamily="34" charset="0"/>
+                <a:ea typeface="JetBrains Mono" pitchFamily="34" charset="-122"/>
+                <a:cs typeface="JetBrains Mono" pitchFamily="34" charset="-120"/>
+              </a:rPr>
+              <a:t>claude code 1.x · ready</a:t>
+            </a:r>
+            <a:endParaRPr lang="en-US" sz="1300" dirty="0"/>
+          </a:p>
+        </p:txBody>
+      </p:sp>
+      <p:sp>
+        <p:nvSpPr>
+          <p:cNvPr id="13" name="Text 11"/>
+          <p:cNvSpPr/>
+          <p:nvPr/>
+        </p:nvSpPr>
+        <p:spPr>
+          <a:xfrm>
+            <a:off x="914400" y="3977640"/>
+            <a:ext cx="6583680" cy="365760"/>
+          </a:xfrm>
+          <a:prstGeom prst="rect">
+            <a:avLst/>
+          </a:prstGeom>
+          <a:noFill/>
+          <a:ln/>
+        </p:spPr>
+        <p:txBody>
+          <a:bodyPr wrap="square" lIns="0" tIns="0" rIns="0" bIns="0" rtlCol="0" anchor="ctr"/>
+          <a:lstStyle/>
+          <a:p>
+            <a:pPr marL="0" indent="0">
+              <a:buNone/>
+            </a:pPr>
+            <a:r>
+              <a:rPr lang="en-US" sz="1800" b="1" dirty="0">
+                <a:solidFill>
+                  <a:srgbClr val="3FB6A8"/>
+                </a:solidFill>
+                <a:latin typeface="JetBrains Mono" pitchFamily="34" charset="0"/>
+                <a:ea typeface="JetBrains Mono" pitchFamily="34" charset="-122"/>
+                <a:cs typeface="JetBrains Mono" pitchFamily="34" charset="-120"/>
+              </a:rPr>
+              <a:t>$ </a:t>
+            </a:r>
+            <a:r>
+              <a:rPr lang="en-US" sz="1800" b="1" dirty="0">
+                <a:solidFill>
+                  <a:srgbClr val="FFFFFF"/>
+                </a:solidFill>
+                <a:latin typeface="JetBrains Mono" pitchFamily="34" charset="0"/>
+                <a:ea typeface="JetBrains Mono" pitchFamily="34" charset="-122"/>
+                <a:cs typeface="JetBrains Mono" pitchFamily="34" charset="-120"/>
+              </a:rPr>
+              <a:t>gh auth status</a:t>
+            </a:r>
+            <a:endParaRPr lang="en-US" sz="1800" dirty="0"/>
+          </a:p>
+        </p:txBody>
+      </p:sp>
+      <p:sp>
+        <p:nvSpPr>
+          <p:cNvPr id="14" name="Text 12"/>
+          <p:cNvSpPr/>
+          <p:nvPr/>
+        </p:nvSpPr>
+        <p:spPr>
+          <a:xfrm>
+            <a:off x="1097280" y="4389120"/>
+            <a:ext cx="6400800" cy="365760"/>
+          </a:xfrm>
+          <a:prstGeom prst="rect">
+            <a:avLst/>
+          </a:prstGeom>
+          <a:noFill/>
+          <a:ln/>
+        </p:spPr>
+        <p:txBody>
+          <a:bodyPr wrap="square" lIns="0" tIns="0" rIns="0" bIns="0" rtlCol="0" anchor="ctr"/>
+          <a:lstStyle/>
+          <a:p>
+            <a:pPr marL="0" indent="0">
+              <a:buNone/>
+            </a:pPr>
+            <a:r>
+              <a:rPr lang="en-US" sz="1300" b="1" dirty="0">
+                <a:solidFill>
+                  <a:srgbClr val="3FB6A8"/>
+                </a:solidFill>
+                <a:latin typeface="JetBrains Mono" pitchFamily="34" charset="0"/>
+                <a:ea typeface="JetBrains Mono" pitchFamily="34" charset="-122"/>
+                <a:cs typeface="JetBrains Mono" pitchFamily="34" charset="-120"/>
+              </a:rPr>
+              <a:t>✓ </a:t>
+            </a:r>
+            <a:r>
+              <a:rPr lang="en-US" sz="1300" dirty="0">
+                <a:solidFill>
+                  <a:srgbClr val="9AA3AF"/>
+                </a:solidFill>
+                <a:latin typeface="JetBrains Mono" pitchFamily="34" charset="0"/>
+                <a:ea typeface="JetBrains Mono" pitchFamily="34" charset="-122"/>
+                <a:cs typeface="JetBrains Mono" pitchFamily="34" charset="-120"/>
+              </a:rPr>
+              <a:t>Logged in to github.com as you</a:t>
+            </a:r>
+            <a:endParaRPr lang="en-US" sz="1300" dirty="0"/>
+          </a:p>
+        </p:txBody>
+      </p:sp>
+      <p:sp>
+        <p:nvSpPr>
+          <p:cNvPr id="15" name="Text 13"/>
+          <p:cNvSpPr/>
+          <p:nvPr/>
+        </p:nvSpPr>
+        <p:spPr>
+          <a:xfrm>
+            <a:off x="914400" y="4937760"/>
+            <a:ext cx="6583680" cy="365760"/>
+          </a:xfrm>
+          <a:prstGeom prst="rect">
+            <a:avLst/>
+          </a:prstGeom>
+          <a:noFill/>
+          <a:ln/>
+        </p:spPr>
+        <p:txBody>
+          <a:bodyPr wrap="square" lIns="0" tIns="0" rIns="0" bIns="0" rtlCol="0" anchor="ctr"/>
+          <a:lstStyle/>
+          <a:p>
+            <a:pPr marL="0" indent="0">
+              <a:buNone/>
+            </a:pPr>
+            <a:r>
+              <a:rPr lang="en-US" sz="1800" b="1" dirty="0">
+                <a:solidFill>
+                  <a:srgbClr val="3FB6A8"/>
+                </a:solidFill>
+                <a:latin typeface="JetBrains Mono" pitchFamily="34" charset="0"/>
+                <a:ea typeface="JetBrains Mono" pitchFamily="34" charset="-122"/>
+                <a:cs typeface="JetBrains Mono" pitchFamily="34" charset="-120"/>
+              </a:rPr>
+              <a:t>$ </a:t>
+            </a:r>
+            <a:r>
+              <a:rPr lang="en-US" sz="1800" b="1" dirty="0">
+                <a:solidFill>
+                  <a:srgbClr val="FFFFFF"/>
+                </a:solidFill>
+                <a:latin typeface="JetBrains Mono" pitchFamily="34" charset="0"/>
+                <a:ea typeface="JetBrains Mono" pitchFamily="34" charset="-122"/>
+                <a:cs typeface="JetBrains Mono" pitchFamily="34" charset="-120"/>
+              </a:rPr>
+              <a:t>node --version</a:t>
+            </a:r>
+            <a:endParaRPr lang="en-US" sz="1800" dirty="0"/>
+          </a:p>
+        </p:txBody>
+      </p:sp>
+      <p:sp>
+        <p:nvSpPr>
+          <p:cNvPr id="16" name="Text 14"/>
+          <p:cNvSpPr/>
+          <p:nvPr/>
+        </p:nvSpPr>
+        <p:spPr>
+          <a:xfrm>
+            <a:off x="1097280" y="5349240"/>
+            <a:ext cx="6400800" cy="365760"/>
+          </a:xfrm>
+          <a:prstGeom prst="rect">
+            <a:avLst/>
+          </a:prstGeom>
+          <a:noFill/>
+          <a:ln/>
+        </p:spPr>
+        <p:txBody>
+          <a:bodyPr wrap="square" lIns="0" tIns="0" rIns="0" bIns="0" rtlCol="0" anchor="ctr"/>
+          <a:lstStyle/>
+          <a:p>
+            <a:pPr marL="0" indent="0">
+              <a:buNone/>
+            </a:pPr>
+            <a:r>
+              <a:rPr lang="en-US" sz="1300" b="1" dirty="0">
+                <a:solidFill>
+                  <a:srgbClr val="3FB6A8"/>
+                </a:solidFill>
+                <a:latin typeface="JetBrains Mono" pitchFamily="34" charset="0"/>
+                <a:ea typeface="JetBrains Mono" pitchFamily="34" charset="-122"/>
+                <a:cs typeface="JetBrains Mono" pitchFamily="34" charset="-120"/>
+              </a:rPr>
+              <a:t>✓ </a:t>
+            </a:r>
+            <a:r>
+              <a:rPr lang="en-US" sz="1300" dirty="0">
+                <a:solidFill>
+                  <a:srgbClr val="9AA3AF"/>
+                </a:solidFill>
+                <a:latin typeface="JetBrains Mono" pitchFamily="34" charset="0"/>
+                <a:ea typeface="JetBrains Mono" pitchFamily="34" charset="-122"/>
+                <a:cs typeface="JetBrains Mono" pitchFamily="34" charset="-120"/>
+              </a:rPr>
+              <a:t>v20.x or newer</a:t>
+            </a:r>
+            <a:endParaRPr lang="en-US" sz="1300" dirty="0"/>
+          </a:p>
+        </p:txBody>
+      </p:sp>
+      <p:sp>
+        <p:nvSpPr>
+          <p:cNvPr id="17" name="Shape 15"/>
+          <p:cNvSpPr/>
+          <p:nvPr/>
+        </p:nvSpPr>
+        <p:spPr>
+          <a:xfrm>
+            <a:off x="8138160" y="2468880"/>
+            <a:ext cx="3474720" cy="3657600"/>
+          </a:xfrm>
+          <a:prstGeom prst="rect">
+            <a:avLst/>
+          </a:prstGeom>
+          <a:solidFill>
+            <a:srgbClr val="FFFFFF"/>
+          </a:solidFill>
+          <a:ln w="6350">
+            <a:solidFill>
+              <a:srgbClr val="E2DFD8"/>
+            </a:solidFill>
+            <a:prstDash val="solid"/>
+          </a:ln>
+        </p:spPr>
+        <p:txBody>
+          <a:bodyPr/>
+          <a:lstStyle/>
+          <a:p>
+            <a:endParaRPr lang="en-US"/>
+          </a:p>
+        </p:txBody>
+      </p:sp>
+      <p:sp>
+        <p:nvSpPr>
+          <p:cNvPr id="18" name="Shape 16"/>
+          <p:cNvSpPr/>
+          <p:nvPr/>
+        </p:nvSpPr>
+        <p:spPr>
+          <a:xfrm>
+            <a:off x="8138160" y="2468880"/>
+            <a:ext cx="3474720" cy="73152"/>
+          </a:xfrm>
+          <a:prstGeom prst="rect">
+            <a:avLst/>
+          </a:prstGeom>
+          <a:solidFill>
+            <a:srgbClr val="E89B3C"/>
+          </a:solidFill>
+          <a:ln/>
+        </p:spPr>
+        <p:txBody>
+          <a:bodyPr/>
+          <a:lstStyle/>
+          <a:p>
+            <a:endParaRPr lang="en-US"/>
+          </a:p>
+        </p:txBody>
+      </p:sp>
+      <p:sp>
+        <p:nvSpPr>
+          <p:cNvPr id="19" name="Text 17"/>
+          <p:cNvSpPr/>
+          <p:nvPr/>
+        </p:nvSpPr>
+        <p:spPr>
+          <a:xfrm>
+            <a:off x="8412480" y="2788920"/>
+            <a:ext cx="2926080" cy="274320"/>
+          </a:xfrm>
+          <a:prstGeom prst="rect">
+            <a:avLst/>
+          </a:prstGeom>
+          <a:noFill/>
+          <a:ln/>
+        </p:spPr>
+        <p:txBody>
+          <a:bodyPr wrap="square" lIns="0" tIns="0" rIns="0" bIns="0" rtlCol="0" anchor="ctr"/>
+          <a:lstStyle/>
+          <a:p>
+            <a:pPr marL="0" indent="0">
+              <a:buNone/>
+            </a:pPr>
+            <a:r>
+              <a:rPr lang="en-US" sz="1000" b="1" kern="0" spc="600" dirty="0">
+                <a:solidFill>
+                  <a:srgbClr val="E89B3C"/>
+                </a:solidFill>
+                <a:latin typeface="Inter" pitchFamily="34" charset="0"/>
+                <a:ea typeface="Inter" pitchFamily="34" charset="-122"/>
+                <a:cs typeface="Inter" pitchFamily="34" charset="-120"/>
+              </a:rPr>
+              <a:t>AI Help</a:t>
+            </a:r>
+            <a:endParaRPr lang="en-US" sz="1000" dirty="0"/>
+          </a:p>
+        </p:txBody>
+      </p:sp>
+      <p:sp>
+        <p:nvSpPr>
+          <p:cNvPr id="20" name="Text 18"/>
+          <p:cNvSpPr/>
+          <p:nvPr/>
+        </p:nvSpPr>
+        <p:spPr>
+          <a:xfrm>
+            <a:off x="8412480" y="3108960"/>
+            <a:ext cx="2926080" cy="548640"/>
+          </a:xfrm>
+          <a:prstGeom prst="rect">
+            <a:avLst/>
+          </a:prstGeom>
+          <a:noFill/>
+          <a:ln/>
+        </p:spPr>
+        <p:txBody>
+          <a:bodyPr wrap="square" lIns="0" tIns="0" rIns="0" bIns="0" rtlCol="0" anchor="ctr"/>
+          <a:lstStyle/>
+          <a:p>
+            <a:pPr marL="0" indent="0">
+              <a:buNone/>
+            </a:pPr>
+            <a:r>
+              <a:rPr lang="en-US" sz="2400" b="1" dirty="0">
+                <a:solidFill>
+                  <a:srgbClr val="1F2937"/>
+                </a:solidFill>
+                <a:latin typeface="Montserrat" pitchFamily="34" charset="0"/>
+                <a:ea typeface="Montserrat" pitchFamily="34" charset="-122"/>
+                <a:cs typeface="Montserrat" pitchFamily="34" charset="-120"/>
+              </a:rPr>
+              <a:t>Tripp &amp; Patrick</a:t>
+            </a:r>
+          </a:p>
+          <a:p>
+            <a:pPr marL="0" indent="0">
+              <a:buNone/>
+            </a:pPr>
+            <a:r>
+              <a:rPr lang="en-US" sz="2400" b="1" dirty="0">
+                <a:solidFill>
+                  <a:srgbClr val="1F2937"/>
+                </a:solidFill>
+                <a:latin typeface="Montserrat" pitchFamily="34" charset="0"/>
+              </a:rPr>
+              <a:t>Jason &amp; Matt</a:t>
+            </a:r>
+            <a:endParaRPr lang="en-US" sz="2400" dirty="0"/>
+          </a:p>
+        </p:txBody>
+      </p:sp>
+      <p:sp>
+        <p:nvSpPr>
+          <p:cNvPr id="21" name="Text 19"/>
+          <p:cNvSpPr/>
+          <p:nvPr/>
+        </p:nvSpPr>
+        <p:spPr>
+          <a:xfrm>
+            <a:off x="8412480" y="3703320"/>
+            <a:ext cx="2926080" cy="365760"/>
+          </a:xfrm>
+          <a:prstGeom prst="rect">
+            <a:avLst/>
+          </a:prstGeom>
+          <a:noFill/>
+          <a:ln/>
+        </p:spPr>
+        <p:txBody>
+          <a:bodyPr wrap="square" lIns="0" tIns="0" rIns="0" bIns="0" rtlCol="0" anchor="ctr"/>
+          <a:lstStyle/>
+          <a:p>
+            <a:pPr marL="0" indent="0">
+              <a:buNone/>
+            </a:pPr>
+            <a:r>
+              <a:rPr lang="en-US" sz="1300" i="1" dirty="0">
+                <a:solidFill>
+                  <a:srgbClr val="6B7280"/>
+                </a:solidFill>
+                <a:latin typeface="Inter" pitchFamily="34" charset="0"/>
+                <a:ea typeface="Inter" pitchFamily="34" charset="-122"/>
+                <a:cs typeface="Inter" pitchFamily="34" charset="-120"/>
+              </a:rPr>
+              <a:t>Standing by at every break.</a:t>
+            </a:r>
+            <a:endParaRPr lang="en-US" sz="1300" dirty="0"/>
+          </a:p>
+        </p:txBody>
+      </p:sp>
+      <p:sp>
+        <p:nvSpPr>
+          <p:cNvPr id="22" name="Text 20"/>
+          <p:cNvSpPr/>
+          <p:nvPr/>
+        </p:nvSpPr>
+        <p:spPr>
+          <a:xfrm>
+            <a:off x="8412480" y="4251960"/>
+            <a:ext cx="2926080" cy="1645920"/>
+          </a:xfrm>
+          <a:prstGeom prst="rect">
+            <a:avLst/>
+          </a:prstGeom>
+          <a:noFill/>
+          <a:ln/>
+        </p:spPr>
+        <p:txBody>
+          <a:bodyPr wrap="square" lIns="0" tIns="0" rIns="0" bIns="0" rtlCol="0" anchor="ctr"/>
+          <a:lstStyle/>
+          <a:p>
+            <a:pPr marL="0" indent="0">
+              <a:buNone/>
+            </a:pPr>
+            <a:r>
+              <a:rPr lang="en-US" sz="1300" b="1" dirty="0">
+                <a:solidFill>
+                  <a:srgbClr val="1F2937"/>
+                </a:solidFill>
+                <a:latin typeface="Inter" pitchFamily="34" charset="0"/>
+                <a:ea typeface="Inter" pitchFamily="34" charset="-122"/>
+                <a:cs typeface="Inter" pitchFamily="34" charset="-120"/>
+              </a:rPr>
+              <a:t>If any of those three are red or missing – turn your name plate vertical.</a:t>
+            </a:r>
+            <a:endParaRPr lang="en-US" sz="1300" dirty="0"/>
+          </a:p>
+          <a:p>
+            <a:pPr marL="0" indent="0">
+              <a:buNone/>
+            </a:pPr>
+            <a:r>
+              <a:rPr lang="en-US" sz="1300" dirty="0">
+                <a:solidFill>
+                  <a:srgbClr val="000000"/>
+                </a:solidFill>
+                <a:latin typeface="Inter" pitchFamily="34" charset="0"/>
+                <a:ea typeface="Inter" pitchFamily="34" charset="-122"/>
+                <a:cs typeface="Inter" pitchFamily="34" charset="-120"/>
+              </a:rPr>
+              <a:t> </a:t>
+            </a:r>
+            <a:endParaRPr lang="en-US" sz="1300" dirty="0"/>
+          </a:p>
+          <a:p>
+            <a:pPr marL="0" indent="0">
+              <a:buNone/>
+            </a:pPr>
+            <a:r>
+              <a:rPr lang="en-US" sz="1300" dirty="0">
+                <a:solidFill>
+                  <a:srgbClr val="6B7280"/>
+                </a:solidFill>
+                <a:latin typeface="Inter" pitchFamily="34" charset="0"/>
+                <a:ea typeface="Inter" pitchFamily="34" charset="-122"/>
+                <a:cs typeface="Inter" pitchFamily="34" charset="-120"/>
+              </a:rPr>
+              <a:t>Anthropic account, Claude Code CLI, and GitHub CLI unlock the rest of the workshop.</a:t>
+            </a:r>
+            <a:endParaRPr lang="en-US" sz="1300" dirty="0"/>
+          </a:p>
+        </p:txBody>
+      </p:sp>
+      <p:sp>
+        <p:nvSpPr>
+          <p:cNvPr id="23" name="Text 21"/>
+          <p:cNvSpPr/>
+          <p:nvPr/>
+        </p:nvSpPr>
+        <p:spPr>
+          <a:xfrm>
+            <a:off x="457200" y="6446520"/>
+            <a:ext cx="7315200" cy="274320"/>
+          </a:xfrm>
+          <a:prstGeom prst="rect">
+            <a:avLst/>
+          </a:prstGeom>
+          <a:noFill/>
+          <a:ln/>
+        </p:spPr>
+        <p:txBody>
+          <a:bodyPr wrap="square" lIns="0" tIns="0" rIns="0" bIns="0" rtlCol="0" anchor="ctr"/>
+          <a:lstStyle/>
+          <a:p>
+            <a:pPr marL="0" indent="0">
+              <a:buNone/>
+            </a:pPr>
+            <a:r>
+              <a:rPr lang="en-US" sz="900" kern="0" spc="300" dirty="0">
+                <a:solidFill>
+                  <a:srgbClr val="6B7280"/>
+                </a:solidFill>
+                <a:latin typeface="Inter" pitchFamily="34" charset="0"/>
+                <a:ea typeface="Inter" pitchFamily="34" charset="-122"/>
+                <a:cs typeface="Inter" pitchFamily="34" charset="-120"/>
+              </a:rPr>
+              <a:t>01 · WELCOME &amp; KICKOFF</a:t>
+            </a:r>
+            <a:endParaRPr lang="en-US" sz="900" dirty="0"/>
+          </a:p>
+        </p:txBody>
+      </p:sp>
+      <p:sp>
+        <p:nvSpPr>
+          <p:cNvPr id="24" name="Text 22"/>
+          <p:cNvSpPr/>
+          <p:nvPr/>
+        </p:nvSpPr>
+        <p:spPr>
+          <a:xfrm>
+            <a:off x="8076895" y="6446520"/>
+            <a:ext cx="3657600" cy="274320"/>
+          </a:xfrm>
+          <a:prstGeom prst="rect">
+            <a:avLst/>
+          </a:prstGeom>
+          <a:noFill/>
+          <a:ln/>
+        </p:spPr>
+        <p:txBody>
+          <a:bodyPr wrap="square" lIns="0" tIns="0" rIns="0" bIns="0" rtlCol="0" anchor="ctr"/>
+          <a:lstStyle/>
+          <a:p>
+            <a:pPr marL="0" indent="0" algn="r">
+              <a:buNone/>
+            </a:pPr>
+            <a:r>
+              <a:rPr lang="en-US" sz="900" kern="0" spc="300" dirty="0">
+                <a:solidFill>
+                  <a:srgbClr val="6B7280"/>
+                </a:solidFill>
+                <a:latin typeface="Inter" pitchFamily="34" charset="0"/>
+                <a:ea typeface="Inter" pitchFamily="34" charset="-122"/>
+                <a:cs typeface="Inter" pitchFamily="34" charset="-120"/>
+              </a:rPr>
+              <a:t>PREREQUISITES · GREEN BY 10:00</a:t>
+            </a:r>
+            <a:endParaRPr lang="en-US" sz="900" dirty="0"/>
           </a:p>
         </p:txBody>
       </p:sp>

--- a/schedule/01-welcome-kickoff/01-welcome-kickoff.pptx
+++ b/schedule/01-welcome-kickoff/01-welcome-kickoff.pptx
@@ -5,19 +5,22 @@
     <p:sldMasterId id="2147483648" r:id="rId1"/>
   </p:sldMasterIdLst>
   <p:notesMasterIdLst>
-    <p:notesMasterId r:id="rId12"/>
+    <p:notesMasterId r:id="rId15"/>
   </p:notesMasterIdLst>
   <p:sldIdLst>
     <p:sldId id="267" r:id="rId2"/>
     <p:sldId id="256" r:id="rId3"/>
-    <p:sldId id="257" r:id="rId4"/>
-    <p:sldId id="258" r:id="rId5"/>
-    <p:sldId id="260" r:id="rId6"/>
-    <p:sldId id="261" r:id="rId7"/>
-    <p:sldId id="262" r:id="rId8"/>
-    <p:sldId id="268" r:id="rId9"/>
-    <p:sldId id="263" r:id="rId10"/>
-    <p:sldId id="265" r:id="rId11"/>
+    <p:sldId id="268" r:id="rId4"/>
+    <p:sldId id="257" r:id="rId5"/>
+    <p:sldId id="258" r:id="rId6"/>
+    <p:sldId id="262" r:id="rId7"/>
+    <p:sldId id="270" r:id="rId8"/>
+    <p:sldId id="271" r:id="rId9"/>
+    <p:sldId id="269" r:id="rId10"/>
+    <p:sldId id="260" r:id="rId11"/>
+    <p:sldId id="261" r:id="rId12"/>
+    <p:sldId id="263" r:id="rId13"/>
+    <p:sldId id="265" r:id="rId14"/>
   </p:sldIdLst>
   <p:sldSz cx="12192000" cy="6858000"/>
   <p:notesSz cx="6858000" cy="12192000"/>
@@ -663,7 +666,7 @@
           <a:p>
             <a:r>
               <a:rPr lang="en-US" dirty="0"/>
-              <a:t>Land it, smile, hand off cleanly. Don't oversell the next session — let it speak for itself. Last words: 'Let's build.'</a:t>
+              <a:t>Don't read the bullets. The point is the headline: Day 1 craft, Day 2 ship. Everything else is in the schedule on the table.</a:t>
             </a:r>
           </a:p>
         </p:txBody>
@@ -686,6 +689,267 @@
             <a:fld id="{F7021451-1387-4CA6-816F-3879F97B5CBC}" type="slidenum">
               <a:rPr lang="en-US"/>
               <a:t>10</a:t>
+            </a:fld>
+            <a:endParaRPr lang="en-US"/>
+          </a:p>
+        </p:txBody>
+      </p:sp>
+    </p:spTree>
+    <p:extLst>
+      <p:ext uri="{BB962C8B-B14F-4D97-AF65-F5344CB8AC3E}">
+        <p14:creationId xmlns:p14="http://schemas.microsoft.com/office/powerpoint/2010/main" val="1024086991"/>
+      </p:ext>
+    </p:extLst>
+  </p:cSld>
+  <p:clrMapOvr>
+    <a:masterClrMapping/>
+  </p:clrMapOvr>
+</p:notes>
+</file>
+
+<file path=ppt/notesSlides/notesSlide11.xml><?xml version="1.0" encoding="utf-8"?>
+<p:notes xmlns:a="http://schemas.openxmlformats.org/drawingml/2006/main" xmlns:r="http://schemas.openxmlformats.org/officeDocument/2006/relationships" xmlns:p="http://schemas.openxmlformats.org/presentationml/2006/main">
+  <p:cSld>
+    <p:spTree>
+      <p:nvGrpSpPr>
+        <p:cNvPr id="1" name=""/>
+        <p:cNvGrpSpPr/>
+        <p:nvPr/>
+      </p:nvGrpSpPr>
+      <p:grpSpPr>
+        <a:xfrm>
+          <a:off x="0" y="0"/>
+          <a:ext cx="0" cy="0"/>
+          <a:chOff x="0" y="0"/>
+          <a:chExt cx="0" cy="0"/>
+        </a:xfrm>
+      </p:grpSpPr>
+      <p:sp>
+        <p:nvSpPr>
+          <p:cNvPr id="2" name="Slide Image Placeholder 1"/>
+          <p:cNvSpPr>
+            <a:spLocks noGrp="1" noRot="1" noChangeAspect="1"/>
+          </p:cNvSpPr>
+          <p:nvPr>
+            <p:ph type="sldImg"/>
+          </p:nvPr>
+        </p:nvSpPr>
+        <p:spPr/>
+      </p:sp>
+      <p:sp>
+        <p:nvSpPr>
+          <p:cNvPr id="3" name="Notes Placeholder 2"/>
+          <p:cNvSpPr>
+            <a:spLocks noGrp="1"/>
+          </p:cNvSpPr>
+          <p:nvPr>
+            <p:ph type="body" idx="1"/>
+          </p:nvPr>
+        </p:nvSpPr>
+        <p:spPr/>
+        <p:txBody>
+          <a:bodyPr/>
+          <a:lstStyle/>
+          <a:p>
+            <a:r>
+              <a:rPr lang="en-US" dirty="0"/>
+              <a:t>Read it slowly, twice. This is the one sentence to leave the room with. Note: this preview lands the idea, then we hand off to the next session for the full unpack.</a:t>
+            </a:r>
+          </a:p>
+        </p:txBody>
+      </p:sp>
+      <p:sp>
+        <p:nvSpPr>
+          <p:cNvPr id="4" name="Slide Number Placeholder 3"/>
+          <p:cNvSpPr>
+            <a:spLocks noGrp="1"/>
+          </p:cNvSpPr>
+          <p:nvPr>
+            <p:ph type="sldNum" sz="quarter" idx="10"/>
+          </p:nvPr>
+        </p:nvSpPr>
+        <p:spPr/>
+        <p:txBody>
+          <a:bodyPr/>
+          <a:lstStyle/>
+          <a:p>
+            <a:fld id="{F7021451-1387-4CA6-816F-3879F97B5CBC}" type="slidenum">
+              <a:rPr lang="en-US"/>
+              <a:t>11</a:t>
+            </a:fld>
+            <a:endParaRPr lang="en-US"/>
+          </a:p>
+        </p:txBody>
+      </p:sp>
+    </p:spTree>
+    <p:extLst>
+      <p:ext uri="{BB962C8B-B14F-4D97-AF65-F5344CB8AC3E}">
+        <p14:creationId xmlns:p14="http://schemas.microsoft.com/office/powerpoint/2010/main" val="1024086991"/>
+      </p:ext>
+    </p:extLst>
+  </p:cSld>
+  <p:clrMapOvr>
+    <a:masterClrMapping/>
+  </p:clrMapOvr>
+</p:notes>
+</file>
+
+<file path=ppt/notesSlides/notesSlide12.xml><?xml version="1.0" encoding="utf-8"?>
+<p:notes xmlns:a="http://schemas.openxmlformats.org/drawingml/2006/main" xmlns:r="http://schemas.openxmlformats.org/officeDocument/2006/relationships" xmlns:p="http://schemas.openxmlformats.org/presentationml/2006/main">
+  <p:cSld>
+    <p:spTree>
+      <p:nvGrpSpPr>
+        <p:cNvPr id="1" name=""/>
+        <p:cNvGrpSpPr/>
+        <p:nvPr/>
+      </p:nvGrpSpPr>
+      <p:grpSpPr>
+        <a:xfrm>
+          <a:off x="0" y="0"/>
+          <a:ext cx="0" cy="0"/>
+          <a:chOff x="0" y="0"/>
+          <a:chExt cx="0" cy="0"/>
+        </a:xfrm>
+      </p:grpSpPr>
+      <p:sp>
+        <p:nvSpPr>
+          <p:cNvPr id="2" name="Slide Image Placeholder 1"/>
+          <p:cNvSpPr>
+            <a:spLocks noGrp="1" noRot="1" noChangeAspect="1"/>
+          </p:cNvSpPr>
+          <p:nvPr>
+            <p:ph type="sldImg"/>
+          </p:nvPr>
+        </p:nvSpPr>
+        <p:spPr/>
+      </p:sp>
+      <p:sp>
+        <p:nvSpPr>
+          <p:cNvPr id="3" name="Notes Placeholder 2"/>
+          <p:cNvSpPr>
+            <a:spLocks noGrp="1"/>
+          </p:cNvSpPr>
+          <p:nvPr>
+            <p:ph type="body" idx="1"/>
+          </p:nvPr>
+        </p:nvSpPr>
+        <p:spPr/>
+        <p:txBody>
+          <a:bodyPr/>
+          <a:lstStyle/>
+          <a:p>
+            <a:r>
+              <a:rPr lang="en-US" dirty="0"/>
+              <a:t>If more than ~20% of the room isn't green, silently extend the 10:15 break by 10 min rather than pushing people into the SDLC session cold. Don't shame anyone — just point them at the AI Genius Bar.</a:t>
+            </a:r>
+          </a:p>
+        </p:txBody>
+      </p:sp>
+      <p:sp>
+        <p:nvSpPr>
+          <p:cNvPr id="4" name="Slide Number Placeholder 3"/>
+          <p:cNvSpPr>
+            <a:spLocks noGrp="1"/>
+          </p:cNvSpPr>
+          <p:nvPr>
+            <p:ph type="sldNum" sz="quarter" idx="10"/>
+          </p:nvPr>
+        </p:nvSpPr>
+        <p:spPr/>
+        <p:txBody>
+          <a:bodyPr/>
+          <a:lstStyle/>
+          <a:p>
+            <a:fld id="{F7021451-1387-4CA6-816F-3879F97B5CBC}" type="slidenum">
+              <a:rPr lang="en-US"/>
+              <a:t>12</a:t>
+            </a:fld>
+            <a:endParaRPr lang="en-US"/>
+          </a:p>
+        </p:txBody>
+      </p:sp>
+    </p:spTree>
+    <p:extLst>
+      <p:ext uri="{BB962C8B-B14F-4D97-AF65-F5344CB8AC3E}">
+        <p14:creationId xmlns:p14="http://schemas.microsoft.com/office/powerpoint/2010/main" val="1024086991"/>
+      </p:ext>
+    </p:extLst>
+  </p:cSld>
+  <p:clrMapOvr>
+    <a:masterClrMapping/>
+  </p:clrMapOvr>
+</p:notes>
+</file>
+
+<file path=ppt/notesSlides/notesSlide13.xml><?xml version="1.0" encoding="utf-8"?>
+<p:notes xmlns:a="http://schemas.openxmlformats.org/drawingml/2006/main" xmlns:r="http://schemas.openxmlformats.org/officeDocument/2006/relationships" xmlns:p="http://schemas.openxmlformats.org/presentationml/2006/main">
+  <p:cSld>
+    <p:spTree>
+      <p:nvGrpSpPr>
+        <p:cNvPr id="1" name=""/>
+        <p:cNvGrpSpPr/>
+        <p:nvPr/>
+      </p:nvGrpSpPr>
+      <p:grpSpPr>
+        <a:xfrm>
+          <a:off x="0" y="0"/>
+          <a:ext cx="0" cy="0"/>
+          <a:chOff x="0" y="0"/>
+          <a:chExt cx="0" cy="0"/>
+        </a:xfrm>
+      </p:grpSpPr>
+      <p:sp>
+        <p:nvSpPr>
+          <p:cNvPr id="2" name="Slide Image Placeholder 1"/>
+          <p:cNvSpPr>
+            <a:spLocks noGrp="1" noRot="1" noChangeAspect="1"/>
+          </p:cNvSpPr>
+          <p:nvPr>
+            <p:ph type="sldImg"/>
+          </p:nvPr>
+        </p:nvSpPr>
+        <p:spPr/>
+      </p:sp>
+      <p:sp>
+        <p:nvSpPr>
+          <p:cNvPr id="3" name="Notes Placeholder 2"/>
+          <p:cNvSpPr>
+            <a:spLocks noGrp="1"/>
+          </p:cNvSpPr>
+          <p:nvPr>
+            <p:ph type="body" idx="1"/>
+          </p:nvPr>
+        </p:nvSpPr>
+        <p:spPr/>
+        <p:txBody>
+          <a:bodyPr/>
+          <a:lstStyle/>
+          <a:p>
+            <a:r>
+              <a:rPr lang="en-US" dirty="0"/>
+              <a:t>Land it, smile, hand off cleanly. Don't oversell the next session — let it speak for itself. Last words: 'Let's build.'</a:t>
+            </a:r>
+          </a:p>
+        </p:txBody>
+      </p:sp>
+      <p:sp>
+        <p:nvSpPr>
+          <p:cNvPr id="4" name="Slide Number Placeholder 3"/>
+          <p:cNvSpPr>
+            <a:spLocks noGrp="1"/>
+          </p:cNvSpPr>
+          <p:nvPr>
+            <p:ph type="sldNum" sz="quarter" idx="10"/>
+          </p:nvPr>
+        </p:nvSpPr>
+        <p:spPr/>
+        <p:txBody>
+          <a:bodyPr/>
+          <a:lstStyle/>
+          <a:p>
+            <a:fld id="{F7021451-1387-4CA6-816F-3879F97B5CBC}" type="slidenum">
+              <a:rPr lang="en-US"/>
+              <a:t>13</a:t>
             </a:fld>
             <a:endParaRPr lang="en-US"/>
           </a:p>
@@ -792,11 +1056,11 @@
 </file>
 
 <file path=ppt/notesSlides/notesSlide3.xml><?xml version="1.0" encoding="utf-8"?>
-<p:notes xmlns:a="http://schemas.openxmlformats.org/drawingml/2006/main" xmlns:r="http://schemas.openxmlformats.org/officeDocument/2006/relationships" xmlns:p="http://schemas.openxmlformats.org/presentationml/2006/main">
+<p:notes xmlns:a="http://schemas.openxmlformats.org/drawingml/2006/main" xmlns:r="http://schemas.openxmlformats.org/officeDocument/2006/relationships" xmlns:p="http://schemas.openxmlformats.org/presentationml/2006/main" showMasterSp="0" showMasterPhAnim="0">
   <p:cSld>
     <p:spTree>
       <p:nvGrpSpPr>
-        <p:cNvPr id="1" name=""/>
+        <p:cNvPr id="1" name="Shape 23"/>
         <p:cNvGrpSpPr/>
         <p:nvPr/>
       </p:nvGrpSpPr>
@@ -810,67 +1074,166 @@
       </p:grpSpPr>
       <p:sp>
         <p:nvSpPr>
-          <p:cNvPr id="2" name="Slide Image Placeholder 1"/>
+          <p:cNvPr id="24" name="Google Shape;24;p2:notes"/>
           <p:cNvSpPr>
             <a:spLocks noGrp="1" noRot="1" noChangeAspect="1"/>
           </p:cNvSpPr>
           <p:nvPr>
-            <p:ph type="sldImg"/>
+            <p:ph type="sldImg" idx="2"/>
           </p:nvPr>
         </p:nvSpPr>
-        <p:spPr/>
-      </p:sp>
-      <p:sp>
-        <p:nvSpPr>
-          <p:cNvPr id="3" name="Notes Placeholder 2"/>
-          <p:cNvSpPr>
+        <p:spPr>
+          <a:xfrm>
+            <a:off x="-1166813" y="0"/>
+            <a:ext cx="5334001" cy="3000375"/>
+          </a:xfrm>
+          <a:custGeom>
+            <a:avLst/>
+            <a:gdLst/>
+            <a:ahLst/>
+            <a:cxnLst/>
+            <a:rect l="l" t="t" r="r" b="b"/>
+            <a:pathLst>
+              <a:path w="120000" h="120000" extrusionOk="0">
+                <a:moveTo>
+                  <a:pt x="0" y="0"/>
+                </a:moveTo>
+                <a:lnTo>
+                  <a:pt x="120000" y="0"/>
+                </a:lnTo>
+                <a:lnTo>
+                  <a:pt x="120000" y="120000"/>
+                </a:lnTo>
+                <a:lnTo>
+                  <a:pt x="0" y="120000"/>
+                </a:lnTo>
+                <a:close/>
+              </a:path>
+            </a:pathLst>
+          </a:custGeom>
+          <a:noFill/>
+          <a:ln>
+            <a:noFill/>
+          </a:ln>
+        </p:spPr>
+      </p:sp>
+      <p:sp>
+        <p:nvSpPr>
+          <p:cNvPr id="25" name="Google Shape;25;p2:notes"/>
+          <p:cNvSpPr txBox="1">
             <a:spLocks noGrp="1"/>
           </p:cNvSpPr>
           <p:nvPr>
             <p:ph type="body" idx="1"/>
           </p:nvPr>
         </p:nvSpPr>
-        <p:spPr/>
-        <p:txBody>
-          <a:bodyPr/>
-          <a:lstStyle/>
-          <a:p>
-            <a:r>
-              <a:rPr lang="en-US" dirty="0"/>
-              <a:t>Pause. Read it. Let it land. This is the line we want echoing in their heads when they walk in tomorrow morning.</a:t>
-            </a:r>
-          </a:p>
-        </p:txBody>
-      </p:sp>
-      <p:sp>
-        <p:nvSpPr>
-          <p:cNvPr id="4" name="Slide Number Placeholder 3"/>
-          <p:cNvSpPr>
+        <p:spPr>
+          <a:xfrm>
+            <a:off x="0" y="0"/>
+            <a:ext cx="3000000" cy="3000000"/>
+          </a:xfrm>
+          <a:prstGeom prst="rect">
+            <a:avLst/>
+          </a:prstGeom>
+          <a:noFill/>
+          <a:ln>
+            <a:noFill/>
+          </a:ln>
+        </p:spPr>
+        <p:txBody>
+          <a:bodyPr spcFirstLastPara="1" wrap="square" lIns="91425" tIns="45700" rIns="91425" bIns="45700" anchor="t" anchorCtr="0">
+            <a:noAutofit/>
+          </a:bodyPr>
+          <a:lstStyle/>
+          <a:p>
+            <a:pPr marL="0" marR="0" lvl="0" indent="0" algn="l" rtl="0">
+              <a:spcBef>
+                <a:spcPts val="0"/>
+              </a:spcBef>
+              <a:spcAft>
+                <a:spcPts val="0"/>
+              </a:spcAft>
+              <a:buNone/>
+            </a:pPr>
+            <a:r>
+              <a:rPr lang="en-US" sz="1200">
+                <a:solidFill>
+                  <a:schemeClr val="dk1"/>
+                </a:solidFill>
+                <a:latin typeface="Arial"/>
+                <a:ea typeface="Arial"/>
+                <a:cs typeface="Arial"/>
+                <a:sym typeface="Arial"/>
+              </a:rPr>
+              <a:t>Brief intro — keep it under 60 seconds. 'I ship AI products for a living and I've been in the church tech world a while. Most of what I'm sharing today is what I wish someone had told me two years ago.'</a:t>
+            </a:r>
+            <a:endParaRPr/>
+          </a:p>
+        </p:txBody>
+      </p:sp>
+      <p:sp>
+        <p:nvSpPr>
+          <p:cNvPr id="26" name="Google Shape;26;p2:notes"/>
+          <p:cNvSpPr txBox="1">
             <a:spLocks noGrp="1"/>
           </p:cNvSpPr>
           <p:nvPr>
-            <p:ph type="sldNum" sz="quarter" idx="10"/>
+            <p:ph type="sldNum" idx="12"/>
           </p:nvPr>
         </p:nvSpPr>
-        <p:spPr/>
-        <p:txBody>
-          <a:bodyPr/>
-          <a:lstStyle/>
-          <a:p>
-            <a:fld id="{F7021451-1387-4CA6-816F-3879F97B5CBC}" type="slidenum">
-              <a:rPr lang="en-US"/>
+        <p:spPr>
+          <a:xfrm>
+            <a:off x="0" y="0"/>
+            <a:ext cx="3000000" cy="3000000"/>
+          </a:xfrm>
+          <a:prstGeom prst="rect">
+            <a:avLst/>
+          </a:prstGeom>
+          <a:noFill/>
+          <a:ln>
+            <a:noFill/>
+          </a:ln>
+        </p:spPr>
+        <p:txBody>
+          <a:bodyPr spcFirstLastPara="1" wrap="square" lIns="91425" tIns="45700" rIns="91425" bIns="45700" anchor="t" anchorCtr="0">
+            <a:noAutofit/>
+          </a:bodyPr>
+          <a:lstStyle/>
+          <a:p>
+            <a:pPr marL="0" marR="0" lvl="0" indent="0" algn="l" rtl="0">
+              <a:spcBef>
+                <a:spcPts val="0"/>
+              </a:spcBef>
+              <a:spcAft>
+                <a:spcPts val="0"/>
+              </a:spcAft>
+              <a:buNone/>
+            </a:pPr>
+            <a:fld id="{00000000-1234-1234-1234-123412341234}" type="slidenum">
+              <a:rPr lang="en-US" sz="1800">
+                <a:solidFill>
+                  <a:schemeClr val="dk1"/>
+                </a:solidFill>
+                <a:latin typeface="Arial"/>
+                <a:ea typeface="Arial"/>
+                <a:cs typeface="Arial"/>
+                <a:sym typeface="Arial"/>
+              </a:rPr>
               <a:t>3</a:t>
             </a:fld>
-            <a:endParaRPr lang="en-US"/>
+            <a:endParaRPr sz="1800">
+              <a:solidFill>
+                <a:schemeClr val="dk1"/>
+              </a:solidFill>
+              <a:latin typeface="Arial"/>
+              <a:ea typeface="Arial"/>
+              <a:cs typeface="Arial"/>
+              <a:sym typeface="Arial"/>
+            </a:endParaRPr>
           </a:p>
         </p:txBody>
       </p:sp>
     </p:spTree>
-    <p:extLst>
-      <p:ext uri="{BB962C8B-B14F-4D97-AF65-F5344CB8AC3E}">
-        <p14:creationId xmlns:p14="http://schemas.microsoft.com/office/powerpoint/2010/main" val="1024086991"/>
-      </p:ext>
-    </p:extLst>
   </p:cSld>
   <p:clrMapOvr>
     <a:masterClrMapping/>
@@ -924,7 +1287,7 @@
           <a:p>
             <a:r>
               <a:rPr lang="en-US" dirty="0"/>
-              <a:t>These are the three bars we have to clear in the next 30 minutes. If we leave the room with all three, we've done our job.</a:t>
+              <a:t>Pause. Read it. Let it land. This is the line we want echoing in their heads when they walk in tomorrow morning.</a:t>
             </a:r>
           </a:p>
         </p:txBody>
@@ -1011,7 +1374,7 @@
           <a:p>
             <a:r>
               <a:rPr lang="en-US" dirty="0"/>
-              <a:t>Don't read the bullets. The point is the headline: Day 1 craft, Day 2 ship. Everything else is in the schedule on the table.</a:t>
+              <a:t>These are the three bars we have to clear in the next 30 minutes. If we leave the room with all three, we've done our job.</a:t>
             </a:r>
           </a:p>
         </p:txBody>
@@ -1098,7 +1461,7 @@
           <a:p>
             <a:r>
               <a:rPr lang="en-US" dirty="0"/>
-              <a:t>Read it slowly, twice. This is the one sentence to leave the room with. Note: this preview lands the idea, then we hand off to the next session for the full unpack.</a:t>
+              <a:t>Keep this tight — 2 to 3 minutes max. Energy stays up. The baseball line gets a laugh; lean into it briefly and move on.</a:t>
             </a:r>
           </a:p>
         </p:txBody>
@@ -1140,11 +1503,17 @@
 </file>
 
 <file path=ppt/notesSlides/notesSlide7.xml><?xml version="1.0" encoding="utf-8"?>
-<p:notes xmlns:a="http://schemas.openxmlformats.org/drawingml/2006/main" xmlns:r="http://schemas.openxmlformats.org/officeDocument/2006/relationships" xmlns:p="http://schemas.openxmlformats.org/presentationml/2006/main">
+<p:notes xmlns:a="http://schemas.openxmlformats.org/drawingml/2006/main" xmlns:r="http://schemas.openxmlformats.org/officeDocument/2006/relationships" xmlns:p="http://schemas.openxmlformats.org/presentationml/2006/main" showMasterSp="0" showMasterPhAnim="0">
   <p:cSld>
     <p:spTree>
       <p:nvGrpSpPr>
-        <p:cNvPr id="1" name=""/>
+        <p:cNvPr id="1" name="Shape 23">
+          <a:extLst>
+            <a:ext uri="{FF2B5EF4-FFF2-40B4-BE49-F238E27FC236}">
+              <a16:creationId xmlns:a16="http://schemas.microsoft.com/office/drawing/2014/main" id="{5190F50A-D733-F175-49C7-E9940194B552}"/>
+            </a:ext>
+          </a:extLst>
+        </p:cNvPr>
         <p:cNvGrpSpPr/>
         <p:nvPr/>
       </p:nvGrpSpPr>
@@ -1158,94 +1527,13 @@
       </p:grpSpPr>
       <p:sp>
         <p:nvSpPr>
-          <p:cNvPr id="2" name="Slide Image Placeholder 1"/>
-          <p:cNvSpPr>
-            <a:spLocks noGrp="1" noRot="1" noChangeAspect="1"/>
-          </p:cNvSpPr>
-          <p:nvPr>
-            <p:ph type="sldImg"/>
-          </p:nvPr>
-        </p:nvSpPr>
-        <p:spPr/>
-      </p:sp>
-      <p:sp>
-        <p:nvSpPr>
-          <p:cNvPr id="3" name="Notes Placeholder 2"/>
-          <p:cNvSpPr>
-            <a:spLocks noGrp="1"/>
-          </p:cNvSpPr>
-          <p:nvPr>
-            <p:ph type="body" idx="1"/>
-          </p:nvPr>
-        </p:nvSpPr>
-        <p:spPr/>
-        <p:txBody>
-          <a:bodyPr/>
-          <a:lstStyle/>
-          <a:p>
-            <a:r>
-              <a:rPr lang="en-US" dirty="0"/>
-              <a:t>Keep this tight — 2 to 3 minutes max. Energy stays up. The baseball line gets a laugh; lean into it briefly and move on.</a:t>
-            </a:r>
-          </a:p>
-        </p:txBody>
-      </p:sp>
-      <p:sp>
-        <p:nvSpPr>
-          <p:cNvPr id="4" name="Slide Number Placeholder 3"/>
-          <p:cNvSpPr>
-            <a:spLocks noGrp="1"/>
-          </p:cNvSpPr>
-          <p:nvPr>
-            <p:ph type="sldNum" sz="quarter" idx="10"/>
-          </p:nvPr>
-        </p:nvSpPr>
-        <p:spPr/>
-        <p:txBody>
-          <a:bodyPr/>
-          <a:lstStyle/>
-          <a:p>
-            <a:fld id="{F7021451-1387-4CA6-816F-3879F97B5CBC}" type="slidenum">
-              <a:rPr lang="en-US"/>
-              <a:t>7</a:t>
-            </a:fld>
-            <a:endParaRPr lang="en-US"/>
-          </a:p>
-        </p:txBody>
-      </p:sp>
-    </p:spTree>
-    <p:extLst>
-      <p:ext uri="{BB962C8B-B14F-4D97-AF65-F5344CB8AC3E}">
-        <p14:creationId xmlns:p14="http://schemas.microsoft.com/office/powerpoint/2010/main" val="1024086991"/>
-      </p:ext>
-    </p:extLst>
-  </p:cSld>
-  <p:clrMapOvr>
-    <a:masterClrMapping/>
-  </p:clrMapOvr>
-</p:notes>
-</file>
-
-<file path=ppt/notesSlides/notesSlide8.xml><?xml version="1.0" encoding="utf-8"?>
-<p:notes xmlns:a="http://schemas.openxmlformats.org/drawingml/2006/main" xmlns:r="http://schemas.openxmlformats.org/officeDocument/2006/relationships" xmlns:p="http://schemas.openxmlformats.org/presentationml/2006/main" showMasterSp="0" showMasterPhAnim="0">
-  <p:cSld>
-    <p:spTree>
-      <p:nvGrpSpPr>
-        <p:cNvPr id="1" name="Shape 23"/>
-        <p:cNvGrpSpPr/>
-        <p:nvPr/>
-      </p:nvGrpSpPr>
-      <p:grpSpPr>
-        <a:xfrm>
-          <a:off x="0" y="0"/>
-          <a:ext cx="0" cy="0"/>
-          <a:chOff x="0" y="0"/>
-          <a:chExt cx="0" cy="0"/>
-        </a:xfrm>
-      </p:grpSpPr>
-      <p:sp>
-        <p:nvSpPr>
-          <p:cNvPr id="24" name="Google Shape;24;p2:notes"/>
+          <p:cNvPr id="24" name="Google Shape;24;p2:notes">
+            <a:extLst>
+              <a:ext uri="{FF2B5EF4-FFF2-40B4-BE49-F238E27FC236}">
+                <a16:creationId xmlns:a16="http://schemas.microsoft.com/office/drawing/2014/main" id="{6A9A0D4C-FF4D-7010-BC0D-72E2588C06A4}"/>
+              </a:ext>
+            </a:extLst>
+          </p:cNvPr>
           <p:cNvSpPr>
             <a:spLocks noGrp="1" noRot="1" noChangeAspect="1"/>
           </p:cNvSpPr>
@@ -1290,7 +1578,13 @@
       </p:sp>
       <p:sp>
         <p:nvSpPr>
-          <p:cNvPr id="25" name="Google Shape;25;p2:notes"/>
+          <p:cNvPr id="25" name="Google Shape;25;p2:notes">
+            <a:extLst>
+              <a:ext uri="{FF2B5EF4-FFF2-40B4-BE49-F238E27FC236}">
+                <a16:creationId xmlns:a16="http://schemas.microsoft.com/office/drawing/2014/main" id="{4897D832-5050-09A3-8709-2978C19BD1ED}"/>
+              </a:ext>
+            </a:extLst>
+          </p:cNvPr>
           <p:cNvSpPr txBox="1">
             <a:spLocks noGrp="1"/>
           </p:cNvSpPr>
@@ -1344,7 +1638,13 @@
       </p:sp>
       <p:sp>
         <p:nvSpPr>
-          <p:cNvPr id="26" name="Google Shape;26;p2:notes"/>
+          <p:cNvPr id="26" name="Google Shape;26;p2:notes">
+            <a:extLst>
+              <a:ext uri="{FF2B5EF4-FFF2-40B4-BE49-F238E27FC236}">
+                <a16:creationId xmlns:a16="http://schemas.microsoft.com/office/drawing/2014/main" id="{50AB0520-937B-664B-D02E-F527E404A90D}"/>
+              </a:ext>
+            </a:extLst>
+          </p:cNvPr>
           <p:cNvSpPr txBox="1">
             <a:spLocks noGrp="1"/>
           </p:cNvSpPr>
@@ -1390,7 +1690,7 @@
                 <a:cs typeface="Arial"/>
                 <a:sym typeface="Arial"/>
               </a:rPr>
-              <a:t>8</a:t>
+              <a:t>7</a:t>
             </a:fld>
             <a:endParaRPr sz="1800">
               <a:solidFill>
@@ -1405,6 +1705,11 @@
         </p:txBody>
       </p:sp>
     </p:spTree>
+    <p:extLst>
+      <p:ext uri="{BB962C8B-B14F-4D97-AF65-F5344CB8AC3E}">
+        <p14:creationId xmlns:p14="http://schemas.microsoft.com/office/powerpoint/2010/main" val="1320900761"/>
+      </p:ext>
+    </p:extLst>
   </p:cSld>
   <p:clrMapOvr>
     <a:masterClrMapping/>
@@ -1412,12 +1717,18 @@
 </p:notes>
 </file>
 
-<file path=ppt/notesSlides/notesSlide9.xml><?xml version="1.0" encoding="utf-8"?>
+<file path=ppt/notesSlides/notesSlide8.xml><?xml version="1.0" encoding="utf-8"?>
 <p:notes xmlns:a="http://schemas.openxmlformats.org/drawingml/2006/main" xmlns:r="http://schemas.openxmlformats.org/officeDocument/2006/relationships" xmlns:p="http://schemas.openxmlformats.org/presentationml/2006/main">
   <p:cSld>
     <p:spTree>
       <p:nvGrpSpPr>
-        <p:cNvPr id="1" name=""/>
+        <p:cNvPr id="1" name="">
+          <a:extLst>
+            <a:ext uri="{FF2B5EF4-FFF2-40B4-BE49-F238E27FC236}">
+              <a16:creationId xmlns:a16="http://schemas.microsoft.com/office/drawing/2014/main" id="{0140A967-15FA-A8B6-660D-210A657AEA02}"/>
+            </a:ext>
+          </a:extLst>
+        </p:cNvPr>
         <p:cNvGrpSpPr/>
         <p:nvPr/>
       </p:nvGrpSpPr>
@@ -1431,7 +1742,13 @@
       </p:grpSpPr>
       <p:sp>
         <p:nvSpPr>
-          <p:cNvPr id="2" name="Slide Image Placeholder 1"/>
+          <p:cNvPr id="2" name="Slide Image Placeholder 1">
+            <a:extLst>
+              <a:ext uri="{FF2B5EF4-FFF2-40B4-BE49-F238E27FC236}">
+                <a16:creationId xmlns:a16="http://schemas.microsoft.com/office/drawing/2014/main" id="{9732D9E4-AB4E-DAB3-D52D-8ED2E5717423}"/>
+              </a:ext>
+            </a:extLst>
+          </p:cNvPr>
           <p:cNvSpPr>
             <a:spLocks noGrp="1" noRot="1" noChangeAspect="1"/>
           </p:cNvSpPr>
@@ -1443,7 +1760,13 @@
       </p:sp>
       <p:sp>
         <p:nvSpPr>
-          <p:cNvPr id="3" name="Notes Placeholder 2"/>
+          <p:cNvPr id="3" name="Notes Placeholder 2">
+            <a:extLst>
+              <a:ext uri="{FF2B5EF4-FFF2-40B4-BE49-F238E27FC236}">
+                <a16:creationId xmlns:a16="http://schemas.microsoft.com/office/drawing/2014/main" id="{8460B4BB-2118-7858-2720-A052EE337DF2}"/>
+              </a:ext>
+            </a:extLst>
+          </p:cNvPr>
           <p:cNvSpPr>
             <a:spLocks noGrp="1"/>
           </p:cNvSpPr>
@@ -1458,14 +1781,20 @@
           <a:p>
             <a:r>
               <a:rPr lang="en-US" dirty="0"/>
-              <a:t>If more than ~20% of the room isn't green, silently extend the 10:15 break by 10 min rather than pushing people into the SDLC session cold. Don't shame anyone — just point them at the AI Genius Bar.</a:t>
-            </a:r>
-          </a:p>
-        </p:txBody>
-      </p:sp>
-      <p:sp>
-        <p:nvSpPr>
-          <p:cNvPr id="4" name="Slide Number Placeholder 3"/>
+              <a:t>Keep this tight — 2 to 3 minutes max. Energy stays up. The baseball line gets a laugh; lean into it briefly and move on.</a:t>
+            </a:r>
+          </a:p>
+        </p:txBody>
+      </p:sp>
+      <p:sp>
+        <p:nvSpPr>
+          <p:cNvPr id="4" name="Slide Number Placeholder 3">
+            <a:extLst>
+              <a:ext uri="{FF2B5EF4-FFF2-40B4-BE49-F238E27FC236}">
+                <a16:creationId xmlns:a16="http://schemas.microsoft.com/office/drawing/2014/main" id="{40259F79-7012-ADD2-19F3-0C6CB0CFD33E}"/>
+              </a:ext>
+            </a:extLst>
+          </p:cNvPr>
           <p:cNvSpPr>
             <a:spLocks noGrp="1"/>
           </p:cNvSpPr>
@@ -1480,7 +1809,7 @@
           <a:p>
             <a:fld id="{F7021451-1387-4CA6-816F-3879F97B5CBC}" type="slidenum">
               <a:rPr lang="en-US"/>
-              <a:t>9</a:t>
+              <a:t>8</a:t>
             </a:fld>
             <a:endParaRPr lang="en-US"/>
           </a:p>
@@ -1489,7 +1818,222 @@
     </p:spTree>
     <p:extLst>
       <p:ext uri="{BB962C8B-B14F-4D97-AF65-F5344CB8AC3E}">
-        <p14:creationId xmlns:p14="http://schemas.microsoft.com/office/powerpoint/2010/main" val="1024086991"/>
+        <p14:creationId xmlns:p14="http://schemas.microsoft.com/office/powerpoint/2010/main" val="3164108662"/>
+      </p:ext>
+    </p:extLst>
+  </p:cSld>
+  <p:clrMapOvr>
+    <a:masterClrMapping/>
+  </p:clrMapOvr>
+</p:notes>
+</file>
+
+<file path=ppt/notesSlides/notesSlide9.xml><?xml version="1.0" encoding="utf-8"?>
+<p:notes xmlns:a="http://schemas.openxmlformats.org/drawingml/2006/main" xmlns:r="http://schemas.openxmlformats.org/officeDocument/2006/relationships" xmlns:p="http://schemas.openxmlformats.org/presentationml/2006/main" showMasterSp="0" showMasterPhAnim="0">
+  <p:cSld>
+    <p:spTree>
+      <p:nvGrpSpPr>
+        <p:cNvPr id="1" name="Shape 23">
+          <a:extLst>
+            <a:ext uri="{FF2B5EF4-FFF2-40B4-BE49-F238E27FC236}">
+              <a16:creationId xmlns:a16="http://schemas.microsoft.com/office/drawing/2014/main" id="{3FBB4FA3-DAA4-BB59-BF63-483EBEBED2F3}"/>
+            </a:ext>
+          </a:extLst>
+        </p:cNvPr>
+        <p:cNvGrpSpPr/>
+        <p:nvPr/>
+      </p:nvGrpSpPr>
+      <p:grpSpPr>
+        <a:xfrm>
+          <a:off x="0" y="0"/>
+          <a:ext cx="0" cy="0"/>
+          <a:chOff x="0" y="0"/>
+          <a:chExt cx="0" cy="0"/>
+        </a:xfrm>
+      </p:grpSpPr>
+      <p:sp>
+        <p:nvSpPr>
+          <p:cNvPr id="24" name="Google Shape;24;p2:notes">
+            <a:extLst>
+              <a:ext uri="{FF2B5EF4-FFF2-40B4-BE49-F238E27FC236}">
+                <a16:creationId xmlns:a16="http://schemas.microsoft.com/office/drawing/2014/main" id="{70FD4460-DC8A-47C9-283A-D0E3C103D36B}"/>
+              </a:ext>
+            </a:extLst>
+          </p:cNvPr>
+          <p:cNvSpPr>
+            <a:spLocks noGrp="1" noRot="1" noChangeAspect="1"/>
+          </p:cNvSpPr>
+          <p:nvPr>
+            <p:ph type="sldImg" idx="2"/>
+          </p:nvPr>
+        </p:nvSpPr>
+        <p:spPr>
+          <a:xfrm>
+            <a:off x="-1166813" y="0"/>
+            <a:ext cx="5334001" cy="3000375"/>
+          </a:xfrm>
+          <a:custGeom>
+            <a:avLst/>
+            <a:gdLst/>
+            <a:ahLst/>
+            <a:cxnLst/>
+            <a:rect l="l" t="t" r="r" b="b"/>
+            <a:pathLst>
+              <a:path w="120000" h="120000" extrusionOk="0">
+                <a:moveTo>
+                  <a:pt x="0" y="0"/>
+                </a:moveTo>
+                <a:lnTo>
+                  <a:pt x="120000" y="0"/>
+                </a:lnTo>
+                <a:lnTo>
+                  <a:pt x="120000" y="120000"/>
+                </a:lnTo>
+                <a:lnTo>
+                  <a:pt x="0" y="120000"/>
+                </a:lnTo>
+                <a:close/>
+              </a:path>
+            </a:pathLst>
+          </a:custGeom>
+          <a:noFill/>
+          <a:ln>
+            <a:noFill/>
+          </a:ln>
+        </p:spPr>
+      </p:sp>
+      <p:sp>
+        <p:nvSpPr>
+          <p:cNvPr id="25" name="Google Shape;25;p2:notes">
+            <a:extLst>
+              <a:ext uri="{FF2B5EF4-FFF2-40B4-BE49-F238E27FC236}">
+                <a16:creationId xmlns:a16="http://schemas.microsoft.com/office/drawing/2014/main" id="{37813064-7850-6180-F587-B2E70DF92AE7}"/>
+              </a:ext>
+            </a:extLst>
+          </p:cNvPr>
+          <p:cNvSpPr txBox="1">
+            <a:spLocks noGrp="1"/>
+          </p:cNvSpPr>
+          <p:nvPr>
+            <p:ph type="body" idx="1"/>
+          </p:nvPr>
+        </p:nvSpPr>
+        <p:spPr>
+          <a:xfrm>
+            <a:off x="0" y="0"/>
+            <a:ext cx="3000000" cy="3000000"/>
+          </a:xfrm>
+          <a:prstGeom prst="rect">
+            <a:avLst/>
+          </a:prstGeom>
+          <a:noFill/>
+          <a:ln>
+            <a:noFill/>
+          </a:ln>
+        </p:spPr>
+        <p:txBody>
+          <a:bodyPr spcFirstLastPara="1" wrap="square" lIns="91425" tIns="45700" rIns="91425" bIns="45700" anchor="t" anchorCtr="0">
+            <a:noAutofit/>
+          </a:bodyPr>
+          <a:lstStyle/>
+          <a:p>
+            <a:pPr marL="0" marR="0" lvl="0" indent="0" algn="l" rtl="0">
+              <a:spcBef>
+                <a:spcPts val="0"/>
+              </a:spcBef>
+              <a:spcAft>
+                <a:spcPts val="0"/>
+              </a:spcAft>
+              <a:buNone/>
+            </a:pPr>
+            <a:r>
+              <a:rPr lang="en-US" sz="1200">
+                <a:solidFill>
+                  <a:schemeClr val="dk1"/>
+                </a:solidFill>
+                <a:latin typeface="Arial"/>
+                <a:ea typeface="Arial"/>
+                <a:cs typeface="Arial"/>
+                <a:sym typeface="Arial"/>
+              </a:rPr>
+              <a:t>Brief intro — keep it under 60 seconds. 'I ship AI products for a living and I've been in the church tech world a while. Most of what I'm sharing today is what I wish someone had told me two years ago.'</a:t>
+            </a:r>
+            <a:endParaRPr/>
+          </a:p>
+        </p:txBody>
+      </p:sp>
+      <p:sp>
+        <p:nvSpPr>
+          <p:cNvPr id="26" name="Google Shape;26;p2:notes">
+            <a:extLst>
+              <a:ext uri="{FF2B5EF4-FFF2-40B4-BE49-F238E27FC236}">
+                <a16:creationId xmlns:a16="http://schemas.microsoft.com/office/drawing/2014/main" id="{3D9D3C68-CDEF-E64A-7A2B-9430CF88CE3B}"/>
+              </a:ext>
+            </a:extLst>
+          </p:cNvPr>
+          <p:cNvSpPr txBox="1">
+            <a:spLocks noGrp="1"/>
+          </p:cNvSpPr>
+          <p:nvPr>
+            <p:ph type="sldNum" idx="12"/>
+          </p:nvPr>
+        </p:nvSpPr>
+        <p:spPr>
+          <a:xfrm>
+            <a:off x="0" y="0"/>
+            <a:ext cx="3000000" cy="3000000"/>
+          </a:xfrm>
+          <a:prstGeom prst="rect">
+            <a:avLst/>
+          </a:prstGeom>
+          <a:noFill/>
+          <a:ln>
+            <a:noFill/>
+          </a:ln>
+        </p:spPr>
+        <p:txBody>
+          <a:bodyPr spcFirstLastPara="1" wrap="square" lIns="91425" tIns="45700" rIns="91425" bIns="45700" anchor="t" anchorCtr="0">
+            <a:noAutofit/>
+          </a:bodyPr>
+          <a:lstStyle/>
+          <a:p>
+            <a:pPr marL="0" marR="0" lvl="0" indent="0" algn="l" rtl="0">
+              <a:spcBef>
+                <a:spcPts val="0"/>
+              </a:spcBef>
+              <a:spcAft>
+                <a:spcPts val="0"/>
+              </a:spcAft>
+              <a:buNone/>
+            </a:pPr>
+            <a:fld id="{00000000-1234-1234-1234-123412341234}" type="slidenum">
+              <a:rPr lang="en-US" sz="1800">
+                <a:solidFill>
+                  <a:schemeClr val="dk1"/>
+                </a:solidFill>
+                <a:latin typeface="Arial"/>
+                <a:ea typeface="Arial"/>
+                <a:cs typeface="Arial"/>
+                <a:sym typeface="Arial"/>
+              </a:rPr>
+              <a:t>9</a:t>
+            </a:fld>
+            <a:endParaRPr sz="1800">
+              <a:solidFill>
+                <a:schemeClr val="dk1"/>
+              </a:solidFill>
+              <a:latin typeface="Arial"/>
+              <a:ea typeface="Arial"/>
+              <a:cs typeface="Arial"/>
+              <a:sym typeface="Arial"/>
+            </a:endParaRPr>
+          </a:p>
+        </p:txBody>
+      </p:sp>
+    </p:spTree>
+    <p:extLst>
+      <p:ext uri="{BB962C8B-B14F-4D97-AF65-F5344CB8AC3E}">
+        <p14:creationId xmlns:p14="http://schemas.microsoft.com/office/powerpoint/2010/main" val="3799838640"/>
       </p:ext>
     </p:extLst>
   </p:cSld>
@@ -2229,6 +2773,2130 @@
 
 <file path=ppt/slides/slide10.xml><?xml version="1.0" encoding="utf-8"?>
 <p:sld xmlns:a="http://schemas.openxmlformats.org/drawingml/2006/main" xmlns:r="http://schemas.openxmlformats.org/officeDocument/2006/relationships" xmlns:p="http://schemas.openxmlformats.org/presentationml/2006/main">
+  <p:cSld name="Slide 5">
+    <p:bg>
+      <p:bgPr>
+        <a:solidFill>
+          <a:srgbClr val="F5F2ED"/>
+        </a:solidFill>
+        <a:effectLst/>
+      </p:bgPr>
+    </p:bg>
+    <p:spTree>
+      <p:nvGrpSpPr>
+        <p:cNvPr id="1" name=""/>
+        <p:cNvGrpSpPr/>
+        <p:nvPr/>
+      </p:nvGrpSpPr>
+      <p:grpSpPr>
+        <a:xfrm>
+          <a:off x="0" y="0"/>
+          <a:ext cx="0" cy="0"/>
+          <a:chOff x="0" y="0"/>
+          <a:chExt cx="0" cy="0"/>
+        </a:xfrm>
+      </p:grpSpPr>
+      <p:sp>
+        <p:nvSpPr>
+          <p:cNvPr id="2" name="Text 0"/>
+          <p:cNvSpPr/>
+          <p:nvPr/>
+        </p:nvSpPr>
+        <p:spPr>
+          <a:xfrm>
+            <a:off x="548640" y="548640"/>
+            <a:ext cx="5486400" cy="274320"/>
+          </a:xfrm>
+          <a:prstGeom prst="rect">
+            <a:avLst/>
+          </a:prstGeom>
+          <a:noFill/>
+          <a:ln/>
+        </p:spPr>
+        <p:txBody>
+          <a:bodyPr wrap="square" lIns="0" tIns="0" rIns="0" bIns="0" rtlCol="0" anchor="ctr"/>
+          <a:lstStyle/>
+          <a:p>
+            <a:pPr marL="0" indent="0">
+              <a:buNone/>
+            </a:pPr>
+            <a:r>
+              <a:rPr lang="en-US" sz="1000" b="1" kern="0" spc="600" dirty="0">
+                <a:solidFill>
+                  <a:srgbClr val="E89B3C"/>
+                </a:solidFill>
+                <a:latin typeface="Inter" pitchFamily="34" charset="0"/>
+                <a:ea typeface="Inter" pitchFamily="34" charset="-122"/>
+                <a:cs typeface="Inter" pitchFamily="34" charset="-120"/>
+              </a:rPr>
+              <a:t>THE ARC</a:t>
+            </a:r>
+            <a:endParaRPr lang="en-US" sz="1000" dirty="0"/>
+          </a:p>
+        </p:txBody>
+      </p:sp>
+      <p:sp>
+        <p:nvSpPr>
+          <p:cNvPr id="3" name="Text 1"/>
+          <p:cNvSpPr/>
+          <p:nvPr/>
+        </p:nvSpPr>
+        <p:spPr>
+          <a:xfrm>
+            <a:off x="548640" y="914400"/>
+            <a:ext cx="10058400" cy="822960"/>
+          </a:xfrm>
+          <a:prstGeom prst="rect">
+            <a:avLst/>
+          </a:prstGeom>
+          <a:noFill/>
+          <a:ln/>
+        </p:spPr>
+        <p:txBody>
+          <a:bodyPr wrap="square" lIns="0" tIns="0" rIns="0" bIns="0" rtlCol="0" anchor="ctr"/>
+          <a:lstStyle/>
+          <a:p>
+            <a:pPr marL="0" indent="0">
+              <a:buNone/>
+            </a:pPr>
+            <a:r>
+              <a:rPr lang="en-US" sz="3600" b="1" dirty="0">
+                <a:solidFill>
+                  <a:srgbClr val="1F2937"/>
+                </a:solidFill>
+                <a:latin typeface="Montserrat" pitchFamily="34" charset="0"/>
+                <a:ea typeface="Montserrat" pitchFamily="34" charset="-122"/>
+                <a:cs typeface="Montserrat" pitchFamily="34" charset="-120"/>
+              </a:rPr>
+              <a:t>Two days. One arc.</a:t>
+            </a:r>
+            <a:endParaRPr lang="en-US" sz="3600" dirty="0"/>
+          </a:p>
+        </p:txBody>
+      </p:sp>
+      <p:sp>
+        <p:nvSpPr>
+          <p:cNvPr id="4" name="Text 2"/>
+          <p:cNvSpPr/>
+          <p:nvPr/>
+        </p:nvSpPr>
+        <p:spPr>
+          <a:xfrm>
+            <a:off x="548640" y="1783080"/>
+            <a:ext cx="10972800" cy="365760"/>
+          </a:xfrm>
+          <a:prstGeom prst="rect">
+            <a:avLst/>
+          </a:prstGeom>
+          <a:noFill/>
+          <a:ln/>
+        </p:spPr>
+        <p:txBody>
+          <a:bodyPr wrap="square" lIns="0" tIns="0" rIns="0" bIns="0" rtlCol="0" anchor="ctr"/>
+          <a:lstStyle/>
+          <a:p>
+            <a:pPr marL="0" indent="0">
+              <a:buNone/>
+            </a:pPr>
+            <a:r>
+              <a:rPr lang="en-US" sz="1500" i="1" dirty="0">
+                <a:solidFill>
+                  <a:srgbClr val="6B7280"/>
+                </a:solidFill>
+                <a:latin typeface="Inter" pitchFamily="34" charset="0"/>
+                <a:ea typeface="Inter" pitchFamily="34" charset="-122"/>
+                <a:cs typeface="Inter" pitchFamily="34" charset="-120"/>
+              </a:rPr>
+              <a:t>Day 1 you learn the craft. Day 2 you ship something real.</a:t>
+            </a:r>
+            <a:endParaRPr lang="en-US" sz="1500" dirty="0"/>
+          </a:p>
+        </p:txBody>
+      </p:sp>
+      <p:sp>
+        <p:nvSpPr>
+          <p:cNvPr id="5" name="Shape 3"/>
+          <p:cNvSpPr/>
+          <p:nvPr/>
+        </p:nvSpPr>
+        <p:spPr>
+          <a:xfrm>
+            <a:off x="548640" y="2560320"/>
+            <a:ext cx="5486400" cy="3383280"/>
+          </a:xfrm>
+          <a:prstGeom prst="rect">
+            <a:avLst/>
+          </a:prstGeom>
+          <a:solidFill>
+            <a:srgbClr val="FFFFFF"/>
+          </a:solidFill>
+          <a:ln w="6350">
+            <a:solidFill>
+              <a:srgbClr val="E2DFD8"/>
+            </a:solidFill>
+            <a:prstDash val="solid"/>
+          </a:ln>
+        </p:spPr>
+        <p:txBody>
+          <a:bodyPr/>
+          <a:lstStyle/>
+          <a:p>
+            <a:endParaRPr lang="en-US"/>
+          </a:p>
+        </p:txBody>
+      </p:sp>
+      <p:sp>
+        <p:nvSpPr>
+          <p:cNvPr id="6" name="Shape 4"/>
+          <p:cNvSpPr/>
+          <p:nvPr/>
+        </p:nvSpPr>
+        <p:spPr>
+          <a:xfrm>
+            <a:off x="548640" y="2560320"/>
+            <a:ext cx="73152" cy="3383280"/>
+          </a:xfrm>
+          <a:prstGeom prst="rect">
+            <a:avLst/>
+          </a:prstGeom>
+          <a:solidFill>
+            <a:srgbClr val="E89B3C"/>
+          </a:solidFill>
+          <a:ln/>
+        </p:spPr>
+        <p:txBody>
+          <a:bodyPr/>
+          <a:lstStyle/>
+          <a:p>
+            <a:endParaRPr lang="en-US"/>
+          </a:p>
+        </p:txBody>
+      </p:sp>
+      <p:sp>
+        <p:nvSpPr>
+          <p:cNvPr id="7" name="Text 5"/>
+          <p:cNvSpPr/>
+          <p:nvPr/>
+        </p:nvSpPr>
+        <p:spPr>
+          <a:xfrm>
+            <a:off x="960120" y="2926080"/>
+            <a:ext cx="3657600" cy="274320"/>
+          </a:xfrm>
+          <a:prstGeom prst="rect">
+            <a:avLst/>
+          </a:prstGeom>
+          <a:noFill/>
+          <a:ln/>
+        </p:spPr>
+        <p:txBody>
+          <a:bodyPr wrap="square" lIns="0" tIns="0" rIns="0" bIns="0" rtlCol="0" anchor="ctr"/>
+          <a:lstStyle/>
+          <a:p>
+            <a:pPr marL="0" indent="0">
+              <a:buNone/>
+            </a:pPr>
+            <a:r>
+              <a:rPr lang="en-US" sz="1000" b="1" kern="0" spc="600" dirty="0">
+                <a:solidFill>
+                  <a:srgbClr val="E89B3C"/>
+                </a:solidFill>
+                <a:latin typeface="Inter" pitchFamily="34" charset="0"/>
+                <a:ea typeface="Inter" pitchFamily="34" charset="-122"/>
+                <a:cs typeface="Inter" pitchFamily="34" charset="-120"/>
+              </a:rPr>
+              <a:t>DAY 1 · MAY 7</a:t>
+            </a:r>
+            <a:endParaRPr lang="en-US" sz="1000" dirty="0"/>
+          </a:p>
+        </p:txBody>
+      </p:sp>
+      <p:sp>
+        <p:nvSpPr>
+          <p:cNvPr id="8" name="Text 6"/>
+          <p:cNvSpPr/>
+          <p:nvPr/>
+        </p:nvSpPr>
+        <p:spPr>
+          <a:xfrm>
+            <a:off x="960120" y="3291840"/>
+            <a:ext cx="4846320" cy="640080"/>
+          </a:xfrm>
+          <a:prstGeom prst="rect">
+            <a:avLst/>
+          </a:prstGeom>
+          <a:noFill/>
+          <a:ln/>
+        </p:spPr>
+        <p:txBody>
+          <a:bodyPr wrap="square" lIns="0" tIns="0" rIns="0" bIns="0" rtlCol="0" anchor="ctr"/>
+          <a:lstStyle/>
+          <a:p>
+            <a:pPr marL="0" indent="0">
+              <a:buNone/>
+            </a:pPr>
+            <a:r>
+              <a:rPr lang="en-US" sz="3000" b="1" dirty="0">
+                <a:solidFill>
+                  <a:srgbClr val="1F2937"/>
+                </a:solidFill>
+                <a:latin typeface="Montserrat" pitchFamily="34" charset="0"/>
+                <a:ea typeface="Montserrat" pitchFamily="34" charset="-122"/>
+                <a:cs typeface="Montserrat" pitchFamily="34" charset="-120"/>
+              </a:rPr>
+              <a:t>Foundations</a:t>
+            </a:r>
+            <a:endParaRPr lang="en-US" sz="3000" dirty="0"/>
+          </a:p>
+        </p:txBody>
+      </p:sp>
+      <p:sp>
+        <p:nvSpPr>
+          <p:cNvPr id="9" name="Text 7"/>
+          <p:cNvSpPr/>
+          <p:nvPr/>
+        </p:nvSpPr>
+        <p:spPr>
+          <a:xfrm>
+            <a:off x="960120" y="3931920"/>
+            <a:ext cx="4846320" cy="457200"/>
+          </a:xfrm>
+          <a:prstGeom prst="rect">
+            <a:avLst/>
+          </a:prstGeom>
+          <a:noFill/>
+          <a:ln/>
+        </p:spPr>
+        <p:txBody>
+          <a:bodyPr wrap="square" lIns="0" tIns="0" rIns="0" bIns="0" rtlCol="0" anchor="ctr"/>
+          <a:lstStyle/>
+          <a:p>
+            <a:pPr marL="0" indent="0">
+              <a:buNone/>
+            </a:pPr>
+            <a:r>
+              <a:rPr lang="en-US" sz="1300" i="1" dirty="0">
+                <a:solidFill>
+                  <a:srgbClr val="6B7280"/>
+                </a:solidFill>
+                <a:latin typeface="Inter" pitchFamily="34" charset="0"/>
+                <a:ea typeface="Inter" pitchFamily="34" charset="-122"/>
+                <a:cs typeface="Inter" pitchFamily="34" charset="-120"/>
+              </a:rPr>
+              <a:t>Learn the mindset, the workflow, and how to build context.</a:t>
+            </a:r>
+            <a:endParaRPr lang="en-US" sz="1300" dirty="0"/>
+          </a:p>
+        </p:txBody>
+      </p:sp>
+      <p:sp>
+        <p:nvSpPr>
+          <p:cNvPr id="10" name="Text 8"/>
+          <p:cNvSpPr/>
+          <p:nvPr/>
+        </p:nvSpPr>
+        <p:spPr>
+          <a:xfrm>
+            <a:off x="960120" y="4480560"/>
+            <a:ext cx="4846320" cy="1371600"/>
+          </a:xfrm>
+          <a:prstGeom prst="rect">
+            <a:avLst/>
+          </a:prstGeom>
+          <a:noFill/>
+          <a:ln/>
+        </p:spPr>
+        <p:txBody>
+          <a:bodyPr wrap="square" lIns="0" tIns="0" rIns="0" bIns="0" rtlCol="0" anchor="ctr"/>
+          <a:lstStyle/>
+          <a:p>
+            <a:pPr marL="342900" indent="-342900">
+              <a:spcAft>
+                <a:spcPts val="400"/>
+              </a:spcAft>
+              <a:buSzPct val="100000"/>
+              <a:buChar char="•"/>
+            </a:pPr>
+            <a:r>
+              <a:rPr lang="en-US" sz="1200" dirty="0">
+                <a:solidFill>
+                  <a:srgbClr val="1F2937"/>
+                </a:solidFill>
+                <a:latin typeface="Inter" pitchFamily="34" charset="0"/>
+                <a:ea typeface="Inter" pitchFamily="34" charset="-122"/>
+                <a:cs typeface="Inter" pitchFamily="34" charset="-120"/>
+              </a:rPr>
+              <a:t>Vibe coding vs. context engineering</a:t>
+            </a:r>
+            <a:endParaRPr lang="en-US" sz="1200" dirty="0"/>
+          </a:p>
+          <a:p>
+            <a:pPr marL="342900" indent="-342900">
+              <a:spcAft>
+                <a:spcPts val="400"/>
+              </a:spcAft>
+              <a:buSzPct val="100000"/>
+              <a:buChar char="•"/>
+            </a:pPr>
+            <a:r>
+              <a:rPr lang="en-US" sz="1200" dirty="0">
+                <a:solidFill>
+                  <a:srgbClr val="1F2937"/>
+                </a:solidFill>
+                <a:latin typeface="Inter" pitchFamily="34" charset="0"/>
+                <a:ea typeface="Inter" pitchFamily="34" charset="-122"/>
+                <a:cs typeface="Inter" pitchFamily="34" charset="-120"/>
+              </a:rPr>
+              <a:t>SDLC crash course (git, repos, terminal)</a:t>
+            </a:r>
+            <a:endParaRPr lang="en-US" sz="1200" dirty="0"/>
+          </a:p>
+          <a:p>
+            <a:pPr marL="342900" indent="-342900">
+              <a:spcAft>
+                <a:spcPts val="400"/>
+              </a:spcAft>
+              <a:buSzPct val="100000"/>
+              <a:buChar char="•"/>
+            </a:pPr>
+            <a:r>
+              <a:rPr lang="en-US" sz="1200" dirty="0">
+                <a:solidFill>
+                  <a:srgbClr val="1F2937"/>
+                </a:solidFill>
+                <a:latin typeface="Inter" pitchFamily="34" charset="0"/>
+                <a:ea typeface="Inter" pitchFamily="34" charset="-122"/>
+                <a:cs typeface="Inter" pitchFamily="34" charset="-120"/>
+              </a:rPr>
+              <a:t>Building context — Part 1 &amp; 2</a:t>
+            </a:r>
+            <a:endParaRPr lang="en-US" sz="1200" dirty="0"/>
+          </a:p>
+          <a:p>
+            <a:pPr marL="342900" indent="-342900">
+              <a:spcAft>
+                <a:spcPts val="400"/>
+              </a:spcAft>
+              <a:buSzPct val="100000"/>
+              <a:buChar char="•"/>
+            </a:pPr>
+            <a:r>
+              <a:rPr lang="en-US" sz="1200" dirty="0">
+                <a:solidFill>
+                  <a:srgbClr val="1F2937"/>
+                </a:solidFill>
+                <a:latin typeface="Inter" pitchFamily="34" charset="0"/>
+                <a:ea typeface="Inter" pitchFamily="34" charset="-122"/>
+                <a:cs typeface="Inter" pitchFamily="34" charset="-120"/>
+              </a:rPr>
+              <a:t>Claude Code for the non-developer</a:t>
+            </a:r>
+            <a:endParaRPr lang="en-US" sz="1200" dirty="0"/>
+          </a:p>
+          <a:p>
+            <a:pPr marL="342900" indent="-342900">
+              <a:spcAft>
+                <a:spcPts val="400"/>
+              </a:spcAft>
+              <a:buSzPct val="100000"/>
+              <a:buChar char="•"/>
+            </a:pPr>
+            <a:r>
+              <a:rPr lang="en-US" sz="1200" dirty="0">
+                <a:solidFill>
+                  <a:srgbClr val="1F2937"/>
+                </a:solidFill>
+                <a:latin typeface="Inter" pitchFamily="34" charset="0"/>
+                <a:ea typeface="Inter" pitchFamily="34" charset="-122"/>
+                <a:cs typeface="Inter" pitchFamily="34" charset="-120"/>
+              </a:rPr>
+              <a:t>Context Engineering Workflow Overview</a:t>
+            </a:r>
+            <a:endParaRPr lang="en-US" sz="1200" dirty="0"/>
+          </a:p>
+          <a:p>
+            <a:pPr marL="342900" indent="-342900">
+              <a:spcAft>
+                <a:spcPts val="400"/>
+              </a:spcAft>
+              <a:buSzPct val="100000"/>
+              <a:buChar char="•"/>
+            </a:pPr>
+            <a:r>
+              <a:rPr lang="en-US" sz="1200" dirty="0">
+                <a:solidFill>
+                  <a:srgbClr val="1F2937"/>
+                </a:solidFill>
+                <a:latin typeface="Inter" pitchFamily="34" charset="0"/>
+                <a:ea typeface="Inter" pitchFamily="34" charset="-122"/>
+                <a:cs typeface="Inter" pitchFamily="34" charset="-120"/>
+              </a:rPr>
+              <a:t>Inspire Leaders panel</a:t>
+            </a:r>
+            <a:endParaRPr lang="en-US" sz="1200" dirty="0"/>
+          </a:p>
+        </p:txBody>
+      </p:sp>
+      <p:sp>
+        <p:nvSpPr>
+          <p:cNvPr id="11" name="Shape 9"/>
+          <p:cNvSpPr/>
+          <p:nvPr/>
+        </p:nvSpPr>
+        <p:spPr>
+          <a:xfrm>
+            <a:off x="6309360" y="2560320"/>
+            <a:ext cx="5486400" cy="3383280"/>
+          </a:xfrm>
+          <a:prstGeom prst="rect">
+            <a:avLst/>
+          </a:prstGeom>
+          <a:solidFill>
+            <a:srgbClr val="0F1620"/>
+          </a:solidFill>
+          <a:ln/>
+        </p:spPr>
+        <p:txBody>
+          <a:bodyPr/>
+          <a:lstStyle/>
+          <a:p>
+            <a:endParaRPr lang="en-US"/>
+          </a:p>
+        </p:txBody>
+      </p:sp>
+      <p:sp>
+        <p:nvSpPr>
+          <p:cNvPr id="12" name="Shape 10"/>
+          <p:cNvSpPr/>
+          <p:nvPr/>
+        </p:nvSpPr>
+        <p:spPr>
+          <a:xfrm>
+            <a:off x="6309360" y="2560320"/>
+            <a:ext cx="73152" cy="3383280"/>
+          </a:xfrm>
+          <a:prstGeom prst="rect">
+            <a:avLst/>
+          </a:prstGeom>
+          <a:solidFill>
+            <a:srgbClr val="3FB6A8"/>
+          </a:solidFill>
+          <a:ln/>
+        </p:spPr>
+        <p:txBody>
+          <a:bodyPr/>
+          <a:lstStyle/>
+          <a:p>
+            <a:endParaRPr lang="en-US"/>
+          </a:p>
+        </p:txBody>
+      </p:sp>
+      <p:sp>
+        <p:nvSpPr>
+          <p:cNvPr id="13" name="Text 11"/>
+          <p:cNvSpPr/>
+          <p:nvPr/>
+        </p:nvSpPr>
+        <p:spPr>
+          <a:xfrm>
+            <a:off x="6720840" y="2926080"/>
+            <a:ext cx="3657600" cy="274320"/>
+          </a:xfrm>
+          <a:prstGeom prst="rect">
+            <a:avLst/>
+          </a:prstGeom>
+          <a:noFill/>
+          <a:ln/>
+        </p:spPr>
+        <p:txBody>
+          <a:bodyPr wrap="square" lIns="0" tIns="0" rIns="0" bIns="0" rtlCol="0" anchor="ctr"/>
+          <a:lstStyle/>
+          <a:p>
+            <a:pPr marL="0" indent="0">
+              <a:buNone/>
+            </a:pPr>
+            <a:r>
+              <a:rPr lang="en-US" sz="1000" b="1" kern="0" spc="600" dirty="0">
+                <a:solidFill>
+                  <a:srgbClr val="3FB6A8"/>
+                </a:solidFill>
+                <a:latin typeface="Inter" pitchFamily="34" charset="0"/>
+                <a:ea typeface="Inter" pitchFamily="34" charset="-122"/>
+                <a:cs typeface="Inter" pitchFamily="34" charset="-120"/>
+              </a:rPr>
+              <a:t>DAY 2 · MAY 8</a:t>
+            </a:r>
+            <a:endParaRPr lang="en-US" sz="1000" dirty="0"/>
+          </a:p>
+        </p:txBody>
+      </p:sp>
+      <p:sp>
+        <p:nvSpPr>
+          <p:cNvPr id="14" name="Text 12"/>
+          <p:cNvSpPr/>
+          <p:nvPr/>
+        </p:nvSpPr>
+        <p:spPr>
+          <a:xfrm>
+            <a:off x="6720840" y="3291840"/>
+            <a:ext cx="4846320" cy="640080"/>
+          </a:xfrm>
+          <a:prstGeom prst="rect">
+            <a:avLst/>
+          </a:prstGeom>
+          <a:noFill/>
+          <a:ln/>
+        </p:spPr>
+        <p:txBody>
+          <a:bodyPr wrap="square" lIns="0" tIns="0" rIns="0" bIns="0" rtlCol="0" anchor="ctr"/>
+          <a:lstStyle/>
+          <a:p>
+            <a:pPr marL="0" indent="0">
+              <a:buNone/>
+            </a:pPr>
+            <a:r>
+              <a:rPr lang="en-US" sz="3000" b="1" dirty="0">
+                <a:solidFill>
+                  <a:srgbClr val="FFFFFF"/>
+                </a:solidFill>
+                <a:latin typeface="Montserrat" pitchFamily="34" charset="0"/>
+                <a:ea typeface="Montserrat" pitchFamily="34" charset="-122"/>
+                <a:cs typeface="Montserrat" pitchFamily="34" charset="-120"/>
+              </a:rPr>
+              <a:t>Build Day</a:t>
+            </a:r>
+            <a:endParaRPr lang="en-US" sz="3000" dirty="0"/>
+          </a:p>
+        </p:txBody>
+      </p:sp>
+      <p:sp>
+        <p:nvSpPr>
+          <p:cNvPr id="15" name="Text 13"/>
+          <p:cNvSpPr/>
+          <p:nvPr/>
+        </p:nvSpPr>
+        <p:spPr>
+          <a:xfrm>
+            <a:off x="6720840" y="3931920"/>
+            <a:ext cx="4846320" cy="457200"/>
+          </a:xfrm>
+          <a:prstGeom prst="rect">
+            <a:avLst/>
+          </a:prstGeom>
+          <a:noFill/>
+          <a:ln/>
+        </p:spPr>
+        <p:txBody>
+          <a:bodyPr wrap="square" lIns="0" tIns="0" rIns="0" bIns="0" rtlCol="0" anchor="ctr"/>
+          <a:lstStyle/>
+          <a:p>
+            <a:pPr marL="0" indent="0">
+              <a:buNone/>
+            </a:pPr>
+            <a:r>
+              <a:rPr lang="en-US" sz="1300" i="1" dirty="0">
+                <a:solidFill>
+                  <a:srgbClr val="9AA3AF"/>
+                </a:solidFill>
+                <a:latin typeface="Inter" pitchFamily="34" charset="0"/>
+                <a:ea typeface="Inter" pitchFamily="34" charset="-122"/>
+                <a:cs typeface="Inter" pitchFamily="34" charset="-120"/>
+              </a:rPr>
+              <a:t>Apply it end-to-end: plan, build, and ship a Next.js app.</a:t>
+            </a:r>
+            <a:endParaRPr lang="en-US" sz="1300" dirty="0"/>
+          </a:p>
+        </p:txBody>
+      </p:sp>
+      <p:sp>
+        <p:nvSpPr>
+          <p:cNvPr id="16" name="Text 14"/>
+          <p:cNvSpPr/>
+          <p:nvPr/>
+        </p:nvSpPr>
+        <p:spPr>
+          <a:xfrm>
+            <a:off x="6720840" y="4480560"/>
+            <a:ext cx="4846320" cy="1371600"/>
+          </a:xfrm>
+          <a:prstGeom prst="rect">
+            <a:avLst/>
+          </a:prstGeom>
+          <a:noFill/>
+          <a:ln/>
+        </p:spPr>
+        <p:txBody>
+          <a:bodyPr wrap="square" lIns="0" tIns="0" rIns="0" bIns="0" rtlCol="0" anchor="ctr"/>
+          <a:lstStyle/>
+          <a:p>
+            <a:pPr marL="342900" indent="-342900">
+              <a:spcAft>
+                <a:spcPts val="400"/>
+              </a:spcAft>
+              <a:buSzPct val="100000"/>
+              <a:buChar char="•"/>
+            </a:pPr>
+            <a:r>
+              <a:rPr lang="en-US" sz="1200" dirty="0">
+                <a:solidFill>
+                  <a:srgbClr val="FFFFFF"/>
+                </a:solidFill>
+                <a:latin typeface="Inter" pitchFamily="34" charset="0"/>
+                <a:ea typeface="Inter" pitchFamily="34" charset="-122"/>
+                <a:cs typeface="Inter" pitchFamily="34" charset="-120"/>
+              </a:rPr>
+              <a:t>Choosing your Claude Code Adventure</a:t>
+            </a:r>
+            <a:endParaRPr lang="en-US" sz="1200" dirty="0"/>
+          </a:p>
+          <a:p>
+            <a:pPr marL="342900" indent="-342900">
+              <a:spcAft>
+                <a:spcPts val="400"/>
+              </a:spcAft>
+              <a:buSzPct val="100000"/>
+              <a:buChar char="•"/>
+            </a:pPr>
+            <a:r>
+              <a:rPr lang="en-US" sz="1200" dirty="0">
+                <a:solidFill>
+                  <a:srgbClr val="FFFFFF"/>
+                </a:solidFill>
+                <a:latin typeface="Inter" pitchFamily="34" charset="0"/>
+                <a:ea typeface="Inter" pitchFamily="34" charset="-122"/>
+                <a:cs typeface="Inter" pitchFamily="34" charset="-120"/>
+              </a:rPr>
+              <a:t>Next.js with Claude Code</a:t>
+            </a:r>
+            <a:endParaRPr lang="en-US" sz="1200" dirty="0"/>
+          </a:p>
+          <a:p>
+            <a:pPr marL="342900" indent="-342900">
+              <a:spcAft>
+                <a:spcPts val="400"/>
+              </a:spcAft>
+              <a:buSzPct val="100000"/>
+              <a:buChar char="•"/>
+            </a:pPr>
+            <a:r>
+              <a:rPr lang="en-US" sz="1200" dirty="0">
+                <a:solidFill>
+                  <a:srgbClr val="FFFFFF"/>
+                </a:solidFill>
+                <a:latin typeface="Inter" pitchFamily="34" charset="0"/>
+                <a:ea typeface="Inter" pitchFamily="34" charset="-122"/>
+                <a:cs typeface="Inter" pitchFamily="34" charset="-120"/>
+              </a:rPr>
+              <a:t>Build Block 1 — plan &amp; review</a:t>
+            </a:r>
+            <a:endParaRPr lang="en-US" sz="1200" dirty="0"/>
+          </a:p>
+          <a:p>
+            <a:pPr marL="342900" indent="-342900">
+              <a:spcAft>
+                <a:spcPts val="400"/>
+              </a:spcAft>
+              <a:buSzPct val="100000"/>
+              <a:buChar char="•"/>
+            </a:pPr>
+            <a:r>
+              <a:rPr lang="en-US" sz="1200" dirty="0">
+                <a:solidFill>
+                  <a:srgbClr val="FFFFFF"/>
+                </a:solidFill>
+                <a:latin typeface="Inter" pitchFamily="34" charset="0"/>
+                <a:ea typeface="Inter" pitchFamily="34" charset="-122"/>
+                <a:cs typeface="Inter" pitchFamily="34" charset="-120"/>
+              </a:rPr>
+              <a:t>Build Block 2 — code &amp; commit</a:t>
+            </a:r>
+            <a:endParaRPr lang="en-US" sz="1200" dirty="0"/>
+          </a:p>
+          <a:p>
+            <a:pPr marL="342900" indent="-342900">
+              <a:spcAft>
+                <a:spcPts val="400"/>
+              </a:spcAft>
+              <a:buSzPct val="100000"/>
+              <a:buChar char="•"/>
+            </a:pPr>
+            <a:r>
+              <a:rPr lang="en-US" sz="1200" dirty="0">
+                <a:solidFill>
+                  <a:srgbClr val="FFFFFF"/>
+                </a:solidFill>
+                <a:latin typeface="Inter" pitchFamily="34" charset="0"/>
+                <a:ea typeface="Inter" pitchFamily="34" charset="-122"/>
+                <a:cs typeface="Inter" pitchFamily="34" charset="-120"/>
+              </a:rPr>
+              <a:t>Deploying – ship it</a:t>
+            </a:r>
+            <a:endParaRPr lang="en-US" sz="1200" dirty="0"/>
+          </a:p>
+          <a:p>
+            <a:pPr marL="342900" indent="-342900">
+              <a:spcAft>
+                <a:spcPts val="400"/>
+              </a:spcAft>
+              <a:buSzPct val="100000"/>
+              <a:buChar char="•"/>
+            </a:pPr>
+            <a:r>
+              <a:rPr lang="en-US" sz="1200" dirty="0">
+                <a:solidFill>
+                  <a:srgbClr val="FFFFFF"/>
+                </a:solidFill>
+                <a:latin typeface="Inter" pitchFamily="34" charset="0"/>
+                <a:ea typeface="Inter" pitchFamily="34" charset="-122"/>
+                <a:cs typeface="Inter" pitchFamily="34" charset="-120"/>
+              </a:rPr>
+              <a:t>Show &amp; tell + closing</a:t>
+            </a:r>
+            <a:endParaRPr lang="en-US" sz="1200" dirty="0"/>
+          </a:p>
+        </p:txBody>
+      </p:sp>
+      <p:sp>
+        <p:nvSpPr>
+          <p:cNvPr id="17" name="Text 15"/>
+          <p:cNvSpPr/>
+          <p:nvPr/>
+        </p:nvSpPr>
+        <p:spPr>
+          <a:xfrm>
+            <a:off x="457200" y="6446520"/>
+            <a:ext cx="7315200" cy="274320"/>
+          </a:xfrm>
+          <a:prstGeom prst="rect">
+            <a:avLst/>
+          </a:prstGeom>
+          <a:noFill/>
+          <a:ln/>
+        </p:spPr>
+        <p:txBody>
+          <a:bodyPr wrap="square" lIns="0" tIns="0" rIns="0" bIns="0" rtlCol="0" anchor="ctr"/>
+          <a:lstStyle/>
+          <a:p>
+            <a:pPr marL="0" indent="0">
+              <a:buNone/>
+            </a:pPr>
+            <a:r>
+              <a:rPr lang="en-US" sz="900" kern="0" spc="300" dirty="0">
+                <a:solidFill>
+                  <a:srgbClr val="6B7280"/>
+                </a:solidFill>
+                <a:latin typeface="Inter" pitchFamily="34" charset="0"/>
+                <a:ea typeface="Inter" pitchFamily="34" charset="-122"/>
+                <a:cs typeface="Inter" pitchFamily="34" charset="-120"/>
+              </a:rPr>
+              <a:t>01 · WELCOME &amp; KICKOFF</a:t>
+            </a:r>
+            <a:endParaRPr lang="en-US" sz="900" dirty="0"/>
+          </a:p>
+        </p:txBody>
+      </p:sp>
+      <p:sp>
+        <p:nvSpPr>
+          <p:cNvPr id="18" name="Text 16"/>
+          <p:cNvSpPr/>
+          <p:nvPr/>
+        </p:nvSpPr>
+        <p:spPr>
+          <a:xfrm>
+            <a:off x="8076895" y="6446520"/>
+            <a:ext cx="3657600" cy="274320"/>
+          </a:xfrm>
+          <a:prstGeom prst="rect">
+            <a:avLst/>
+          </a:prstGeom>
+          <a:noFill/>
+          <a:ln/>
+        </p:spPr>
+        <p:txBody>
+          <a:bodyPr wrap="square" lIns="0" tIns="0" rIns="0" bIns="0" rtlCol="0" anchor="ctr"/>
+          <a:lstStyle/>
+          <a:p>
+            <a:pPr marL="0" indent="0" algn="r">
+              <a:buNone/>
+            </a:pPr>
+            <a:r>
+              <a:rPr lang="en-US" sz="900" kern="0" spc="300" dirty="0">
+                <a:solidFill>
+                  <a:srgbClr val="6B7280"/>
+                </a:solidFill>
+                <a:latin typeface="Inter" pitchFamily="34" charset="0"/>
+                <a:ea typeface="Inter" pitchFamily="34" charset="-122"/>
+                <a:cs typeface="Inter" pitchFamily="34" charset="-120"/>
+              </a:rPr>
+              <a:t>TWO DAYS · ONE ARC</a:t>
+            </a:r>
+            <a:endParaRPr lang="en-US" sz="900" dirty="0"/>
+          </a:p>
+        </p:txBody>
+      </p:sp>
+    </p:spTree>
+  </p:cSld>
+  <p:clrMapOvr>
+    <a:masterClrMapping/>
+  </p:clrMapOvr>
+</p:sld>
+</file>
+
+<file path=ppt/slides/slide11.xml><?xml version="1.0" encoding="utf-8"?>
+<p:sld xmlns:a="http://schemas.openxmlformats.org/drawingml/2006/main" xmlns:r="http://schemas.openxmlformats.org/officeDocument/2006/relationships" xmlns:p="http://schemas.openxmlformats.org/presentationml/2006/main">
+  <p:cSld name="Slide 6">
+    <p:bg>
+      <p:bgPr>
+        <a:solidFill>
+          <a:srgbClr val="0F1620"/>
+        </a:solidFill>
+        <a:effectLst/>
+      </p:bgPr>
+    </p:bg>
+    <p:spTree>
+      <p:nvGrpSpPr>
+        <p:cNvPr id="1" name=""/>
+        <p:cNvGrpSpPr/>
+        <p:nvPr/>
+      </p:nvGrpSpPr>
+      <p:grpSpPr>
+        <a:xfrm>
+          <a:off x="0" y="0"/>
+          <a:ext cx="0" cy="0"/>
+          <a:chOff x="0" y="0"/>
+          <a:chExt cx="0" cy="0"/>
+        </a:xfrm>
+      </p:grpSpPr>
+      <p:sp>
+        <p:nvSpPr>
+          <p:cNvPr id="2" name="Text 0"/>
+          <p:cNvSpPr/>
+          <p:nvPr/>
+        </p:nvSpPr>
+        <p:spPr>
+          <a:xfrm>
+            <a:off x="731520" y="640080"/>
+            <a:ext cx="5486400" cy="274320"/>
+          </a:xfrm>
+          <a:prstGeom prst="rect">
+            <a:avLst/>
+          </a:prstGeom>
+          <a:noFill/>
+          <a:ln/>
+        </p:spPr>
+        <p:txBody>
+          <a:bodyPr wrap="square" lIns="0" tIns="0" rIns="0" bIns="0" rtlCol="0" anchor="ctr"/>
+          <a:lstStyle/>
+          <a:p>
+            <a:pPr marL="0" indent="0">
+              <a:buNone/>
+            </a:pPr>
+            <a:r>
+              <a:rPr lang="en-US" sz="1000" b="1" kern="0" spc="600" dirty="0">
+                <a:solidFill>
+                  <a:srgbClr val="E89B3C"/>
+                </a:solidFill>
+                <a:latin typeface="Inter" pitchFamily="34" charset="0"/>
+                <a:ea typeface="Inter" pitchFamily="34" charset="-122"/>
+                <a:cs typeface="Inter" pitchFamily="34" charset="-120"/>
+              </a:rPr>
+              <a:t>WORKING DEFINITION</a:t>
+            </a:r>
+            <a:endParaRPr lang="en-US" sz="1000" dirty="0"/>
+          </a:p>
+        </p:txBody>
+      </p:sp>
+      <p:sp>
+        <p:nvSpPr>
+          <p:cNvPr id="3" name="Text 1"/>
+          <p:cNvSpPr/>
+          <p:nvPr/>
+        </p:nvSpPr>
+        <p:spPr>
+          <a:xfrm>
+            <a:off x="731520" y="1463040"/>
+            <a:ext cx="10972800" cy="1097280"/>
+          </a:xfrm>
+          <a:prstGeom prst="rect">
+            <a:avLst/>
+          </a:prstGeom>
+          <a:noFill/>
+          <a:ln/>
+        </p:spPr>
+        <p:txBody>
+          <a:bodyPr wrap="square" lIns="0" tIns="0" rIns="0" bIns="0" rtlCol="0" anchor="ctr"/>
+          <a:lstStyle/>
+          <a:p>
+            <a:pPr marL="0" indent="0">
+              <a:buNone/>
+            </a:pPr>
+            <a:r>
+              <a:rPr lang="en-US" sz="4400" b="1" dirty="0">
+                <a:solidFill>
+                  <a:srgbClr val="FFFFFF"/>
+                </a:solidFill>
+                <a:latin typeface="Montserrat" pitchFamily="34" charset="0"/>
+                <a:ea typeface="Montserrat" pitchFamily="34" charset="-122"/>
+                <a:cs typeface="Montserrat" pitchFamily="34" charset="-120"/>
+              </a:rPr>
+              <a:t>Context engineering is a </a:t>
+            </a:r>
+            <a:r>
+              <a:rPr lang="en-US" sz="4400" b="1" i="1" dirty="0">
+                <a:solidFill>
+                  <a:srgbClr val="3FB6A8"/>
+                </a:solidFill>
+                <a:latin typeface="Montserrat" pitchFamily="34" charset="0"/>
+                <a:ea typeface="Montserrat" pitchFamily="34" charset="-122"/>
+                <a:cs typeface="Montserrat" pitchFamily="34" charset="-120"/>
+              </a:rPr>
+              <a:t>discipline</a:t>
+            </a:r>
+            <a:r>
+              <a:rPr lang="en-US" sz="4400" b="1" dirty="0">
+                <a:solidFill>
+                  <a:srgbClr val="FFFFFF"/>
+                </a:solidFill>
+                <a:latin typeface="Montserrat" pitchFamily="34" charset="0"/>
+                <a:ea typeface="Montserrat" pitchFamily="34" charset="-122"/>
+                <a:cs typeface="Montserrat" pitchFamily="34" charset="-120"/>
+              </a:rPr>
+              <a:t>, not a prompt trick.</a:t>
+            </a:r>
+            <a:endParaRPr lang="en-US" sz="4400" dirty="0"/>
+          </a:p>
+        </p:txBody>
+      </p:sp>
+      <p:sp>
+        <p:nvSpPr>
+          <p:cNvPr id="4" name="Text 2"/>
+          <p:cNvSpPr/>
+          <p:nvPr/>
+        </p:nvSpPr>
+        <p:spPr>
+          <a:xfrm>
+            <a:off x="731520" y="2743200"/>
+            <a:ext cx="10972800" cy="1097280"/>
+          </a:xfrm>
+          <a:prstGeom prst="rect">
+            <a:avLst/>
+          </a:prstGeom>
+          <a:noFill/>
+          <a:ln/>
+        </p:spPr>
+        <p:txBody>
+          <a:bodyPr wrap="square" lIns="0" tIns="0" rIns="0" bIns="0" rtlCol="0" anchor="ctr"/>
+          <a:lstStyle/>
+          <a:p>
+            <a:pPr marL="0" indent="0">
+              <a:buNone/>
+            </a:pPr>
+            <a:r>
+              <a:rPr lang="en-US" sz="4400" b="1" dirty="0">
+                <a:solidFill>
+                  <a:srgbClr val="FFFFFF"/>
+                </a:solidFill>
+                <a:latin typeface="Montserrat" pitchFamily="34" charset="0"/>
+                <a:ea typeface="Montserrat" pitchFamily="34" charset="-122"/>
+                <a:cs typeface="Montserrat" pitchFamily="34" charset="-120"/>
+              </a:rPr>
+              <a:t>What you put in front of the model</a:t>
+            </a:r>
+            <a:r>
+              <a:rPr lang="en-US" sz="4400" b="1" i="1" dirty="0">
+                <a:solidFill>
+                  <a:srgbClr val="E89B3C"/>
+                </a:solidFill>
+                <a:latin typeface="Montserrat" pitchFamily="34" charset="0"/>
+                <a:ea typeface="Montserrat" pitchFamily="34" charset="-122"/>
+                <a:cs typeface="Montserrat" pitchFamily="34" charset="-120"/>
+              </a:rPr>
+              <a:t> is the whole game.</a:t>
+            </a:r>
+            <a:endParaRPr lang="en-US" sz="4400" dirty="0"/>
+          </a:p>
+        </p:txBody>
+      </p:sp>
+      <p:sp>
+        <p:nvSpPr>
+          <p:cNvPr id="5" name="Shape 3"/>
+          <p:cNvSpPr/>
+          <p:nvPr/>
+        </p:nvSpPr>
+        <p:spPr>
+          <a:xfrm>
+            <a:off x="731520" y="4297680"/>
+            <a:ext cx="548640" cy="36576"/>
+          </a:xfrm>
+          <a:prstGeom prst="rect">
+            <a:avLst/>
+          </a:prstGeom>
+          <a:solidFill>
+            <a:srgbClr val="3FB6A8"/>
+          </a:solidFill>
+          <a:ln/>
+        </p:spPr>
+        <p:txBody>
+          <a:bodyPr/>
+          <a:lstStyle/>
+          <a:p>
+            <a:endParaRPr lang="en-US"/>
+          </a:p>
+        </p:txBody>
+      </p:sp>
+      <p:sp>
+        <p:nvSpPr>
+          <p:cNvPr id="6" name="Text 4"/>
+          <p:cNvSpPr/>
+          <p:nvPr/>
+        </p:nvSpPr>
+        <p:spPr>
+          <a:xfrm>
+            <a:off x="731520" y="4480560"/>
+            <a:ext cx="10058400" cy="548640"/>
+          </a:xfrm>
+          <a:prstGeom prst="rect">
+            <a:avLst/>
+          </a:prstGeom>
+          <a:noFill/>
+          <a:ln/>
+        </p:spPr>
+        <p:txBody>
+          <a:bodyPr wrap="square" lIns="0" tIns="0" rIns="0" bIns="0" rtlCol="0" anchor="ctr"/>
+          <a:lstStyle/>
+          <a:p>
+            <a:pPr marL="0" indent="0">
+              <a:buNone/>
+            </a:pPr>
+            <a:r>
+              <a:rPr lang="en-US" sz="1800" i="1" dirty="0">
+                <a:solidFill>
+                  <a:srgbClr val="9AA3AF"/>
+                </a:solidFill>
+                <a:latin typeface="Montserrat" pitchFamily="34" charset="0"/>
+                <a:ea typeface="Montserrat" pitchFamily="34" charset="-122"/>
+                <a:cs typeface="Montserrat" pitchFamily="34" charset="-120"/>
+              </a:rPr>
+              <a:t>Day 1 is learning the craft. Day 2 is using it to ship.</a:t>
+            </a:r>
+            <a:endParaRPr lang="en-US" sz="1800" dirty="0"/>
+          </a:p>
+        </p:txBody>
+      </p:sp>
+      <p:sp>
+        <p:nvSpPr>
+          <p:cNvPr id="7" name="Text 5"/>
+          <p:cNvSpPr/>
+          <p:nvPr/>
+        </p:nvSpPr>
+        <p:spPr>
+          <a:xfrm>
+            <a:off x="457200" y="6446520"/>
+            <a:ext cx="7315200" cy="274320"/>
+          </a:xfrm>
+          <a:prstGeom prst="rect">
+            <a:avLst/>
+          </a:prstGeom>
+          <a:noFill/>
+          <a:ln/>
+        </p:spPr>
+        <p:txBody>
+          <a:bodyPr wrap="square" lIns="0" tIns="0" rIns="0" bIns="0" rtlCol="0" anchor="ctr"/>
+          <a:lstStyle/>
+          <a:p>
+            <a:pPr marL="0" indent="0">
+              <a:buNone/>
+            </a:pPr>
+            <a:r>
+              <a:rPr lang="en-US" sz="900" kern="0" spc="300" dirty="0">
+                <a:solidFill>
+                  <a:srgbClr val="9AA3AF"/>
+                </a:solidFill>
+                <a:latin typeface="Inter" pitchFamily="34" charset="0"/>
+                <a:ea typeface="Inter" pitchFamily="34" charset="-122"/>
+                <a:cs typeface="Inter" pitchFamily="34" charset="-120"/>
+              </a:rPr>
+              <a:t>01 · WELCOME &amp; KICKOFF</a:t>
+            </a:r>
+            <a:endParaRPr lang="en-US" sz="900" dirty="0"/>
+          </a:p>
+        </p:txBody>
+      </p:sp>
+      <p:sp>
+        <p:nvSpPr>
+          <p:cNvPr id="8" name="Text 6"/>
+          <p:cNvSpPr/>
+          <p:nvPr/>
+        </p:nvSpPr>
+        <p:spPr>
+          <a:xfrm>
+            <a:off x="8076895" y="6446520"/>
+            <a:ext cx="3657600" cy="274320"/>
+          </a:xfrm>
+          <a:prstGeom prst="rect">
+            <a:avLst/>
+          </a:prstGeom>
+          <a:noFill/>
+          <a:ln/>
+        </p:spPr>
+        <p:txBody>
+          <a:bodyPr wrap="square" lIns="0" tIns="0" rIns="0" bIns="0" rtlCol="0" anchor="ctr"/>
+          <a:lstStyle/>
+          <a:p>
+            <a:pPr marL="0" indent="0" algn="r">
+              <a:buNone/>
+            </a:pPr>
+            <a:r>
+              <a:rPr lang="en-US" sz="900" kern="0" spc="300" dirty="0">
+                <a:solidFill>
+                  <a:srgbClr val="9AA3AF"/>
+                </a:solidFill>
+                <a:latin typeface="Inter" pitchFamily="34" charset="0"/>
+                <a:ea typeface="Inter" pitchFamily="34" charset="-122"/>
+                <a:cs typeface="Inter" pitchFamily="34" charset="-120"/>
+              </a:rPr>
+              <a:t>WHAT IT IS</a:t>
+            </a:r>
+            <a:endParaRPr lang="en-US" sz="900" dirty="0"/>
+          </a:p>
+        </p:txBody>
+      </p:sp>
+    </p:spTree>
+  </p:cSld>
+  <p:clrMapOvr>
+    <a:masterClrMapping/>
+  </p:clrMapOvr>
+</p:sld>
+</file>
+
+<file path=ppt/slides/slide12.xml><?xml version="1.0" encoding="utf-8"?>
+<p:sld xmlns:a="http://schemas.openxmlformats.org/drawingml/2006/main" xmlns:r="http://schemas.openxmlformats.org/officeDocument/2006/relationships" xmlns:p="http://schemas.openxmlformats.org/presentationml/2006/main">
+  <p:cSld name="Slide 8">
+    <p:bg>
+      <p:bgPr>
+        <a:solidFill>
+          <a:srgbClr val="F5F2ED"/>
+        </a:solidFill>
+        <a:effectLst/>
+      </p:bgPr>
+    </p:bg>
+    <p:spTree>
+      <p:nvGrpSpPr>
+        <p:cNvPr id="1" name=""/>
+        <p:cNvGrpSpPr/>
+        <p:nvPr/>
+      </p:nvGrpSpPr>
+      <p:grpSpPr>
+        <a:xfrm>
+          <a:off x="0" y="0"/>
+          <a:ext cx="0" cy="0"/>
+          <a:chOff x="0" y="0"/>
+          <a:chExt cx="0" cy="0"/>
+        </a:xfrm>
+      </p:grpSpPr>
+      <p:sp>
+        <p:nvSpPr>
+          <p:cNvPr id="2" name="Text 0"/>
+          <p:cNvSpPr/>
+          <p:nvPr/>
+        </p:nvSpPr>
+        <p:spPr>
+          <a:xfrm>
+            <a:off x="548640" y="548640"/>
+            <a:ext cx="5486400" cy="274320"/>
+          </a:xfrm>
+          <a:prstGeom prst="rect">
+            <a:avLst/>
+          </a:prstGeom>
+          <a:noFill/>
+          <a:ln/>
+        </p:spPr>
+        <p:txBody>
+          <a:bodyPr wrap="square" lIns="0" tIns="0" rIns="0" bIns="0" rtlCol="0" anchor="ctr"/>
+          <a:lstStyle/>
+          <a:p>
+            <a:pPr marL="0" indent="0">
+              <a:buNone/>
+            </a:pPr>
+            <a:r>
+              <a:rPr lang="en-US" sz="1000" b="1" kern="0" spc="600" dirty="0">
+                <a:solidFill>
+                  <a:srgbClr val="E89B3C"/>
+                </a:solidFill>
+                <a:latin typeface="Inter" pitchFamily="34" charset="0"/>
+                <a:ea typeface="Inter" pitchFamily="34" charset="-122"/>
+                <a:cs typeface="Inter" pitchFamily="34" charset="-120"/>
+              </a:rPr>
+              <a:t>SETUP CHECK · 8 MIN</a:t>
+            </a:r>
+            <a:endParaRPr lang="en-US" sz="1000" dirty="0"/>
+          </a:p>
+        </p:txBody>
+      </p:sp>
+      <p:sp>
+        <p:nvSpPr>
+          <p:cNvPr id="3" name="Text 1"/>
+          <p:cNvSpPr/>
+          <p:nvPr/>
+        </p:nvSpPr>
+        <p:spPr>
+          <a:xfrm>
+            <a:off x="548640" y="914400"/>
+            <a:ext cx="10972800" cy="822960"/>
+          </a:xfrm>
+          <a:prstGeom prst="rect">
+            <a:avLst/>
+          </a:prstGeom>
+          <a:noFill/>
+          <a:ln/>
+        </p:spPr>
+        <p:txBody>
+          <a:bodyPr wrap="square" lIns="0" tIns="0" rIns="0" bIns="0" rtlCol="0" anchor="ctr"/>
+          <a:lstStyle/>
+          <a:p>
+            <a:pPr marL="0" indent="0">
+              <a:buNone/>
+            </a:pPr>
+            <a:r>
+              <a:rPr lang="en-US" sz="3400" b="1" dirty="0">
+                <a:solidFill>
+                  <a:srgbClr val="1F2937"/>
+                </a:solidFill>
+                <a:latin typeface="Montserrat" pitchFamily="34" charset="0"/>
+                <a:ea typeface="Montserrat" pitchFamily="34" charset="-122"/>
+                <a:cs typeface="Montserrat" pitchFamily="34" charset="-120"/>
+              </a:rPr>
+              <a:t>Run these three commands together.</a:t>
+            </a:r>
+            <a:endParaRPr lang="en-US" sz="3400" dirty="0"/>
+          </a:p>
+        </p:txBody>
+      </p:sp>
+      <p:sp>
+        <p:nvSpPr>
+          <p:cNvPr id="5" name="Shape 3"/>
+          <p:cNvSpPr/>
+          <p:nvPr/>
+        </p:nvSpPr>
+        <p:spPr>
+          <a:xfrm>
+            <a:off x="548640" y="2468880"/>
+            <a:ext cx="7315200" cy="3657600"/>
+          </a:xfrm>
+          <a:prstGeom prst="rect">
+            <a:avLst/>
+          </a:prstGeom>
+          <a:solidFill>
+            <a:srgbClr val="0F1620"/>
+          </a:solidFill>
+          <a:ln/>
+        </p:spPr>
+        <p:txBody>
+          <a:bodyPr/>
+          <a:lstStyle/>
+          <a:p>
+            <a:endParaRPr lang="en-US"/>
+          </a:p>
+        </p:txBody>
+      </p:sp>
+      <p:sp>
+        <p:nvSpPr>
+          <p:cNvPr id="6" name="Shape 4"/>
+          <p:cNvSpPr/>
+          <p:nvPr/>
+        </p:nvSpPr>
+        <p:spPr>
+          <a:xfrm>
+            <a:off x="548640" y="2468880"/>
+            <a:ext cx="7315200" cy="365760"/>
+          </a:xfrm>
+          <a:prstGeom prst="rect">
+            <a:avLst/>
+          </a:prstGeom>
+          <a:solidFill>
+            <a:srgbClr val="1B2533"/>
+          </a:solidFill>
+          <a:ln/>
+        </p:spPr>
+        <p:txBody>
+          <a:bodyPr/>
+          <a:lstStyle/>
+          <a:p>
+            <a:endParaRPr lang="en-US"/>
+          </a:p>
+        </p:txBody>
+      </p:sp>
+      <p:sp>
+        <p:nvSpPr>
+          <p:cNvPr id="7" name="Shape 5"/>
+          <p:cNvSpPr/>
+          <p:nvPr/>
+        </p:nvSpPr>
+        <p:spPr>
+          <a:xfrm>
+            <a:off x="731520" y="2587752"/>
+            <a:ext cx="137160" cy="137160"/>
+          </a:xfrm>
+          <a:prstGeom prst="ellipse">
+            <a:avLst/>
+          </a:prstGeom>
+          <a:solidFill>
+            <a:srgbClr val="FF6058"/>
+          </a:solidFill>
+          <a:ln/>
+        </p:spPr>
+        <p:txBody>
+          <a:bodyPr/>
+          <a:lstStyle/>
+          <a:p>
+            <a:endParaRPr lang="en-US"/>
+          </a:p>
+        </p:txBody>
+      </p:sp>
+      <p:sp>
+        <p:nvSpPr>
+          <p:cNvPr id="8" name="Shape 6"/>
+          <p:cNvSpPr/>
+          <p:nvPr/>
+        </p:nvSpPr>
+        <p:spPr>
+          <a:xfrm>
+            <a:off x="960120" y="2587752"/>
+            <a:ext cx="137160" cy="137160"/>
+          </a:xfrm>
+          <a:prstGeom prst="ellipse">
+            <a:avLst/>
+          </a:prstGeom>
+          <a:solidFill>
+            <a:srgbClr val="FFBD2E"/>
+          </a:solidFill>
+          <a:ln/>
+        </p:spPr>
+        <p:txBody>
+          <a:bodyPr/>
+          <a:lstStyle/>
+          <a:p>
+            <a:endParaRPr lang="en-US"/>
+          </a:p>
+        </p:txBody>
+      </p:sp>
+      <p:sp>
+        <p:nvSpPr>
+          <p:cNvPr id="9" name="Shape 7"/>
+          <p:cNvSpPr/>
+          <p:nvPr/>
+        </p:nvSpPr>
+        <p:spPr>
+          <a:xfrm>
+            <a:off x="1188720" y="2587752"/>
+            <a:ext cx="137160" cy="137160"/>
+          </a:xfrm>
+          <a:prstGeom prst="ellipse">
+            <a:avLst/>
+          </a:prstGeom>
+          <a:solidFill>
+            <a:srgbClr val="27CA40"/>
+          </a:solidFill>
+          <a:ln/>
+        </p:spPr>
+        <p:txBody>
+          <a:bodyPr/>
+          <a:lstStyle/>
+          <a:p>
+            <a:endParaRPr lang="en-US"/>
+          </a:p>
+        </p:txBody>
+      </p:sp>
+      <p:sp>
+        <p:nvSpPr>
+          <p:cNvPr id="10" name="Text 8"/>
+          <p:cNvSpPr/>
+          <p:nvPr/>
+        </p:nvSpPr>
+        <p:spPr>
+          <a:xfrm>
+            <a:off x="1920240" y="2514600"/>
+            <a:ext cx="4572000" cy="274320"/>
+          </a:xfrm>
+          <a:prstGeom prst="rect">
+            <a:avLst/>
+          </a:prstGeom>
+          <a:noFill/>
+          <a:ln/>
+        </p:spPr>
+        <p:txBody>
+          <a:bodyPr wrap="square" lIns="0" tIns="0" rIns="0" bIns="0" rtlCol="0" anchor="ctr"/>
+          <a:lstStyle/>
+          <a:p>
+            <a:pPr marL="0" indent="0" algn="ctr">
+              <a:buNone/>
+            </a:pPr>
+            <a:r>
+              <a:rPr lang="en-US" sz="1000" dirty="0">
+                <a:solidFill>
+                  <a:srgbClr val="9AA3AF"/>
+                </a:solidFill>
+                <a:latin typeface="JetBrains Mono" pitchFamily="34" charset="0"/>
+                <a:ea typeface="JetBrains Mono" pitchFamily="34" charset="-122"/>
+                <a:cs typeface="JetBrains Mono" pitchFamily="34" charset="-120"/>
+              </a:rPr>
+              <a:t>prerequisites · check</a:t>
+            </a:r>
+            <a:endParaRPr lang="en-US" sz="1000" dirty="0"/>
+          </a:p>
+        </p:txBody>
+      </p:sp>
+      <p:sp>
+        <p:nvSpPr>
+          <p:cNvPr id="11" name="Text 9"/>
+          <p:cNvSpPr/>
+          <p:nvPr/>
+        </p:nvSpPr>
+        <p:spPr>
+          <a:xfrm>
+            <a:off x="914400" y="3017520"/>
+            <a:ext cx="6583680" cy="365760"/>
+          </a:xfrm>
+          <a:prstGeom prst="rect">
+            <a:avLst/>
+          </a:prstGeom>
+          <a:noFill/>
+          <a:ln/>
+        </p:spPr>
+        <p:txBody>
+          <a:bodyPr wrap="square" lIns="0" tIns="0" rIns="0" bIns="0" rtlCol="0" anchor="ctr"/>
+          <a:lstStyle/>
+          <a:p>
+            <a:pPr marL="0" indent="0">
+              <a:buNone/>
+            </a:pPr>
+            <a:r>
+              <a:rPr lang="en-US" sz="1800" b="1" dirty="0">
+                <a:solidFill>
+                  <a:srgbClr val="3FB6A8"/>
+                </a:solidFill>
+                <a:latin typeface="JetBrains Mono" pitchFamily="34" charset="0"/>
+                <a:ea typeface="JetBrains Mono" pitchFamily="34" charset="-122"/>
+                <a:cs typeface="JetBrains Mono" pitchFamily="34" charset="-120"/>
+              </a:rPr>
+              <a:t>$ </a:t>
+            </a:r>
+            <a:r>
+              <a:rPr lang="en-US" sz="1800" b="1" dirty="0">
+                <a:solidFill>
+                  <a:srgbClr val="FFFFFF"/>
+                </a:solidFill>
+                <a:latin typeface="JetBrains Mono" pitchFamily="34" charset="0"/>
+                <a:ea typeface="JetBrains Mono" pitchFamily="34" charset="-122"/>
+                <a:cs typeface="JetBrains Mono" pitchFamily="34" charset="-120"/>
+              </a:rPr>
+              <a:t>claude --version</a:t>
+            </a:r>
+            <a:endParaRPr lang="en-US" sz="1800" dirty="0"/>
+          </a:p>
+        </p:txBody>
+      </p:sp>
+      <p:sp>
+        <p:nvSpPr>
+          <p:cNvPr id="12" name="Text 10"/>
+          <p:cNvSpPr/>
+          <p:nvPr/>
+        </p:nvSpPr>
+        <p:spPr>
+          <a:xfrm>
+            <a:off x="1097280" y="3429000"/>
+            <a:ext cx="6400800" cy="365760"/>
+          </a:xfrm>
+          <a:prstGeom prst="rect">
+            <a:avLst/>
+          </a:prstGeom>
+          <a:noFill/>
+          <a:ln/>
+        </p:spPr>
+        <p:txBody>
+          <a:bodyPr wrap="square" lIns="0" tIns="0" rIns="0" bIns="0" rtlCol="0" anchor="ctr"/>
+          <a:lstStyle/>
+          <a:p>
+            <a:pPr marL="0" indent="0">
+              <a:buNone/>
+            </a:pPr>
+            <a:r>
+              <a:rPr lang="en-US" sz="1300" b="1" dirty="0">
+                <a:solidFill>
+                  <a:srgbClr val="3FB6A8"/>
+                </a:solidFill>
+                <a:latin typeface="JetBrains Mono" pitchFamily="34" charset="0"/>
+                <a:ea typeface="JetBrains Mono" pitchFamily="34" charset="-122"/>
+                <a:cs typeface="JetBrains Mono" pitchFamily="34" charset="-120"/>
+              </a:rPr>
+              <a:t>✓ </a:t>
+            </a:r>
+            <a:r>
+              <a:rPr lang="en-US" sz="1300" dirty="0">
+                <a:solidFill>
+                  <a:srgbClr val="9AA3AF"/>
+                </a:solidFill>
+                <a:latin typeface="JetBrains Mono" pitchFamily="34" charset="0"/>
+                <a:ea typeface="JetBrains Mono" pitchFamily="34" charset="-122"/>
+                <a:cs typeface="JetBrains Mono" pitchFamily="34" charset="-120"/>
+              </a:rPr>
+              <a:t>claude code 1.x · ready</a:t>
+            </a:r>
+            <a:endParaRPr lang="en-US" sz="1300" dirty="0"/>
+          </a:p>
+        </p:txBody>
+      </p:sp>
+      <p:sp>
+        <p:nvSpPr>
+          <p:cNvPr id="13" name="Text 11"/>
+          <p:cNvSpPr/>
+          <p:nvPr/>
+        </p:nvSpPr>
+        <p:spPr>
+          <a:xfrm>
+            <a:off x="914400" y="3977640"/>
+            <a:ext cx="6583680" cy="365760"/>
+          </a:xfrm>
+          <a:prstGeom prst="rect">
+            <a:avLst/>
+          </a:prstGeom>
+          <a:noFill/>
+          <a:ln/>
+        </p:spPr>
+        <p:txBody>
+          <a:bodyPr wrap="square" lIns="0" tIns="0" rIns="0" bIns="0" rtlCol="0" anchor="ctr"/>
+          <a:lstStyle/>
+          <a:p>
+            <a:pPr marL="0" indent="0">
+              <a:buNone/>
+            </a:pPr>
+            <a:r>
+              <a:rPr lang="en-US" sz="1800" b="1" dirty="0">
+                <a:solidFill>
+                  <a:srgbClr val="3FB6A8"/>
+                </a:solidFill>
+                <a:latin typeface="JetBrains Mono" pitchFamily="34" charset="0"/>
+                <a:ea typeface="JetBrains Mono" pitchFamily="34" charset="-122"/>
+                <a:cs typeface="JetBrains Mono" pitchFamily="34" charset="-120"/>
+              </a:rPr>
+              <a:t>$ </a:t>
+            </a:r>
+            <a:r>
+              <a:rPr lang="en-US" sz="1800" b="1" dirty="0">
+                <a:solidFill>
+                  <a:srgbClr val="FFFFFF"/>
+                </a:solidFill>
+                <a:latin typeface="JetBrains Mono" pitchFamily="34" charset="0"/>
+                <a:ea typeface="JetBrains Mono" pitchFamily="34" charset="-122"/>
+                <a:cs typeface="JetBrains Mono" pitchFamily="34" charset="-120"/>
+              </a:rPr>
+              <a:t>gh auth status</a:t>
+            </a:r>
+            <a:endParaRPr lang="en-US" sz="1800" dirty="0"/>
+          </a:p>
+        </p:txBody>
+      </p:sp>
+      <p:sp>
+        <p:nvSpPr>
+          <p:cNvPr id="14" name="Text 12"/>
+          <p:cNvSpPr/>
+          <p:nvPr/>
+        </p:nvSpPr>
+        <p:spPr>
+          <a:xfrm>
+            <a:off x="1097280" y="4389120"/>
+            <a:ext cx="6400800" cy="365760"/>
+          </a:xfrm>
+          <a:prstGeom prst="rect">
+            <a:avLst/>
+          </a:prstGeom>
+          <a:noFill/>
+          <a:ln/>
+        </p:spPr>
+        <p:txBody>
+          <a:bodyPr wrap="square" lIns="0" tIns="0" rIns="0" bIns="0" rtlCol="0" anchor="ctr"/>
+          <a:lstStyle/>
+          <a:p>
+            <a:pPr marL="0" indent="0">
+              <a:buNone/>
+            </a:pPr>
+            <a:r>
+              <a:rPr lang="en-US" sz="1300" b="1" dirty="0">
+                <a:solidFill>
+                  <a:srgbClr val="3FB6A8"/>
+                </a:solidFill>
+                <a:latin typeface="JetBrains Mono" pitchFamily="34" charset="0"/>
+                <a:ea typeface="JetBrains Mono" pitchFamily="34" charset="-122"/>
+                <a:cs typeface="JetBrains Mono" pitchFamily="34" charset="-120"/>
+              </a:rPr>
+              <a:t>✓ </a:t>
+            </a:r>
+            <a:r>
+              <a:rPr lang="en-US" sz="1300" dirty="0">
+                <a:solidFill>
+                  <a:srgbClr val="9AA3AF"/>
+                </a:solidFill>
+                <a:latin typeface="JetBrains Mono" pitchFamily="34" charset="0"/>
+                <a:ea typeface="JetBrains Mono" pitchFamily="34" charset="-122"/>
+                <a:cs typeface="JetBrains Mono" pitchFamily="34" charset="-120"/>
+              </a:rPr>
+              <a:t>Logged in to github.com as you</a:t>
+            </a:r>
+            <a:endParaRPr lang="en-US" sz="1300" dirty="0"/>
+          </a:p>
+        </p:txBody>
+      </p:sp>
+      <p:sp>
+        <p:nvSpPr>
+          <p:cNvPr id="15" name="Text 13"/>
+          <p:cNvSpPr/>
+          <p:nvPr/>
+        </p:nvSpPr>
+        <p:spPr>
+          <a:xfrm>
+            <a:off x="914400" y="4937760"/>
+            <a:ext cx="6583680" cy="365760"/>
+          </a:xfrm>
+          <a:prstGeom prst="rect">
+            <a:avLst/>
+          </a:prstGeom>
+          <a:noFill/>
+          <a:ln/>
+        </p:spPr>
+        <p:txBody>
+          <a:bodyPr wrap="square" lIns="0" tIns="0" rIns="0" bIns="0" rtlCol="0" anchor="ctr"/>
+          <a:lstStyle/>
+          <a:p>
+            <a:pPr marL="0" indent="0">
+              <a:buNone/>
+            </a:pPr>
+            <a:r>
+              <a:rPr lang="en-US" sz="1800" b="1" dirty="0">
+                <a:solidFill>
+                  <a:srgbClr val="3FB6A8"/>
+                </a:solidFill>
+                <a:latin typeface="JetBrains Mono" pitchFamily="34" charset="0"/>
+                <a:ea typeface="JetBrains Mono" pitchFamily="34" charset="-122"/>
+                <a:cs typeface="JetBrains Mono" pitchFamily="34" charset="-120"/>
+              </a:rPr>
+              <a:t>$ </a:t>
+            </a:r>
+            <a:r>
+              <a:rPr lang="en-US" sz="1800" b="1" dirty="0">
+                <a:solidFill>
+                  <a:srgbClr val="FFFFFF"/>
+                </a:solidFill>
+                <a:latin typeface="JetBrains Mono" pitchFamily="34" charset="0"/>
+                <a:ea typeface="JetBrains Mono" pitchFamily="34" charset="-122"/>
+                <a:cs typeface="JetBrains Mono" pitchFamily="34" charset="-120"/>
+              </a:rPr>
+              <a:t>node --version</a:t>
+            </a:r>
+            <a:endParaRPr lang="en-US" sz="1800" dirty="0"/>
+          </a:p>
+        </p:txBody>
+      </p:sp>
+      <p:sp>
+        <p:nvSpPr>
+          <p:cNvPr id="16" name="Text 14"/>
+          <p:cNvSpPr/>
+          <p:nvPr/>
+        </p:nvSpPr>
+        <p:spPr>
+          <a:xfrm>
+            <a:off x="1097280" y="5349240"/>
+            <a:ext cx="6400800" cy="365760"/>
+          </a:xfrm>
+          <a:prstGeom prst="rect">
+            <a:avLst/>
+          </a:prstGeom>
+          <a:noFill/>
+          <a:ln/>
+        </p:spPr>
+        <p:txBody>
+          <a:bodyPr wrap="square" lIns="0" tIns="0" rIns="0" bIns="0" rtlCol="0" anchor="ctr"/>
+          <a:lstStyle/>
+          <a:p>
+            <a:pPr marL="0" indent="0">
+              <a:buNone/>
+            </a:pPr>
+            <a:r>
+              <a:rPr lang="en-US" sz="1300" b="1" dirty="0">
+                <a:solidFill>
+                  <a:srgbClr val="3FB6A8"/>
+                </a:solidFill>
+                <a:latin typeface="JetBrains Mono" pitchFamily="34" charset="0"/>
+                <a:ea typeface="JetBrains Mono" pitchFamily="34" charset="-122"/>
+                <a:cs typeface="JetBrains Mono" pitchFamily="34" charset="-120"/>
+              </a:rPr>
+              <a:t>✓ </a:t>
+            </a:r>
+            <a:r>
+              <a:rPr lang="en-US" sz="1300" dirty="0">
+                <a:solidFill>
+                  <a:srgbClr val="9AA3AF"/>
+                </a:solidFill>
+                <a:latin typeface="JetBrains Mono" pitchFamily="34" charset="0"/>
+                <a:ea typeface="JetBrains Mono" pitchFamily="34" charset="-122"/>
+                <a:cs typeface="JetBrains Mono" pitchFamily="34" charset="-120"/>
+              </a:rPr>
+              <a:t>v20.x or newer</a:t>
+            </a:r>
+            <a:endParaRPr lang="en-US" sz="1300" dirty="0"/>
+          </a:p>
+        </p:txBody>
+      </p:sp>
+      <p:sp>
+        <p:nvSpPr>
+          <p:cNvPr id="17" name="Shape 15"/>
+          <p:cNvSpPr/>
+          <p:nvPr/>
+        </p:nvSpPr>
+        <p:spPr>
+          <a:xfrm>
+            <a:off x="8138160" y="2468880"/>
+            <a:ext cx="3474720" cy="3657600"/>
+          </a:xfrm>
+          <a:prstGeom prst="rect">
+            <a:avLst/>
+          </a:prstGeom>
+          <a:solidFill>
+            <a:srgbClr val="FFFFFF"/>
+          </a:solidFill>
+          <a:ln w="6350">
+            <a:solidFill>
+              <a:srgbClr val="E2DFD8"/>
+            </a:solidFill>
+            <a:prstDash val="solid"/>
+          </a:ln>
+        </p:spPr>
+        <p:txBody>
+          <a:bodyPr/>
+          <a:lstStyle/>
+          <a:p>
+            <a:endParaRPr lang="en-US"/>
+          </a:p>
+        </p:txBody>
+      </p:sp>
+      <p:sp>
+        <p:nvSpPr>
+          <p:cNvPr id="18" name="Shape 16"/>
+          <p:cNvSpPr/>
+          <p:nvPr/>
+        </p:nvSpPr>
+        <p:spPr>
+          <a:xfrm>
+            <a:off x="8138160" y="2468880"/>
+            <a:ext cx="3474720" cy="73152"/>
+          </a:xfrm>
+          <a:prstGeom prst="rect">
+            <a:avLst/>
+          </a:prstGeom>
+          <a:solidFill>
+            <a:srgbClr val="E89B3C"/>
+          </a:solidFill>
+          <a:ln/>
+        </p:spPr>
+        <p:txBody>
+          <a:bodyPr/>
+          <a:lstStyle/>
+          <a:p>
+            <a:endParaRPr lang="en-US"/>
+          </a:p>
+        </p:txBody>
+      </p:sp>
+      <p:sp>
+        <p:nvSpPr>
+          <p:cNvPr id="19" name="Text 17"/>
+          <p:cNvSpPr/>
+          <p:nvPr/>
+        </p:nvSpPr>
+        <p:spPr>
+          <a:xfrm>
+            <a:off x="8412480" y="2788920"/>
+            <a:ext cx="2926080" cy="274320"/>
+          </a:xfrm>
+          <a:prstGeom prst="rect">
+            <a:avLst/>
+          </a:prstGeom>
+          <a:noFill/>
+          <a:ln/>
+        </p:spPr>
+        <p:txBody>
+          <a:bodyPr wrap="square" lIns="0" tIns="0" rIns="0" bIns="0" rtlCol="0" anchor="ctr"/>
+          <a:lstStyle/>
+          <a:p>
+            <a:pPr marL="0" indent="0">
+              <a:buNone/>
+            </a:pPr>
+            <a:r>
+              <a:rPr lang="en-US" sz="1000" b="1" kern="0" spc="600" dirty="0">
+                <a:solidFill>
+                  <a:srgbClr val="E89B3C"/>
+                </a:solidFill>
+                <a:latin typeface="Inter" pitchFamily="34" charset="0"/>
+                <a:ea typeface="Inter" pitchFamily="34" charset="-122"/>
+                <a:cs typeface="Inter" pitchFamily="34" charset="-120"/>
+              </a:rPr>
+              <a:t>AI Help</a:t>
+            </a:r>
+            <a:endParaRPr lang="en-US" sz="1000" dirty="0"/>
+          </a:p>
+        </p:txBody>
+      </p:sp>
+      <p:sp>
+        <p:nvSpPr>
+          <p:cNvPr id="20" name="Text 18"/>
+          <p:cNvSpPr/>
+          <p:nvPr/>
+        </p:nvSpPr>
+        <p:spPr>
+          <a:xfrm>
+            <a:off x="8412480" y="3108960"/>
+            <a:ext cx="2926080" cy="548640"/>
+          </a:xfrm>
+          <a:prstGeom prst="rect">
+            <a:avLst/>
+          </a:prstGeom>
+          <a:noFill/>
+          <a:ln/>
+        </p:spPr>
+        <p:txBody>
+          <a:bodyPr wrap="square" lIns="0" tIns="0" rIns="0" bIns="0" rtlCol="0" anchor="ctr"/>
+          <a:lstStyle/>
+          <a:p>
+            <a:pPr marL="0" indent="0">
+              <a:buNone/>
+            </a:pPr>
+            <a:r>
+              <a:rPr lang="en-US" sz="2400" b="1" dirty="0">
+                <a:solidFill>
+                  <a:srgbClr val="1F2937"/>
+                </a:solidFill>
+                <a:latin typeface="Montserrat" pitchFamily="34" charset="0"/>
+                <a:ea typeface="Montserrat" pitchFamily="34" charset="-122"/>
+                <a:cs typeface="Montserrat" pitchFamily="34" charset="-120"/>
+              </a:rPr>
+              <a:t>Tripp &amp; Patrick</a:t>
+            </a:r>
+          </a:p>
+          <a:p>
+            <a:pPr marL="0" indent="0">
+              <a:buNone/>
+            </a:pPr>
+            <a:r>
+              <a:rPr lang="en-US" sz="2400" b="1" dirty="0">
+                <a:solidFill>
+                  <a:srgbClr val="1F2937"/>
+                </a:solidFill>
+                <a:latin typeface="Montserrat" pitchFamily="34" charset="0"/>
+              </a:rPr>
+              <a:t>Jason &amp; Matt</a:t>
+            </a:r>
+            <a:endParaRPr lang="en-US" sz="2400" dirty="0"/>
+          </a:p>
+        </p:txBody>
+      </p:sp>
+      <p:sp>
+        <p:nvSpPr>
+          <p:cNvPr id="21" name="Text 19"/>
+          <p:cNvSpPr/>
+          <p:nvPr/>
+        </p:nvSpPr>
+        <p:spPr>
+          <a:xfrm>
+            <a:off x="8412480" y="3703320"/>
+            <a:ext cx="2926080" cy="365760"/>
+          </a:xfrm>
+          <a:prstGeom prst="rect">
+            <a:avLst/>
+          </a:prstGeom>
+          <a:noFill/>
+          <a:ln/>
+        </p:spPr>
+        <p:txBody>
+          <a:bodyPr wrap="square" lIns="0" tIns="0" rIns="0" bIns="0" rtlCol="0" anchor="ctr"/>
+          <a:lstStyle/>
+          <a:p>
+            <a:pPr marL="0" indent="0">
+              <a:buNone/>
+            </a:pPr>
+            <a:r>
+              <a:rPr lang="en-US" sz="1300" i="1" dirty="0">
+                <a:solidFill>
+                  <a:srgbClr val="6B7280"/>
+                </a:solidFill>
+                <a:latin typeface="Inter" pitchFamily="34" charset="0"/>
+                <a:ea typeface="Inter" pitchFamily="34" charset="-122"/>
+                <a:cs typeface="Inter" pitchFamily="34" charset="-120"/>
+              </a:rPr>
+              <a:t>Standing by at every break.</a:t>
+            </a:r>
+            <a:endParaRPr lang="en-US" sz="1300" dirty="0"/>
+          </a:p>
+        </p:txBody>
+      </p:sp>
+      <p:sp>
+        <p:nvSpPr>
+          <p:cNvPr id="22" name="Text 20"/>
+          <p:cNvSpPr/>
+          <p:nvPr/>
+        </p:nvSpPr>
+        <p:spPr>
+          <a:xfrm>
+            <a:off x="8412480" y="4251960"/>
+            <a:ext cx="2926080" cy="1645920"/>
+          </a:xfrm>
+          <a:prstGeom prst="rect">
+            <a:avLst/>
+          </a:prstGeom>
+          <a:noFill/>
+          <a:ln/>
+        </p:spPr>
+        <p:txBody>
+          <a:bodyPr wrap="square" lIns="0" tIns="0" rIns="0" bIns="0" rtlCol="0" anchor="ctr"/>
+          <a:lstStyle/>
+          <a:p>
+            <a:pPr marL="0" indent="0">
+              <a:buNone/>
+            </a:pPr>
+            <a:r>
+              <a:rPr lang="en-US" sz="1300" b="1" dirty="0">
+                <a:solidFill>
+                  <a:srgbClr val="1F2937"/>
+                </a:solidFill>
+                <a:latin typeface="Inter" pitchFamily="34" charset="0"/>
+                <a:ea typeface="Inter" pitchFamily="34" charset="-122"/>
+                <a:cs typeface="Inter" pitchFamily="34" charset="-120"/>
+              </a:rPr>
+              <a:t>If any of those three are red or missing – turn your name plate vertical.</a:t>
+            </a:r>
+            <a:endParaRPr lang="en-US" sz="1300" dirty="0"/>
+          </a:p>
+          <a:p>
+            <a:pPr marL="0" indent="0">
+              <a:buNone/>
+            </a:pPr>
+            <a:r>
+              <a:rPr lang="en-US" sz="1300" dirty="0">
+                <a:solidFill>
+                  <a:srgbClr val="000000"/>
+                </a:solidFill>
+                <a:latin typeface="Inter" pitchFamily="34" charset="0"/>
+                <a:ea typeface="Inter" pitchFamily="34" charset="-122"/>
+                <a:cs typeface="Inter" pitchFamily="34" charset="-120"/>
+              </a:rPr>
+              <a:t> </a:t>
+            </a:r>
+            <a:endParaRPr lang="en-US" sz="1300" dirty="0"/>
+          </a:p>
+          <a:p>
+            <a:pPr marL="0" indent="0">
+              <a:buNone/>
+            </a:pPr>
+            <a:r>
+              <a:rPr lang="en-US" sz="1300" dirty="0">
+                <a:solidFill>
+                  <a:srgbClr val="6B7280"/>
+                </a:solidFill>
+                <a:latin typeface="Inter" pitchFamily="34" charset="0"/>
+                <a:ea typeface="Inter" pitchFamily="34" charset="-122"/>
+                <a:cs typeface="Inter" pitchFamily="34" charset="-120"/>
+              </a:rPr>
+              <a:t>Anthropic account, Claude Code CLI, and GitHub CLI unlock the rest of the workshop.</a:t>
+            </a:r>
+            <a:endParaRPr lang="en-US" sz="1300" dirty="0"/>
+          </a:p>
+        </p:txBody>
+      </p:sp>
+      <p:sp>
+        <p:nvSpPr>
+          <p:cNvPr id="23" name="Text 21"/>
+          <p:cNvSpPr/>
+          <p:nvPr/>
+        </p:nvSpPr>
+        <p:spPr>
+          <a:xfrm>
+            <a:off x="457200" y="6446520"/>
+            <a:ext cx="7315200" cy="274320"/>
+          </a:xfrm>
+          <a:prstGeom prst="rect">
+            <a:avLst/>
+          </a:prstGeom>
+          <a:noFill/>
+          <a:ln/>
+        </p:spPr>
+        <p:txBody>
+          <a:bodyPr wrap="square" lIns="0" tIns="0" rIns="0" bIns="0" rtlCol="0" anchor="ctr"/>
+          <a:lstStyle/>
+          <a:p>
+            <a:pPr marL="0" indent="0">
+              <a:buNone/>
+            </a:pPr>
+            <a:r>
+              <a:rPr lang="en-US" sz="900" kern="0" spc="300" dirty="0">
+                <a:solidFill>
+                  <a:srgbClr val="6B7280"/>
+                </a:solidFill>
+                <a:latin typeface="Inter" pitchFamily="34" charset="0"/>
+                <a:ea typeface="Inter" pitchFamily="34" charset="-122"/>
+                <a:cs typeface="Inter" pitchFamily="34" charset="-120"/>
+              </a:rPr>
+              <a:t>01 · WELCOME &amp; KICKOFF</a:t>
+            </a:r>
+            <a:endParaRPr lang="en-US" sz="900" dirty="0"/>
+          </a:p>
+        </p:txBody>
+      </p:sp>
+      <p:sp>
+        <p:nvSpPr>
+          <p:cNvPr id="24" name="Text 22"/>
+          <p:cNvSpPr/>
+          <p:nvPr/>
+        </p:nvSpPr>
+        <p:spPr>
+          <a:xfrm>
+            <a:off x="8076895" y="6446520"/>
+            <a:ext cx="3657600" cy="274320"/>
+          </a:xfrm>
+          <a:prstGeom prst="rect">
+            <a:avLst/>
+          </a:prstGeom>
+          <a:noFill/>
+          <a:ln/>
+        </p:spPr>
+        <p:txBody>
+          <a:bodyPr wrap="square" lIns="0" tIns="0" rIns="0" bIns="0" rtlCol="0" anchor="ctr"/>
+          <a:lstStyle/>
+          <a:p>
+            <a:pPr marL="0" indent="0" algn="r">
+              <a:buNone/>
+            </a:pPr>
+            <a:r>
+              <a:rPr lang="en-US" sz="900" kern="0" spc="300" dirty="0">
+                <a:solidFill>
+                  <a:srgbClr val="6B7280"/>
+                </a:solidFill>
+                <a:latin typeface="Inter" pitchFamily="34" charset="0"/>
+                <a:ea typeface="Inter" pitchFamily="34" charset="-122"/>
+                <a:cs typeface="Inter" pitchFamily="34" charset="-120"/>
+              </a:rPr>
+              <a:t>PREREQUISITES · GREEN BY 10:00</a:t>
+            </a:r>
+            <a:endParaRPr lang="en-US" sz="900" dirty="0"/>
+          </a:p>
+        </p:txBody>
+      </p:sp>
+    </p:spTree>
+  </p:cSld>
+  <p:clrMapOvr>
+    <a:masterClrMapping/>
+  </p:clrMapOvr>
+</p:sld>
+</file>
+
+<file path=ppt/slides/slide13.xml><?xml version="1.0" encoding="utf-8"?>
+<p:sld xmlns:a="http://schemas.openxmlformats.org/drawingml/2006/main" xmlns:r="http://schemas.openxmlformats.org/officeDocument/2006/relationships" xmlns:p="http://schemas.openxmlformats.org/presentationml/2006/main">
   <p:cSld name="Slide 10">
     <p:bg>
       <p:bgPr>
@@ -3056,6 +5724,240 @@
 
 <file path=ppt/slides/slide3.xml><?xml version="1.0" encoding="utf-8"?>
 <p:sld xmlns:a="http://schemas.openxmlformats.org/drawingml/2006/main" xmlns:r="http://schemas.openxmlformats.org/officeDocument/2006/relationships" xmlns:p="http://schemas.openxmlformats.org/presentationml/2006/main">
+  <p:cSld>
+    <p:spTree>
+      <p:nvGrpSpPr>
+        <p:cNvPr id="1" name="Shape 27"/>
+        <p:cNvGrpSpPr/>
+        <p:nvPr/>
+      </p:nvGrpSpPr>
+      <p:grpSpPr>
+        <a:xfrm>
+          <a:off x="0" y="0"/>
+          <a:ext cx="0" cy="0"/>
+          <a:chOff x="0" y="0"/>
+          <a:chExt cx="0" cy="0"/>
+        </a:xfrm>
+      </p:grpSpPr>
+      <p:sp>
+        <p:nvSpPr>
+          <p:cNvPr id="28" name="Google Shape;28;p2"/>
+          <p:cNvSpPr/>
+          <p:nvPr/>
+        </p:nvSpPr>
+        <p:spPr>
+          <a:xfrm>
+            <a:off x="635000" y="1778000"/>
+            <a:ext cx="4572000" cy="4572000"/>
+          </a:xfrm>
+          <a:prstGeom prst="roundRect">
+            <a:avLst>
+              <a:gd name="adj" fmla="val 2778"/>
+            </a:avLst>
+          </a:prstGeom>
+          <a:solidFill>
+            <a:srgbClr val="1B1D24"/>
+          </a:solidFill>
+          <a:ln>
+            <a:noFill/>
+          </a:ln>
+        </p:spPr>
+        <p:txBody>
+          <a:bodyPr spcFirstLastPara="1" wrap="square" lIns="60950" tIns="30467" rIns="60950" bIns="30467" anchor="t" anchorCtr="0">
+            <a:noAutofit/>
+          </a:bodyPr>
+          <a:lstStyle/>
+          <a:p>
+            <a:endParaRPr sz="1200">
+              <a:solidFill>
+                <a:schemeClr val="dk1"/>
+              </a:solidFill>
+              <a:latin typeface="Calibri"/>
+              <a:ea typeface="Calibri"/>
+              <a:cs typeface="Calibri"/>
+              <a:sym typeface="Calibri"/>
+            </a:endParaRPr>
+          </a:p>
+        </p:txBody>
+      </p:sp>
+      <p:sp>
+        <p:nvSpPr>
+          <p:cNvPr id="30" name="Google Shape;30;p2"/>
+          <p:cNvSpPr/>
+          <p:nvPr/>
+        </p:nvSpPr>
+        <p:spPr>
+          <a:xfrm>
+            <a:off x="5715000" y="2753519"/>
+            <a:ext cx="6017260" cy="222250"/>
+          </a:xfrm>
+          <a:prstGeom prst="rect">
+            <a:avLst/>
+          </a:prstGeom>
+          <a:noFill/>
+          <a:ln>
+            <a:noFill/>
+          </a:ln>
+        </p:spPr>
+        <p:txBody>
+          <a:bodyPr spcFirstLastPara="1" wrap="square" lIns="16933" tIns="16933" rIns="16933" bIns="16933" anchor="t" anchorCtr="0">
+            <a:normAutofit/>
+          </a:bodyPr>
+          <a:lstStyle/>
+          <a:p>
+            <a:pPr>
+              <a:buClr>
+                <a:srgbClr val="F58220"/>
+              </a:buClr>
+              <a:buSzPts val="1800"/>
+            </a:pPr>
+            <a:r>
+              <a:rPr lang="en-US" sz="1200" dirty="0">
+                <a:solidFill>
+                  <a:srgbClr val="F58220"/>
+                </a:solidFill>
+                <a:latin typeface="JetBrains Mono"/>
+                <a:ea typeface="JetBrains Mono"/>
+                <a:cs typeface="JetBrains Mono"/>
+                <a:sym typeface="JetBrains Mono"/>
+              </a:rPr>
+              <a:t>HOST</a:t>
+            </a:r>
+            <a:endParaRPr sz="1200" dirty="0">
+              <a:solidFill>
+                <a:schemeClr val="dk1"/>
+              </a:solidFill>
+              <a:latin typeface="Calibri"/>
+              <a:ea typeface="Calibri"/>
+              <a:cs typeface="Calibri"/>
+              <a:sym typeface="Calibri"/>
+            </a:endParaRPr>
+          </a:p>
+        </p:txBody>
+      </p:sp>
+      <p:sp>
+        <p:nvSpPr>
+          <p:cNvPr id="31" name="Google Shape;31;p2"/>
+          <p:cNvSpPr/>
+          <p:nvPr/>
+        </p:nvSpPr>
+        <p:spPr>
+          <a:xfrm>
+            <a:off x="5715000" y="3064669"/>
+            <a:ext cx="6017260" cy="635000"/>
+          </a:xfrm>
+          <a:prstGeom prst="rect">
+            <a:avLst/>
+          </a:prstGeom>
+          <a:noFill/>
+          <a:ln>
+            <a:noFill/>
+          </a:ln>
+        </p:spPr>
+        <p:txBody>
+          <a:bodyPr spcFirstLastPara="1" wrap="square" lIns="16933" tIns="16933" rIns="16933" bIns="16933" anchor="t" anchorCtr="0">
+            <a:normAutofit fontScale="92500" lnSpcReduction="20000"/>
+          </a:bodyPr>
+          <a:lstStyle/>
+          <a:p>
+            <a:pPr>
+              <a:buClr>
+                <a:srgbClr val="2A2D38"/>
+              </a:buClr>
+              <a:buSzPts val="7200"/>
+            </a:pPr>
+            <a:r>
+              <a:rPr lang="en-US" sz="4800" b="1" dirty="0">
+                <a:solidFill>
+                  <a:srgbClr val="2A2D38"/>
+                </a:solidFill>
+                <a:latin typeface="Montserrat"/>
+                <a:ea typeface="Montserrat"/>
+                <a:cs typeface="Montserrat"/>
+                <a:sym typeface="Montserrat"/>
+              </a:rPr>
+              <a:t>Jason Lee</a:t>
+            </a:r>
+            <a:endParaRPr sz="4800" dirty="0">
+              <a:solidFill>
+                <a:schemeClr val="dk1"/>
+              </a:solidFill>
+              <a:latin typeface="Calibri"/>
+              <a:ea typeface="Calibri"/>
+              <a:cs typeface="Calibri"/>
+              <a:sym typeface="Calibri"/>
+            </a:endParaRPr>
+          </a:p>
+        </p:txBody>
+      </p:sp>
+      <p:sp>
+        <p:nvSpPr>
+          <p:cNvPr id="32" name="Google Shape;32;p2"/>
+          <p:cNvSpPr/>
+          <p:nvPr/>
+        </p:nvSpPr>
+        <p:spPr>
+          <a:xfrm>
+            <a:off x="5722717" y="3797736"/>
+            <a:ext cx="6017260" cy="273050"/>
+          </a:xfrm>
+          <a:prstGeom prst="rect">
+            <a:avLst/>
+          </a:prstGeom>
+          <a:noFill/>
+          <a:ln>
+            <a:noFill/>
+          </a:ln>
+        </p:spPr>
+        <p:txBody>
+          <a:bodyPr spcFirstLastPara="1" wrap="square" lIns="16933" tIns="16933" rIns="16933" bIns="16933" anchor="t" anchorCtr="0">
+            <a:normAutofit/>
+          </a:bodyPr>
+          <a:lstStyle/>
+          <a:p>
+            <a:pPr>
+              <a:lnSpc>
+                <a:spcPct val="90000"/>
+              </a:lnSpc>
+              <a:buClr>
+                <a:srgbClr val="F58220"/>
+              </a:buClr>
+              <a:buSzPts val="2400"/>
+            </a:pPr>
+            <a:r>
+              <a:rPr lang="en-US" sz="1600" b="1" dirty="0">
+                <a:solidFill>
+                  <a:srgbClr val="F58220"/>
+                </a:solidFill>
+                <a:latin typeface="Montserrat"/>
+                <a:ea typeface="Montserrat"/>
+                <a:cs typeface="Montserrat"/>
+                <a:sym typeface="Montserrat"/>
+              </a:rPr>
+              <a:t>Digital Innovation Pastor – Northwoods Church</a:t>
+            </a:r>
+            <a:endParaRPr sz="1600" dirty="0">
+              <a:solidFill>
+                <a:schemeClr val="dk1"/>
+              </a:solidFill>
+              <a:latin typeface="Calibri"/>
+              <a:ea typeface="Calibri"/>
+              <a:cs typeface="Calibri"/>
+              <a:sym typeface="Calibri"/>
+            </a:endParaRPr>
+          </a:p>
+        </p:txBody>
+      </p:sp>
+    </p:spTree>
+  </p:cSld>
+  <p:clrMapOvr>
+    <a:masterClrMapping/>
+  </p:clrMapOvr>
+</p:sld>
+</file>
+
+<file path=ppt/slides/slide4.xml><?xml version="1.0" encoding="utf-8"?>
+<p:sld xmlns:a="http://schemas.openxmlformats.org/drawingml/2006/main" xmlns:r="http://schemas.openxmlformats.org/officeDocument/2006/relationships" xmlns:p="http://schemas.openxmlformats.org/presentationml/2006/main">
   <p:cSld name="Slide 2">
     <p:bg>
       <p:bgPr>
@@ -3360,7 +6262,7 @@
 </p:sld>
 </file>
 
-<file path=ppt/slides/slide4.xml><?xml version="1.0" encoding="utf-8"?>
+<file path=ppt/slides/slide5.xml><?xml version="1.0" encoding="utf-8"?>
 <p:sld xmlns:a="http://schemas.openxmlformats.org/drawingml/2006/main" xmlns:r="http://schemas.openxmlformats.org/officeDocument/2006/relationships" xmlns:p="http://schemas.openxmlformats.org/presentationml/2006/main">
   <p:cSld name="Slide 3">
     <p:bg>
@@ -4116,1205 +7018,7 @@
 </p:sld>
 </file>
 
-<file path=ppt/slides/slide5.xml><?xml version="1.0" encoding="utf-8"?>
-<p:sld xmlns:a="http://schemas.openxmlformats.org/drawingml/2006/main" xmlns:r="http://schemas.openxmlformats.org/officeDocument/2006/relationships" xmlns:p="http://schemas.openxmlformats.org/presentationml/2006/main">
-  <p:cSld name="Slide 5">
-    <p:bg>
-      <p:bgPr>
-        <a:solidFill>
-          <a:srgbClr val="F5F2ED"/>
-        </a:solidFill>
-        <a:effectLst/>
-      </p:bgPr>
-    </p:bg>
-    <p:spTree>
-      <p:nvGrpSpPr>
-        <p:cNvPr id="1" name=""/>
-        <p:cNvGrpSpPr/>
-        <p:nvPr/>
-      </p:nvGrpSpPr>
-      <p:grpSpPr>
-        <a:xfrm>
-          <a:off x="0" y="0"/>
-          <a:ext cx="0" cy="0"/>
-          <a:chOff x="0" y="0"/>
-          <a:chExt cx="0" cy="0"/>
-        </a:xfrm>
-      </p:grpSpPr>
-      <p:sp>
-        <p:nvSpPr>
-          <p:cNvPr id="2" name="Text 0"/>
-          <p:cNvSpPr/>
-          <p:nvPr/>
-        </p:nvSpPr>
-        <p:spPr>
-          <a:xfrm>
-            <a:off x="548640" y="548640"/>
-            <a:ext cx="5486400" cy="274320"/>
-          </a:xfrm>
-          <a:prstGeom prst="rect">
-            <a:avLst/>
-          </a:prstGeom>
-          <a:noFill/>
-          <a:ln/>
-        </p:spPr>
-        <p:txBody>
-          <a:bodyPr wrap="square" lIns="0" tIns="0" rIns="0" bIns="0" rtlCol="0" anchor="ctr"/>
-          <a:lstStyle/>
-          <a:p>
-            <a:pPr marL="0" indent="0">
-              <a:buNone/>
-            </a:pPr>
-            <a:r>
-              <a:rPr lang="en-US" sz="1000" b="1" kern="0" spc="600" dirty="0">
-                <a:solidFill>
-                  <a:srgbClr val="E89B3C"/>
-                </a:solidFill>
-                <a:latin typeface="Inter" pitchFamily="34" charset="0"/>
-                <a:ea typeface="Inter" pitchFamily="34" charset="-122"/>
-                <a:cs typeface="Inter" pitchFamily="34" charset="-120"/>
-              </a:rPr>
-              <a:t>THE ARC</a:t>
-            </a:r>
-            <a:endParaRPr lang="en-US" sz="1000" dirty="0"/>
-          </a:p>
-        </p:txBody>
-      </p:sp>
-      <p:sp>
-        <p:nvSpPr>
-          <p:cNvPr id="3" name="Text 1"/>
-          <p:cNvSpPr/>
-          <p:nvPr/>
-        </p:nvSpPr>
-        <p:spPr>
-          <a:xfrm>
-            <a:off x="548640" y="914400"/>
-            <a:ext cx="10058400" cy="822960"/>
-          </a:xfrm>
-          <a:prstGeom prst="rect">
-            <a:avLst/>
-          </a:prstGeom>
-          <a:noFill/>
-          <a:ln/>
-        </p:spPr>
-        <p:txBody>
-          <a:bodyPr wrap="square" lIns="0" tIns="0" rIns="0" bIns="0" rtlCol="0" anchor="ctr"/>
-          <a:lstStyle/>
-          <a:p>
-            <a:pPr marL="0" indent="0">
-              <a:buNone/>
-            </a:pPr>
-            <a:r>
-              <a:rPr lang="en-US" sz="3600" b="1" dirty="0">
-                <a:solidFill>
-                  <a:srgbClr val="1F2937"/>
-                </a:solidFill>
-                <a:latin typeface="Montserrat" pitchFamily="34" charset="0"/>
-                <a:ea typeface="Montserrat" pitchFamily="34" charset="-122"/>
-                <a:cs typeface="Montserrat" pitchFamily="34" charset="-120"/>
-              </a:rPr>
-              <a:t>Two days. One arc.</a:t>
-            </a:r>
-            <a:endParaRPr lang="en-US" sz="3600" dirty="0"/>
-          </a:p>
-        </p:txBody>
-      </p:sp>
-      <p:sp>
-        <p:nvSpPr>
-          <p:cNvPr id="4" name="Text 2"/>
-          <p:cNvSpPr/>
-          <p:nvPr/>
-        </p:nvSpPr>
-        <p:spPr>
-          <a:xfrm>
-            <a:off x="548640" y="1783080"/>
-            <a:ext cx="10972800" cy="365760"/>
-          </a:xfrm>
-          <a:prstGeom prst="rect">
-            <a:avLst/>
-          </a:prstGeom>
-          <a:noFill/>
-          <a:ln/>
-        </p:spPr>
-        <p:txBody>
-          <a:bodyPr wrap="square" lIns="0" tIns="0" rIns="0" bIns="0" rtlCol="0" anchor="ctr"/>
-          <a:lstStyle/>
-          <a:p>
-            <a:pPr marL="0" indent="0">
-              <a:buNone/>
-            </a:pPr>
-            <a:r>
-              <a:rPr lang="en-US" sz="1500" i="1" dirty="0">
-                <a:solidFill>
-                  <a:srgbClr val="6B7280"/>
-                </a:solidFill>
-                <a:latin typeface="Inter" pitchFamily="34" charset="0"/>
-                <a:ea typeface="Inter" pitchFamily="34" charset="-122"/>
-                <a:cs typeface="Inter" pitchFamily="34" charset="-120"/>
-              </a:rPr>
-              <a:t>Day 1 you learn the craft. Day 2 you ship something real.</a:t>
-            </a:r>
-            <a:endParaRPr lang="en-US" sz="1500" dirty="0"/>
-          </a:p>
-        </p:txBody>
-      </p:sp>
-      <p:sp>
-        <p:nvSpPr>
-          <p:cNvPr id="5" name="Shape 3"/>
-          <p:cNvSpPr/>
-          <p:nvPr/>
-        </p:nvSpPr>
-        <p:spPr>
-          <a:xfrm>
-            <a:off x="548640" y="2560320"/>
-            <a:ext cx="5486400" cy="3383280"/>
-          </a:xfrm>
-          <a:prstGeom prst="rect">
-            <a:avLst/>
-          </a:prstGeom>
-          <a:solidFill>
-            <a:srgbClr val="FFFFFF"/>
-          </a:solidFill>
-          <a:ln w="6350">
-            <a:solidFill>
-              <a:srgbClr val="E2DFD8"/>
-            </a:solidFill>
-            <a:prstDash val="solid"/>
-          </a:ln>
-        </p:spPr>
-        <p:txBody>
-          <a:bodyPr/>
-          <a:lstStyle/>
-          <a:p>
-            <a:endParaRPr lang="en-US"/>
-          </a:p>
-        </p:txBody>
-      </p:sp>
-      <p:sp>
-        <p:nvSpPr>
-          <p:cNvPr id="6" name="Shape 4"/>
-          <p:cNvSpPr/>
-          <p:nvPr/>
-        </p:nvSpPr>
-        <p:spPr>
-          <a:xfrm>
-            <a:off x="548640" y="2560320"/>
-            <a:ext cx="73152" cy="3383280"/>
-          </a:xfrm>
-          <a:prstGeom prst="rect">
-            <a:avLst/>
-          </a:prstGeom>
-          <a:solidFill>
-            <a:srgbClr val="E89B3C"/>
-          </a:solidFill>
-          <a:ln/>
-        </p:spPr>
-        <p:txBody>
-          <a:bodyPr/>
-          <a:lstStyle/>
-          <a:p>
-            <a:endParaRPr lang="en-US"/>
-          </a:p>
-        </p:txBody>
-      </p:sp>
-      <p:sp>
-        <p:nvSpPr>
-          <p:cNvPr id="7" name="Text 5"/>
-          <p:cNvSpPr/>
-          <p:nvPr/>
-        </p:nvSpPr>
-        <p:spPr>
-          <a:xfrm>
-            <a:off x="960120" y="2926080"/>
-            <a:ext cx="3657600" cy="274320"/>
-          </a:xfrm>
-          <a:prstGeom prst="rect">
-            <a:avLst/>
-          </a:prstGeom>
-          <a:noFill/>
-          <a:ln/>
-        </p:spPr>
-        <p:txBody>
-          <a:bodyPr wrap="square" lIns="0" tIns="0" rIns="0" bIns="0" rtlCol="0" anchor="ctr"/>
-          <a:lstStyle/>
-          <a:p>
-            <a:pPr marL="0" indent="0">
-              <a:buNone/>
-            </a:pPr>
-            <a:r>
-              <a:rPr lang="en-US" sz="1000" b="1" kern="0" spc="600" dirty="0">
-                <a:solidFill>
-                  <a:srgbClr val="E89B3C"/>
-                </a:solidFill>
-                <a:latin typeface="Inter" pitchFamily="34" charset="0"/>
-                <a:ea typeface="Inter" pitchFamily="34" charset="-122"/>
-                <a:cs typeface="Inter" pitchFamily="34" charset="-120"/>
-              </a:rPr>
-              <a:t>DAY 1 · MAY 7</a:t>
-            </a:r>
-            <a:endParaRPr lang="en-US" sz="1000" dirty="0"/>
-          </a:p>
-        </p:txBody>
-      </p:sp>
-      <p:sp>
-        <p:nvSpPr>
-          <p:cNvPr id="8" name="Text 6"/>
-          <p:cNvSpPr/>
-          <p:nvPr/>
-        </p:nvSpPr>
-        <p:spPr>
-          <a:xfrm>
-            <a:off x="960120" y="3291840"/>
-            <a:ext cx="4846320" cy="640080"/>
-          </a:xfrm>
-          <a:prstGeom prst="rect">
-            <a:avLst/>
-          </a:prstGeom>
-          <a:noFill/>
-          <a:ln/>
-        </p:spPr>
-        <p:txBody>
-          <a:bodyPr wrap="square" lIns="0" tIns="0" rIns="0" bIns="0" rtlCol="0" anchor="ctr"/>
-          <a:lstStyle/>
-          <a:p>
-            <a:pPr marL="0" indent="0">
-              <a:buNone/>
-            </a:pPr>
-            <a:r>
-              <a:rPr lang="en-US" sz="3000" b="1" dirty="0">
-                <a:solidFill>
-                  <a:srgbClr val="1F2937"/>
-                </a:solidFill>
-                <a:latin typeface="Montserrat" pitchFamily="34" charset="0"/>
-                <a:ea typeface="Montserrat" pitchFamily="34" charset="-122"/>
-                <a:cs typeface="Montserrat" pitchFamily="34" charset="-120"/>
-              </a:rPr>
-              <a:t>Foundations</a:t>
-            </a:r>
-            <a:endParaRPr lang="en-US" sz="3000" dirty="0"/>
-          </a:p>
-        </p:txBody>
-      </p:sp>
-      <p:sp>
-        <p:nvSpPr>
-          <p:cNvPr id="9" name="Text 7"/>
-          <p:cNvSpPr/>
-          <p:nvPr/>
-        </p:nvSpPr>
-        <p:spPr>
-          <a:xfrm>
-            <a:off x="960120" y="3931920"/>
-            <a:ext cx="4846320" cy="457200"/>
-          </a:xfrm>
-          <a:prstGeom prst="rect">
-            <a:avLst/>
-          </a:prstGeom>
-          <a:noFill/>
-          <a:ln/>
-        </p:spPr>
-        <p:txBody>
-          <a:bodyPr wrap="square" lIns="0" tIns="0" rIns="0" bIns="0" rtlCol="0" anchor="ctr"/>
-          <a:lstStyle/>
-          <a:p>
-            <a:pPr marL="0" indent="0">
-              <a:buNone/>
-            </a:pPr>
-            <a:r>
-              <a:rPr lang="en-US" sz="1300" i="1" dirty="0">
-                <a:solidFill>
-                  <a:srgbClr val="6B7280"/>
-                </a:solidFill>
-                <a:latin typeface="Inter" pitchFamily="34" charset="0"/>
-                <a:ea typeface="Inter" pitchFamily="34" charset="-122"/>
-                <a:cs typeface="Inter" pitchFamily="34" charset="-120"/>
-              </a:rPr>
-              <a:t>Learn the mindset, the workflow, and how to build context.</a:t>
-            </a:r>
-            <a:endParaRPr lang="en-US" sz="1300" dirty="0"/>
-          </a:p>
-        </p:txBody>
-      </p:sp>
-      <p:sp>
-        <p:nvSpPr>
-          <p:cNvPr id="10" name="Text 8"/>
-          <p:cNvSpPr/>
-          <p:nvPr/>
-        </p:nvSpPr>
-        <p:spPr>
-          <a:xfrm>
-            <a:off x="960120" y="4480560"/>
-            <a:ext cx="4846320" cy="1371600"/>
-          </a:xfrm>
-          <a:prstGeom prst="rect">
-            <a:avLst/>
-          </a:prstGeom>
-          <a:noFill/>
-          <a:ln/>
-        </p:spPr>
-        <p:txBody>
-          <a:bodyPr wrap="square" lIns="0" tIns="0" rIns="0" bIns="0" rtlCol="0" anchor="ctr"/>
-          <a:lstStyle/>
-          <a:p>
-            <a:pPr marL="342900" indent="-342900">
-              <a:spcAft>
-                <a:spcPts val="400"/>
-              </a:spcAft>
-              <a:buSzPct val="100000"/>
-              <a:buChar char="•"/>
-            </a:pPr>
-            <a:r>
-              <a:rPr lang="en-US" sz="1200" dirty="0">
-                <a:solidFill>
-                  <a:srgbClr val="1F2937"/>
-                </a:solidFill>
-                <a:latin typeface="Inter" pitchFamily="34" charset="0"/>
-                <a:ea typeface="Inter" pitchFamily="34" charset="-122"/>
-                <a:cs typeface="Inter" pitchFamily="34" charset="-120"/>
-              </a:rPr>
-              <a:t>Vibe coding vs. context engineering</a:t>
-            </a:r>
-            <a:endParaRPr lang="en-US" sz="1200" dirty="0"/>
-          </a:p>
-          <a:p>
-            <a:pPr marL="342900" indent="-342900">
-              <a:spcAft>
-                <a:spcPts val="400"/>
-              </a:spcAft>
-              <a:buSzPct val="100000"/>
-              <a:buChar char="•"/>
-            </a:pPr>
-            <a:r>
-              <a:rPr lang="en-US" sz="1200" dirty="0">
-                <a:solidFill>
-                  <a:srgbClr val="1F2937"/>
-                </a:solidFill>
-                <a:latin typeface="Inter" pitchFamily="34" charset="0"/>
-                <a:ea typeface="Inter" pitchFamily="34" charset="-122"/>
-                <a:cs typeface="Inter" pitchFamily="34" charset="-120"/>
-              </a:rPr>
-              <a:t>SDLC crash course (git, repos, terminal)</a:t>
-            </a:r>
-            <a:endParaRPr lang="en-US" sz="1200" dirty="0"/>
-          </a:p>
-          <a:p>
-            <a:pPr marL="342900" indent="-342900">
-              <a:spcAft>
-                <a:spcPts val="400"/>
-              </a:spcAft>
-              <a:buSzPct val="100000"/>
-              <a:buChar char="•"/>
-            </a:pPr>
-            <a:r>
-              <a:rPr lang="en-US" sz="1200" dirty="0">
-                <a:solidFill>
-                  <a:srgbClr val="1F2937"/>
-                </a:solidFill>
-                <a:latin typeface="Inter" pitchFamily="34" charset="0"/>
-                <a:ea typeface="Inter" pitchFamily="34" charset="-122"/>
-                <a:cs typeface="Inter" pitchFamily="34" charset="-120"/>
-              </a:rPr>
-              <a:t>Building context — Part 1 &amp; 2</a:t>
-            </a:r>
-            <a:endParaRPr lang="en-US" sz="1200" dirty="0"/>
-          </a:p>
-          <a:p>
-            <a:pPr marL="342900" indent="-342900">
-              <a:spcAft>
-                <a:spcPts val="400"/>
-              </a:spcAft>
-              <a:buSzPct val="100000"/>
-              <a:buChar char="•"/>
-            </a:pPr>
-            <a:r>
-              <a:rPr lang="en-US" sz="1200" dirty="0">
-                <a:solidFill>
-                  <a:srgbClr val="1F2937"/>
-                </a:solidFill>
-                <a:latin typeface="Inter" pitchFamily="34" charset="0"/>
-                <a:ea typeface="Inter" pitchFamily="34" charset="-122"/>
-                <a:cs typeface="Inter" pitchFamily="34" charset="-120"/>
-              </a:rPr>
-              <a:t>Claude Code for the non-developer</a:t>
-            </a:r>
-            <a:endParaRPr lang="en-US" sz="1200" dirty="0"/>
-          </a:p>
-          <a:p>
-            <a:pPr marL="342900" indent="-342900">
-              <a:spcAft>
-                <a:spcPts val="400"/>
-              </a:spcAft>
-              <a:buSzPct val="100000"/>
-              <a:buChar char="•"/>
-            </a:pPr>
-            <a:r>
-              <a:rPr lang="en-US" sz="1200" dirty="0">
-                <a:solidFill>
-                  <a:srgbClr val="1F2937"/>
-                </a:solidFill>
-                <a:latin typeface="Inter" pitchFamily="34" charset="0"/>
-                <a:ea typeface="Inter" pitchFamily="34" charset="-122"/>
-                <a:cs typeface="Inter" pitchFamily="34" charset="-120"/>
-              </a:rPr>
-              <a:t>Context Engineering Workflow Overview</a:t>
-            </a:r>
-            <a:endParaRPr lang="en-US" sz="1200" dirty="0"/>
-          </a:p>
-          <a:p>
-            <a:pPr marL="342900" indent="-342900">
-              <a:spcAft>
-                <a:spcPts val="400"/>
-              </a:spcAft>
-              <a:buSzPct val="100000"/>
-              <a:buChar char="•"/>
-            </a:pPr>
-            <a:r>
-              <a:rPr lang="en-US" sz="1200" dirty="0">
-                <a:solidFill>
-                  <a:srgbClr val="1F2937"/>
-                </a:solidFill>
-                <a:latin typeface="Inter" pitchFamily="34" charset="0"/>
-                <a:ea typeface="Inter" pitchFamily="34" charset="-122"/>
-                <a:cs typeface="Inter" pitchFamily="34" charset="-120"/>
-              </a:rPr>
-              <a:t>Inspire Leaders panel</a:t>
-            </a:r>
-            <a:endParaRPr lang="en-US" sz="1200" dirty="0"/>
-          </a:p>
-        </p:txBody>
-      </p:sp>
-      <p:sp>
-        <p:nvSpPr>
-          <p:cNvPr id="11" name="Shape 9"/>
-          <p:cNvSpPr/>
-          <p:nvPr/>
-        </p:nvSpPr>
-        <p:spPr>
-          <a:xfrm>
-            <a:off x="6309360" y="2560320"/>
-            <a:ext cx="5486400" cy="3383280"/>
-          </a:xfrm>
-          <a:prstGeom prst="rect">
-            <a:avLst/>
-          </a:prstGeom>
-          <a:solidFill>
-            <a:srgbClr val="0F1620"/>
-          </a:solidFill>
-          <a:ln/>
-        </p:spPr>
-        <p:txBody>
-          <a:bodyPr/>
-          <a:lstStyle/>
-          <a:p>
-            <a:endParaRPr lang="en-US"/>
-          </a:p>
-        </p:txBody>
-      </p:sp>
-      <p:sp>
-        <p:nvSpPr>
-          <p:cNvPr id="12" name="Shape 10"/>
-          <p:cNvSpPr/>
-          <p:nvPr/>
-        </p:nvSpPr>
-        <p:spPr>
-          <a:xfrm>
-            <a:off x="6309360" y="2560320"/>
-            <a:ext cx="73152" cy="3383280"/>
-          </a:xfrm>
-          <a:prstGeom prst="rect">
-            <a:avLst/>
-          </a:prstGeom>
-          <a:solidFill>
-            <a:srgbClr val="3FB6A8"/>
-          </a:solidFill>
-          <a:ln/>
-        </p:spPr>
-        <p:txBody>
-          <a:bodyPr/>
-          <a:lstStyle/>
-          <a:p>
-            <a:endParaRPr lang="en-US"/>
-          </a:p>
-        </p:txBody>
-      </p:sp>
-      <p:sp>
-        <p:nvSpPr>
-          <p:cNvPr id="13" name="Text 11"/>
-          <p:cNvSpPr/>
-          <p:nvPr/>
-        </p:nvSpPr>
-        <p:spPr>
-          <a:xfrm>
-            <a:off x="6720840" y="2926080"/>
-            <a:ext cx="3657600" cy="274320"/>
-          </a:xfrm>
-          <a:prstGeom prst="rect">
-            <a:avLst/>
-          </a:prstGeom>
-          <a:noFill/>
-          <a:ln/>
-        </p:spPr>
-        <p:txBody>
-          <a:bodyPr wrap="square" lIns="0" tIns="0" rIns="0" bIns="0" rtlCol="0" anchor="ctr"/>
-          <a:lstStyle/>
-          <a:p>
-            <a:pPr marL="0" indent="0">
-              <a:buNone/>
-            </a:pPr>
-            <a:r>
-              <a:rPr lang="en-US" sz="1000" b="1" kern="0" spc="600" dirty="0">
-                <a:solidFill>
-                  <a:srgbClr val="3FB6A8"/>
-                </a:solidFill>
-                <a:latin typeface="Inter" pitchFamily="34" charset="0"/>
-                <a:ea typeface="Inter" pitchFamily="34" charset="-122"/>
-                <a:cs typeface="Inter" pitchFamily="34" charset="-120"/>
-              </a:rPr>
-              <a:t>DAY 2 · MAY 8</a:t>
-            </a:r>
-            <a:endParaRPr lang="en-US" sz="1000" dirty="0"/>
-          </a:p>
-        </p:txBody>
-      </p:sp>
-      <p:sp>
-        <p:nvSpPr>
-          <p:cNvPr id="14" name="Text 12"/>
-          <p:cNvSpPr/>
-          <p:nvPr/>
-        </p:nvSpPr>
-        <p:spPr>
-          <a:xfrm>
-            <a:off x="6720840" y="3291840"/>
-            <a:ext cx="4846320" cy="640080"/>
-          </a:xfrm>
-          <a:prstGeom prst="rect">
-            <a:avLst/>
-          </a:prstGeom>
-          <a:noFill/>
-          <a:ln/>
-        </p:spPr>
-        <p:txBody>
-          <a:bodyPr wrap="square" lIns="0" tIns="0" rIns="0" bIns="0" rtlCol="0" anchor="ctr"/>
-          <a:lstStyle/>
-          <a:p>
-            <a:pPr marL="0" indent="0">
-              <a:buNone/>
-            </a:pPr>
-            <a:r>
-              <a:rPr lang="en-US" sz="3000" b="1" dirty="0">
-                <a:solidFill>
-                  <a:srgbClr val="FFFFFF"/>
-                </a:solidFill>
-                <a:latin typeface="Montserrat" pitchFamily="34" charset="0"/>
-                <a:ea typeface="Montserrat" pitchFamily="34" charset="-122"/>
-                <a:cs typeface="Montserrat" pitchFamily="34" charset="-120"/>
-              </a:rPr>
-              <a:t>Build Day</a:t>
-            </a:r>
-            <a:endParaRPr lang="en-US" sz="3000" dirty="0"/>
-          </a:p>
-        </p:txBody>
-      </p:sp>
-      <p:sp>
-        <p:nvSpPr>
-          <p:cNvPr id="15" name="Text 13"/>
-          <p:cNvSpPr/>
-          <p:nvPr/>
-        </p:nvSpPr>
-        <p:spPr>
-          <a:xfrm>
-            <a:off x="6720840" y="3931920"/>
-            <a:ext cx="4846320" cy="457200"/>
-          </a:xfrm>
-          <a:prstGeom prst="rect">
-            <a:avLst/>
-          </a:prstGeom>
-          <a:noFill/>
-          <a:ln/>
-        </p:spPr>
-        <p:txBody>
-          <a:bodyPr wrap="square" lIns="0" tIns="0" rIns="0" bIns="0" rtlCol="0" anchor="ctr"/>
-          <a:lstStyle/>
-          <a:p>
-            <a:pPr marL="0" indent="0">
-              <a:buNone/>
-            </a:pPr>
-            <a:r>
-              <a:rPr lang="en-US" sz="1300" i="1" dirty="0">
-                <a:solidFill>
-                  <a:srgbClr val="9AA3AF"/>
-                </a:solidFill>
-                <a:latin typeface="Inter" pitchFamily="34" charset="0"/>
-                <a:ea typeface="Inter" pitchFamily="34" charset="-122"/>
-                <a:cs typeface="Inter" pitchFamily="34" charset="-120"/>
-              </a:rPr>
-              <a:t>Apply it end-to-end: plan, build, and ship a Next.js app.</a:t>
-            </a:r>
-            <a:endParaRPr lang="en-US" sz="1300" dirty="0"/>
-          </a:p>
-        </p:txBody>
-      </p:sp>
-      <p:sp>
-        <p:nvSpPr>
-          <p:cNvPr id="16" name="Text 14"/>
-          <p:cNvSpPr/>
-          <p:nvPr/>
-        </p:nvSpPr>
-        <p:spPr>
-          <a:xfrm>
-            <a:off x="6720840" y="4480560"/>
-            <a:ext cx="4846320" cy="1371600"/>
-          </a:xfrm>
-          <a:prstGeom prst="rect">
-            <a:avLst/>
-          </a:prstGeom>
-          <a:noFill/>
-          <a:ln/>
-        </p:spPr>
-        <p:txBody>
-          <a:bodyPr wrap="square" lIns="0" tIns="0" rIns="0" bIns="0" rtlCol="0" anchor="ctr"/>
-          <a:lstStyle/>
-          <a:p>
-            <a:pPr marL="342900" indent="-342900">
-              <a:spcAft>
-                <a:spcPts val="400"/>
-              </a:spcAft>
-              <a:buSzPct val="100000"/>
-              <a:buChar char="•"/>
-            </a:pPr>
-            <a:r>
-              <a:rPr lang="en-US" sz="1200" dirty="0">
-                <a:solidFill>
-                  <a:srgbClr val="FFFFFF"/>
-                </a:solidFill>
-                <a:latin typeface="Inter" pitchFamily="34" charset="0"/>
-                <a:ea typeface="Inter" pitchFamily="34" charset="-122"/>
-                <a:cs typeface="Inter" pitchFamily="34" charset="-120"/>
-              </a:rPr>
-              <a:t>Choosing your Claude Code Adventure</a:t>
-            </a:r>
-            <a:endParaRPr lang="en-US" sz="1200" dirty="0"/>
-          </a:p>
-          <a:p>
-            <a:pPr marL="342900" indent="-342900">
-              <a:spcAft>
-                <a:spcPts val="400"/>
-              </a:spcAft>
-              <a:buSzPct val="100000"/>
-              <a:buChar char="•"/>
-            </a:pPr>
-            <a:r>
-              <a:rPr lang="en-US" sz="1200" dirty="0">
-                <a:solidFill>
-                  <a:srgbClr val="FFFFFF"/>
-                </a:solidFill>
-                <a:latin typeface="Inter" pitchFamily="34" charset="0"/>
-                <a:ea typeface="Inter" pitchFamily="34" charset="-122"/>
-                <a:cs typeface="Inter" pitchFamily="34" charset="-120"/>
-              </a:rPr>
-              <a:t>Next.js with Claude Code</a:t>
-            </a:r>
-            <a:endParaRPr lang="en-US" sz="1200" dirty="0"/>
-          </a:p>
-          <a:p>
-            <a:pPr marL="342900" indent="-342900">
-              <a:spcAft>
-                <a:spcPts val="400"/>
-              </a:spcAft>
-              <a:buSzPct val="100000"/>
-              <a:buChar char="•"/>
-            </a:pPr>
-            <a:r>
-              <a:rPr lang="en-US" sz="1200" dirty="0">
-                <a:solidFill>
-                  <a:srgbClr val="FFFFFF"/>
-                </a:solidFill>
-                <a:latin typeface="Inter" pitchFamily="34" charset="0"/>
-                <a:ea typeface="Inter" pitchFamily="34" charset="-122"/>
-                <a:cs typeface="Inter" pitchFamily="34" charset="-120"/>
-              </a:rPr>
-              <a:t>Build Block 1 — plan &amp; review</a:t>
-            </a:r>
-            <a:endParaRPr lang="en-US" sz="1200" dirty="0"/>
-          </a:p>
-          <a:p>
-            <a:pPr marL="342900" indent="-342900">
-              <a:spcAft>
-                <a:spcPts val="400"/>
-              </a:spcAft>
-              <a:buSzPct val="100000"/>
-              <a:buChar char="•"/>
-            </a:pPr>
-            <a:r>
-              <a:rPr lang="en-US" sz="1200" dirty="0">
-                <a:solidFill>
-                  <a:srgbClr val="FFFFFF"/>
-                </a:solidFill>
-                <a:latin typeface="Inter" pitchFamily="34" charset="0"/>
-                <a:ea typeface="Inter" pitchFamily="34" charset="-122"/>
-                <a:cs typeface="Inter" pitchFamily="34" charset="-120"/>
-              </a:rPr>
-              <a:t>Build Block 2 — code &amp; commit</a:t>
-            </a:r>
-            <a:endParaRPr lang="en-US" sz="1200" dirty="0"/>
-          </a:p>
-          <a:p>
-            <a:pPr marL="342900" indent="-342900">
-              <a:spcAft>
-                <a:spcPts val="400"/>
-              </a:spcAft>
-              <a:buSzPct val="100000"/>
-              <a:buChar char="•"/>
-            </a:pPr>
-            <a:r>
-              <a:rPr lang="en-US" sz="1200" dirty="0">
-                <a:solidFill>
-                  <a:srgbClr val="FFFFFF"/>
-                </a:solidFill>
-                <a:latin typeface="Inter" pitchFamily="34" charset="0"/>
-                <a:ea typeface="Inter" pitchFamily="34" charset="-122"/>
-                <a:cs typeface="Inter" pitchFamily="34" charset="-120"/>
-              </a:rPr>
-              <a:t>Deploying – ship it</a:t>
-            </a:r>
-            <a:endParaRPr lang="en-US" sz="1200" dirty="0"/>
-          </a:p>
-          <a:p>
-            <a:pPr marL="342900" indent="-342900">
-              <a:spcAft>
-                <a:spcPts val="400"/>
-              </a:spcAft>
-              <a:buSzPct val="100000"/>
-              <a:buChar char="•"/>
-            </a:pPr>
-            <a:r>
-              <a:rPr lang="en-US" sz="1200" dirty="0">
-                <a:solidFill>
-                  <a:srgbClr val="FFFFFF"/>
-                </a:solidFill>
-                <a:latin typeface="Inter" pitchFamily="34" charset="0"/>
-                <a:ea typeface="Inter" pitchFamily="34" charset="-122"/>
-                <a:cs typeface="Inter" pitchFamily="34" charset="-120"/>
-              </a:rPr>
-              <a:t>Show &amp; tell + closing</a:t>
-            </a:r>
-            <a:endParaRPr lang="en-US" sz="1200" dirty="0"/>
-          </a:p>
-        </p:txBody>
-      </p:sp>
-      <p:sp>
-        <p:nvSpPr>
-          <p:cNvPr id="17" name="Text 15"/>
-          <p:cNvSpPr/>
-          <p:nvPr/>
-        </p:nvSpPr>
-        <p:spPr>
-          <a:xfrm>
-            <a:off x="457200" y="6446520"/>
-            <a:ext cx="7315200" cy="274320"/>
-          </a:xfrm>
-          <a:prstGeom prst="rect">
-            <a:avLst/>
-          </a:prstGeom>
-          <a:noFill/>
-          <a:ln/>
-        </p:spPr>
-        <p:txBody>
-          <a:bodyPr wrap="square" lIns="0" tIns="0" rIns="0" bIns="0" rtlCol="0" anchor="ctr"/>
-          <a:lstStyle/>
-          <a:p>
-            <a:pPr marL="0" indent="0">
-              <a:buNone/>
-            </a:pPr>
-            <a:r>
-              <a:rPr lang="en-US" sz="900" kern="0" spc="300" dirty="0">
-                <a:solidFill>
-                  <a:srgbClr val="6B7280"/>
-                </a:solidFill>
-                <a:latin typeface="Inter" pitchFamily="34" charset="0"/>
-                <a:ea typeface="Inter" pitchFamily="34" charset="-122"/>
-                <a:cs typeface="Inter" pitchFamily="34" charset="-120"/>
-              </a:rPr>
-              <a:t>01 · WELCOME &amp; KICKOFF</a:t>
-            </a:r>
-            <a:endParaRPr lang="en-US" sz="900" dirty="0"/>
-          </a:p>
-        </p:txBody>
-      </p:sp>
-      <p:sp>
-        <p:nvSpPr>
-          <p:cNvPr id="18" name="Text 16"/>
-          <p:cNvSpPr/>
-          <p:nvPr/>
-        </p:nvSpPr>
-        <p:spPr>
-          <a:xfrm>
-            <a:off x="8076895" y="6446520"/>
-            <a:ext cx="3657600" cy="274320"/>
-          </a:xfrm>
-          <a:prstGeom prst="rect">
-            <a:avLst/>
-          </a:prstGeom>
-          <a:noFill/>
-          <a:ln/>
-        </p:spPr>
-        <p:txBody>
-          <a:bodyPr wrap="square" lIns="0" tIns="0" rIns="0" bIns="0" rtlCol="0" anchor="ctr"/>
-          <a:lstStyle/>
-          <a:p>
-            <a:pPr marL="0" indent="0" algn="r">
-              <a:buNone/>
-            </a:pPr>
-            <a:r>
-              <a:rPr lang="en-US" sz="900" kern="0" spc="300" dirty="0">
-                <a:solidFill>
-                  <a:srgbClr val="6B7280"/>
-                </a:solidFill>
-                <a:latin typeface="Inter" pitchFamily="34" charset="0"/>
-                <a:ea typeface="Inter" pitchFamily="34" charset="-122"/>
-                <a:cs typeface="Inter" pitchFamily="34" charset="-120"/>
-              </a:rPr>
-              <a:t>TWO DAYS · ONE ARC</a:t>
-            </a:r>
-            <a:endParaRPr lang="en-US" sz="900" dirty="0"/>
-          </a:p>
-        </p:txBody>
-      </p:sp>
-    </p:spTree>
-  </p:cSld>
-  <p:clrMapOvr>
-    <a:masterClrMapping/>
-  </p:clrMapOvr>
-</p:sld>
-</file>
-
 <file path=ppt/slides/slide6.xml><?xml version="1.0" encoding="utf-8"?>
-<p:sld xmlns:a="http://schemas.openxmlformats.org/drawingml/2006/main" xmlns:r="http://schemas.openxmlformats.org/officeDocument/2006/relationships" xmlns:p="http://schemas.openxmlformats.org/presentationml/2006/main">
-  <p:cSld name="Slide 6">
-    <p:bg>
-      <p:bgPr>
-        <a:solidFill>
-          <a:srgbClr val="0F1620"/>
-        </a:solidFill>
-        <a:effectLst/>
-      </p:bgPr>
-    </p:bg>
-    <p:spTree>
-      <p:nvGrpSpPr>
-        <p:cNvPr id="1" name=""/>
-        <p:cNvGrpSpPr/>
-        <p:nvPr/>
-      </p:nvGrpSpPr>
-      <p:grpSpPr>
-        <a:xfrm>
-          <a:off x="0" y="0"/>
-          <a:ext cx="0" cy="0"/>
-          <a:chOff x="0" y="0"/>
-          <a:chExt cx="0" cy="0"/>
-        </a:xfrm>
-      </p:grpSpPr>
-      <p:sp>
-        <p:nvSpPr>
-          <p:cNvPr id="2" name="Text 0"/>
-          <p:cNvSpPr/>
-          <p:nvPr/>
-        </p:nvSpPr>
-        <p:spPr>
-          <a:xfrm>
-            <a:off x="731520" y="640080"/>
-            <a:ext cx="5486400" cy="274320"/>
-          </a:xfrm>
-          <a:prstGeom prst="rect">
-            <a:avLst/>
-          </a:prstGeom>
-          <a:noFill/>
-          <a:ln/>
-        </p:spPr>
-        <p:txBody>
-          <a:bodyPr wrap="square" lIns="0" tIns="0" rIns="0" bIns="0" rtlCol="0" anchor="ctr"/>
-          <a:lstStyle/>
-          <a:p>
-            <a:pPr marL="0" indent="0">
-              <a:buNone/>
-            </a:pPr>
-            <a:r>
-              <a:rPr lang="en-US" sz="1000" b="1" kern="0" spc="600" dirty="0">
-                <a:solidFill>
-                  <a:srgbClr val="E89B3C"/>
-                </a:solidFill>
-                <a:latin typeface="Inter" pitchFamily="34" charset="0"/>
-                <a:ea typeface="Inter" pitchFamily="34" charset="-122"/>
-                <a:cs typeface="Inter" pitchFamily="34" charset="-120"/>
-              </a:rPr>
-              <a:t>WORKING DEFINITION</a:t>
-            </a:r>
-            <a:endParaRPr lang="en-US" sz="1000" dirty="0"/>
-          </a:p>
-        </p:txBody>
-      </p:sp>
-      <p:sp>
-        <p:nvSpPr>
-          <p:cNvPr id="3" name="Text 1"/>
-          <p:cNvSpPr/>
-          <p:nvPr/>
-        </p:nvSpPr>
-        <p:spPr>
-          <a:xfrm>
-            <a:off x="731520" y="1463040"/>
-            <a:ext cx="10972800" cy="1097280"/>
-          </a:xfrm>
-          <a:prstGeom prst="rect">
-            <a:avLst/>
-          </a:prstGeom>
-          <a:noFill/>
-          <a:ln/>
-        </p:spPr>
-        <p:txBody>
-          <a:bodyPr wrap="square" lIns="0" tIns="0" rIns="0" bIns="0" rtlCol="0" anchor="ctr"/>
-          <a:lstStyle/>
-          <a:p>
-            <a:pPr marL="0" indent="0">
-              <a:buNone/>
-            </a:pPr>
-            <a:r>
-              <a:rPr lang="en-US" sz="4400" b="1" dirty="0">
-                <a:solidFill>
-                  <a:srgbClr val="FFFFFF"/>
-                </a:solidFill>
-                <a:latin typeface="Montserrat" pitchFamily="34" charset="0"/>
-                <a:ea typeface="Montserrat" pitchFamily="34" charset="-122"/>
-                <a:cs typeface="Montserrat" pitchFamily="34" charset="-120"/>
-              </a:rPr>
-              <a:t>Context engineering is a </a:t>
-            </a:r>
-            <a:r>
-              <a:rPr lang="en-US" sz="4400" b="1" i="1" dirty="0">
-                <a:solidFill>
-                  <a:srgbClr val="3FB6A8"/>
-                </a:solidFill>
-                <a:latin typeface="Montserrat" pitchFamily="34" charset="0"/>
-                <a:ea typeface="Montserrat" pitchFamily="34" charset="-122"/>
-                <a:cs typeface="Montserrat" pitchFamily="34" charset="-120"/>
-              </a:rPr>
-              <a:t>discipline</a:t>
-            </a:r>
-            <a:r>
-              <a:rPr lang="en-US" sz="4400" b="1" dirty="0">
-                <a:solidFill>
-                  <a:srgbClr val="FFFFFF"/>
-                </a:solidFill>
-                <a:latin typeface="Montserrat" pitchFamily="34" charset="0"/>
-                <a:ea typeface="Montserrat" pitchFamily="34" charset="-122"/>
-                <a:cs typeface="Montserrat" pitchFamily="34" charset="-120"/>
-              </a:rPr>
-              <a:t>, not a prompt trick.</a:t>
-            </a:r>
-            <a:endParaRPr lang="en-US" sz="4400" dirty="0"/>
-          </a:p>
-        </p:txBody>
-      </p:sp>
-      <p:sp>
-        <p:nvSpPr>
-          <p:cNvPr id="4" name="Text 2"/>
-          <p:cNvSpPr/>
-          <p:nvPr/>
-        </p:nvSpPr>
-        <p:spPr>
-          <a:xfrm>
-            <a:off x="731520" y="2743200"/>
-            <a:ext cx="10972800" cy="1097280"/>
-          </a:xfrm>
-          <a:prstGeom prst="rect">
-            <a:avLst/>
-          </a:prstGeom>
-          <a:noFill/>
-          <a:ln/>
-        </p:spPr>
-        <p:txBody>
-          <a:bodyPr wrap="square" lIns="0" tIns="0" rIns="0" bIns="0" rtlCol="0" anchor="ctr"/>
-          <a:lstStyle/>
-          <a:p>
-            <a:pPr marL="0" indent="0">
-              <a:buNone/>
-            </a:pPr>
-            <a:r>
-              <a:rPr lang="en-US" sz="4400" b="1" dirty="0">
-                <a:solidFill>
-                  <a:srgbClr val="FFFFFF"/>
-                </a:solidFill>
-                <a:latin typeface="Montserrat" pitchFamily="34" charset="0"/>
-                <a:ea typeface="Montserrat" pitchFamily="34" charset="-122"/>
-                <a:cs typeface="Montserrat" pitchFamily="34" charset="-120"/>
-              </a:rPr>
-              <a:t>What you put in front of the model</a:t>
-            </a:r>
-            <a:r>
-              <a:rPr lang="en-US" sz="4400" b="1" i="1" dirty="0">
-                <a:solidFill>
-                  <a:srgbClr val="E89B3C"/>
-                </a:solidFill>
-                <a:latin typeface="Montserrat" pitchFamily="34" charset="0"/>
-                <a:ea typeface="Montserrat" pitchFamily="34" charset="-122"/>
-                <a:cs typeface="Montserrat" pitchFamily="34" charset="-120"/>
-              </a:rPr>
-              <a:t> is the whole game.</a:t>
-            </a:r>
-            <a:endParaRPr lang="en-US" sz="4400" dirty="0"/>
-          </a:p>
-        </p:txBody>
-      </p:sp>
-      <p:sp>
-        <p:nvSpPr>
-          <p:cNvPr id="5" name="Shape 3"/>
-          <p:cNvSpPr/>
-          <p:nvPr/>
-        </p:nvSpPr>
-        <p:spPr>
-          <a:xfrm>
-            <a:off x="731520" y="4297680"/>
-            <a:ext cx="548640" cy="36576"/>
-          </a:xfrm>
-          <a:prstGeom prst="rect">
-            <a:avLst/>
-          </a:prstGeom>
-          <a:solidFill>
-            <a:srgbClr val="3FB6A8"/>
-          </a:solidFill>
-          <a:ln/>
-        </p:spPr>
-        <p:txBody>
-          <a:bodyPr/>
-          <a:lstStyle/>
-          <a:p>
-            <a:endParaRPr lang="en-US"/>
-          </a:p>
-        </p:txBody>
-      </p:sp>
-      <p:sp>
-        <p:nvSpPr>
-          <p:cNvPr id="6" name="Text 4"/>
-          <p:cNvSpPr/>
-          <p:nvPr/>
-        </p:nvSpPr>
-        <p:spPr>
-          <a:xfrm>
-            <a:off x="731520" y="4480560"/>
-            <a:ext cx="10058400" cy="548640"/>
-          </a:xfrm>
-          <a:prstGeom prst="rect">
-            <a:avLst/>
-          </a:prstGeom>
-          <a:noFill/>
-          <a:ln/>
-        </p:spPr>
-        <p:txBody>
-          <a:bodyPr wrap="square" lIns="0" tIns="0" rIns="0" bIns="0" rtlCol="0" anchor="ctr"/>
-          <a:lstStyle/>
-          <a:p>
-            <a:pPr marL="0" indent="0">
-              <a:buNone/>
-            </a:pPr>
-            <a:r>
-              <a:rPr lang="en-US" sz="1800" i="1" dirty="0">
-                <a:solidFill>
-                  <a:srgbClr val="9AA3AF"/>
-                </a:solidFill>
-                <a:latin typeface="Montserrat" pitchFamily="34" charset="0"/>
-                <a:ea typeface="Montserrat" pitchFamily="34" charset="-122"/>
-                <a:cs typeface="Montserrat" pitchFamily="34" charset="-120"/>
-              </a:rPr>
-              <a:t>Day 1 is learning the craft. Day 2 is using it to ship.</a:t>
-            </a:r>
-            <a:endParaRPr lang="en-US" sz="1800" dirty="0"/>
-          </a:p>
-        </p:txBody>
-      </p:sp>
-      <p:sp>
-        <p:nvSpPr>
-          <p:cNvPr id="7" name="Text 5"/>
-          <p:cNvSpPr/>
-          <p:nvPr/>
-        </p:nvSpPr>
-        <p:spPr>
-          <a:xfrm>
-            <a:off x="457200" y="6446520"/>
-            <a:ext cx="7315200" cy="274320"/>
-          </a:xfrm>
-          <a:prstGeom prst="rect">
-            <a:avLst/>
-          </a:prstGeom>
-          <a:noFill/>
-          <a:ln/>
-        </p:spPr>
-        <p:txBody>
-          <a:bodyPr wrap="square" lIns="0" tIns="0" rIns="0" bIns="0" rtlCol="0" anchor="ctr"/>
-          <a:lstStyle/>
-          <a:p>
-            <a:pPr marL="0" indent="0">
-              <a:buNone/>
-            </a:pPr>
-            <a:r>
-              <a:rPr lang="en-US" sz="900" kern="0" spc="300" dirty="0">
-                <a:solidFill>
-                  <a:srgbClr val="9AA3AF"/>
-                </a:solidFill>
-                <a:latin typeface="Inter" pitchFamily="34" charset="0"/>
-                <a:ea typeface="Inter" pitchFamily="34" charset="-122"/>
-                <a:cs typeface="Inter" pitchFamily="34" charset="-120"/>
-              </a:rPr>
-              <a:t>01 · WELCOME &amp; KICKOFF</a:t>
-            </a:r>
-            <a:endParaRPr lang="en-US" sz="900" dirty="0"/>
-          </a:p>
-        </p:txBody>
-      </p:sp>
-      <p:sp>
-        <p:nvSpPr>
-          <p:cNvPr id="8" name="Text 6"/>
-          <p:cNvSpPr/>
-          <p:nvPr/>
-        </p:nvSpPr>
-        <p:spPr>
-          <a:xfrm>
-            <a:off x="8076895" y="6446520"/>
-            <a:ext cx="3657600" cy="274320"/>
-          </a:xfrm>
-          <a:prstGeom prst="rect">
-            <a:avLst/>
-          </a:prstGeom>
-          <a:noFill/>
-          <a:ln/>
-        </p:spPr>
-        <p:txBody>
-          <a:bodyPr wrap="square" lIns="0" tIns="0" rIns="0" bIns="0" rtlCol="0" anchor="ctr"/>
-          <a:lstStyle/>
-          <a:p>
-            <a:pPr marL="0" indent="0" algn="r">
-              <a:buNone/>
-            </a:pPr>
-            <a:r>
-              <a:rPr lang="en-US" sz="900" kern="0" spc="300" dirty="0">
-                <a:solidFill>
-                  <a:srgbClr val="9AA3AF"/>
-                </a:solidFill>
-                <a:latin typeface="Inter" pitchFamily="34" charset="0"/>
-                <a:ea typeface="Inter" pitchFamily="34" charset="-122"/>
-                <a:cs typeface="Inter" pitchFamily="34" charset="-120"/>
-              </a:rPr>
-              <a:t>WHAT IT IS</a:t>
-            </a:r>
-            <a:endParaRPr lang="en-US" sz="900" dirty="0"/>
-          </a:p>
-        </p:txBody>
-      </p:sp>
-    </p:spTree>
-  </p:cSld>
-  <p:clrMapOvr>
-    <a:masterClrMapping/>
-  </p:clrMapOvr>
-</p:sld>
-</file>
-
-<file path=ppt/slides/slide7.xml><?xml version="1.0" encoding="utf-8"?>
 <p:sld xmlns:a="http://schemas.openxmlformats.org/drawingml/2006/main" xmlns:r="http://schemas.openxmlformats.org/officeDocument/2006/relationships" xmlns:p="http://schemas.openxmlformats.org/presentationml/2006/main">
   <p:cSld name="Slide 7">
     <p:bg>
@@ -6207,12 +7911,18 @@
 </p:sld>
 </file>
 
-<file path=ppt/slides/slide8.xml><?xml version="1.0" encoding="utf-8"?>
+<file path=ppt/slides/slide7.xml><?xml version="1.0" encoding="utf-8"?>
 <p:sld xmlns:a="http://schemas.openxmlformats.org/drawingml/2006/main" xmlns:r="http://schemas.openxmlformats.org/officeDocument/2006/relationships" xmlns:p="http://schemas.openxmlformats.org/presentationml/2006/main">
   <p:cSld>
     <p:spTree>
       <p:nvGrpSpPr>
-        <p:cNvPr id="1" name="Shape 27"/>
+        <p:cNvPr id="1" name="Shape 27">
+          <a:extLst>
+            <a:ext uri="{FF2B5EF4-FFF2-40B4-BE49-F238E27FC236}">
+              <a16:creationId xmlns:a16="http://schemas.microsoft.com/office/drawing/2014/main" id="{ABB0E90E-2383-D0E9-EBFC-5061CC1514F6}"/>
+            </a:ext>
+          </a:extLst>
+        </p:cNvPr>
         <p:cNvGrpSpPr/>
         <p:nvPr/>
       </p:nvGrpSpPr>
@@ -6226,7 +7936,13 @@
       </p:grpSpPr>
       <p:sp>
         <p:nvSpPr>
-          <p:cNvPr id="28" name="Google Shape;28;p2"/>
+          <p:cNvPr id="28" name="Google Shape;28;p2">
+            <a:extLst>
+              <a:ext uri="{FF2B5EF4-FFF2-40B4-BE49-F238E27FC236}">
+                <a16:creationId xmlns:a16="http://schemas.microsoft.com/office/drawing/2014/main" id="{7BA25ACF-C658-DF7C-ED1E-BBAA36C10159}"/>
+              </a:ext>
+            </a:extLst>
+          </p:cNvPr>
           <p:cNvSpPr/>
           <p:nvPr/>
         </p:nvSpPr>
@@ -6265,39 +7981,15 @@
           </a:p>
         </p:txBody>
       </p:sp>
-      <p:pic>
-        <p:nvPicPr>
-          <p:cNvPr id="29" name="Avatar"/>
-          <p:cNvPicPr>
-            <a:picLocks noChangeAspect="1"/>
-          </p:cNvPicPr>
-          <p:nvPr/>
-        </p:nvPicPr>
-        <p:blipFill>
-          <a:blip r:embed="rId3"/>
-          <a:srcRect/>
-          <a:stretch>
-            <a:fillRect/>
-          </a:stretch>
-        </p:blipFill>
-        <p:spPr>
-          <a:xfrm>
-            <a:off x="863600" y="2006600"/>
-            <a:ext cx="4114800" cy="4114800"/>
-          </a:xfrm>
-          <a:prstGeom prst="roundRect">
-            <a:avLst>
-              <a:gd name="adj" fmla="val 2778"/>
-            </a:avLst>
-          </a:prstGeom>
-          <a:ln>
-            <a:noFill/>
-          </a:ln>
-        </p:spPr>
-      </p:pic>
-      <p:sp>
-        <p:nvSpPr>
-          <p:cNvPr id="30" name="Google Shape;30;p2"/>
+      <p:sp>
+        <p:nvSpPr>
+          <p:cNvPr id="30" name="Google Shape;30;p2">
+            <a:extLst>
+              <a:ext uri="{FF2B5EF4-FFF2-40B4-BE49-F238E27FC236}">
+                <a16:creationId xmlns:a16="http://schemas.microsoft.com/office/drawing/2014/main" id="{2A95754E-D88B-CF34-E6B1-5F39C8D841A7}"/>
+              </a:ext>
+            </a:extLst>
+          </p:cNvPr>
           <p:cNvSpPr/>
           <p:nvPr/>
         </p:nvSpPr>
@@ -6327,7 +8019,7 @@
               <a:buSzPts val="1800"/>
             </a:pPr>
             <a:r>
-              <a:rPr lang="en-US" sz="1200">
+              <a:rPr lang="en-US" sz="1200" dirty="0">
                 <a:solidFill>
                   <a:srgbClr val="F58220"/>
                 </a:solidFill>
@@ -6336,9 +8028,9 @@
                 <a:cs typeface="JetBrains Mono"/>
                 <a:sym typeface="JetBrains Mono"/>
               </a:rPr>
-              <a:t>SPEAKER</a:t>
-            </a:r>
-            <a:endParaRPr sz="1200">
+              <a:t>DEVO</a:t>
+            </a:r>
+            <a:endParaRPr sz="1200" dirty="0">
               <a:solidFill>
                 <a:schemeClr val="dk1"/>
               </a:solidFill>
@@ -6352,7 +8044,13 @@
       </p:sp>
       <p:sp>
         <p:nvSpPr>
-          <p:cNvPr id="31" name="Google Shape;31;p2"/>
+          <p:cNvPr id="31" name="Google Shape;31;p2">
+            <a:extLst>
+              <a:ext uri="{FF2B5EF4-FFF2-40B4-BE49-F238E27FC236}">
+                <a16:creationId xmlns:a16="http://schemas.microsoft.com/office/drawing/2014/main" id="{AC20D631-434B-4FE9-7883-0B1F9D570371}"/>
+              </a:ext>
+            </a:extLst>
+          </p:cNvPr>
           <p:cNvSpPr/>
           <p:nvPr/>
         </p:nvSpPr>
@@ -6382,7 +8080,7 @@
               <a:buSzPts val="7200"/>
             </a:pPr>
             <a:r>
-              <a:rPr lang="en-US" sz="4800" b="1">
+              <a:rPr lang="en-US" sz="4800" b="1" dirty="0">
                 <a:solidFill>
                   <a:srgbClr val="2A2D38"/>
                 </a:solidFill>
@@ -6391,9 +8089,9 @@
                 <a:cs typeface="Montserrat"/>
                 <a:sym typeface="Montserrat"/>
               </a:rPr>
-              <a:t>Chris Kehayias</a:t>
-            </a:r>
-            <a:endParaRPr sz="4800">
+              <a:t>Dean Lisenby</a:t>
+            </a:r>
+            <a:endParaRPr sz="4800" dirty="0">
               <a:solidFill>
                 <a:schemeClr val="dk1"/>
               </a:solidFill>
@@ -6407,7 +8105,13 @@
       </p:sp>
       <p:sp>
         <p:nvSpPr>
-          <p:cNvPr id="32" name="Google Shape;32;p2"/>
+          <p:cNvPr id="32" name="Google Shape;32;p2">
+            <a:extLst>
+              <a:ext uri="{FF2B5EF4-FFF2-40B4-BE49-F238E27FC236}">
+                <a16:creationId xmlns:a16="http://schemas.microsoft.com/office/drawing/2014/main" id="{D021A6F7-FE30-CCFB-F999-A5E5D9F7EF9F}"/>
+              </a:ext>
+            </a:extLst>
+          </p:cNvPr>
           <p:cNvSpPr/>
           <p:nvPr/>
         </p:nvSpPr>
@@ -6440,7 +8144,7 @@
               <a:buSzPts val="2400"/>
             </a:pPr>
             <a:r>
-              <a:rPr lang="en-US" sz="1600" b="1">
+              <a:rPr lang="en-US" sz="1600" b="1" dirty="0">
                 <a:solidFill>
                   <a:srgbClr val="F58220"/>
                 </a:solidFill>
@@ -6449,9 +8153,9 @@
                 <a:cs typeface="Montserrat"/>
                 <a:sym typeface="Montserrat"/>
               </a:rPr>
-              <a:t>SVP, AI &amp; INNOVATION – ACS Technologies</a:t>
-            </a:r>
-            <a:endParaRPr sz="1600">
+              <a:t>Chief Ventures Officer – ACS Technologies</a:t>
+            </a:r>
+            <a:endParaRPr sz="1600" dirty="0">
               <a:solidFill>
                 <a:schemeClr val="dk1"/>
               </a:solidFill>
@@ -6464,6 +8168,11 @@
         </p:txBody>
       </p:sp>
     </p:spTree>
+    <p:extLst>
+      <p:ext uri="{BB962C8B-B14F-4D97-AF65-F5344CB8AC3E}">
+        <p14:creationId xmlns:p14="http://schemas.microsoft.com/office/powerpoint/2010/main" val="384232578"/>
+      </p:ext>
+    </p:extLst>
   </p:cSld>
   <p:clrMapOvr>
     <a:masterClrMapping/>
@@ -6471,9 +8180,9 @@
 </p:sld>
 </file>
 
-<file path=ppt/slides/slide9.xml><?xml version="1.0" encoding="utf-8"?>
+<file path=ppt/slides/slide8.xml><?xml version="1.0" encoding="utf-8"?>
 <p:sld xmlns:a="http://schemas.openxmlformats.org/drawingml/2006/main" xmlns:r="http://schemas.openxmlformats.org/officeDocument/2006/relationships" xmlns:p="http://schemas.openxmlformats.org/presentationml/2006/main">
-  <p:cSld name="Slide 8">
+  <p:cSld>
     <p:bg>
       <p:bgPr>
         <a:solidFill>
@@ -6484,7 +8193,13 @@
     </p:bg>
     <p:spTree>
       <p:nvGrpSpPr>
-        <p:cNvPr id="1" name=""/>
+        <p:cNvPr id="1" name="">
+          <a:extLst>
+            <a:ext uri="{FF2B5EF4-FFF2-40B4-BE49-F238E27FC236}">
+              <a16:creationId xmlns:a16="http://schemas.microsoft.com/office/drawing/2014/main" id="{920C94E1-AC68-4FE9-8849-0180E2E73A3A}"/>
+            </a:ext>
+          </a:extLst>
+        </p:cNvPr>
         <p:cNvGrpSpPr/>
         <p:nvPr/>
       </p:nvGrpSpPr>
@@ -6498,7 +8213,13 @@
       </p:grpSpPr>
       <p:sp>
         <p:nvSpPr>
-          <p:cNvPr id="2" name="Text 0"/>
+          <p:cNvPr id="2" name="Text 0">
+            <a:extLst>
+              <a:ext uri="{FF2B5EF4-FFF2-40B4-BE49-F238E27FC236}">
+                <a16:creationId xmlns:a16="http://schemas.microsoft.com/office/drawing/2014/main" id="{521AD94F-065F-44F9-1E3A-9EBD1B5E7304}"/>
+              </a:ext>
+            </a:extLst>
+          </p:cNvPr>
           <p:cNvSpPr/>
           <p:nvPr/>
         </p:nvSpPr>
@@ -6529,7 +8250,7 @@
                 <a:ea typeface="Inter" pitchFamily="34" charset="-122"/>
                 <a:cs typeface="Inter" pitchFamily="34" charset="-120"/>
               </a:rPr>
-              <a:t>SETUP CHECK · 8 MIN</a:t>
+              <a:t>LOGISTICS</a:t>
             </a:r>
             <a:endParaRPr lang="en-US" sz="1000" dirty="0"/>
           </a:p>
@@ -6537,14 +8258,20 @@
       </p:sp>
       <p:sp>
         <p:nvSpPr>
-          <p:cNvPr id="3" name="Text 1"/>
-          <p:cNvSpPr/>
-          <p:nvPr/>
-        </p:nvSpPr>
-        <p:spPr>
-          <a:xfrm>
-            <a:off x="548640" y="914400"/>
-            <a:ext cx="10972800" cy="822960"/>
+          <p:cNvPr id="3" name="Text 1">
+            <a:extLst>
+              <a:ext uri="{FF2B5EF4-FFF2-40B4-BE49-F238E27FC236}">
+                <a16:creationId xmlns:a16="http://schemas.microsoft.com/office/drawing/2014/main" id="{B76332B8-A1C9-F5BE-8CCB-572D8EF3860E}"/>
+              </a:ext>
+            </a:extLst>
+          </p:cNvPr>
+          <p:cNvSpPr/>
+          <p:nvPr/>
+        </p:nvSpPr>
+        <p:spPr>
+          <a:xfrm>
+            <a:off x="1066800" y="3223260"/>
+            <a:ext cx="10058400" cy="822960"/>
           </a:xfrm>
           <a:prstGeom prst="rect">
             <a:avLst/>
@@ -6556,11 +8283,11 @@
           <a:bodyPr wrap="square" lIns="0" tIns="0" rIns="0" bIns="0" rtlCol="0" anchor="ctr"/>
           <a:lstStyle/>
           <a:p>
-            <a:pPr marL="0" indent="0">
-              <a:buNone/>
-            </a:pPr>
-            <a:r>
-              <a:rPr lang="en-US" sz="3400" b="1" dirty="0">
+            <a:pPr marL="0" indent="0" algn="ctr">
+              <a:buNone/>
+            </a:pPr>
+            <a:r>
+              <a:rPr lang="en-US" sz="7200" b="1" dirty="0">
                 <a:solidFill>
                   <a:srgbClr val="1F2937"/>
                 </a:solidFill>
@@ -6568,157 +8295,28 @@
                 <a:ea typeface="Montserrat" pitchFamily="34" charset="-122"/>
                 <a:cs typeface="Montserrat" pitchFamily="34" charset="-120"/>
               </a:rPr>
-              <a:t>Run these three commands together.</a:t>
-            </a:r>
-            <a:endParaRPr lang="en-US" sz="3400" dirty="0"/>
-          </a:p>
-        </p:txBody>
-      </p:sp>
-      <p:sp>
-        <p:nvSpPr>
-          <p:cNvPr id="5" name="Shape 3"/>
-          <p:cNvSpPr/>
-          <p:nvPr/>
-        </p:nvSpPr>
-        <p:spPr>
-          <a:xfrm>
-            <a:off x="548640" y="2468880"/>
-            <a:ext cx="7315200" cy="3657600"/>
-          </a:xfrm>
-          <a:prstGeom prst="rect">
-            <a:avLst/>
-          </a:prstGeom>
-          <a:solidFill>
-            <a:srgbClr val="0F1620"/>
-          </a:solidFill>
-          <a:ln/>
-        </p:spPr>
-        <p:txBody>
-          <a:bodyPr/>
-          <a:lstStyle/>
-          <a:p>
-            <a:endParaRPr lang="en-US"/>
-          </a:p>
-        </p:txBody>
-      </p:sp>
-      <p:sp>
-        <p:nvSpPr>
-          <p:cNvPr id="6" name="Shape 4"/>
-          <p:cNvSpPr/>
-          <p:nvPr/>
-        </p:nvSpPr>
-        <p:spPr>
-          <a:xfrm>
-            <a:off x="548640" y="2468880"/>
-            <a:ext cx="7315200" cy="365760"/>
-          </a:xfrm>
-          <a:prstGeom prst="rect">
-            <a:avLst/>
-          </a:prstGeom>
-          <a:solidFill>
-            <a:srgbClr val="1B2533"/>
-          </a:solidFill>
-          <a:ln/>
-        </p:spPr>
-        <p:txBody>
-          <a:bodyPr/>
-          <a:lstStyle/>
-          <a:p>
-            <a:endParaRPr lang="en-US"/>
-          </a:p>
-        </p:txBody>
-      </p:sp>
-      <p:sp>
-        <p:nvSpPr>
-          <p:cNvPr id="7" name="Shape 5"/>
-          <p:cNvSpPr/>
-          <p:nvPr/>
-        </p:nvSpPr>
-        <p:spPr>
-          <a:xfrm>
-            <a:off x="731520" y="2587752"/>
-            <a:ext cx="137160" cy="137160"/>
-          </a:xfrm>
-          <a:prstGeom prst="ellipse">
-            <a:avLst/>
-          </a:prstGeom>
-          <a:solidFill>
-            <a:srgbClr val="FF6058"/>
-          </a:solidFill>
-          <a:ln/>
-        </p:spPr>
-        <p:txBody>
-          <a:bodyPr/>
-          <a:lstStyle/>
-          <a:p>
-            <a:endParaRPr lang="en-US"/>
-          </a:p>
-        </p:txBody>
-      </p:sp>
-      <p:sp>
-        <p:nvSpPr>
-          <p:cNvPr id="8" name="Shape 6"/>
-          <p:cNvSpPr/>
-          <p:nvPr/>
-        </p:nvSpPr>
-        <p:spPr>
-          <a:xfrm>
-            <a:off x="960120" y="2587752"/>
-            <a:ext cx="137160" cy="137160"/>
-          </a:xfrm>
-          <a:prstGeom prst="ellipse">
-            <a:avLst/>
-          </a:prstGeom>
-          <a:solidFill>
-            <a:srgbClr val="FFBD2E"/>
-          </a:solidFill>
-          <a:ln/>
-        </p:spPr>
-        <p:txBody>
-          <a:bodyPr/>
-          <a:lstStyle/>
-          <a:p>
-            <a:endParaRPr lang="en-US"/>
-          </a:p>
-        </p:txBody>
-      </p:sp>
-      <p:sp>
-        <p:nvSpPr>
-          <p:cNvPr id="9" name="Shape 7"/>
-          <p:cNvSpPr/>
-          <p:nvPr/>
-        </p:nvSpPr>
-        <p:spPr>
-          <a:xfrm>
-            <a:off x="1188720" y="2587752"/>
-            <a:ext cx="137160" cy="137160"/>
-          </a:xfrm>
-          <a:prstGeom prst="ellipse">
-            <a:avLst/>
-          </a:prstGeom>
-          <a:solidFill>
-            <a:srgbClr val="27CA40"/>
-          </a:solidFill>
-          <a:ln/>
-        </p:spPr>
-        <p:txBody>
-          <a:bodyPr/>
-          <a:lstStyle/>
-          <a:p>
-            <a:endParaRPr lang="en-US"/>
-          </a:p>
-        </p:txBody>
-      </p:sp>
-      <p:sp>
-        <p:nvSpPr>
-          <p:cNvPr id="10" name="Text 8"/>
-          <p:cNvSpPr/>
-          <p:nvPr/>
-        </p:nvSpPr>
-        <p:spPr>
-          <a:xfrm>
-            <a:off x="1920240" y="2514600"/>
-            <a:ext cx="4572000" cy="274320"/>
+              <a:t>Devo Time</a:t>
+            </a:r>
+            <a:endParaRPr lang="en-US" sz="7200" dirty="0"/>
+          </a:p>
+        </p:txBody>
+      </p:sp>
+      <p:sp>
+        <p:nvSpPr>
+          <p:cNvPr id="24" name="Text 22">
+            <a:extLst>
+              <a:ext uri="{FF2B5EF4-FFF2-40B4-BE49-F238E27FC236}">
+                <a16:creationId xmlns:a16="http://schemas.microsoft.com/office/drawing/2014/main" id="{32F7ECB8-2F7E-061F-B195-DAF5CF5B0140}"/>
+              </a:ext>
+            </a:extLst>
+          </p:cNvPr>
+          <p:cNvSpPr/>
+          <p:nvPr/>
+        </p:nvSpPr>
+        <p:spPr>
+          <a:xfrm>
+            <a:off x="457200" y="6446520"/>
+            <a:ext cx="7315200" cy="274320"/>
           </a:xfrm>
           <a:prstGeom prst="rect">
             <a:avLst/>
@@ -6730,432 +8328,40 @@
           <a:bodyPr wrap="square" lIns="0" tIns="0" rIns="0" bIns="0" rtlCol="0" anchor="ctr"/>
           <a:lstStyle/>
           <a:p>
-            <a:pPr marL="0" indent="0" algn="ctr">
-              <a:buNone/>
-            </a:pPr>
-            <a:r>
-              <a:rPr lang="en-US" sz="1000" dirty="0">
-                <a:solidFill>
-                  <a:srgbClr val="9AA3AF"/>
-                </a:solidFill>
-                <a:latin typeface="JetBrains Mono" pitchFamily="34" charset="0"/>
-                <a:ea typeface="JetBrains Mono" pitchFamily="34" charset="-122"/>
-                <a:cs typeface="JetBrains Mono" pitchFamily="34" charset="-120"/>
-              </a:rPr>
-              <a:t>prerequisites · check</a:t>
-            </a:r>
-            <a:endParaRPr lang="en-US" sz="1000" dirty="0"/>
-          </a:p>
-        </p:txBody>
-      </p:sp>
-      <p:sp>
-        <p:nvSpPr>
-          <p:cNvPr id="11" name="Text 9"/>
-          <p:cNvSpPr/>
-          <p:nvPr/>
-        </p:nvSpPr>
-        <p:spPr>
-          <a:xfrm>
-            <a:off x="914400" y="3017520"/>
-            <a:ext cx="6583680" cy="365760"/>
-          </a:xfrm>
-          <a:prstGeom prst="rect">
-            <a:avLst/>
-          </a:prstGeom>
-          <a:noFill/>
-          <a:ln/>
-        </p:spPr>
-        <p:txBody>
-          <a:bodyPr wrap="square" lIns="0" tIns="0" rIns="0" bIns="0" rtlCol="0" anchor="ctr"/>
-          <a:lstStyle/>
-          <a:p>
             <a:pPr marL="0" indent="0">
               <a:buNone/>
             </a:pPr>
             <a:r>
-              <a:rPr lang="en-US" sz="1800" b="1" dirty="0">
-                <a:solidFill>
-                  <a:srgbClr val="3FB6A8"/>
-                </a:solidFill>
-                <a:latin typeface="JetBrains Mono" pitchFamily="34" charset="0"/>
-                <a:ea typeface="JetBrains Mono" pitchFamily="34" charset="-122"/>
-                <a:cs typeface="JetBrains Mono" pitchFamily="34" charset="-120"/>
-              </a:rPr>
-              <a:t>$ </a:t>
-            </a:r>
-            <a:r>
-              <a:rPr lang="en-US" sz="1800" b="1" dirty="0">
-                <a:solidFill>
-                  <a:srgbClr val="FFFFFF"/>
-                </a:solidFill>
-                <a:latin typeface="JetBrains Mono" pitchFamily="34" charset="0"/>
-                <a:ea typeface="JetBrains Mono" pitchFamily="34" charset="-122"/>
-                <a:cs typeface="JetBrains Mono" pitchFamily="34" charset="-120"/>
-              </a:rPr>
-              <a:t>claude --version</a:t>
-            </a:r>
-            <a:endParaRPr lang="en-US" sz="1800" dirty="0"/>
-          </a:p>
-        </p:txBody>
-      </p:sp>
-      <p:sp>
-        <p:nvSpPr>
-          <p:cNvPr id="12" name="Text 10"/>
-          <p:cNvSpPr/>
-          <p:nvPr/>
-        </p:nvSpPr>
-        <p:spPr>
-          <a:xfrm>
-            <a:off x="1097280" y="3429000"/>
-            <a:ext cx="6400800" cy="365760"/>
-          </a:xfrm>
-          <a:prstGeom prst="rect">
-            <a:avLst/>
-          </a:prstGeom>
-          <a:noFill/>
-          <a:ln/>
-        </p:spPr>
-        <p:txBody>
-          <a:bodyPr wrap="square" lIns="0" tIns="0" rIns="0" bIns="0" rtlCol="0" anchor="ctr"/>
-          <a:lstStyle/>
-          <a:p>
-            <a:pPr marL="0" indent="0">
-              <a:buNone/>
-            </a:pPr>
-            <a:r>
-              <a:rPr lang="en-US" sz="1300" b="1" dirty="0">
-                <a:solidFill>
-                  <a:srgbClr val="3FB6A8"/>
-                </a:solidFill>
-                <a:latin typeface="JetBrains Mono" pitchFamily="34" charset="0"/>
-                <a:ea typeface="JetBrains Mono" pitchFamily="34" charset="-122"/>
-                <a:cs typeface="JetBrains Mono" pitchFamily="34" charset="-120"/>
-              </a:rPr>
-              <a:t>✓ </a:t>
-            </a:r>
-            <a:r>
-              <a:rPr lang="en-US" sz="1300" dirty="0">
-                <a:solidFill>
-                  <a:srgbClr val="9AA3AF"/>
-                </a:solidFill>
-                <a:latin typeface="JetBrains Mono" pitchFamily="34" charset="0"/>
-                <a:ea typeface="JetBrains Mono" pitchFamily="34" charset="-122"/>
-                <a:cs typeface="JetBrains Mono" pitchFamily="34" charset="-120"/>
-              </a:rPr>
-              <a:t>claude code 1.x · ready</a:t>
-            </a:r>
-            <a:endParaRPr lang="en-US" sz="1300" dirty="0"/>
-          </a:p>
-        </p:txBody>
-      </p:sp>
-      <p:sp>
-        <p:nvSpPr>
-          <p:cNvPr id="13" name="Text 11"/>
-          <p:cNvSpPr/>
-          <p:nvPr/>
-        </p:nvSpPr>
-        <p:spPr>
-          <a:xfrm>
-            <a:off x="914400" y="3977640"/>
-            <a:ext cx="6583680" cy="365760"/>
-          </a:xfrm>
-          <a:prstGeom prst="rect">
-            <a:avLst/>
-          </a:prstGeom>
-          <a:noFill/>
-          <a:ln/>
-        </p:spPr>
-        <p:txBody>
-          <a:bodyPr wrap="square" lIns="0" tIns="0" rIns="0" bIns="0" rtlCol="0" anchor="ctr"/>
-          <a:lstStyle/>
-          <a:p>
-            <a:pPr marL="0" indent="0">
-              <a:buNone/>
-            </a:pPr>
-            <a:r>
-              <a:rPr lang="en-US" sz="1800" b="1" dirty="0">
-                <a:solidFill>
-                  <a:srgbClr val="3FB6A8"/>
-                </a:solidFill>
-                <a:latin typeface="JetBrains Mono" pitchFamily="34" charset="0"/>
-                <a:ea typeface="JetBrains Mono" pitchFamily="34" charset="-122"/>
-                <a:cs typeface="JetBrains Mono" pitchFamily="34" charset="-120"/>
-              </a:rPr>
-              <a:t>$ </a:t>
-            </a:r>
-            <a:r>
-              <a:rPr lang="en-US" sz="1800" b="1" dirty="0">
-                <a:solidFill>
-                  <a:srgbClr val="FFFFFF"/>
-                </a:solidFill>
-                <a:latin typeface="JetBrains Mono" pitchFamily="34" charset="0"/>
-                <a:ea typeface="JetBrains Mono" pitchFamily="34" charset="-122"/>
-                <a:cs typeface="JetBrains Mono" pitchFamily="34" charset="-120"/>
-              </a:rPr>
-              <a:t>gh auth status</a:t>
-            </a:r>
-            <a:endParaRPr lang="en-US" sz="1800" dirty="0"/>
-          </a:p>
-        </p:txBody>
-      </p:sp>
-      <p:sp>
-        <p:nvSpPr>
-          <p:cNvPr id="14" name="Text 12"/>
-          <p:cNvSpPr/>
-          <p:nvPr/>
-        </p:nvSpPr>
-        <p:spPr>
-          <a:xfrm>
-            <a:off x="1097280" y="4389120"/>
-            <a:ext cx="6400800" cy="365760"/>
-          </a:xfrm>
-          <a:prstGeom prst="rect">
-            <a:avLst/>
-          </a:prstGeom>
-          <a:noFill/>
-          <a:ln/>
-        </p:spPr>
-        <p:txBody>
-          <a:bodyPr wrap="square" lIns="0" tIns="0" rIns="0" bIns="0" rtlCol="0" anchor="ctr"/>
-          <a:lstStyle/>
-          <a:p>
-            <a:pPr marL="0" indent="0">
-              <a:buNone/>
-            </a:pPr>
-            <a:r>
-              <a:rPr lang="en-US" sz="1300" b="1" dirty="0">
-                <a:solidFill>
-                  <a:srgbClr val="3FB6A8"/>
-                </a:solidFill>
-                <a:latin typeface="JetBrains Mono" pitchFamily="34" charset="0"/>
-                <a:ea typeface="JetBrains Mono" pitchFamily="34" charset="-122"/>
-                <a:cs typeface="JetBrains Mono" pitchFamily="34" charset="-120"/>
-              </a:rPr>
-              <a:t>✓ </a:t>
-            </a:r>
-            <a:r>
-              <a:rPr lang="en-US" sz="1300" dirty="0">
-                <a:solidFill>
-                  <a:srgbClr val="9AA3AF"/>
-                </a:solidFill>
-                <a:latin typeface="JetBrains Mono" pitchFamily="34" charset="0"/>
-                <a:ea typeface="JetBrains Mono" pitchFamily="34" charset="-122"/>
-                <a:cs typeface="JetBrains Mono" pitchFamily="34" charset="-120"/>
-              </a:rPr>
-              <a:t>Logged in to github.com as you</a:t>
-            </a:r>
-            <a:endParaRPr lang="en-US" sz="1300" dirty="0"/>
-          </a:p>
-        </p:txBody>
-      </p:sp>
-      <p:sp>
-        <p:nvSpPr>
-          <p:cNvPr id="15" name="Text 13"/>
-          <p:cNvSpPr/>
-          <p:nvPr/>
-        </p:nvSpPr>
-        <p:spPr>
-          <a:xfrm>
-            <a:off x="914400" y="4937760"/>
-            <a:ext cx="6583680" cy="365760"/>
-          </a:xfrm>
-          <a:prstGeom prst="rect">
-            <a:avLst/>
-          </a:prstGeom>
-          <a:noFill/>
-          <a:ln/>
-        </p:spPr>
-        <p:txBody>
-          <a:bodyPr wrap="square" lIns="0" tIns="0" rIns="0" bIns="0" rtlCol="0" anchor="ctr"/>
-          <a:lstStyle/>
-          <a:p>
-            <a:pPr marL="0" indent="0">
-              <a:buNone/>
-            </a:pPr>
-            <a:r>
-              <a:rPr lang="en-US" sz="1800" b="1" dirty="0">
-                <a:solidFill>
-                  <a:srgbClr val="3FB6A8"/>
-                </a:solidFill>
-                <a:latin typeface="JetBrains Mono" pitchFamily="34" charset="0"/>
-                <a:ea typeface="JetBrains Mono" pitchFamily="34" charset="-122"/>
-                <a:cs typeface="JetBrains Mono" pitchFamily="34" charset="-120"/>
-              </a:rPr>
-              <a:t>$ </a:t>
-            </a:r>
-            <a:r>
-              <a:rPr lang="en-US" sz="1800" b="1" dirty="0">
-                <a:solidFill>
-                  <a:srgbClr val="FFFFFF"/>
-                </a:solidFill>
-                <a:latin typeface="JetBrains Mono" pitchFamily="34" charset="0"/>
-                <a:ea typeface="JetBrains Mono" pitchFamily="34" charset="-122"/>
-                <a:cs typeface="JetBrains Mono" pitchFamily="34" charset="-120"/>
-              </a:rPr>
-              <a:t>node --version</a:t>
-            </a:r>
-            <a:endParaRPr lang="en-US" sz="1800" dirty="0"/>
-          </a:p>
-        </p:txBody>
-      </p:sp>
-      <p:sp>
-        <p:nvSpPr>
-          <p:cNvPr id="16" name="Text 14"/>
-          <p:cNvSpPr/>
-          <p:nvPr/>
-        </p:nvSpPr>
-        <p:spPr>
-          <a:xfrm>
-            <a:off x="1097280" y="5349240"/>
-            <a:ext cx="6400800" cy="365760"/>
-          </a:xfrm>
-          <a:prstGeom prst="rect">
-            <a:avLst/>
-          </a:prstGeom>
-          <a:noFill/>
-          <a:ln/>
-        </p:spPr>
-        <p:txBody>
-          <a:bodyPr wrap="square" lIns="0" tIns="0" rIns="0" bIns="0" rtlCol="0" anchor="ctr"/>
-          <a:lstStyle/>
-          <a:p>
-            <a:pPr marL="0" indent="0">
-              <a:buNone/>
-            </a:pPr>
-            <a:r>
-              <a:rPr lang="en-US" sz="1300" b="1" dirty="0">
-                <a:solidFill>
-                  <a:srgbClr val="3FB6A8"/>
-                </a:solidFill>
-                <a:latin typeface="JetBrains Mono" pitchFamily="34" charset="0"/>
-                <a:ea typeface="JetBrains Mono" pitchFamily="34" charset="-122"/>
-                <a:cs typeface="JetBrains Mono" pitchFamily="34" charset="-120"/>
-              </a:rPr>
-              <a:t>✓ </a:t>
-            </a:r>
-            <a:r>
-              <a:rPr lang="en-US" sz="1300" dirty="0">
-                <a:solidFill>
-                  <a:srgbClr val="9AA3AF"/>
-                </a:solidFill>
-                <a:latin typeface="JetBrains Mono" pitchFamily="34" charset="0"/>
-                <a:ea typeface="JetBrains Mono" pitchFamily="34" charset="-122"/>
-                <a:cs typeface="JetBrains Mono" pitchFamily="34" charset="-120"/>
-              </a:rPr>
-              <a:t>v20.x or newer</a:t>
-            </a:r>
-            <a:endParaRPr lang="en-US" sz="1300" dirty="0"/>
-          </a:p>
-        </p:txBody>
-      </p:sp>
-      <p:sp>
-        <p:nvSpPr>
-          <p:cNvPr id="17" name="Shape 15"/>
-          <p:cNvSpPr/>
-          <p:nvPr/>
-        </p:nvSpPr>
-        <p:spPr>
-          <a:xfrm>
-            <a:off x="8138160" y="2468880"/>
-            <a:ext cx="3474720" cy="3657600"/>
-          </a:xfrm>
-          <a:prstGeom prst="rect">
-            <a:avLst/>
-          </a:prstGeom>
-          <a:solidFill>
-            <a:srgbClr val="FFFFFF"/>
-          </a:solidFill>
-          <a:ln w="6350">
-            <a:solidFill>
-              <a:srgbClr val="E2DFD8"/>
-            </a:solidFill>
-            <a:prstDash val="solid"/>
-          </a:ln>
-        </p:spPr>
-        <p:txBody>
-          <a:bodyPr/>
-          <a:lstStyle/>
-          <a:p>
-            <a:endParaRPr lang="en-US"/>
-          </a:p>
-        </p:txBody>
-      </p:sp>
-      <p:sp>
-        <p:nvSpPr>
-          <p:cNvPr id="18" name="Shape 16"/>
-          <p:cNvSpPr/>
-          <p:nvPr/>
-        </p:nvSpPr>
-        <p:spPr>
-          <a:xfrm>
-            <a:off x="8138160" y="2468880"/>
-            <a:ext cx="3474720" cy="73152"/>
-          </a:xfrm>
-          <a:prstGeom prst="rect">
-            <a:avLst/>
-          </a:prstGeom>
-          <a:solidFill>
-            <a:srgbClr val="E89B3C"/>
-          </a:solidFill>
-          <a:ln/>
-        </p:spPr>
-        <p:txBody>
-          <a:bodyPr/>
-          <a:lstStyle/>
-          <a:p>
-            <a:endParaRPr lang="en-US"/>
-          </a:p>
-        </p:txBody>
-      </p:sp>
-      <p:sp>
-        <p:nvSpPr>
-          <p:cNvPr id="19" name="Text 17"/>
-          <p:cNvSpPr/>
-          <p:nvPr/>
-        </p:nvSpPr>
-        <p:spPr>
-          <a:xfrm>
-            <a:off x="8412480" y="2788920"/>
-            <a:ext cx="2926080" cy="274320"/>
-          </a:xfrm>
-          <a:prstGeom prst="rect">
-            <a:avLst/>
-          </a:prstGeom>
-          <a:noFill/>
-          <a:ln/>
-        </p:spPr>
-        <p:txBody>
-          <a:bodyPr wrap="square" lIns="0" tIns="0" rIns="0" bIns="0" rtlCol="0" anchor="ctr"/>
-          <a:lstStyle/>
-          <a:p>
-            <a:pPr marL="0" indent="0">
-              <a:buNone/>
-            </a:pPr>
-            <a:r>
-              <a:rPr lang="en-US" sz="1000" b="1" kern="0" spc="600" dirty="0">
-                <a:solidFill>
-                  <a:srgbClr val="E89B3C"/>
+              <a:rPr lang="en-US" sz="900" kern="0" spc="300" dirty="0">
+                <a:solidFill>
+                  <a:srgbClr val="6B7280"/>
                 </a:solidFill>
                 <a:latin typeface="Inter" pitchFamily="34" charset="0"/>
                 <a:ea typeface="Inter" pitchFamily="34" charset="-122"/>
                 <a:cs typeface="Inter" pitchFamily="34" charset="-120"/>
               </a:rPr>
-              <a:t>AI Help</a:t>
-            </a:r>
-            <a:endParaRPr lang="en-US" sz="1000" dirty="0"/>
-          </a:p>
-        </p:txBody>
-      </p:sp>
-      <p:sp>
-        <p:nvSpPr>
-          <p:cNvPr id="20" name="Text 18"/>
-          <p:cNvSpPr/>
-          <p:nvPr/>
-        </p:nvSpPr>
-        <p:spPr>
-          <a:xfrm>
-            <a:off x="8412480" y="3108960"/>
-            <a:ext cx="2926080" cy="548640"/>
+              <a:t>01 · WELCOME &amp; KICKOFF</a:t>
+            </a:r>
+            <a:endParaRPr lang="en-US" sz="900" dirty="0"/>
+          </a:p>
+        </p:txBody>
+      </p:sp>
+      <p:sp>
+        <p:nvSpPr>
+          <p:cNvPr id="25" name="Text 23">
+            <a:extLst>
+              <a:ext uri="{FF2B5EF4-FFF2-40B4-BE49-F238E27FC236}">
+                <a16:creationId xmlns:a16="http://schemas.microsoft.com/office/drawing/2014/main" id="{1E2F5D56-2E92-FEA4-31F8-DDBE222DA723}"/>
+              </a:ext>
+            </a:extLst>
+          </p:cNvPr>
+          <p:cNvSpPr/>
+          <p:nvPr/>
+        </p:nvSpPr>
+        <p:spPr>
+          <a:xfrm>
+            <a:off x="8076895" y="6446520"/>
+            <a:ext cx="3657600" cy="274320"/>
           </a:xfrm>
           <a:prstGeom prst="rect">
             <a:avLst/>
@@ -7167,64 +8373,11 @@
           <a:bodyPr wrap="square" lIns="0" tIns="0" rIns="0" bIns="0" rtlCol="0" anchor="ctr"/>
           <a:lstStyle/>
           <a:p>
-            <a:pPr marL="0" indent="0">
-              <a:buNone/>
-            </a:pPr>
-            <a:r>
-              <a:rPr lang="en-US" sz="2400" b="1" dirty="0">
-                <a:solidFill>
-                  <a:srgbClr val="1F2937"/>
-                </a:solidFill>
-                <a:latin typeface="Montserrat" pitchFamily="34" charset="0"/>
-                <a:ea typeface="Montserrat" pitchFamily="34" charset="-122"/>
-                <a:cs typeface="Montserrat" pitchFamily="34" charset="-120"/>
-              </a:rPr>
-              <a:t>Tripp &amp; Patrick</a:t>
-            </a:r>
-          </a:p>
-          <a:p>
-            <a:pPr marL="0" indent="0">
-              <a:buNone/>
-            </a:pPr>
-            <a:r>
-              <a:rPr lang="en-US" sz="2400" b="1" dirty="0">
-                <a:solidFill>
-                  <a:srgbClr val="1F2937"/>
-                </a:solidFill>
-                <a:latin typeface="Montserrat" pitchFamily="34" charset="0"/>
-              </a:rPr>
-              <a:t>Jason &amp; Matt</a:t>
-            </a:r>
-            <a:endParaRPr lang="en-US" sz="2400" dirty="0"/>
-          </a:p>
-        </p:txBody>
-      </p:sp>
-      <p:sp>
-        <p:nvSpPr>
-          <p:cNvPr id="21" name="Text 19"/>
-          <p:cNvSpPr/>
-          <p:nvPr/>
-        </p:nvSpPr>
-        <p:spPr>
-          <a:xfrm>
-            <a:off x="8412480" y="3703320"/>
-            <a:ext cx="2926080" cy="365760"/>
-          </a:xfrm>
-          <a:prstGeom prst="rect">
-            <a:avLst/>
-          </a:prstGeom>
-          <a:noFill/>
-          <a:ln/>
-        </p:spPr>
-        <p:txBody>
-          <a:bodyPr wrap="square" lIns="0" tIns="0" rIns="0" bIns="0" rtlCol="0" anchor="ctr"/>
-          <a:lstStyle/>
-          <a:p>
-            <a:pPr marL="0" indent="0">
-              <a:buNone/>
-            </a:pPr>
-            <a:r>
-              <a:rPr lang="en-US" sz="1300" i="1" dirty="0">
+            <a:pPr marL="0" indent="0" algn="r">
+              <a:buNone/>
+            </a:pPr>
+            <a:r>
+              <a:rPr lang="en-US" sz="900" kern="0" spc="300" dirty="0">
                 <a:solidFill>
                   <a:srgbClr val="6B7280"/>
                 </a:solidFill>
@@ -7232,164 +8385,323 @@
                 <a:ea typeface="Inter" pitchFamily="34" charset="-122"/>
                 <a:cs typeface="Inter" pitchFamily="34" charset="-120"/>
               </a:rPr>
-              <a:t>Standing by at every break.</a:t>
-            </a:r>
-            <a:endParaRPr lang="en-US" sz="1300" dirty="0"/>
-          </a:p>
-        </p:txBody>
-      </p:sp>
-      <p:sp>
-        <p:nvSpPr>
-          <p:cNvPr id="22" name="Text 20"/>
-          <p:cNvSpPr/>
-          <p:nvPr/>
-        </p:nvSpPr>
-        <p:spPr>
-          <a:xfrm>
-            <a:off x="8412480" y="4251960"/>
-            <a:ext cx="2926080" cy="1645920"/>
-          </a:xfrm>
-          <a:prstGeom prst="rect">
-            <a:avLst/>
-          </a:prstGeom>
-          <a:noFill/>
-          <a:ln/>
-        </p:spPr>
-        <p:txBody>
-          <a:bodyPr wrap="square" lIns="0" tIns="0" rIns="0" bIns="0" rtlCol="0" anchor="ctr"/>
-          <a:lstStyle/>
-          <a:p>
-            <a:pPr marL="0" indent="0">
-              <a:buNone/>
-            </a:pPr>
-            <a:r>
-              <a:rPr lang="en-US" sz="1300" b="1" dirty="0">
-                <a:solidFill>
-                  <a:srgbClr val="1F2937"/>
-                </a:solidFill>
-                <a:latin typeface="Inter" pitchFamily="34" charset="0"/>
-                <a:ea typeface="Inter" pitchFamily="34" charset="-122"/>
-                <a:cs typeface="Inter" pitchFamily="34" charset="-120"/>
-              </a:rPr>
-              <a:t>If any of those three are red or missing – turn your name plate vertical.</a:t>
-            </a:r>
-            <a:endParaRPr lang="en-US" sz="1300" dirty="0"/>
-          </a:p>
-          <a:p>
-            <a:pPr marL="0" indent="0">
-              <a:buNone/>
-            </a:pPr>
-            <a:r>
-              <a:rPr lang="en-US" sz="1300" dirty="0">
-                <a:solidFill>
-                  <a:srgbClr val="000000"/>
-                </a:solidFill>
-                <a:latin typeface="Inter" pitchFamily="34" charset="0"/>
-                <a:ea typeface="Inter" pitchFamily="34" charset="-122"/>
-                <a:cs typeface="Inter" pitchFamily="34" charset="-120"/>
-              </a:rPr>
-              <a:t> </a:t>
-            </a:r>
-            <a:endParaRPr lang="en-US" sz="1300" dirty="0"/>
-          </a:p>
-          <a:p>
-            <a:pPr marL="0" indent="0">
-              <a:buNone/>
-            </a:pPr>
-            <a:r>
-              <a:rPr lang="en-US" sz="1300" dirty="0">
-                <a:solidFill>
-                  <a:srgbClr val="6B7280"/>
-                </a:solidFill>
-                <a:latin typeface="Inter" pitchFamily="34" charset="0"/>
-                <a:ea typeface="Inter" pitchFamily="34" charset="-122"/>
-                <a:cs typeface="Inter" pitchFamily="34" charset="-120"/>
-              </a:rPr>
-              <a:t>Anthropic account, Claude Code CLI, and GitHub CLI unlock the rest of the workshop.</a:t>
-            </a:r>
-            <a:endParaRPr lang="en-US" sz="1300" dirty="0"/>
-          </a:p>
-        </p:txBody>
-      </p:sp>
-      <p:sp>
-        <p:nvSpPr>
-          <p:cNvPr id="23" name="Text 21"/>
-          <p:cNvSpPr/>
-          <p:nvPr/>
-        </p:nvSpPr>
-        <p:spPr>
-          <a:xfrm>
-            <a:off x="457200" y="6446520"/>
-            <a:ext cx="7315200" cy="274320"/>
-          </a:xfrm>
-          <a:prstGeom prst="rect">
-            <a:avLst/>
-          </a:prstGeom>
-          <a:noFill/>
-          <a:ln/>
-        </p:spPr>
-        <p:txBody>
-          <a:bodyPr wrap="square" lIns="0" tIns="0" rIns="0" bIns="0" rtlCol="0" anchor="ctr"/>
-          <a:lstStyle/>
-          <a:p>
-            <a:pPr marL="0" indent="0">
-              <a:buNone/>
-            </a:pPr>
-            <a:r>
-              <a:rPr lang="en-US" sz="900" kern="0" spc="300" dirty="0">
-                <a:solidFill>
-                  <a:srgbClr val="6B7280"/>
-                </a:solidFill>
-                <a:latin typeface="Inter" pitchFamily="34" charset="0"/>
-                <a:ea typeface="Inter" pitchFamily="34" charset="-122"/>
-                <a:cs typeface="Inter" pitchFamily="34" charset="-120"/>
-              </a:rPr>
-              <a:t>01 · WELCOME &amp; KICKOFF</a:t>
+              <a:t>HOUSEKEEPING</a:t>
             </a:r>
             <a:endParaRPr lang="en-US" sz="900" dirty="0"/>
           </a:p>
         </p:txBody>
       </p:sp>
-      <p:sp>
-        <p:nvSpPr>
-          <p:cNvPr id="24" name="Text 22"/>
-          <p:cNvSpPr/>
-          <p:nvPr/>
-        </p:nvSpPr>
-        <p:spPr>
-          <a:xfrm>
-            <a:off x="8076895" y="6446520"/>
-            <a:ext cx="3657600" cy="274320"/>
-          </a:xfrm>
-          <a:prstGeom prst="rect">
-            <a:avLst/>
-          </a:prstGeom>
-          <a:noFill/>
-          <a:ln/>
-        </p:spPr>
-        <p:txBody>
-          <a:bodyPr wrap="square" lIns="0" tIns="0" rIns="0" bIns="0" rtlCol="0" anchor="ctr"/>
-          <a:lstStyle/>
-          <a:p>
-            <a:pPr marL="0" indent="0" algn="r">
-              <a:buNone/>
-            </a:pPr>
-            <a:r>
-              <a:rPr lang="en-US" sz="900" kern="0" spc="300" dirty="0">
-                <a:solidFill>
-                  <a:srgbClr val="6B7280"/>
-                </a:solidFill>
-                <a:latin typeface="Inter" pitchFamily="34" charset="0"/>
-                <a:ea typeface="Inter" pitchFamily="34" charset="-122"/>
-                <a:cs typeface="Inter" pitchFamily="34" charset="-120"/>
-              </a:rPr>
-              <a:t>PREREQUISITES · GREEN BY 10:00</a:t>
-            </a:r>
-            <a:endParaRPr lang="en-US" sz="900" dirty="0"/>
-          </a:p>
-        </p:txBody>
-      </p:sp>
     </p:spTree>
+    <p:extLst>
+      <p:ext uri="{BB962C8B-B14F-4D97-AF65-F5344CB8AC3E}">
+        <p14:creationId xmlns:p14="http://schemas.microsoft.com/office/powerpoint/2010/main" val="1146459734"/>
+      </p:ext>
+    </p:extLst>
+  </p:cSld>
+  <p:clrMapOvr>
+    <a:masterClrMapping/>
+  </p:clrMapOvr>
+</p:sld>
+</file>
+
+<file path=ppt/slides/slide9.xml><?xml version="1.0" encoding="utf-8"?>
+<p:sld xmlns:a="http://schemas.openxmlformats.org/drawingml/2006/main" xmlns:r="http://schemas.openxmlformats.org/officeDocument/2006/relationships" xmlns:p="http://schemas.openxmlformats.org/presentationml/2006/main">
+  <p:cSld>
+    <p:spTree>
+      <p:nvGrpSpPr>
+        <p:cNvPr id="1" name="Shape 27">
+          <a:extLst>
+            <a:ext uri="{FF2B5EF4-FFF2-40B4-BE49-F238E27FC236}">
+              <a16:creationId xmlns:a16="http://schemas.microsoft.com/office/drawing/2014/main" id="{7BD51D6D-860B-D6CF-C1FB-0096B3DEA40B}"/>
+            </a:ext>
+          </a:extLst>
+        </p:cNvPr>
+        <p:cNvGrpSpPr/>
+        <p:nvPr/>
+      </p:nvGrpSpPr>
+      <p:grpSpPr>
+        <a:xfrm>
+          <a:off x="0" y="0"/>
+          <a:ext cx="0" cy="0"/>
+          <a:chOff x="0" y="0"/>
+          <a:chExt cx="0" cy="0"/>
+        </a:xfrm>
+      </p:grpSpPr>
+      <p:sp>
+        <p:nvSpPr>
+          <p:cNvPr id="28" name="Google Shape;28;p2">
+            <a:extLst>
+              <a:ext uri="{FF2B5EF4-FFF2-40B4-BE49-F238E27FC236}">
+                <a16:creationId xmlns:a16="http://schemas.microsoft.com/office/drawing/2014/main" id="{AFE46911-16ED-3E2F-A860-FB5DE3AE0104}"/>
+              </a:ext>
+            </a:extLst>
+          </p:cNvPr>
+          <p:cNvSpPr/>
+          <p:nvPr/>
+        </p:nvSpPr>
+        <p:spPr>
+          <a:xfrm>
+            <a:off x="635000" y="1778000"/>
+            <a:ext cx="4572000" cy="4572000"/>
+          </a:xfrm>
+          <a:prstGeom prst="roundRect">
+            <a:avLst>
+              <a:gd name="adj" fmla="val 2778"/>
+            </a:avLst>
+          </a:prstGeom>
+          <a:solidFill>
+            <a:srgbClr val="1B1D24"/>
+          </a:solidFill>
+          <a:ln>
+            <a:noFill/>
+          </a:ln>
+        </p:spPr>
+        <p:txBody>
+          <a:bodyPr spcFirstLastPara="1" wrap="square" lIns="60950" tIns="30467" rIns="60950" bIns="30467" anchor="t" anchorCtr="0">
+            <a:noAutofit/>
+          </a:bodyPr>
+          <a:lstStyle/>
+          <a:p>
+            <a:endParaRPr sz="1200">
+              <a:solidFill>
+                <a:schemeClr val="dk1"/>
+              </a:solidFill>
+              <a:latin typeface="Calibri"/>
+              <a:ea typeface="Calibri"/>
+              <a:cs typeface="Calibri"/>
+              <a:sym typeface="Calibri"/>
+            </a:endParaRPr>
+          </a:p>
+        </p:txBody>
+      </p:sp>
+      <p:pic>
+        <p:nvPicPr>
+          <p:cNvPr id="29" name="Avatar">
+            <a:extLst>
+              <a:ext uri="{FF2B5EF4-FFF2-40B4-BE49-F238E27FC236}">
+                <a16:creationId xmlns:a16="http://schemas.microsoft.com/office/drawing/2014/main" id="{6AABFAE7-D801-61F7-E1DA-61872A25917D}"/>
+              </a:ext>
+            </a:extLst>
+          </p:cNvPr>
+          <p:cNvPicPr>
+            <a:picLocks noChangeAspect="1"/>
+          </p:cNvPicPr>
+          <p:nvPr/>
+        </p:nvPicPr>
+        <p:blipFill>
+          <a:blip r:embed="rId3"/>
+          <a:srcRect/>
+          <a:stretch>
+            <a:fillRect/>
+          </a:stretch>
+        </p:blipFill>
+        <p:spPr>
+          <a:xfrm>
+            <a:off x="863600" y="2006600"/>
+            <a:ext cx="4114800" cy="4114800"/>
+          </a:xfrm>
+          <a:prstGeom prst="roundRect">
+            <a:avLst>
+              <a:gd name="adj" fmla="val 2778"/>
+            </a:avLst>
+          </a:prstGeom>
+          <a:ln>
+            <a:noFill/>
+          </a:ln>
+        </p:spPr>
+      </p:pic>
+      <p:sp>
+        <p:nvSpPr>
+          <p:cNvPr id="30" name="Google Shape;30;p2">
+            <a:extLst>
+              <a:ext uri="{FF2B5EF4-FFF2-40B4-BE49-F238E27FC236}">
+                <a16:creationId xmlns:a16="http://schemas.microsoft.com/office/drawing/2014/main" id="{88E70E76-1354-5FC6-B4D7-49B25025B626}"/>
+              </a:ext>
+            </a:extLst>
+          </p:cNvPr>
+          <p:cNvSpPr/>
+          <p:nvPr/>
+        </p:nvSpPr>
+        <p:spPr>
+          <a:xfrm>
+            <a:off x="5715000" y="2753519"/>
+            <a:ext cx="6017260" cy="222250"/>
+          </a:xfrm>
+          <a:prstGeom prst="rect">
+            <a:avLst/>
+          </a:prstGeom>
+          <a:noFill/>
+          <a:ln>
+            <a:noFill/>
+          </a:ln>
+        </p:spPr>
+        <p:txBody>
+          <a:bodyPr spcFirstLastPara="1" wrap="square" lIns="16933" tIns="16933" rIns="16933" bIns="16933" anchor="t" anchorCtr="0">
+            <a:normAutofit/>
+          </a:bodyPr>
+          <a:lstStyle/>
+          <a:p>
+            <a:pPr>
+              <a:buClr>
+                <a:srgbClr val="F58220"/>
+              </a:buClr>
+              <a:buSzPts val="1800"/>
+            </a:pPr>
+            <a:r>
+              <a:rPr lang="en-US" sz="1200">
+                <a:solidFill>
+                  <a:srgbClr val="F58220"/>
+                </a:solidFill>
+                <a:latin typeface="JetBrains Mono"/>
+                <a:ea typeface="JetBrains Mono"/>
+                <a:cs typeface="JetBrains Mono"/>
+                <a:sym typeface="JetBrains Mono"/>
+              </a:rPr>
+              <a:t>SPEAKER</a:t>
+            </a:r>
+            <a:endParaRPr sz="1200">
+              <a:solidFill>
+                <a:schemeClr val="dk1"/>
+              </a:solidFill>
+              <a:latin typeface="Calibri"/>
+              <a:ea typeface="Calibri"/>
+              <a:cs typeface="Calibri"/>
+              <a:sym typeface="Calibri"/>
+            </a:endParaRPr>
+          </a:p>
+        </p:txBody>
+      </p:sp>
+      <p:sp>
+        <p:nvSpPr>
+          <p:cNvPr id="31" name="Google Shape;31;p2">
+            <a:extLst>
+              <a:ext uri="{FF2B5EF4-FFF2-40B4-BE49-F238E27FC236}">
+                <a16:creationId xmlns:a16="http://schemas.microsoft.com/office/drawing/2014/main" id="{0F24CAB3-3AB1-2E86-4350-09ABF06D13D3}"/>
+              </a:ext>
+            </a:extLst>
+          </p:cNvPr>
+          <p:cNvSpPr/>
+          <p:nvPr/>
+        </p:nvSpPr>
+        <p:spPr>
+          <a:xfrm>
+            <a:off x="5715000" y="3064669"/>
+            <a:ext cx="6017260" cy="635000"/>
+          </a:xfrm>
+          <a:prstGeom prst="rect">
+            <a:avLst/>
+          </a:prstGeom>
+          <a:noFill/>
+          <a:ln>
+            <a:noFill/>
+          </a:ln>
+        </p:spPr>
+        <p:txBody>
+          <a:bodyPr spcFirstLastPara="1" wrap="square" lIns="16933" tIns="16933" rIns="16933" bIns="16933" anchor="t" anchorCtr="0">
+            <a:normAutofit fontScale="92500" lnSpcReduction="20000"/>
+          </a:bodyPr>
+          <a:lstStyle/>
+          <a:p>
+            <a:pPr>
+              <a:buClr>
+                <a:srgbClr val="2A2D38"/>
+              </a:buClr>
+              <a:buSzPts val="7200"/>
+            </a:pPr>
+            <a:r>
+              <a:rPr lang="en-US" sz="4800" b="1">
+                <a:solidFill>
+                  <a:srgbClr val="2A2D38"/>
+                </a:solidFill>
+                <a:latin typeface="Montserrat"/>
+                <a:ea typeface="Montserrat"/>
+                <a:cs typeface="Montserrat"/>
+                <a:sym typeface="Montserrat"/>
+              </a:rPr>
+              <a:t>Chris Kehayias</a:t>
+            </a:r>
+            <a:endParaRPr sz="4800">
+              <a:solidFill>
+                <a:schemeClr val="dk1"/>
+              </a:solidFill>
+              <a:latin typeface="Calibri"/>
+              <a:ea typeface="Calibri"/>
+              <a:cs typeface="Calibri"/>
+              <a:sym typeface="Calibri"/>
+            </a:endParaRPr>
+          </a:p>
+        </p:txBody>
+      </p:sp>
+      <p:sp>
+        <p:nvSpPr>
+          <p:cNvPr id="32" name="Google Shape;32;p2">
+            <a:extLst>
+              <a:ext uri="{FF2B5EF4-FFF2-40B4-BE49-F238E27FC236}">
+                <a16:creationId xmlns:a16="http://schemas.microsoft.com/office/drawing/2014/main" id="{1C1B2404-8597-C0CA-48A0-11A219C0EA8C}"/>
+              </a:ext>
+            </a:extLst>
+          </p:cNvPr>
+          <p:cNvSpPr/>
+          <p:nvPr/>
+        </p:nvSpPr>
+        <p:spPr>
+          <a:xfrm>
+            <a:off x="5722717" y="3797736"/>
+            <a:ext cx="6017260" cy="273050"/>
+          </a:xfrm>
+          <a:prstGeom prst="rect">
+            <a:avLst/>
+          </a:prstGeom>
+          <a:noFill/>
+          <a:ln>
+            <a:noFill/>
+          </a:ln>
+        </p:spPr>
+        <p:txBody>
+          <a:bodyPr spcFirstLastPara="1" wrap="square" lIns="16933" tIns="16933" rIns="16933" bIns="16933" anchor="t" anchorCtr="0">
+            <a:normAutofit/>
+          </a:bodyPr>
+          <a:lstStyle/>
+          <a:p>
+            <a:pPr>
+              <a:lnSpc>
+                <a:spcPct val="90000"/>
+              </a:lnSpc>
+              <a:buClr>
+                <a:srgbClr val="F58220"/>
+              </a:buClr>
+              <a:buSzPts val="2400"/>
+            </a:pPr>
+            <a:r>
+              <a:rPr lang="en-US" sz="1600" b="1">
+                <a:solidFill>
+                  <a:srgbClr val="F58220"/>
+                </a:solidFill>
+                <a:latin typeface="Montserrat"/>
+                <a:ea typeface="Montserrat"/>
+                <a:cs typeface="Montserrat"/>
+                <a:sym typeface="Montserrat"/>
+              </a:rPr>
+              <a:t>SVP, AI &amp; INNOVATION – ACS Technologies</a:t>
+            </a:r>
+            <a:endParaRPr sz="1600">
+              <a:solidFill>
+                <a:schemeClr val="dk1"/>
+              </a:solidFill>
+              <a:latin typeface="Calibri"/>
+              <a:ea typeface="Calibri"/>
+              <a:cs typeface="Calibri"/>
+              <a:sym typeface="Calibri"/>
+            </a:endParaRPr>
+          </a:p>
+        </p:txBody>
+      </p:sp>
+    </p:spTree>
+    <p:extLst>
+      <p:ext uri="{BB962C8B-B14F-4D97-AF65-F5344CB8AC3E}">
+        <p14:creationId xmlns:p14="http://schemas.microsoft.com/office/powerpoint/2010/main" val="1975718549"/>
+      </p:ext>
+    </p:extLst>
   </p:cSld>
   <p:clrMapOvr>
     <a:masterClrMapping/>

--- a/schedule/01-welcome-kickoff/01-welcome-kickoff.pptx
+++ b/schedule/01-welcome-kickoff/01-welcome-kickoff.pptx
@@ -5948,6 +5948,53 @@
           </a:p>
         </p:txBody>
       </p:sp>
+      <p:pic>
+        <p:nvPicPr>
+          <p:cNvPr id="1026" name="Picture 2">
+            <a:extLst>
+              <a:ext uri="{FF2B5EF4-FFF2-40B4-BE49-F238E27FC236}">
+                <a16:creationId xmlns:a16="http://schemas.microsoft.com/office/drawing/2014/main" id="{0C49CD5C-954A-3A79-9CA2-56CDAE2ABFFF}"/>
+              </a:ext>
+            </a:extLst>
+          </p:cNvPr>
+          <p:cNvPicPr>
+            <a:picLocks noChangeAspect="1" noChangeArrowheads="1"/>
+          </p:cNvPicPr>
+          <p:nvPr/>
+        </p:nvPicPr>
+        <p:blipFill>
+          <a:blip r:embed="rId3">
+            <a:extLst>
+              <a:ext uri="{28A0092B-C50C-407E-A947-70E740481C1C}">
+                <a14:useLocalDpi xmlns:a14="http://schemas.microsoft.com/office/drawing/2010/main" val="0"/>
+              </a:ext>
+            </a:extLst>
+          </a:blip>
+          <a:srcRect/>
+          <a:stretch>
+            <a:fillRect/>
+          </a:stretch>
+        </p:blipFill>
+        <p:spPr bwMode="auto">
+          <a:xfrm>
+            <a:off x="835478" y="1966118"/>
+            <a:ext cx="4193521" cy="4193521"/>
+          </a:xfrm>
+          <a:prstGeom prst="rect">
+            <a:avLst/>
+          </a:prstGeom>
+          <a:noFill/>
+          <a:extLst>
+            <a:ext uri="{909E8E84-426E-40DD-AFC4-6F175D3DCCD1}">
+              <a14:hiddenFill xmlns:a14="http://schemas.microsoft.com/office/drawing/2010/main">
+                <a:solidFill>
+                  <a:srgbClr val="FFFFFF"/>
+                </a:solidFill>
+              </a14:hiddenFill>
+            </a:ext>
+          </a:extLst>
+        </p:spPr>
+      </p:pic>
     </p:spTree>
   </p:cSld>
   <p:clrMapOvr>
@@ -8167,6 +8214,53 @@
           </a:p>
         </p:txBody>
       </p:sp>
+      <p:pic>
+        <p:nvPicPr>
+          <p:cNvPr id="2050" name="Picture 2">
+            <a:extLst>
+              <a:ext uri="{FF2B5EF4-FFF2-40B4-BE49-F238E27FC236}">
+                <a16:creationId xmlns:a16="http://schemas.microsoft.com/office/drawing/2014/main" id="{7C27C622-A44C-35C3-83EF-42A8811272A2}"/>
+              </a:ext>
+            </a:extLst>
+          </p:cNvPr>
+          <p:cNvPicPr>
+            <a:picLocks noChangeAspect="1" noChangeArrowheads="1"/>
+          </p:cNvPicPr>
+          <p:nvPr/>
+        </p:nvPicPr>
+        <p:blipFill>
+          <a:blip r:embed="rId3">
+            <a:extLst>
+              <a:ext uri="{28A0092B-C50C-407E-A947-70E740481C1C}">
+                <a14:useLocalDpi xmlns:a14="http://schemas.microsoft.com/office/drawing/2010/main" val="0"/>
+              </a:ext>
+            </a:extLst>
+          </a:blip>
+          <a:srcRect/>
+          <a:stretch>
+            <a:fillRect/>
+          </a:stretch>
+        </p:blipFill>
+        <p:spPr bwMode="auto">
+          <a:xfrm>
+            <a:off x="733048" y="1882834"/>
+            <a:ext cx="4375904" cy="4375904"/>
+          </a:xfrm>
+          <a:prstGeom prst="rect">
+            <a:avLst/>
+          </a:prstGeom>
+          <a:noFill/>
+          <a:extLst>
+            <a:ext uri="{909E8E84-426E-40DD-AFC4-6F175D3DCCD1}">
+              <a14:hiddenFill xmlns:a14="http://schemas.microsoft.com/office/drawing/2010/main">
+                <a:solidFill>
+                  <a:srgbClr val="FFFFFF"/>
+                </a:solidFill>
+              </a14:hiddenFill>
+            </a:ext>
+          </a:extLst>
+        </p:spPr>
+      </p:pic>
     </p:spTree>
     <p:extLst>
       <p:ext uri="{BB962C8B-B14F-4D97-AF65-F5344CB8AC3E}">

--- a/schedule/01-welcome-kickoff/01-welcome-kickoff.pptx
+++ b/schedule/01-welcome-kickoff/01-welcome-kickoff.pptx
@@ -7514,7 +7514,7 @@
                 <a:ea typeface="Inter" pitchFamily="34" charset="-122"/>
                 <a:cs typeface="Inter" pitchFamily="34" charset="-120"/>
               </a:rPr>
-              <a:t>15 min at 10:15 · 75 min lunch at 12:30 · 20 min snack break at 3:30. Clock on the wall is the truth.</a:t>
+              <a:t>15 min at 9:45 · 75 min lunch at 11:45 · 20 min snack break at 3:45. Clock on the wall is the truth.</a:t>
             </a:r>
             <a:endParaRPr lang="en-US" sz="1200" dirty="0"/>
           </a:p>
@@ -7690,7 +7690,7 @@
                 <a:ea typeface="Inter" pitchFamily="34" charset="-122"/>
                 <a:cs typeface="Inter" pitchFamily="34" charset="-120"/>
               </a:rPr>
-              <a:t>Doughnuts already out. Lunch starts at 12:30 — sponsors get 2–5 min before we eat.</a:t>
+              <a:t>Doughnuts already out. Lunch starts at 11:45 — sponsors get 2–5 min before we eat.</a:t>
             </a:r>
             <a:endParaRPr lang="en-US" sz="1200" dirty="0"/>
           </a:p>
@@ -7827,7 +7827,7 @@
                 <a:ea typeface="Montserrat" pitchFamily="34" charset="-122"/>
                 <a:cs typeface="Montserrat" pitchFamily="34" charset="-120"/>
               </a:rPr>
-              <a:t>Game is at 7. We'll be done.</a:t>
+              <a:t>Game is at 6:30. We'll be done.</a:t>
             </a:r>
             <a:endParaRPr lang="en-US" sz="1900" dirty="0"/>
           </a:p>
@@ -7866,7 +7866,7 @@
                 <a:ea typeface="Inter" pitchFamily="34" charset="-122"/>
                 <a:cs typeface="Inter" pitchFamily="34" charset="-120"/>
               </a:rPr>
-              <a:t>Dinner at 6:30 PM. We'll wrap by 5:00 sharp so nobody misses first pitch.</a:t>
+              <a:t>Dinner at 6:15 PM. We'll wrap by 5:00 sharp so nobody misses first pitch.</a:t>
             </a:r>
             <a:endParaRPr lang="en-US" sz="1200" dirty="0"/>
           </a:p>
